--- a/ADG/11장/11장_SnapshotStandby.pptx
+++ b/ADG/11장/11장_SnapshotStandby.pptx
@@ -5828,7 +5828,17 @@
                 </a:solidFill>
                 <a:latin typeface="맑은 고딕"/>
               </a:rPr>
-              <a:t>•  전환 전 boston — `FLASHBACK_ON = NO`</a:t>
+              <a:t>•  전환 전 boston — </a:t>
+            </a:r>
+            <a:r>
+              <a:rPr sz="1700" b="0">
+                <a:solidFill>
+                  <a:srgbClr val="222222"/>
+                </a:solidFill>
+                <a:latin typeface="Consolas"/>
+                <a:cs typeface="Consolas"/>
+              </a:rPr>
+              <a:t>FLASHBACK_ON = NO</a:t>
             </a:r>
           </a:p>
           <a:p>
@@ -5844,7 +5854,17 @@
                 </a:solidFill>
                 <a:latin typeface="맑은 고딕"/>
               </a:rPr>
-              <a:t>•  Primary 도 `NO`</a:t>
+              <a:t>•  Primary 도 </a:t>
+            </a:r>
+            <a:r>
+              <a:rPr sz="1700" b="0">
+                <a:solidFill>
+                  <a:srgbClr val="222222"/>
+                </a:solidFill>
+                <a:latin typeface="Consolas"/>
+                <a:cs typeface="Consolas"/>
+              </a:rPr>
+              <a:t>NO</a:t>
             </a:r>
           </a:p>
           <a:p>
@@ -5876,7 +5896,25 @@
                 </a:solidFill>
                 <a:latin typeface="맑은 고딕"/>
               </a:rPr>
-              <a:t>•  이유 — 전체 플래시백 로깅이 아니라 **보장 복원 지점**을 쓴다</a:t>
+              <a:t>•  이유 — 전체 플래시백 로깅이 아니라 </a:t>
+            </a:r>
+            <a:r>
+              <a:rPr sz="1700" b="1">
+                <a:solidFill>
+                  <a:srgbClr val="222222"/>
+                </a:solidFill>
+                <a:latin typeface="맑은 고딕"/>
+              </a:rPr>
+              <a:t>보장 복원 지점</a:t>
+            </a:r>
+            <a:r>
+              <a:rPr sz="1700" b="0">
+                <a:solidFill>
+                  <a:srgbClr val="222222"/>
+                </a:solidFill>
+                <a:latin typeface="맑은 고딕"/>
+              </a:rPr>
+              <a:t>을 쓴다</a:t>
             </a:r>
           </a:p>
         </p:txBody>
@@ -6055,7 +6093,25 @@
                 </a:solidFill>
                 <a:latin typeface="맑은 고딕"/>
               </a:rPr>
-              <a:t>•  **① FRA 여유** — 실습 15,360MB 중 1,536MB 사용</a:t>
+              <a:t>•  </a:t>
+            </a:r>
+            <a:r>
+              <a:rPr sz="1700" b="1">
+                <a:solidFill>
+                  <a:srgbClr val="222222"/>
+                </a:solidFill>
+                <a:latin typeface="맑은 고딕"/>
+              </a:rPr>
+              <a:t>① FRA 여유</a:t>
+            </a:r>
+            <a:r>
+              <a:rPr sz="1700" b="0">
+                <a:solidFill>
+                  <a:srgbClr val="222222"/>
+                </a:solidFill>
+                <a:latin typeface="맑은 고딕"/>
+              </a:rPr>
+              <a:t> — 실습 15,360MB 중 1,536MB 사용</a:t>
             </a:r>
           </a:p>
           <a:p>
@@ -6071,7 +6127,25 @@
                 </a:solidFill>
                 <a:latin typeface="맑은 고딕"/>
               </a:rPr>
-              <a:t>•  **② 다른 Standby 가 있는가** — 전환하면 재해 복구 대상이 아니다</a:t>
+              <a:t>•  </a:t>
+            </a:r>
+            <a:r>
+              <a:rPr sz="1700" b="1">
+                <a:solidFill>
+                  <a:srgbClr val="222222"/>
+                </a:solidFill>
+                <a:latin typeface="맑은 고딕"/>
+              </a:rPr>
+              <a:t>② 다른 Standby 가 있는가</a:t>
+            </a:r>
+            <a:r>
+              <a:rPr sz="1700" b="0">
+                <a:solidFill>
+                  <a:srgbClr val="222222"/>
+                </a:solidFill>
+                <a:latin typeface="맑은 고딕"/>
+              </a:rPr>
+              <a:t> — 전환하면 재해 복구 대상이 아니다</a:t>
             </a:r>
           </a:p>
           <a:p>
@@ -6087,7 +6161,25 @@
                 </a:solidFill>
                 <a:latin typeface="맑은 고딕"/>
               </a:rPr>
-              <a:t>•  **③ 언제까지 쓸 것인가** — 길수록 리두가 쌓인다</a:t>
+              <a:t>•  </a:t>
+            </a:r>
+            <a:r>
+              <a:rPr sz="1700" b="1">
+                <a:solidFill>
+                  <a:srgbClr val="222222"/>
+                </a:solidFill>
+                <a:latin typeface="맑은 고딕"/>
+              </a:rPr>
+              <a:t>③ 언제까지 쓸 것인가</a:t>
+            </a:r>
+            <a:r>
+              <a:rPr sz="1700" b="0">
+                <a:solidFill>
+                  <a:srgbClr val="222222"/>
+                </a:solidFill>
+                <a:latin typeface="맑은 고딕"/>
+              </a:rPr>
+              <a:t> — 길수록 리두가 쌓인다</a:t>
             </a:r>
           </a:p>
           <a:p>
@@ -6103,7 +6195,25 @@
                 </a:solidFill>
                 <a:latin typeface="맑은 고딕"/>
               </a:rPr>
-              <a:t>•  **④ 남길 것은 무엇인가** — 되돌리면 전부 사라진다</a:t>
+              <a:t>•  </a:t>
+            </a:r>
+            <a:r>
+              <a:rPr sz="1700" b="1">
+                <a:solidFill>
+                  <a:srgbClr val="222222"/>
+                </a:solidFill>
+                <a:latin typeface="맑은 고딕"/>
+              </a:rPr>
+              <a:t>④ 남길 것은 무엇인가</a:t>
+            </a:r>
+            <a:r>
+              <a:rPr sz="1700" b="0">
+                <a:solidFill>
+                  <a:srgbClr val="222222"/>
+                </a:solidFill>
+                <a:latin typeface="맑은 고딕"/>
+              </a:rPr>
+              <a:t> — 되돌리면 전부 사라진다</a:t>
             </a:r>
           </a:p>
           <a:p>
@@ -6119,7 +6229,25 @@
                 </a:solidFill>
                 <a:latin typeface="맑은 고딕"/>
               </a:rPr>
-              <a:t>•  **⑤ 알림은 했는가** — ADG 조회 사용자가 있다면</a:t>
+              <a:t>•  </a:t>
+            </a:r>
+            <a:r>
+              <a:rPr sz="1700" b="1">
+                <a:solidFill>
+                  <a:srgbClr val="222222"/>
+                </a:solidFill>
+                <a:latin typeface="맑은 고딕"/>
+              </a:rPr>
+              <a:t>⑤ 알림은 했는가</a:t>
+            </a:r>
+            <a:r>
+              <a:rPr sz="1700" b="0">
+                <a:solidFill>
+                  <a:srgbClr val="222222"/>
+                </a:solidFill>
+                <a:latin typeface="맑은 고딕"/>
+              </a:rPr>
+              <a:t> — ADG 조회 사용자가 있다면</a:t>
             </a:r>
           </a:p>
         </p:txBody>
@@ -6569,7 +6697,17 @@
                 </a:solidFill>
                 <a:latin typeface="맑은 고딕"/>
               </a:rPr>
-              <a:t>•  `ORA-38784: Cannot create restore point 'SNAPSHOT_STANDBY_REQUIRED_...'`</a:t>
+              <a:t>•  </a:t>
+            </a:r>
+            <a:r>
+              <a:rPr sz="1700" b="0">
+                <a:solidFill>
+                  <a:srgbClr val="222222"/>
+                </a:solidFill>
+                <a:latin typeface="Consolas"/>
+                <a:cs typeface="Consolas"/>
+              </a:rPr>
+              <a:t>ORA-38784: Cannot create restore point 'SNAPSHOT_STANDBY_REQUIRED_...'</a:t>
             </a:r>
           </a:p>
           <a:p>
@@ -6585,7 +6723,17 @@
                 </a:solidFill>
                 <a:latin typeface="맑은 고딕"/>
               </a:rPr>
-              <a:t>•  `ORA-01153: an incompatible media recovery is active`</a:t>
+              <a:t>•  </a:t>
+            </a:r>
+            <a:r>
+              <a:rPr sz="1700" b="0">
+                <a:solidFill>
+                  <a:srgbClr val="222222"/>
+                </a:solidFill>
+                <a:latin typeface="Consolas"/>
+                <a:cs typeface="Consolas"/>
+              </a:rPr>
+              <a:t>ORA-01153: an incompatible media recovery is active</a:t>
             </a:r>
           </a:p>
           <a:p>
@@ -6601,7 +6749,16 @@
                 </a:solidFill>
                 <a:latin typeface="맑은 고딕"/>
               </a:rPr>
-              <a:t>•  읽어 낼 수 있는 것 — **전환의 첫 단계가 복원 지점 생성**</a:t>
+              <a:t>•  읽어 낼 수 있는 것 — </a:t>
+            </a:r>
+            <a:r>
+              <a:rPr sz="1700" b="1">
+                <a:solidFill>
+                  <a:srgbClr val="222222"/>
+                </a:solidFill>
+                <a:latin typeface="맑은 고딕"/>
+              </a:rPr>
+              <a:t>전환의 첫 단계가 복원 지점 생성</a:t>
             </a:r>
           </a:p>
           <a:p>
@@ -6617,7 +6774,25 @@
                 </a:solidFill>
                 <a:latin typeface="맑은 고딕"/>
               </a:rPr>
-              <a:t>•  복원 지점은 **SCN 이 고정**되어야 만들 수 있다</a:t>
+              <a:t>•  복원 지점은 </a:t>
+            </a:r>
+            <a:r>
+              <a:rPr sz="1700" b="1">
+                <a:solidFill>
+                  <a:srgbClr val="222222"/>
+                </a:solidFill>
+                <a:latin typeface="맑은 고딕"/>
+              </a:rPr>
+              <a:t>SCN 이 고정</a:t>
+            </a:r>
+            <a:r>
+              <a:rPr sz="1700" b="0">
+                <a:solidFill>
+                  <a:srgbClr val="222222"/>
+                </a:solidFill>
+                <a:latin typeface="맑은 고딕"/>
+              </a:rPr>
+              <a:t>되어야 만들 수 있다</a:t>
             </a:r>
           </a:p>
         </p:txBody>
@@ -6796,7 +6971,35 @@
                 </a:solidFill>
                 <a:latin typeface="맑은 고딕"/>
               </a:rPr>
-              <a:t>•  `DATABASE_ROLE` — PHYSICAL STANDBY → **SNAPSHOT STANDBY**</a:t>
+              <a:t>•  </a:t>
+            </a:r>
+            <a:r>
+              <a:rPr sz="1700" b="0">
+                <a:solidFill>
+                  <a:srgbClr val="222222"/>
+                </a:solidFill>
+                <a:latin typeface="Consolas"/>
+                <a:cs typeface="Consolas"/>
+              </a:rPr>
+              <a:t>DATABASE_ROLE</a:t>
+            </a:r>
+            <a:r>
+              <a:rPr sz="1700" b="0">
+                <a:solidFill>
+                  <a:srgbClr val="222222"/>
+                </a:solidFill>
+                <a:latin typeface="맑은 고딕"/>
+              </a:rPr>
+              <a:t> — PHYSICAL STANDBY → </a:t>
+            </a:r>
+            <a:r>
+              <a:rPr sz="1700" b="1">
+                <a:solidFill>
+                  <a:srgbClr val="222222"/>
+                </a:solidFill>
+                <a:latin typeface="맑은 고딕"/>
+              </a:rPr>
+              <a:t>SNAPSHOT STANDBY</a:t>
             </a:r>
           </a:p>
           <a:p>
@@ -6812,7 +7015,35 @@
                 </a:solidFill>
                 <a:latin typeface="맑은 고딕"/>
               </a:rPr>
-              <a:t>•  `CONTROLFILE_TYPE` — STANDBY → **CURRENT**</a:t>
+              <a:t>•  </a:t>
+            </a:r>
+            <a:r>
+              <a:rPr sz="1700" b="0">
+                <a:solidFill>
+                  <a:srgbClr val="222222"/>
+                </a:solidFill>
+                <a:latin typeface="Consolas"/>
+                <a:cs typeface="Consolas"/>
+              </a:rPr>
+              <a:t>CONTROLFILE_TYPE</a:t>
+            </a:r>
+            <a:r>
+              <a:rPr sz="1700" b="0">
+                <a:solidFill>
+                  <a:srgbClr val="222222"/>
+                </a:solidFill>
+                <a:latin typeface="맑은 고딕"/>
+              </a:rPr>
+              <a:t> — STANDBY → </a:t>
+            </a:r>
+            <a:r>
+              <a:rPr sz="1700" b="1">
+                <a:solidFill>
+                  <a:srgbClr val="222222"/>
+                </a:solidFill>
+                <a:latin typeface="맑은 고딕"/>
+              </a:rPr>
+              <a:t>CURRENT</a:t>
             </a:r>
           </a:p>
           <a:p>
@@ -6828,7 +7059,35 @@
                 </a:solidFill>
                 <a:latin typeface="맑은 고딕"/>
               </a:rPr>
-              <a:t>•  `FLASHBACK_ON` — NO → **RESTORE POINT ONLY**</a:t>
+              <a:t>•  </a:t>
+            </a:r>
+            <a:r>
+              <a:rPr sz="1700" b="0">
+                <a:solidFill>
+                  <a:srgbClr val="222222"/>
+                </a:solidFill>
+                <a:latin typeface="Consolas"/>
+                <a:cs typeface="Consolas"/>
+              </a:rPr>
+              <a:t>FLASHBACK_ON</a:t>
+            </a:r>
+            <a:r>
+              <a:rPr sz="1700" b="0">
+                <a:solidFill>
+                  <a:srgbClr val="222222"/>
+                </a:solidFill>
+                <a:latin typeface="맑은 고딕"/>
+              </a:rPr>
+              <a:t> — NO → </a:t>
+            </a:r>
+            <a:r>
+              <a:rPr sz="1700" b="1">
+                <a:solidFill>
+                  <a:srgbClr val="222222"/>
+                </a:solidFill>
+                <a:latin typeface="맑은 고딕"/>
+              </a:rPr>
+              <a:t>RESTORE POINT ONLY</a:t>
             </a:r>
           </a:p>
           <a:p>
@@ -6844,7 +7103,35 @@
                 </a:solidFill>
                 <a:latin typeface="맑은 고딕"/>
               </a:rPr>
-              <a:t>•  `OPEN_MODE` — READ ONLY → **MOUNTED**</a:t>
+              <a:t>•  </a:t>
+            </a:r>
+            <a:r>
+              <a:rPr sz="1700" b="0">
+                <a:solidFill>
+                  <a:srgbClr val="222222"/>
+                </a:solidFill>
+                <a:latin typeface="Consolas"/>
+                <a:cs typeface="Consolas"/>
+              </a:rPr>
+              <a:t>OPEN_MODE</a:t>
+            </a:r>
+            <a:r>
+              <a:rPr sz="1700" b="0">
+                <a:solidFill>
+                  <a:srgbClr val="222222"/>
+                </a:solidFill>
+                <a:latin typeface="맑은 고딕"/>
+              </a:rPr>
+              <a:t> — READ ONLY → </a:t>
+            </a:r>
+            <a:r>
+              <a:rPr sz="1700" b="1">
+                <a:solidFill>
+                  <a:srgbClr val="222222"/>
+                </a:solidFill>
+                <a:latin typeface="맑은 고딕"/>
+              </a:rPr>
+              <a:t>MOUNTED</a:t>
             </a:r>
           </a:p>
           <a:p>
@@ -7039,7 +7326,17 @@
                 </a:solidFill>
                 <a:latin typeface="맑은 고딕"/>
               </a:rPr>
-              <a:t>•  이름 — `SNAPSHOT_STANDBY_REQUIRED_08/27/2026 16:16:43`</a:t>
+              <a:t>•  이름 — </a:t>
+            </a:r>
+            <a:r>
+              <a:rPr sz="1700" b="0">
+                <a:solidFill>
+                  <a:srgbClr val="222222"/>
+                </a:solidFill>
+                <a:latin typeface="Consolas"/>
+                <a:cs typeface="Consolas"/>
+              </a:rPr>
+              <a:t>SNAPSHOT_STANDBY_REQUIRED_08/27/2026 16:16:43</a:t>
             </a:r>
           </a:p>
           <a:p>
@@ -7071,7 +7368,35 @@
                 </a:solidFill>
                 <a:latin typeface="맑은 고딕"/>
               </a:rPr>
-              <a:t>•  `GUARANTEE_FLASHBACK_DATABASE` — **YES**</a:t>
+              <a:t>•  </a:t>
+            </a:r>
+            <a:r>
+              <a:rPr sz="1700" b="0">
+                <a:solidFill>
+                  <a:srgbClr val="222222"/>
+                </a:solidFill>
+                <a:latin typeface="Consolas"/>
+                <a:cs typeface="Consolas"/>
+              </a:rPr>
+              <a:t>GUARANTEE_FLASHBACK_DATABASE</a:t>
+            </a:r>
+            <a:r>
+              <a:rPr sz="1700" b="0">
+                <a:solidFill>
+                  <a:srgbClr val="222222"/>
+                </a:solidFill>
+                <a:latin typeface="맑은 고딕"/>
+              </a:rPr>
+              <a:t> — </a:t>
+            </a:r>
+            <a:r>
+              <a:rPr sz="1700" b="1">
+                <a:solidFill>
+                  <a:srgbClr val="222222"/>
+                </a:solidFill>
+                <a:latin typeface="맑은 고딕"/>
+              </a:rPr>
+              <a:t>YES</a:t>
             </a:r>
           </a:p>
           <a:p>
@@ -7087,7 +7412,26 @@
                 </a:solidFill>
                 <a:latin typeface="맑은 고딕"/>
               </a:rPr>
-              <a:t>•  `STORAGE_SIZE` — 200MB</a:t>
+              <a:t>•  </a:t>
+            </a:r>
+            <a:r>
+              <a:rPr sz="1700" b="0">
+                <a:solidFill>
+                  <a:srgbClr val="222222"/>
+                </a:solidFill>
+                <a:latin typeface="Consolas"/>
+                <a:cs typeface="Consolas"/>
+              </a:rPr>
+              <a:t>STORAGE_SIZE</a:t>
+            </a:r>
+            <a:r>
+              <a:rPr sz="1700" b="0">
+                <a:solidFill>
+                  <a:srgbClr val="222222"/>
+                </a:solidFill>
+                <a:latin typeface="맑은 고딕"/>
+              </a:rPr>
+              <a:t> — 200MB</a:t>
             </a:r>
           </a:p>
           <a:p>
@@ -7103,7 +7447,25 @@
                 </a:solidFill>
                 <a:latin typeface="맑은 고딕"/>
               </a:rPr>
-              <a:t>•  **REQUIRED** 는 지우면 안 된다는 표시</a:t>
+              <a:t>•  </a:t>
+            </a:r>
+            <a:r>
+              <a:rPr sz="1700" b="1">
+                <a:solidFill>
+                  <a:srgbClr val="222222"/>
+                </a:solidFill>
+                <a:latin typeface="맑은 고딕"/>
+              </a:rPr>
+              <a:t>REQUIRED</a:t>
+            </a:r>
+            <a:r>
+              <a:rPr sz="1700" b="0">
+                <a:solidFill>
+                  <a:srgbClr val="222222"/>
+                </a:solidFill>
+                <a:latin typeface="맑은 고딕"/>
+              </a:rPr>
+              <a:t> 는 지우면 안 된다는 표시</a:t>
             </a:r>
           </a:p>
         </p:txBody>
@@ -7282,7 +7644,44 @@
                 </a:solidFill>
                 <a:latin typeface="맑은 고딕"/>
               </a:rPr>
-              <a:t>•  `ALTER DATABASE OPEN` → **READ WRITE** (READ ONLY 가 아니다)</a:t>
+              <a:t>•  </a:t>
+            </a:r>
+            <a:r>
+              <a:rPr sz="1700" b="0">
+                <a:solidFill>
+                  <a:srgbClr val="222222"/>
+                </a:solidFill>
+                <a:latin typeface="Consolas"/>
+                <a:cs typeface="Consolas"/>
+              </a:rPr>
+              <a:t>ALTER DATABASE OPEN</a:t>
+            </a:r>
+            <a:r>
+              <a:rPr sz="1700" b="0">
+                <a:solidFill>
+                  <a:srgbClr val="222222"/>
+                </a:solidFill>
+                <a:latin typeface="맑은 고딕"/>
+              </a:rPr>
+              <a:t> → </a:t>
+            </a:r>
+            <a:r>
+              <a:rPr sz="1700" b="1">
+                <a:solidFill>
+                  <a:srgbClr val="222222"/>
+                </a:solidFill>
+                <a:latin typeface="맑은 고딕"/>
+              </a:rPr>
+              <a:t>READ WRITE</a:t>
+            </a:r>
+            <a:r>
+              <a:rPr sz="1700" b="0">
+                <a:solidFill>
+                  <a:srgbClr val="222222"/>
+                </a:solidFill>
+                <a:latin typeface="맑은 고딕"/>
+              </a:rPr>
+              <a:t> (READ ONLY 가 아니다)</a:t>
             </a:r>
           </a:p>
           <a:p>
@@ -7298,7 +7697,44 @@
                 </a:solidFill>
                 <a:latin typeface="맑은 고딕"/>
               </a:rPr>
-              <a:t>•  `V$PDBS` — CHICAGO_PDB1 이 **MOUNTED** 로 남는다</a:t>
+              <a:t>•  </a:t>
+            </a:r>
+            <a:r>
+              <a:rPr sz="1700" b="0">
+                <a:solidFill>
+                  <a:srgbClr val="222222"/>
+                </a:solidFill>
+                <a:latin typeface="Consolas"/>
+                <a:cs typeface="Consolas"/>
+              </a:rPr>
+              <a:t>V$PDBS</a:t>
+            </a:r>
+            <a:r>
+              <a:rPr sz="1700" b="0">
+                <a:solidFill>
+                  <a:srgbClr val="222222"/>
+                </a:solidFill>
+                <a:latin typeface="맑은 고딕"/>
+              </a:rPr>
+              <a:t> — CHICAGO_PDB1 이 </a:t>
+            </a:r>
+            <a:r>
+              <a:rPr sz="1700" b="1">
+                <a:solidFill>
+                  <a:srgbClr val="222222"/>
+                </a:solidFill>
+                <a:latin typeface="맑은 고딕"/>
+              </a:rPr>
+              <a:t>MOUNTED</a:t>
+            </a:r>
+            <a:r>
+              <a:rPr sz="1700" b="0">
+                <a:solidFill>
+                  <a:srgbClr val="222222"/>
+                </a:solidFill>
+                <a:latin typeface="맑은 고딕"/>
+              </a:rPr>
+              <a:t> 로 남는다</a:t>
             </a:r>
           </a:p>
           <a:p>
@@ -7314,7 +7750,16 @@
                 </a:solidFill>
                 <a:latin typeface="맑은 고딕"/>
               </a:rPr>
-              <a:t>•  조회하면 **ORA-01219**</a:t>
+              <a:t>•  조회하면 </a:t>
+            </a:r>
+            <a:r>
+              <a:rPr sz="1700" b="1">
+                <a:solidFill>
+                  <a:srgbClr val="222222"/>
+                </a:solidFill>
+                <a:latin typeface="맑은 고딕"/>
+              </a:rPr>
+              <a:t>ORA-01219</a:t>
             </a:r>
           </a:p>
           <a:p>
@@ -7330,7 +7775,26 @@
                 </a:solidFill>
                 <a:latin typeface="맑은 고딕"/>
               </a:rPr>
-              <a:t>•  `ALTER PLUGGABLE DATABASE ... OPEN` 으로 따로 연다</a:t>
+              <a:t>•  </a:t>
+            </a:r>
+            <a:r>
+              <a:rPr sz="1700" b="0">
+                <a:solidFill>
+                  <a:srgbClr val="222222"/>
+                </a:solidFill>
+                <a:latin typeface="Consolas"/>
+                <a:cs typeface="Consolas"/>
+              </a:rPr>
+              <a:t>ALTER PLUGGABLE DATABASE ... OPEN</a:t>
+            </a:r>
+            <a:r>
+              <a:rPr sz="1700" b="0">
+                <a:solidFill>
+                  <a:srgbClr val="222222"/>
+                </a:solidFill>
+                <a:latin typeface="맑은 고딕"/>
+              </a:rPr>
+              <a:t> 으로 따로 연다</a:t>
             </a:r>
           </a:p>
           <a:p>
@@ -7525,7 +7989,64 @@
                 </a:solidFill>
                 <a:latin typeface="맑은 고딕"/>
               </a:rPr>
-              <a:t>•  CDB — `CREATE TABLE` / `INSERT` / `COMMIT` 모두 성공</a:t>
+              <a:t>•  CDB — </a:t>
+            </a:r>
+            <a:r>
+              <a:rPr sz="1700" b="0">
+                <a:solidFill>
+                  <a:srgbClr val="222222"/>
+                </a:solidFill>
+                <a:latin typeface="Consolas"/>
+                <a:cs typeface="Consolas"/>
+              </a:rPr>
+              <a:t>CREATE TABLE</a:t>
+            </a:r>
+            <a:r>
+              <a:rPr sz="1700" b="0">
+                <a:solidFill>
+                  <a:srgbClr val="222222"/>
+                </a:solidFill>
+                <a:latin typeface="맑은 고딕"/>
+              </a:rPr>
+              <a:t> / </a:t>
+            </a:r>
+            <a:r>
+              <a:rPr sz="1700" b="0">
+                <a:solidFill>
+                  <a:srgbClr val="222222"/>
+                </a:solidFill>
+                <a:latin typeface="Consolas"/>
+                <a:cs typeface="Consolas"/>
+              </a:rPr>
+              <a:t>INSERT</a:t>
+            </a:r>
+            <a:r>
+              <a:rPr sz="1700" b="0">
+                <a:solidFill>
+                  <a:srgbClr val="222222"/>
+                </a:solidFill>
+                <a:latin typeface="맑은 고딕"/>
+              </a:rPr>
+              <a:t> / </a:t>
+            </a:r>
+            <a:r>
+              <a:rPr sz="1700" b="0">
+                <a:solidFill>
+                  <a:srgbClr val="222222"/>
+                </a:solidFill>
+                <a:latin typeface="Consolas"/>
+                <a:cs typeface="Consolas"/>
+              </a:rPr>
+              <a:t>COMMIT</a:t>
+            </a:r>
+            <a:r>
+              <a:rPr sz="1700" b="0">
+                <a:solidFill>
+                  <a:srgbClr val="222222"/>
+                </a:solidFill>
+                <a:latin typeface="맑은 고딕"/>
+              </a:rPr>
+              <a:t> 모두 성공</a:t>
             </a:r>
           </a:p>
           <a:p>
@@ -7541,7 +8062,55 @@
                 </a:solidFill>
                 <a:latin typeface="맑은 고딕"/>
               </a:rPr>
-              <a:t>•  기존 행 `UPDATE` — `before-snapshot` → `modified-on-snapshot`</a:t>
+              <a:t>•  기존 행 </a:t>
+            </a:r>
+            <a:r>
+              <a:rPr sz="1700" b="0">
+                <a:solidFill>
+                  <a:srgbClr val="222222"/>
+                </a:solidFill>
+                <a:latin typeface="Consolas"/>
+                <a:cs typeface="Consolas"/>
+              </a:rPr>
+              <a:t>UPDATE</a:t>
+            </a:r>
+            <a:r>
+              <a:rPr sz="1700" b="0">
+                <a:solidFill>
+                  <a:srgbClr val="222222"/>
+                </a:solidFill>
+                <a:latin typeface="맑은 고딕"/>
+              </a:rPr>
+              <a:t> — </a:t>
+            </a:r>
+            <a:r>
+              <a:rPr sz="1700" b="0">
+                <a:solidFill>
+                  <a:srgbClr val="222222"/>
+                </a:solidFill>
+                <a:latin typeface="Consolas"/>
+                <a:cs typeface="Consolas"/>
+              </a:rPr>
+              <a:t>before-snapshot</a:t>
+            </a:r>
+            <a:r>
+              <a:rPr sz="1700" b="0">
+                <a:solidFill>
+                  <a:srgbClr val="222222"/>
+                </a:solidFill>
+                <a:latin typeface="맑은 고딕"/>
+              </a:rPr>
+              <a:t> → </a:t>
+            </a:r>
+            <a:r>
+              <a:rPr sz="1700" b="0">
+                <a:solidFill>
+                  <a:srgbClr val="222222"/>
+                </a:solidFill>
+                <a:latin typeface="Consolas"/>
+                <a:cs typeface="Consolas"/>
+              </a:rPr>
+              <a:t>modified-on-snapshot</a:t>
             </a:r>
           </a:p>
           <a:p>
@@ -7573,7 +8142,25 @@
                 </a:solidFill>
                 <a:latin typeface="맑은 고딕"/>
               </a:rPr>
-              <a:t>•  9장에서 같은 명령이 **ORA-16000** 을 냈던 것과 대조</a:t>
+              <a:t>•  9장에서 같은 명령이 </a:t>
+            </a:r>
+            <a:r>
+              <a:rPr sz="1700" b="1">
+                <a:solidFill>
+                  <a:srgbClr val="222222"/>
+                </a:solidFill>
+                <a:latin typeface="맑은 고딕"/>
+              </a:rPr>
+              <a:t>ORA-16000</a:t>
+            </a:r>
+            <a:r>
+              <a:rPr sz="1700" b="0">
+                <a:solidFill>
+                  <a:srgbClr val="222222"/>
+                </a:solidFill>
+                <a:latin typeface="맑은 고딕"/>
+              </a:rPr>
+              <a:t> 을 냈던 것과 대조</a:t>
             </a:r>
           </a:p>
         </p:txBody>
@@ -7752,7 +8339,44 @@
                 </a:solidFill>
                 <a:latin typeface="맑은 고딕"/>
               </a:rPr>
-              <a:t>•  MOUNTED 에서 `CURRENT_SCN` → **0** (열려 있어야 값이 나온다)</a:t>
+              <a:t>•  MOUNTED 에서 </a:t>
+            </a:r>
+            <a:r>
+              <a:rPr sz="1700" b="0">
+                <a:solidFill>
+                  <a:srgbClr val="222222"/>
+                </a:solidFill>
+                <a:latin typeface="Consolas"/>
+                <a:cs typeface="Consolas"/>
+              </a:rPr>
+              <a:t>CURRENT_SCN</a:t>
+            </a:r>
+            <a:r>
+              <a:rPr sz="1700" b="0">
+                <a:solidFill>
+                  <a:srgbClr val="222222"/>
+                </a:solidFill>
+                <a:latin typeface="맑은 고딕"/>
+              </a:rPr>
+              <a:t> → </a:t>
+            </a:r>
+            <a:r>
+              <a:rPr sz="1700" b="1">
+                <a:solidFill>
+                  <a:srgbClr val="222222"/>
+                </a:solidFill>
+                <a:latin typeface="맑은 고딕"/>
+              </a:rPr>
+              <a:t>0</a:t>
+            </a:r>
+            <a:r>
+              <a:rPr sz="1700" b="0">
+                <a:solidFill>
+                  <a:srgbClr val="222222"/>
+                </a:solidFill>
+                <a:latin typeface="맑은 고딕"/>
+              </a:rPr>
+              <a:t> (열려 있어야 값이 나온다)</a:t>
             </a:r>
           </a:p>
           <a:p>
@@ -7768,7 +8392,53 @@
                 </a:solidFill>
                 <a:latin typeface="맑은 고딕"/>
               </a:rPr>
-              <a:t>•  연 뒤 쓰기 → 복원 지점 **2255344** / `CURRENT_SCN` **2256351**</a:t>
+              <a:t>•  연 뒤 쓰기 → 복원 지점 </a:t>
+            </a:r>
+            <a:r>
+              <a:rPr sz="1700" b="1">
+                <a:solidFill>
+                  <a:srgbClr val="222222"/>
+                </a:solidFill>
+                <a:latin typeface="맑은 고딕"/>
+              </a:rPr>
+              <a:t>2255344</a:t>
+            </a:r>
+            <a:r>
+              <a:rPr sz="1700" b="0">
+                <a:solidFill>
+                  <a:srgbClr val="222222"/>
+                </a:solidFill>
+                <a:latin typeface="맑은 고딕"/>
+              </a:rPr>
+              <a:t> / </a:t>
+            </a:r>
+            <a:r>
+              <a:rPr sz="1700" b="0">
+                <a:solidFill>
+                  <a:srgbClr val="222222"/>
+                </a:solidFill>
+                <a:latin typeface="Consolas"/>
+                <a:cs typeface="Consolas"/>
+              </a:rPr>
+              <a:t>CURRENT_SCN</a:t>
+            </a:r>
+            <a:r>
+              <a:rPr sz="1700" b="0">
+                <a:solidFill>
+                  <a:srgbClr val="222222"/>
+                </a:solidFill>
+                <a:latin typeface="맑은 고딕"/>
+              </a:rPr>
+              <a:t> </a:t>
+            </a:r>
+            <a:r>
+              <a:rPr sz="1700" b="1">
+                <a:solidFill>
+                  <a:srgbClr val="222222"/>
+                </a:solidFill>
+                <a:latin typeface="맑은 고딕"/>
+              </a:rPr>
+              <a:t>2256351</a:t>
             </a:r>
           </a:p>
           <a:p>
@@ -7784,7 +8454,25 @@
                 </a:solidFill>
                 <a:latin typeface="맑은 고딕"/>
               </a:rPr>
-              <a:t>•  차이 **1,007** 이 되돌릴 양</a:t>
+              <a:t>•  차이 </a:t>
+            </a:r>
+            <a:r>
+              <a:rPr sz="1700" b="1">
+                <a:solidFill>
+                  <a:srgbClr val="222222"/>
+                </a:solidFill>
+                <a:latin typeface="맑은 고딕"/>
+              </a:rPr>
+              <a:t>1,007</a:t>
+            </a:r>
+            <a:r>
+              <a:rPr sz="1700" b="0">
+                <a:solidFill>
+                  <a:srgbClr val="222222"/>
+                </a:solidFill>
+                <a:latin typeface="맑은 고딕"/>
+              </a:rPr>
+              <a:t> 이 되돌릴 양</a:t>
             </a:r>
           </a:p>
           <a:p>
@@ -8470,7 +9158,16 @@
                 </a:solidFill>
                 <a:latin typeface="맑은 고딕"/>
               </a:rPr>
-              <a:t>•  Snapshot Standby 에서 MRP 기동 → **ORA-01665**</a:t>
+              <a:t>•  Snapshot Standby 에서 MRP 기동 → </a:t>
+            </a:r>
+            <a:r>
+              <a:rPr sz="1700" b="1">
+                <a:solidFill>
+                  <a:srgbClr val="222222"/>
+                </a:solidFill>
+                <a:latin typeface="맑은 고딕"/>
+              </a:rPr>
+              <a:t>ORA-01665</a:t>
             </a:r>
           </a:p>
           <a:p>
@@ -8502,7 +9199,16 @@
                 </a:solidFill>
                 <a:latin typeface="맑은 고딕"/>
               </a:rPr>
-              <a:t>•  **MRP 를 띄울 수 있는 것은 Standby 컨트롤 파일뿐**</a:t>
+              <a:t>•  </a:t>
+            </a:r>
+            <a:r>
+              <a:rPr sz="1700" b="1">
+                <a:solidFill>
+                  <a:srgbClr val="222222"/>
+                </a:solidFill>
+                <a:latin typeface="맑은 고딕"/>
+              </a:rPr>
+              <a:t>MRP 를 띄울 수 있는 것은 Standby 컨트롤 파일뿐</a:t>
             </a:r>
           </a:p>
           <a:p>
@@ -8518,7 +9224,25 @@
                 </a:solidFill>
                 <a:latin typeface="맑은 고딕"/>
               </a:rPr>
-              <a:t>•  오라클이 이 판단을 **역할이 아니라 컨트롤 파일 유형**으로 한다</a:t>
+              <a:t>•  오라클이 이 판단을 </a:t>
+            </a:r>
+            <a:r>
+              <a:rPr sz="1700" b="1">
+                <a:solidFill>
+                  <a:srgbClr val="222222"/>
+                </a:solidFill>
+                <a:latin typeface="맑은 고딕"/>
+              </a:rPr>
+              <a:t>역할이 아니라 컨트롤 파일 유형</a:t>
+            </a:r>
+            <a:r>
+              <a:rPr sz="1700" b="0">
+                <a:solidFill>
+                  <a:srgbClr val="222222"/>
+                </a:solidFill>
+                <a:latin typeface="맑은 고딕"/>
+              </a:rPr>
+              <a:t>으로 한다</a:t>
             </a:r>
           </a:p>
           <a:p>
@@ -8534,7 +9258,44 @@
                 </a:solidFill>
                 <a:latin typeface="맑은 고딕"/>
               </a:rPr>
-              <a:t>•  `RECOVERY_MODE` = **IDLE**, MRP0 = 0개</a:t>
+              <a:t>•  </a:t>
+            </a:r>
+            <a:r>
+              <a:rPr sz="1700" b="0">
+                <a:solidFill>
+                  <a:srgbClr val="222222"/>
+                </a:solidFill>
+                <a:latin typeface="Consolas"/>
+                <a:cs typeface="Consolas"/>
+              </a:rPr>
+              <a:t>RECOVERY_MODE</a:t>
+            </a:r>
+            <a:r>
+              <a:rPr sz="1700" b="0">
+                <a:solidFill>
+                  <a:srgbClr val="222222"/>
+                </a:solidFill>
+                <a:latin typeface="맑은 고딕"/>
+              </a:rPr>
+              <a:t> = </a:t>
+            </a:r>
+            <a:r>
+              <a:rPr sz="1700" b="1">
+                <a:solidFill>
+                  <a:srgbClr val="222222"/>
+                </a:solidFill>
+                <a:latin typeface="맑은 고딕"/>
+              </a:rPr>
+              <a:t>IDLE</a:t>
+            </a:r>
+            <a:r>
+              <a:rPr sz="1700" b="0">
+                <a:solidFill>
+                  <a:srgbClr val="222222"/>
+                </a:solidFill>
+                <a:latin typeface="맑은 고딕"/>
+              </a:rPr>
+              <a:t>, MRP0 = 0개</a:t>
             </a:r>
           </a:p>
         </p:txBody>
@@ -8713,7 +9474,44 @@
                 </a:solidFill>
                 <a:latin typeface="맑은 고딕"/>
               </a:rPr>
-              <a:t>•  `transport lag` — **+00 00:00:00** (계속 받는다)</a:t>
+              <a:t>•  </a:t>
+            </a:r>
+            <a:r>
+              <a:rPr sz="1700" b="0">
+                <a:solidFill>
+                  <a:srgbClr val="222222"/>
+                </a:solidFill>
+                <a:latin typeface="Consolas"/>
+                <a:cs typeface="Consolas"/>
+              </a:rPr>
+              <a:t>transport lag</a:t>
+            </a:r>
+            <a:r>
+              <a:rPr sz="1700" b="0">
+                <a:solidFill>
+                  <a:srgbClr val="222222"/>
+                </a:solidFill>
+                <a:latin typeface="맑은 고딕"/>
+              </a:rPr>
+              <a:t> — </a:t>
+            </a:r>
+            <a:r>
+              <a:rPr sz="1700" b="1">
+                <a:solidFill>
+                  <a:srgbClr val="222222"/>
+                </a:solidFill>
+                <a:latin typeface="맑은 고딕"/>
+              </a:rPr>
+              <a:t>+00 00:00:00</a:t>
+            </a:r>
+            <a:r>
+              <a:rPr sz="1700" b="0">
+                <a:solidFill>
+                  <a:srgbClr val="222222"/>
+                </a:solidFill>
+                <a:latin typeface="맑은 고딕"/>
+              </a:rPr>
+              <a:t> (계속 받는다)</a:t>
             </a:r>
           </a:p>
           <a:p>
@@ -8729,7 +9527,44 @@
                 </a:solidFill>
                 <a:latin typeface="맑은 고딕"/>
               </a:rPr>
-              <a:t>•  `apply lag` — **+00 00:02:38** (적용을 안 한다)</a:t>
+              <a:t>•  </a:t>
+            </a:r>
+            <a:r>
+              <a:rPr sz="1700" b="0">
+                <a:solidFill>
+                  <a:srgbClr val="222222"/>
+                </a:solidFill>
+                <a:latin typeface="Consolas"/>
+                <a:cs typeface="Consolas"/>
+              </a:rPr>
+              <a:t>apply lag</a:t>
+            </a:r>
+            <a:r>
+              <a:rPr sz="1700" b="0">
+                <a:solidFill>
+                  <a:srgbClr val="222222"/>
+                </a:solidFill>
+                <a:latin typeface="맑은 고딕"/>
+              </a:rPr>
+              <a:t> — </a:t>
+            </a:r>
+            <a:r>
+              <a:rPr sz="1700" b="1">
+                <a:solidFill>
+                  <a:srgbClr val="222222"/>
+                </a:solidFill>
+                <a:latin typeface="맑은 고딕"/>
+              </a:rPr>
+              <a:t>+00 00:02:38</a:t>
+            </a:r>
+            <a:r>
+              <a:rPr sz="1700" b="0">
+                <a:solidFill>
+                  <a:srgbClr val="222222"/>
+                </a:solidFill>
+                <a:latin typeface="맑은 고딕"/>
+              </a:rPr>
+              <a:t> (적용을 안 한다)</a:t>
             </a:r>
           </a:p>
           <a:p>
@@ -8761,7 +9596,25 @@
                 </a:solidFill>
                 <a:latin typeface="맑은 고딕"/>
               </a:rPr>
-              <a:t>•  Primary 목적지는 **VALID** — 영향받지 않는다</a:t>
+              <a:t>•  Primary 목적지는 </a:t>
+            </a:r>
+            <a:r>
+              <a:rPr sz="1700" b="1">
+                <a:solidFill>
+                  <a:srgbClr val="222222"/>
+                </a:solidFill>
+                <a:latin typeface="맑은 고딕"/>
+              </a:rPr>
+              <a:t>VALID</a:t>
+            </a:r>
+            <a:r>
+              <a:rPr sz="1700" b="0">
+                <a:solidFill>
+                  <a:srgbClr val="222222"/>
+                </a:solidFill>
+                <a:latin typeface="맑은 고딕"/>
+              </a:rPr>
+              <a:t> — 영향받지 않는다</a:t>
             </a:r>
           </a:p>
         </p:txBody>
@@ -8956,7 +9809,25 @@
                 </a:solidFill>
                 <a:latin typeface="맑은 고딕"/>
               </a:rPr>
-              <a:t>•  Primary 가 그것을 지우면 **갭**이 된다</a:t>
+              <a:t>•  Primary 가 그것을 지우면 </a:t>
+            </a:r>
+            <a:r>
+              <a:rPr sz="1700" b="1">
+                <a:solidFill>
+                  <a:srgbClr val="222222"/>
+                </a:solidFill>
+                <a:latin typeface="맑은 고딕"/>
+              </a:rPr>
+              <a:t>갭</a:t>
+            </a:r>
+            <a:r>
+              <a:rPr sz="1700" b="0">
+                <a:solidFill>
+                  <a:srgbClr val="222222"/>
+                </a:solidFill>
+                <a:latin typeface="맑은 고딕"/>
+              </a:rPr>
+              <a:t>이 된다</a:t>
             </a:r>
           </a:p>
           <a:p>
@@ -8972,7 +9843,25 @@
                 </a:solidFill>
                 <a:latin typeface="맑은 고딕"/>
               </a:rPr>
-              <a:t>•  다행히 **전송은 계속**되므로 이미 받아 둔 것은 무사하다</a:t>
+              <a:t>•  다행히 </a:t>
+            </a:r>
+            <a:r>
+              <a:rPr sz="1700" b="1">
+                <a:solidFill>
+                  <a:srgbClr val="222222"/>
+                </a:solidFill>
+                <a:latin typeface="맑은 고딕"/>
+              </a:rPr>
+              <a:t>전송은 계속</a:t>
+            </a:r>
+            <a:r>
+              <a:rPr sz="1700" b="0">
+                <a:solidFill>
+                  <a:srgbClr val="222222"/>
+                </a:solidFill>
+                <a:latin typeface="맑은 고딕"/>
+              </a:rPr>
+              <a:t>되므로 이미 받아 둔 것은 무사하다</a:t>
             </a:r>
           </a:p>
           <a:p>
@@ -8988,7 +9877,16 @@
                 </a:solidFill>
                 <a:latin typeface="맑은 고딕"/>
               </a:rPr>
-              <a:t>•  위험한 것은 **전송이 끊겼던 구간**</a:t>
+              <a:t>•  위험한 것은 </a:t>
+            </a:r>
+            <a:r>
+              <a:rPr sz="1700" b="1">
+                <a:solidFill>
+                  <a:srgbClr val="222222"/>
+                </a:solidFill>
+                <a:latin typeface="맑은 고딕"/>
+              </a:rPr>
+              <a:t>전송이 끊겼던 구간</a:t>
             </a:r>
           </a:p>
           <a:p>
@@ -9199,7 +10097,25 @@
                 </a:solidFill>
                 <a:latin typeface="맑은 고딕"/>
               </a:rPr>
-              <a:t>•  전환 후 — **FLASHBACK LOG** 2.6% / 2개 추가</a:t>
+              <a:t>•  전환 후 — </a:t>
+            </a:r>
+            <a:r>
+              <a:rPr sz="1700" b="1">
+                <a:solidFill>
+                  <a:srgbClr val="222222"/>
+                </a:solidFill>
+                <a:latin typeface="맑은 고딕"/>
+              </a:rPr>
+              <a:t>FLASHBACK LOG</a:t>
+            </a:r>
+            <a:r>
+              <a:rPr sz="1700" b="0">
+                <a:solidFill>
+                  <a:srgbClr val="222222"/>
+                </a:solidFill>
+                <a:latin typeface="맑은 고딕"/>
+              </a:rPr>
+              <a:t> 2.6% / 2개 추가</a:t>
             </a:r>
           </a:p>
           <a:p>
@@ -9215,7 +10131,25 @@
                 </a:solidFill>
                 <a:latin typeface="맑은 고딕"/>
               </a:rPr>
-              <a:t>•  1,536MB → **1,941MB** (405MB 증가)</a:t>
+              <a:t>•  1,536MB → </a:t>
+            </a:r>
+            <a:r>
+              <a:rPr sz="1700" b="1">
+                <a:solidFill>
+                  <a:srgbClr val="222222"/>
+                </a:solidFill>
+                <a:latin typeface="맑은 고딕"/>
+              </a:rPr>
+              <a:t>1,941MB</a:t>
+            </a:r>
+            <a:r>
+              <a:rPr sz="1700" b="0">
+                <a:solidFill>
+                  <a:srgbClr val="222222"/>
+                </a:solidFill>
+                <a:latin typeface="맑은 고딕"/>
+              </a:rPr>
+              <a:t> (405MB 증가)</a:t>
             </a:r>
           </a:p>
           <a:p>
@@ -9231,7 +10165,16 @@
                 </a:solidFill>
                 <a:latin typeface="맑은 고딕"/>
               </a:rPr>
-              <a:t>•  몇 건만 바꿨는데 405MB 인 이유 — **블록 단위 이전 이미지**</a:t>
+              <a:t>•  몇 건만 바꿨는데 405MB 인 이유 — </a:t>
+            </a:r>
+            <a:r>
+              <a:rPr sz="1700" b="1">
+                <a:solidFill>
+                  <a:srgbClr val="222222"/>
+                </a:solidFill>
+                <a:latin typeface="맑은 고딕"/>
+              </a:rPr>
+              <a:t>블록 단위 이전 이미지</a:t>
             </a:r>
           </a:p>
         </p:txBody>
@@ -9410,7 +10353,35 @@
                 </a:solidFill>
                 <a:latin typeface="맑은 고딕"/>
               </a:rPr>
-              <a:t>•  144,766행 테이블 생성 후 `STORAGE_SIZE` → **200MB 그대로**</a:t>
+              <a:t>•  144,766행 테이블 생성 후 </a:t>
+            </a:r>
+            <a:r>
+              <a:rPr sz="1700" b="0">
+                <a:solidFill>
+                  <a:srgbClr val="222222"/>
+                </a:solidFill>
+                <a:latin typeface="Consolas"/>
+                <a:cs typeface="Consolas"/>
+              </a:rPr>
+              <a:t>STORAGE_SIZE</a:t>
+            </a:r>
+            <a:r>
+              <a:rPr sz="1700" b="0">
+                <a:solidFill>
+                  <a:srgbClr val="222222"/>
+                </a:solidFill>
+                <a:latin typeface="맑은 고딕"/>
+              </a:rPr>
+              <a:t> → </a:t>
+            </a:r>
+            <a:r>
+              <a:rPr sz="1700" b="1">
+                <a:solidFill>
+                  <a:srgbClr val="222222"/>
+                </a:solidFill>
+                <a:latin typeface="맑은 고딕"/>
+              </a:rPr>
+              <a:t>200MB 그대로</a:t>
             </a:r>
           </a:p>
           <a:p>
@@ -9426,7 +10397,16 @@
                 </a:solidFill>
                 <a:latin typeface="맑은 고딕"/>
               </a:rPr>
-              <a:t>•  이 값은 "쓴 양" 이 아니라 **확보된 크기**</a:t>
+              <a:t>•  이 값은 "쓴 양" 이 아니라 </a:t>
+            </a:r>
+            <a:r>
+              <a:rPr sz="1700" b="1">
+                <a:solidFill>
+                  <a:srgbClr val="222222"/>
+                </a:solidFill>
+                <a:latin typeface="맑은 고딕"/>
+              </a:rPr>
+              <a:t>확보된 크기</a:t>
             </a:r>
           </a:p>
           <a:p>
@@ -9442,7 +10422,44 @@
                 </a:solidFill>
                 <a:latin typeface="맑은 고딕"/>
               </a:rPr>
-              <a:t>•  감시는 `V$FLASH_RECOVERY_AREA_USAGE` 의 **FLASHBACK LOG** 로</a:t>
+              <a:t>•  감시는 </a:t>
+            </a:r>
+            <a:r>
+              <a:rPr sz="1700" b="0">
+                <a:solidFill>
+                  <a:srgbClr val="222222"/>
+                </a:solidFill>
+                <a:latin typeface="Consolas"/>
+                <a:cs typeface="Consolas"/>
+              </a:rPr>
+              <a:t>V$FLASH_RECOVERY_AREA_USAGE</a:t>
+            </a:r>
+            <a:r>
+              <a:rPr sz="1700" b="0">
+                <a:solidFill>
+                  <a:srgbClr val="222222"/>
+                </a:solidFill>
+                <a:latin typeface="맑은 고딕"/>
+              </a:rPr>
+              <a:t> 의 </a:t>
+            </a:r>
+            <a:r>
+              <a:rPr sz="1700" b="1">
+                <a:solidFill>
+                  <a:srgbClr val="222222"/>
+                </a:solidFill>
+                <a:latin typeface="맑은 고딕"/>
+              </a:rPr>
+              <a:t>FLASHBACK LOG</a:t>
+            </a:r>
+            <a:r>
+              <a:rPr sz="1700" b="0">
+                <a:solidFill>
+                  <a:srgbClr val="222222"/>
+                </a:solidFill>
+                <a:latin typeface="맑은 고딕"/>
+              </a:rPr>
+              <a:t> 로</a:t>
             </a:r>
           </a:p>
           <a:p>
@@ -9637,7 +10654,34 @@
                 </a:solidFill>
                 <a:latin typeface="맑은 고딕"/>
               </a:rPr>
-              <a:t>•  첫 전환 SCN **2252853** → 되돌림 → 두 번째 전환 SCN **2253716**</a:t>
+              <a:t>•  첫 전환 SCN </a:t>
+            </a:r>
+            <a:r>
+              <a:rPr sz="1700" b="1">
+                <a:solidFill>
+                  <a:srgbClr val="222222"/>
+                </a:solidFill>
+                <a:latin typeface="맑은 고딕"/>
+              </a:rPr>
+              <a:t>2252853</a:t>
+            </a:r>
+            <a:r>
+              <a:rPr sz="1700" b="0">
+                <a:solidFill>
+                  <a:srgbClr val="222222"/>
+                </a:solidFill>
+                <a:latin typeface="맑은 고딕"/>
+              </a:rPr>
+              <a:t> → 되돌림 → 두 번째 전환 SCN </a:t>
+            </a:r>
+            <a:r>
+              <a:rPr sz="1700" b="1">
+                <a:solidFill>
+                  <a:srgbClr val="222222"/>
+                </a:solidFill>
+                <a:latin typeface="맑은 고딕"/>
+              </a:rPr>
+              <a:t>2253716</a:t>
             </a:r>
           </a:p>
           <a:p>
@@ -9669,7 +10713,25 @@
                 </a:solidFill>
                 <a:latin typeface="맑은 고딕"/>
               </a:rPr>
-              <a:t>•  그래서 **매번 더 최신 데이터**에서 시작한다</a:t>
+              <a:t>•  그래서 </a:t>
+            </a:r>
+            <a:r>
+              <a:rPr sz="1700" b="1">
+                <a:solidFill>
+                  <a:srgbClr val="222222"/>
+                </a:solidFill>
+                <a:latin typeface="맑은 고딕"/>
+              </a:rPr>
+              <a:t>매번 더 최신 데이터</a:t>
+            </a:r>
+            <a:r>
+              <a:rPr sz="1700" b="0">
+                <a:solidFill>
+                  <a:srgbClr val="222222"/>
+                </a:solidFill>
+                <a:latin typeface="맑은 고딕"/>
+              </a:rPr>
+              <a:t>에서 시작한다</a:t>
             </a:r>
           </a:p>
           <a:p>
@@ -9928,7 +10990,25 @@
                 </a:solidFill>
                 <a:latin typeface="맑은 고딕"/>
               </a:rPr>
-              <a:t>•  **①이 첫 단계인 것**이 핵심이다</a:t>
+              <a:t>•  </a:t>
+            </a:r>
+            <a:r>
+              <a:rPr sz="1700" b="1">
+                <a:solidFill>
+                  <a:srgbClr val="222222"/>
+                </a:solidFill>
+                <a:latin typeface="맑은 고딕"/>
+              </a:rPr>
+              <a:t>①이 첫 단계인 것</a:t>
+            </a:r>
+            <a:r>
+              <a:rPr sz="1700" b="0">
+                <a:solidFill>
+                  <a:srgbClr val="222222"/>
+                </a:solidFill>
+                <a:latin typeface="맑은 고딕"/>
+              </a:rPr>
+              <a:t>이 핵심이다</a:t>
             </a:r>
           </a:p>
         </p:txBody>
@@ -10362,7 +11442,36 @@
                 </a:solidFill>
                 <a:latin typeface="맑은 고딕"/>
               </a:rPr>
-              <a:t>•  `SHUTDOWN IMMEDIATE` → `STARTUP MOUNT`</a:t>
+              <a:t>•  </a:t>
+            </a:r>
+            <a:r>
+              <a:rPr sz="1700" b="0">
+                <a:solidFill>
+                  <a:srgbClr val="222222"/>
+                </a:solidFill>
+                <a:latin typeface="Consolas"/>
+                <a:cs typeface="Consolas"/>
+              </a:rPr>
+              <a:t>SHUTDOWN IMMEDIATE</a:t>
+            </a:r>
+            <a:r>
+              <a:rPr sz="1700" b="0">
+                <a:solidFill>
+                  <a:srgbClr val="222222"/>
+                </a:solidFill>
+                <a:latin typeface="맑은 고딕"/>
+              </a:rPr>
+              <a:t> → </a:t>
+            </a:r>
+            <a:r>
+              <a:rPr sz="1700" b="0">
+                <a:solidFill>
+                  <a:srgbClr val="222222"/>
+                </a:solidFill>
+                <a:latin typeface="Consolas"/>
+                <a:cs typeface="Consolas"/>
+              </a:rPr>
+              <a:t>STARTUP MOUNT</a:t>
             </a:r>
           </a:p>
           <a:p>
@@ -10378,7 +11487,17 @@
                 </a:solidFill>
                 <a:latin typeface="맑은 고딕"/>
               </a:rPr>
-              <a:t>•  `ALTER DATABASE CONVERT TO PHYSICAL STANDBY`</a:t>
+              <a:t>•  </a:t>
+            </a:r>
+            <a:r>
+              <a:rPr sz="1700" b="0">
+                <a:solidFill>
+                  <a:srgbClr val="222222"/>
+                </a:solidFill>
+                <a:latin typeface="Consolas"/>
+                <a:cs typeface="Consolas"/>
+              </a:rPr>
+              <a:t>ALTER DATABASE CONVERT TO PHYSICAL STANDBY</a:t>
             </a:r>
           </a:p>
           <a:p>
@@ -10394,7 +11513,17 @@
                 </a:solidFill>
                 <a:latin typeface="맑은 고딕"/>
               </a:rPr>
-              <a:t>•  결과 — `PHYSICAL STANDBY / STANDBY / NO`</a:t>
+              <a:t>•  결과 — </a:t>
+            </a:r>
+            <a:r>
+              <a:rPr sz="1700" b="0">
+                <a:solidFill>
+                  <a:srgbClr val="222222"/>
+                </a:solidFill>
+                <a:latin typeface="Consolas"/>
+                <a:cs typeface="Consolas"/>
+              </a:rPr>
+              <a:t>PHYSICAL STANDBY / STANDBY / NO</a:t>
             </a:r>
           </a:p>
           <a:p>
@@ -10410,7 +11539,44 @@
                 </a:solidFill>
                 <a:latin typeface="맑은 고딕"/>
               </a:rPr>
-              <a:t>•  **복원 지점이 사라진다** (`V$RESTORE_POINT` 0행)</a:t>
+              <a:t>•  </a:t>
+            </a:r>
+            <a:r>
+              <a:rPr sz="1700" b="1">
+                <a:solidFill>
+                  <a:srgbClr val="222222"/>
+                </a:solidFill>
+                <a:latin typeface="맑은 고딕"/>
+              </a:rPr>
+              <a:t>복원 지점이 사라진다</a:t>
+            </a:r>
+            <a:r>
+              <a:rPr sz="1700" b="0">
+                <a:solidFill>
+                  <a:srgbClr val="222222"/>
+                </a:solidFill>
+                <a:latin typeface="맑은 고딕"/>
+              </a:rPr>
+              <a:t> (</a:t>
+            </a:r>
+            <a:r>
+              <a:rPr sz="1700" b="0">
+                <a:solidFill>
+                  <a:srgbClr val="222222"/>
+                </a:solidFill>
+                <a:latin typeface="Consolas"/>
+                <a:cs typeface="Consolas"/>
+              </a:rPr>
+              <a:t>V$RESTORE_POINT</a:t>
+            </a:r>
+            <a:r>
+              <a:rPr sz="1700" b="0">
+                <a:solidFill>
+                  <a:srgbClr val="222222"/>
+                </a:solidFill>
+                <a:latin typeface="맑은 고딕"/>
+              </a:rPr>
+              <a:t> 0행)</a:t>
             </a:r>
           </a:p>
           <a:p>
@@ -10621,7 +11787,45 @@
                 </a:solidFill>
                 <a:latin typeface="맑은 고딕"/>
               </a:rPr>
-              <a:t>•  ② `SHUTDOWN` → `STARTUP MOUNT` — 되감으려면 아무도 안 써야 한다</a:t>
+              <a:t>•  ② </a:t>
+            </a:r>
+            <a:r>
+              <a:rPr sz="1700" b="0">
+                <a:solidFill>
+                  <a:srgbClr val="222222"/>
+                </a:solidFill>
+                <a:latin typeface="Consolas"/>
+                <a:cs typeface="Consolas"/>
+              </a:rPr>
+              <a:t>SHUTDOWN</a:t>
+            </a:r>
+            <a:r>
+              <a:rPr sz="1700" b="0">
+                <a:solidFill>
+                  <a:srgbClr val="222222"/>
+                </a:solidFill>
+                <a:latin typeface="맑은 고딕"/>
+              </a:rPr>
+              <a:t> → </a:t>
+            </a:r>
+            <a:r>
+              <a:rPr sz="1700" b="0">
+                <a:solidFill>
+                  <a:srgbClr val="222222"/>
+                </a:solidFill>
+                <a:latin typeface="Consolas"/>
+                <a:cs typeface="Consolas"/>
+              </a:rPr>
+              <a:t>STARTUP MOUNT</a:t>
+            </a:r>
+            <a:r>
+              <a:rPr sz="1700" b="0">
+                <a:solidFill>
+                  <a:srgbClr val="222222"/>
+                </a:solidFill>
+                <a:latin typeface="맑은 고딕"/>
+              </a:rPr>
+              <a:t> — 되감으려면 아무도 안 써야 한다</a:t>
             </a:r>
           </a:p>
           <a:p>
@@ -10637,7 +11841,17 @@
                 </a:solidFill>
                 <a:latin typeface="맑은 고딕"/>
               </a:rPr>
-              <a:t>•  ③ `CONVERT TO PHYSICAL STANDBY`</a:t>
+              <a:t>•  ③ </a:t>
+            </a:r>
+            <a:r>
+              <a:rPr sz="1700" b="0">
+                <a:solidFill>
+                  <a:srgbClr val="222222"/>
+                </a:solidFill>
+                <a:latin typeface="Consolas"/>
+                <a:cs typeface="Consolas"/>
+              </a:rPr>
+              <a:t>CONVERT TO PHYSICAL STANDBY</a:t>
             </a:r>
           </a:p>
           <a:p>
@@ -10669,7 +11883,26 @@
                 </a:solidFill>
                 <a:latin typeface="맑은 고딕"/>
               </a:rPr>
-              <a:t>•  ⑤ `OPEN READ ONLY` → ⑥ MRP 기동 → ⑦ PDB 열기</a:t>
+              <a:t>•  ⑤ </a:t>
+            </a:r>
+            <a:r>
+              <a:rPr sz="1700" b="0">
+                <a:solidFill>
+                  <a:srgbClr val="222222"/>
+                </a:solidFill>
+                <a:latin typeface="Consolas"/>
+                <a:cs typeface="Consolas"/>
+              </a:rPr>
+              <a:t>OPEN READ ONLY</a:t>
+            </a:r>
+            <a:r>
+              <a:rPr sz="1700" b="0">
+                <a:solidFill>
+                  <a:srgbClr val="222222"/>
+                </a:solidFill>
+                <a:latin typeface="맑은 고딕"/>
+              </a:rPr>
+              <a:t> → ⑥ MRP 기동 → ⑦ PDB 열기</a:t>
             </a:r>
           </a:p>
         </p:txBody>
@@ -11084,7 +12317,17 @@
                 </a:solidFill>
                 <a:latin typeface="맑은 고딕"/>
               </a:rPr>
-              <a:t>•  `ORA-10456: cannot open standby database; media recovery session may be in progress`</a:t>
+              <a:t>•  </a:t>
+            </a:r>
+            <a:r>
+              <a:rPr sz="1700" b="0">
+                <a:solidFill>
+                  <a:srgbClr val="222222"/>
+                </a:solidFill>
+                <a:latin typeface="Consolas"/>
+                <a:cs typeface="Consolas"/>
+              </a:rPr>
+              <a:t>ORA-10456: cannot open standby database; media recovery session may be in progress</a:t>
             </a:r>
           </a:p>
           <a:p>
@@ -11100,7 +12343,16 @@
                 </a:solidFill>
                 <a:latin typeface="맑은 고딕"/>
               </a:rPr>
-              <a:t>•  올바른 순서 — **MRP 취소 → OPEN READ ONLY → MRP 기동**</a:t>
+              <a:t>•  올바른 순서 — </a:t>
+            </a:r>
+            <a:r>
+              <a:rPr sz="1700" b="1">
+                <a:solidFill>
+                  <a:srgbClr val="222222"/>
+                </a:solidFill>
+                <a:latin typeface="맑은 고딕"/>
+              </a:rPr>
+              <a:t>MRP 취소 → OPEN READ ONLY → MRP 기동</a:t>
             </a:r>
           </a:p>
           <a:p>
@@ -11116,7 +12368,17 @@
                 </a:solidFill>
                 <a:latin typeface="맑은 고딕"/>
               </a:rPr>
-              <a:t>•  결과 — `READ ONLY WITH APPLY`</a:t>
+              <a:t>•  결과 — </a:t>
+            </a:r>
+            <a:r>
+              <a:rPr sz="1700" b="0">
+                <a:solidFill>
+                  <a:srgbClr val="222222"/>
+                </a:solidFill>
+                <a:latin typeface="Consolas"/>
+                <a:cs typeface="Consolas"/>
+              </a:rPr>
+              <a:t>READ ONLY WITH APPLY</a:t>
             </a:r>
           </a:p>
         </p:txBody>
@@ -11295,7 +12557,27 @@
                 </a:solidFill>
                 <a:latin typeface="맑은 고딕"/>
               </a:rPr>
-              <a:t>•  Snapshot Standby — `ALTER PLUGGABLE DATABASE ... **OPEN**`</a:t>
+              <a:t>•  Snapshot Standby — </a:t>
+            </a:r>
+            <a:r>
+              <a:rPr sz="1700" b="0">
+                <a:solidFill>
+                  <a:srgbClr val="222222"/>
+                </a:solidFill>
+                <a:latin typeface="Consolas"/>
+                <a:cs typeface="Consolas"/>
+              </a:rPr>
+              <a:t>ALTER PLUGGABLE DATABASE ... </a:t>
+            </a:r>
+            <a:r>
+              <a:rPr sz="1700" b="1">
+                <a:solidFill>
+                  <a:srgbClr val="222222"/>
+                </a:solidFill>
+                <a:latin typeface="Consolas"/>
+                <a:cs typeface="Consolas"/>
+              </a:rPr>
+              <a:t>OPEN</a:t>
             </a:r>
           </a:p>
           <a:p>
@@ -11311,7 +12593,27 @@
                 </a:solidFill>
                 <a:latin typeface="맑은 고딕"/>
               </a:rPr>
-              <a:t>•  Physical Standby — `ALTER PLUGGABLE DATABASE ... **OPEN READ ONLY**`</a:t>
+              <a:t>•  Physical Standby — </a:t>
+            </a:r>
+            <a:r>
+              <a:rPr sz="1700" b="0">
+                <a:solidFill>
+                  <a:srgbClr val="222222"/>
+                </a:solidFill>
+                <a:latin typeface="Consolas"/>
+                <a:cs typeface="Consolas"/>
+              </a:rPr>
+              <a:t>ALTER PLUGGABLE DATABASE ... </a:t>
+            </a:r>
+            <a:r>
+              <a:rPr sz="1700" b="1">
+                <a:solidFill>
+                  <a:srgbClr val="222222"/>
+                </a:solidFill>
+                <a:latin typeface="Consolas"/>
+                <a:cs typeface="Consolas"/>
+              </a:rPr>
+              <a:t>OPEN READ ONLY</a:t>
             </a:r>
           </a:p>
           <a:p>
@@ -11327,7 +12629,36 @@
                 </a:solidFill>
                 <a:latin typeface="맑은 고딕"/>
               </a:rPr>
-              <a:t>•  CDB 도 마찬가지 — Snapshot 은 `OPEN`, Physical 은 `OPEN READ ONLY`</a:t>
+              <a:t>•  CDB 도 마찬가지 — Snapshot 은 </a:t>
+            </a:r>
+            <a:r>
+              <a:rPr sz="1700" b="0">
+                <a:solidFill>
+                  <a:srgbClr val="222222"/>
+                </a:solidFill>
+                <a:latin typeface="Consolas"/>
+                <a:cs typeface="Consolas"/>
+              </a:rPr>
+              <a:t>OPEN</a:t>
+            </a:r>
+            <a:r>
+              <a:rPr sz="1700" b="0">
+                <a:solidFill>
+                  <a:srgbClr val="222222"/>
+                </a:solidFill>
+                <a:latin typeface="맑은 고딕"/>
+              </a:rPr>
+              <a:t>, Physical 은 </a:t>
+            </a:r>
+            <a:r>
+              <a:rPr sz="1700" b="0">
+                <a:solidFill>
+                  <a:srgbClr val="222222"/>
+                </a:solidFill>
+                <a:latin typeface="Consolas"/>
+                <a:cs typeface="Consolas"/>
+              </a:rPr>
+              <a:t>OPEN READ ONLY</a:t>
             </a:r>
           </a:p>
           <a:p>
@@ -11343,7 +12674,16 @@
                 </a:solidFill>
                 <a:latin typeface="맑은 고딕"/>
               </a:rPr>
-              <a:t>•  어느 쪽이든 **CDB 를 열어도 PDB 는 따라오지 않는다**</a:t>
+              <a:t>•  어느 쪽이든 </a:t>
+            </a:r>
+            <a:r>
+              <a:rPr sz="1700" b="1">
+                <a:solidFill>
+                  <a:srgbClr val="222222"/>
+                </a:solidFill>
+                <a:latin typeface="맑은 고딕"/>
+              </a:rPr>
+              <a:t>CDB 를 열어도 PDB 는 따라오지 않는다</a:t>
             </a:r>
           </a:p>
         </p:txBody>
@@ -11522,7 +12862,25 @@
                 </a:solidFill>
                 <a:latin typeface="맑은 고딕"/>
               </a:rPr>
-              <a:t>•  Snapshot 에서 만든 테이블 → **ORA-00942** (존재 자체가 없다)</a:t>
+              <a:t>•  Snapshot 에서 만든 테이블 → </a:t>
+            </a:r>
+            <a:r>
+              <a:rPr sz="1700" b="1">
+                <a:solidFill>
+                  <a:srgbClr val="222222"/>
+                </a:solidFill>
+                <a:latin typeface="맑은 고딕"/>
+              </a:rPr>
+              <a:t>ORA-00942</a:t>
+            </a:r>
+            <a:r>
+              <a:rPr sz="1700" b="0">
+                <a:solidFill>
+                  <a:srgbClr val="222222"/>
+                </a:solidFill>
+                <a:latin typeface="맑은 고딕"/>
+              </a:rPr>
+              <a:t> (존재 자체가 없다)</a:t>
             </a:r>
           </a:p>
           <a:p>
@@ -11538,7 +12896,45 @@
                 </a:solidFill>
                 <a:latin typeface="맑은 고딕"/>
               </a:rPr>
-              <a:t>•  고친 행 → `modified-on-snapshot` → **`before-snapshot`** 복귀</a:t>
+              <a:t>•  고친 행 → </a:t>
+            </a:r>
+            <a:r>
+              <a:rPr sz="1700" b="0">
+                <a:solidFill>
+                  <a:srgbClr val="222222"/>
+                </a:solidFill>
+                <a:latin typeface="Consolas"/>
+                <a:cs typeface="Consolas"/>
+              </a:rPr>
+              <a:t>modified-on-snapshot</a:t>
+            </a:r>
+            <a:r>
+              <a:rPr sz="1700" b="0">
+                <a:solidFill>
+                  <a:srgbClr val="222222"/>
+                </a:solidFill>
+                <a:latin typeface="맑은 고딕"/>
+              </a:rPr>
+              <a:t> → </a:t>
+            </a:r>
+            <a:r>
+              <a:rPr sz="1700" b="1">
+                <a:solidFill>
+                  <a:srgbClr val="222222"/>
+                </a:solidFill>
+                <a:latin typeface="Consolas"/>
+                <a:cs typeface="Consolas"/>
+              </a:rPr>
+              <a:t>before-snapshot</a:t>
+            </a:r>
+            <a:r>
+              <a:rPr sz="1700" b="0">
+                <a:solidFill>
+                  <a:srgbClr val="222222"/>
+                </a:solidFill>
+                <a:latin typeface="맑은 고딕"/>
+              </a:rPr>
+              <a:t> 복귀</a:t>
             </a:r>
           </a:p>
           <a:p>
@@ -11554,7 +12950,16 @@
                 </a:solidFill>
                 <a:latin typeface="맑은 고딕"/>
               </a:rPr>
-              <a:t>•  그동안 Primary 가 넣은 2·3번 행 → **나타났다**</a:t>
+              <a:t>•  그동안 Primary 가 넣은 2·3번 행 → </a:t>
+            </a:r>
+            <a:r>
+              <a:rPr sz="1700" b="1">
+                <a:solidFill>
+                  <a:srgbClr val="222222"/>
+                </a:solidFill>
+                <a:latin typeface="맑은 고딕"/>
+              </a:rPr>
+              <a:t>나타났다</a:t>
             </a:r>
           </a:p>
           <a:p>
@@ -11570,7 +12975,35 @@
                 </a:solidFill>
                 <a:latin typeface="맑은 고딕"/>
               </a:rPr>
-              <a:t>•  `apply lag` 2분 38초 → **0**</a:t>
+              <a:t>•  </a:t>
+            </a:r>
+            <a:r>
+              <a:rPr sz="1700" b="0">
+                <a:solidFill>
+                  <a:srgbClr val="222222"/>
+                </a:solidFill>
+                <a:latin typeface="Consolas"/>
+                <a:cs typeface="Consolas"/>
+              </a:rPr>
+              <a:t>apply lag</a:t>
+            </a:r>
+            <a:r>
+              <a:rPr sz="1700" b="0">
+                <a:solidFill>
+                  <a:srgbClr val="222222"/>
+                </a:solidFill>
+                <a:latin typeface="맑은 고딕"/>
+              </a:rPr>
+              <a:t> 2분 38초 → </a:t>
+            </a:r>
+            <a:r>
+              <a:rPr sz="1700" b="1">
+                <a:solidFill>
+                  <a:srgbClr val="222222"/>
+                </a:solidFill>
+                <a:latin typeface="맑은 고딕"/>
+              </a:rPr>
+              <a:t>0</a:t>
             </a:r>
           </a:p>
           <a:p>
@@ -11586,7 +13019,16 @@
                 </a:solidFill>
                 <a:latin typeface="맑은 고딕"/>
               </a:rPr>
-              <a:t>•  FRA — FLASHBACK LOG 사라지고 **1,941MB → 1,559MB**</a:t>
+              <a:t>•  FRA — FLASHBACK LOG 사라지고 </a:t>
+            </a:r>
+            <a:r>
+              <a:rPr sz="1700" b="1">
+                <a:solidFill>
+                  <a:srgbClr val="222222"/>
+                </a:solidFill>
+                <a:latin typeface="맑은 고딕"/>
+              </a:rPr>
+              <a:t>1,941MB → 1,559MB</a:t>
             </a:r>
           </a:p>
         </p:txBody>
@@ -11765,7 +13207,17 @@
                 </a:solidFill>
                 <a:latin typeface="맑은 고딕"/>
               </a:rPr>
-              <a:t>•  상태 — `database_role, open_mode, controlfile_type, flashback_on`</a:t>
+              <a:t>•  상태 — </a:t>
+            </a:r>
+            <a:r>
+              <a:rPr sz="1700" b="0">
+                <a:solidFill>
+                  <a:srgbClr val="222222"/>
+                </a:solidFill>
+                <a:latin typeface="Consolas"/>
+                <a:cs typeface="Consolas"/>
+              </a:rPr>
+              <a:t>database_role, open_mode, controlfile_type, flashback_on</a:t>
             </a:r>
           </a:p>
           <a:p>
@@ -11781,7 +13233,17 @@
                 </a:solidFill>
                 <a:latin typeface="맑은 고딕"/>
               </a:rPr>
-              <a:t>•  되돌아갈 자리 — `V$RESTORE_POINT`</a:t>
+              <a:t>•  되돌아갈 자리 — </a:t>
+            </a:r>
+            <a:r>
+              <a:rPr sz="1700" b="0">
+                <a:solidFill>
+                  <a:srgbClr val="222222"/>
+                </a:solidFill>
+                <a:latin typeface="Consolas"/>
+                <a:cs typeface="Consolas"/>
+              </a:rPr>
+              <a:t>V$RESTORE_POINT</a:t>
             </a:r>
           </a:p>
           <a:p>
@@ -11797,7 +13259,36 @@
                 </a:solidFill>
                 <a:latin typeface="맑은 고딕"/>
               </a:rPr>
-              <a:t>•  적용 — `V$ARCHIVE_DEST_STATUS.RECOVERY_MODE`, `V$MANAGED_STANDBY`</a:t>
+              <a:t>•  적용 — </a:t>
+            </a:r>
+            <a:r>
+              <a:rPr sz="1700" b="0">
+                <a:solidFill>
+                  <a:srgbClr val="222222"/>
+                </a:solidFill>
+                <a:latin typeface="Consolas"/>
+                <a:cs typeface="Consolas"/>
+              </a:rPr>
+              <a:t>V$ARCHIVE_DEST_STATUS.RECOVERY_MODE</a:t>
+            </a:r>
+            <a:r>
+              <a:rPr sz="1700" b="0">
+                <a:solidFill>
+                  <a:srgbClr val="222222"/>
+                </a:solidFill>
+                <a:latin typeface="맑은 고딕"/>
+              </a:rPr>
+              <a:t>, </a:t>
+            </a:r>
+            <a:r>
+              <a:rPr sz="1700" b="0">
+                <a:solidFill>
+                  <a:srgbClr val="222222"/>
+                </a:solidFill>
+                <a:latin typeface="Consolas"/>
+                <a:cs typeface="Consolas"/>
+              </a:rPr>
+              <a:t>V$MANAGED_STANDBY</a:t>
             </a:r>
           </a:p>
           <a:p>
@@ -11813,7 +13304,17 @@
                 </a:solidFill>
                 <a:latin typeface="맑은 고딕"/>
               </a:rPr>
-              <a:t>•  지연 — `V$DATAGUARD_STATS`</a:t>
+              <a:t>•  지연 — </a:t>
+            </a:r>
+            <a:r>
+              <a:rPr sz="1700" b="0">
+                <a:solidFill>
+                  <a:srgbClr val="222222"/>
+                </a:solidFill>
+                <a:latin typeface="Consolas"/>
+                <a:cs typeface="Consolas"/>
+              </a:rPr>
+              <a:t>V$DATAGUARD_STATS</a:t>
             </a:r>
           </a:p>
           <a:p>
@@ -11829,7 +13330,17 @@
                 </a:solidFill>
                 <a:latin typeface="맑은 고딕"/>
               </a:rPr>
-              <a:t>•  FRA — `V$FLASH_RECOVERY_AREA_USAGE`</a:t>
+              <a:t>•  FRA — </a:t>
+            </a:r>
+            <a:r>
+              <a:rPr sz="1700" b="0">
+                <a:solidFill>
+                  <a:srgbClr val="222222"/>
+                </a:solidFill>
+                <a:latin typeface="Consolas"/>
+                <a:cs typeface="Consolas"/>
+              </a:rPr>
+              <a:t>V$FLASH_RECOVERY_AREA_USAGE</a:t>
             </a:r>
           </a:p>
           <a:p>
@@ -11845,7 +13356,17 @@
                 </a:solidFill>
                 <a:latin typeface="맑은 고딕"/>
               </a:rPr>
-              <a:t>•  PDB — `V$PDBS`</a:t>
+              <a:t>•  PDB — </a:t>
+            </a:r>
+            <a:r>
+              <a:rPr sz="1700" b="0">
+                <a:solidFill>
+                  <a:srgbClr val="222222"/>
+                </a:solidFill>
+                <a:latin typeface="Consolas"/>
+                <a:cs typeface="Consolas"/>
+              </a:rPr>
+              <a:t>V$PDBS</a:t>
             </a:r>
           </a:p>
         </p:txBody>
@@ -12263,7 +13784,25 @@
                 </a:solidFill>
                 <a:latin typeface="맑은 고딕"/>
               </a:rPr>
-              <a:t>•  **적합** — 실제 데이터에서만 드러나는 문제 / 짧게 / 되돌릴 것이 확실할 때</a:t>
+              <a:t>•  </a:t>
+            </a:r>
+            <a:r>
+              <a:rPr sz="1700" b="1">
+                <a:solidFill>
+                  <a:srgbClr val="222222"/>
+                </a:solidFill>
+                <a:latin typeface="맑은 고딕"/>
+              </a:rPr>
+              <a:t>적합</a:t>
+            </a:r>
+            <a:r>
+              <a:rPr sz="1700" b="0">
+                <a:solidFill>
+                  <a:srgbClr val="222222"/>
+                </a:solidFill>
+                <a:latin typeface="맑은 고딕"/>
+              </a:rPr>
+              <a:t> — 실제 데이터에서만 드러나는 문제 / 짧게 / 되돌릴 것이 확실할 때</a:t>
             </a:r>
           </a:p>
           <a:p>
@@ -12279,7 +13818,25 @@
                 </a:solidFill>
                 <a:latin typeface="맑은 고딕"/>
               </a:rPr>
-              <a:t>•  **부적합** — Standby 가 하나뿐 / 오래 / 결과를 유지 / 데이터를 많이 바꿈</a:t>
+              <a:t>•  </a:t>
+            </a:r>
+            <a:r>
+              <a:rPr sz="1700" b="1">
+                <a:solidFill>
+                  <a:srgbClr val="222222"/>
+                </a:solidFill>
+                <a:latin typeface="맑은 고딕"/>
+              </a:rPr>
+              <a:t>부적합</a:t>
+            </a:r>
+            <a:r>
+              <a:rPr sz="1700" b="0">
+                <a:solidFill>
+                  <a:srgbClr val="222222"/>
+                </a:solidFill>
+                <a:latin typeface="맑은 고딕"/>
+              </a:rPr>
+              <a:t> — Standby 가 하나뿐 / 오래 / 결과를 유지 / 데이터를 많이 바꿈</a:t>
             </a:r>
           </a:p>
           <a:p>
@@ -12295,7 +13852,25 @@
                 </a:solidFill>
                 <a:latin typeface="맑은 고딕"/>
               </a:rPr>
-              <a:t>•  긴 시험은 **나누어** 한다 — 되돌렸다 다시 전환</a:t>
+              <a:t>•  긴 시험은 </a:t>
+            </a:r>
+            <a:r>
+              <a:rPr sz="1700" b="1">
+                <a:solidFill>
+                  <a:srgbClr val="222222"/>
+                </a:solidFill>
+                <a:latin typeface="맑은 고딕"/>
+              </a:rPr>
+              <a:t>나누어</a:t>
+            </a:r>
+            <a:r>
+              <a:rPr sz="1700" b="0">
+                <a:solidFill>
+                  <a:srgbClr val="222222"/>
+                </a:solidFill>
+                <a:latin typeface="맑은 고딕"/>
+              </a:rPr>
+              <a:t> 한다 — 되돌렸다 다시 전환</a:t>
             </a:r>
           </a:p>
           <a:p>
@@ -12506,7 +14081,25 @@
                 </a:solidFill>
                 <a:latin typeface="맑은 고딕"/>
               </a:rPr>
-              <a:t>•  그런데 만난 오류 넷 중 **셋이 상태에서** 왔다</a:t>
+              <a:t>•  그런데 만난 오류 넷 중 </a:t>
+            </a:r>
+            <a:r>
+              <a:rPr sz="1700" b="1">
+                <a:solidFill>
+                  <a:srgbClr val="222222"/>
+                </a:solidFill>
+                <a:latin typeface="맑은 고딕"/>
+              </a:rPr>
+              <a:t>셋이 상태에서</a:t>
+            </a:r>
+            <a:r>
+              <a:rPr sz="1700" b="0">
+                <a:solidFill>
+                  <a:srgbClr val="222222"/>
+                </a:solidFill>
+                <a:latin typeface="맑은 고딕"/>
+              </a:rPr>
+              <a:t> 왔다</a:t>
             </a:r>
           </a:p>
           <a:p>
@@ -12538,7 +14131,25 @@
                 </a:solidFill>
                 <a:latin typeface="맑은 고딕"/>
               </a:rPr>
-              <a:t>•  대책 — 명령 전에 **상태 한 줄**을 먼저 조회한다</a:t>
+              <a:t>•  대책 — 명령 전에 </a:t>
+            </a:r>
+            <a:r>
+              <a:rPr sz="1700" b="1">
+                <a:solidFill>
+                  <a:srgbClr val="222222"/>
+                </a:solidFill>
+                <a:latin typeface="맑은 고딕"/>
+              </a:rPr>
+              <a:t>상태 한 줄</a:t>
+            </a:r>
+            <a:r>
+              <a:rPr sz="1700" b="0">
+                <a:solidFill>
+                  <a:srgbClr val="222222"/>
+                </a:solidFill>
+                <a:latin typeface="맑은 고딕"/>
+              </a:rPr>
+              <a:t>을 먼저 조회한다</a:t>
             </a:r>
           </a:p>
           <a:p>
@@ -12554,7 +14165,17 @@
                 </a:solidFill>
                 <a:latin typeface="맑은 고딕"/>
               </a:rPr>
-              <a:t>•  `select database_role, open_mode, controlfile_type, flashback_on from v$database;`</a:t>
+              <a:t>•  </a:t>
+            </a:r>
+            <a:r>
+              <a:rPr sz="1700" b="0">
+                <a:solidFill>
+                  <a:srgbClr val="222222"/>
+                </a:solidFill>
+                <a:latin typeface="Consolas"/>
+                <a:cs typeface="Consolas"/>
+              </a:rPr>
+              <a:t>select database_role, open_mode, controlfile_type, flashback_on from v$database;</a:t>
             </a:r>
           </a:p>
         </p:txBody>
@@ -12694,7 +14315,25 @@
                 </a:solidFill>
                 <a:latin typeface="맑은 고딕"/>
               </a:rPr>
-              <a:t>•  Snapshot Standby 는 Physical Standby 를 **잠시 쓰기 가능**하게 바꾼다. 되돌리면 전부 사라진다.</a:t>
+              <a:t>•  Snapshot Standby 는 Physical Standby 를 </a:t>
+            </a:r>
+            <a:r>
+              <a:rPr sz="1600" b="1">
+                <a:solidFill>
+                  <a:srgbClr val="222222"/>
+                </a:solidFill>
+                <a:latin typeface="맑은 고딕"/>
+              </a:rPr>
+              <a:t>잠시 쓰기 가능</a:t>
+            </a:r>
+            <a:r>
+              <a:rPr sz="1600" b="0">
+                <a:solidFill>
+                  <a:srgbClr val="222222"/>
+                </a:solidFill>
+                <a:latin typeface="맑은 고딕"/>
+              </a:rPr>
+              <a:t>하게 바꾼다. 되돌리면 전부 사라진다.</a:t>
             </a:r>
           </a:p>
           <a:p>
@@ -12726,7 +14365,25 @@
                 </a:solidFill>
                 <a:latin typeface="맑은 고딕"/>
               </a:rPr>
-              <a:t>•  되돌리는 원리는 **보장 복원 지점**이다. 전환할 때 자동으로 만들어진다.</a:t>
+              <a:t>•  되돌리는 원리는 </a:t>
+            </a:r>
+            <a:r>
+              <a:rPr sz="1600" b="1">
+                <a:solidFill>
+                  <a:srgbClr val="222222"/>
+                </a:solidFill>
+                <a:latin typeface="맑은 고딕"/>
+              </a:rPr>
+              <a:t>보장 복원 지점</a:t>
+            </a:r>
+            <a:r>
+              <a:rPr sz="1600" b="0">
+                <a:solidFill>
+                  <a:srgbClr val="222222"/>
+                </a:solidFill>
+                <a:latin typeface="맑은 고딕"/>
+              </a:rPr>
+              <a:t>이다. 전환할 때 자동으로 만들어진다.</a:t>
             </a:r>
           </a:p>
           <a:p>
@@ -12742,7 +14399,26 @@
                 </a:solidFill>
                 <a:latin typeface="맑은 고딕"/>
               </a:rPr>
-              <a:t>•  `FLASHBACK_ON` 이 NO 여도 전환된다. 전체 로깅이 아니라 복원 지점을 쓰기 때문이다.</a:t>
+              <a:t>•  </a:t>
+            </a:r>
+            <a:r>
+              <a:rPr sz="1600" b="0">
+                <a:solidFill>
+                  <a:srgbClr val="222222"/>
+                </a:solidFill>
+                <a:latin typeface="Consolas"/>
+                <a:cs typeface="Consolas"/>
+              </a:rPr>
+              <a:t>FLASHBACK_ON</a:t>
+            </a:r>
+            <a:r>
+              <a:rPr sz="1600" b="0">
+                <a:solidFill>
+                  <a:srgbClr val="222222"/>
+                </a:solidFill>
+                <a:latin typeface="맑은 고딕"/>
+              </a:rPr>
+              <a:t> 이 NO 여도 전환된다. 전체 로깅이 아니라 복원 지점을 쓰기 때문이다.</a:t>
             </a:r>
           </a:p>
           <a:p>
@@ -12758,7 +14434,25 @@
                 </a:solidFill>
                 <a:latin typeface="맑은 고딕"/>
               </a:rPr>
-              <a:t>•  MRP 가 돌면 전환 불가 — **ORA-38784 + ORA-01153**. 메시지에 복원 지점 이름이 드러난다.</a:t>
+              <a:t>•  MRP 가 돌면 전환 불가 — </a:t>
+            </a:r>
+            <a:r>
+              <a:rPr sz="1600" b="1">
+                <a:solidFill>
+                  <a:srgbClr val="222222"/>
+                </a:solidFill>
+                <a:latin typeface="맑은 고딕"/>
+              </a:rPr>
+              <a:t>ORA-38784 + ORA-01153</a:t>
+            </a:r>
+            <a:r>
+              <a:rPr sz="1600" b="0">
+                <a:solidFill>
+                  <a:srgbClr val="222222"/>
+                </a:solidFill>
+                <a:latin typeface="맑은 고딕"/>
+              </a:rPr>
+              <a:t>. 메시지에 복원 지점 이름이 드러난다.</a:t>
             </a:r>
           </a:p>
           <a:p>
@@ -12774,7 +14468,25 @@
                 </a:solidFill>
                 <a:latin typeface="맑은 고딕"/>
               </a:rPr>
-              <a:t>•  전환 후 — SNAPSHOT STANDBY / **MOUNTED** / CURRENT / RESTORE POINT ONLY.</a:t>
+              <a:t>•  전환 후 — SNAPSHOT STANDBY / </a:t>
+            </a:r>
+            <a:r>
+              <a:rPr sz="1600" b="1">
+                <a:solidFill>
+                  <a:srgbClr val="222222"/>
+                </a:solidFill>
+                <a:latin typeface="맑은 고딕"/>
+              </a:rPr>
+              <a:t>MOUNTED</a:t>
+            </a:r>
+            <a:r>
+              <a:rPr sz="1600" b="0">
+                <a:solidFill>
+                  <a:srgbClr val="222222"/>
+                </a:solidFill>
+                <a:latin typeface="맑은 고딕"/>
+              </a:rPr>
+              <a:t> / CURRENT / RESTORE POINT ONLY.</a:t>
             </a:r>
           </a:p>
         </p:txBody>
@@ -12914,7 +14626,25 @@
                 </a:solidFill>
                 <a:latin typeface="맑은 고딕"/>
               </a:rPr>
-              <a:t>•  보장 복원 지점은 FRA 가 부족해도 **지워지지 않는다.** 대신 데이터베이스가 멈춘다.</a:t>
+              <a:t>•  보장 복원 지점은 FRA 가 부족해도 </a:t>
+            </a:r>
+            <a:r>
+              <a:rPr sz="1600" b="1">
+                <a:solidFill>
+                  <a:srgbClr val="222222"/>
+                </a:solidFill>
+                <a:latin typeface="맑은 고딕"/>
+              </a:rPr>
+              <a:t>지워지지 않는다.</a:t>
+            </a:r>
+            <a:r>
+              <a:rPr sz="1600" b="0">
+                <a:solidFill>
+                  <a:srgbClr val="222222"/>
+                </a:solidFill>
+                <a:latin typeface="맑은 고딕"/>
+              </a:rPr>
+              <a:t> 대신 데이터베이스가 멈춘다.</a:t>
             </a:r>
           </a:p>
           <a:p>
@@ -12930,7 +14660,25 @@
                 </a:solidFill>
                 <a:latin typeface="맑은 고딕"/>
               </a:rPr>
-              <a:t>•  CDB 를 열어도 **PDB 는 MOUNTED** 로 남는다. 조회하면 ORA-01219.</a:t>
+              <a:t>•  CDB 를 열어도 </a:t>
+            </a:r>
+            <a:r>
+              <a:rPr sz="1600" b="1">
+                <a:solidFill>
+                  <a:srgbClr val="222222"/>
+                </a:solidFill>
+                <a:latin typeface="맑은 고딕"/>
+              </a:rPr>
+              <a:t>PDB 는 MOUNTED</a:t>
+            </a:r>
+            <a:r>
+              <a:rPr sz="1600" b="0">
+                <a:solidFill>
+                  <a:srgbClr val="222222"/>
+                </a:solidFill>
+                <a:latin typeface="맑은 고딕"/>
+              </a:rPr>
+              <a:t> 로 남는다. 조회하면 ORA-01219.</a:t>
             </a:r>
           </a:p>
           <a:p>
@@ -12946,7 +14694,25 @@
                 </a:solidFill>
                 <a:latin typeface="맑은 고딕"/>
               </a:rPr>
-              <a:t>•  Snapshot 에서 MRP 기동 → **ORA-01665**. Primary·Far Sync 와 같은 이유(컨트롤 파일 유형).</a:t>
+              <a:t>•  Snapshot 에서 MRP 기동 → </a:t>
+            </a:r>
+            <a:r>
+              <a:rPr sz="1600" b="1">
+                <a:solidFill>
+                  <a:srgbClr val="222222"/>
+                </a:solidFill>
+                <a:latin typeface="맑은 고딕"/>
+              </a:rPr>
+              <a:t>ORA-01665</a:t>
+            </a:r>
+            <a:r>
+              <a:rPr sz="1600" b="0">
+                <a:solidFill>
+                  <a:srgbClr val="222222"/>
+                </a:solidFill>
+                <a:latin typeface="맑은 고딕"/>
+              </a:rPr>
+              <a:t>. Primary·Far Sync 와 같은 이유(컨트롤 파일 유형).</a:t>
             </a:r>
           </a:p>
           <a:p>
@@ -12962,7 +14728,25 @@
                 </a:solidFill>
                 <a:latin typeface="맑은 고딕"/>
               </a:rPr>
-              <a:t>•  적용은 멈추고 **수신은 계속**한다. transport lag 0 / apply lag 증가.</a:t>
+              <a:t>•  적용은 멈추고 </a:t>
+            </a:r>
+            <a:r>
+              <a:rPr sz="1600" b="1">
+                <a:solidFill>
+                  <a:srgbClr val="222222"/>
+                </a:solidFill>
+                <a:latin typeface="맑은 고딕"/>
+              </a:rPr>
+              <a:t>수신은 계속</a:t>
+            </a:r>
+            <a:r>
+              <a:rPr sz="1600" b="0">
+                <a:solidFill>
+                  <a:srgbClr val="222222"/>
+                </a:solidFill>
+                <a:latin typeface="맑은 고딕"/>
+              </a:rPr>
+              <a:t>한다. transport lag 0 / apply lag 증가.</a:t>
             </a:r>
           </a:p>
           <a:p>
@@ -12978,7 +14762,44 @@
                 </a:solidFill>
                 <a:latin typeface="맑은 고딕"/>
               </a:rPr>
-              <a:t>•  FRA 에 **FLASHBACK LOG** 유형이 생긴다(1,536 → 1,941MB). 감시는 `STORAGE_SIZE` 가 아니라 이것으로.</a:t>
+              <a:t>•  FRA 에 </a:t>
+            </a:r>
+            <a:r>
+              <a:rPr sz="1600" b="1">
+                <a:solidFill>
+                  <a:srgbClr val="222222"/>
+                </a:solidFill>
+                <a:latin typeface="맑은 고딕"/>
+              </a:rPr>
+              <a:t>FLASHBACK LOG</a:t>
+            </a:r>
+            <a:r>
+              <a:rPr sz="1600" b="0">
+                <a:solidFill>
+                  <a:srgbClr val="222222"/>
+                </a:solidFill>
+                <a:latin typeface="맑은 고딕"/>
+              </a:rPr>
+              <a:t> 유형이 생긴다(1,536 → 1,941MB). 감시는 </a:t>
+            </a:r>
+            <a:r>
+              <a:rPr sz="1600" b="0">
+                <a:solidFill>
+                  <a:srgbClr val="222222"/>
+                </a:solidFill>
+                <a:latin typeface="Consolas"/>
+                <a:cs typeface="Consolas"/>
+              </a:rPr>
+              <a:t>STORAGE_SIZE</a:t>
+            </a:r>
+            <a:r>
+              <a:rPr sz="1600" b="0">
+                <a:solidFill>
+                  <a:srgbClr val="222222"/>
+                </a:solidFill>
+                <a:latin typeface="맑은 고딕"/>
+              </a:rPr>
+              <a:t> 가 아니라 이것으로.</a:t>
             </a:r>
           </a:p>
           <a:p>
@@ -12994,7 +14815,61 @@
                 </a:solidFill>
                 <a:latin typeface="맑은 고딕"/>
               </a:rPr>
-              <a:t>•  복귀는 **MOUNT 에서**. 이후 **열고 나서 MRP** — 반대면 **ORA-10456**.</a:t>
+              <a:t>•  복귀는 </a:t>
+            </a:r>
+            <a:r>
+              <a:rPr sz="1600" b="1">
+                <a:solidFill>
+                  <a:srgbClr val="222222"/>
+                </a:solidFill>
+                <a:latin typeface="맑은 고딕"/>
+              </a:rPr>
+              <a:t>MOUNT 에서</a:t>
+            </a:r>
+            <a:r>
+              <a:rPr sz="1600" b="0">
+                <a:solidFill>
+                  <a:srgbClr val="222222"/>
+                </a:solidFill>
+                <a:latin typeface="맑은 고딕"/>
+              </a:rPr>
+              <a:t>. 이후 </a:t>
+            </a:r>
+            <a:r>
+              <a:rPr sz="1600" b="1">
+                <a:solidFill>
+                  <a:srgbClr val="222222"/>
+                </a:solidFill>
+                <a:latin typeface="맑은 고딕"/>
+              </a:rPr>
+              <a:t>열고 나서 MRP</a:t>
+            </a:r>
+            <a:r>
+              <a:rPr sz="1600" b="0">
+                <a:solidFill>
+                  <a:srgbClr val="222222"/>
+                </a:solidFill>
+                <a:latin typeface="맑은 고딕"/>
+              </a:rPr>
+              <a:t> — 반대면 </a:t>
+            </a:r>
+            <a:r>
+              <a:rPr sz="1600" b="1">
+                <a:solidFill>
+                  <a:srgbClr val="222222"/>
+                </a:solidFill>
+                <a:latin typeface="맑은 고딕"/>
+              </a:rPr>
+              <a:t>ORA-10456</a:t>
+            </a:r>
+            <a:r>
+              <a:rPr sz="1600" b="0">
+                <a:solidFill>
+                  <a:srgbClr val="222222"/>
+                </a:solidFill>
+                <a:latin typeface="맑은 고딕"/>
+              </a:rPr>
+              <a:t>.</a:t>
             </a:r>
           </a:p>
           <a:p>
@@ -13010,7 +14885,25 @@
                 </a:solidFill>
                 <a:latin typeface="맑은 고딕"/>
               </a:rPr>
-              <a:t>•  검증 — 쓴 테이블은 **ORA-00942**, 고친 행은 복귀, 밀린 리두는 적용, FRA 400MB 회수.</a:t>
+              <a:t>•  검증 — 쓴 테이블은 </a:t>
+            </a:r>
+            <a:r>
+              <a:rPr sz="1600" b="1">
+                <a:solidFill>
+                  <a:srgbClr val="222222"/>
+                </a:solidFill>
+                <a:latin typeface="맑은 고딕"/>
+              </a:rPr>
+              <a:t>ORA-00942</a:t>
+            </a:r>
+            <a:r>
+              <a:rPr sz="1600" b="0">
+                <a:solidFill>
+                  <a:srgbClr val="222222"/>
+                </a:solidFill>
+                <a:latin typeface="맑은 고딕"/>
+              </a:rPr>
+              <a:t>, 고친 행은 복귀, 밀린 리두는 적용, FRA 400MB 회수.</a:t>
             </a:r>
           </a:p>
         </p:txBody>
@@ -13955,7 +15848,70 @@
                 </a:solidFill>
                 <a:latin typeface="맑은 고딕"/>
               </a:rPr>
-              <a:t>•  **Snapshot Standby** — **명령 한 줄**, **기존 Standby 재사용**, **전환 직전까지**</a:t>
+              <a:t>•  </a:t>
+            </a:r>
+            <a:r>
+              <a:rPr sz="1700" b="1">
+                <a:solidFill>
+                  <a:srgbClr val="222222"/>
+                </a:solidFill>
+                <a:latin typeface="맑은 고딕"/>
+              </a:rPr>
+              <a:t>Snapshot Standby</a:t>
+            </a:r>
+            <a:r>
+              <a:rPr sz="1700" b="0">
+                <a:solidFill>
+                  <a:srgbClr val="222222"/>
+                </a:solidFill>
+                <a:latin typeface="맑은 고딕"/>
+              </a:rPr>
+              <a:t> — </a:t>
+            </a:r>
+            <a:r>
+              <a:rPr sz="1700" b="1">
+                <a:solidFill>
+                  <a:srgbClr val="222222"/>
+                </a:solidFill>
+                <a:latin typeface="맑은 고딕"/>
+              </a:rPr>
+              <a:t>명령 한 줄</a:t>
+            </a:r>
+            <a:r>
+              <a:rPr sz="1700" b="0">
+                <a:solidFill>
+                  <a:srgbClr val="222222"/>
+                </a:solidFill>
+                <a:latin typeface="맑은 고딕"/>
+              </a:rPr>
+              <a:t>, </a:t>
+            </a:r>
+            <a:r>
+              <a:rPr sz="1700" b="1">
+                <a:solidFill>
+                  <a:srgbClr val="222222"/>
+                </a:solidFill>
+                <a:latin typeface="맑은 고딕"/>
+              </a:rPr>
+              <a:t>기존 Standby 재사용</a:t>
+            </a:r>
+            <a:r>
+              <a:rPr sz="1700" b="0">
+                <a:solidFill>
+                  <a:srgbClr val="222222"/>
+                </a:solidFill>
+                <a:latin typeface="맑은 고딕"/>
+              </a:rPr>
+              <a:t>, </a:t>
+            </a:r>
+            <a:r>
+              <a:rPr sz="1700" b="1">
+                <a:solidFill>
+                  <a:srgbClr val="222222"/>
+                </a:solidFill>
+                <a:latin typeface="맑은 고딕"/>
+              </a:rPr>
+              <a:t>전환 직전까지</a:t>
             </a:r>
           </a:p>
           <a:p>
@@ -13971,7 +15927,16 @@
                 </a:solidFill>
                 <a:latin typeface="맑은 고딕"/>
               </a:rPr>
-              <a:t>•  ADG (Physical Standby) — 실시간이지만 **조회만**</a:t>
+              <a:t>•  ADG (Physical Standby) — 실시간이지만 </a:t>
+            </a:r>
+            <a:r>
+              <a:rPr sz="1700" b="1">
+                <a:solidFill>
+                  <a:srgbClr val="222222"/>
+                </a:solidFill>
+                <a:latin typeface="맑은 고딕"/>
+              </a:rPr>
+              <a:t>조회만</a:t>
             </a:r>
           </a:p>
         </p:txBody>
@@ -14150,7 +16115,25 @@
                 </a:solidFill>
                 <a:latin typeface="맑은 고딕"/>
               </a:rPr>
-              <a:t>•  **① 재해 복구 능력이 잠시 사라진다** — 적용이 멈춘다</a:t>
+              <a:t>•  </a:t>
+            </a:r>
+            <a:r>
+              <a:rPr sz="1700" b="1">
+                <a:solidFill>
+                  <a:srgbClr val="222222"/>
+                </a:solidFill>
+                <a:latin typeface="맑은 고딕"/>
+              </a:rPr>
+              <a:t>① 재해 복구 능력이 잠시 사라진다</a:t>
+            </a:r>
+            <a:r>
+              <a:rPr sz="1700" b="0">
+                <a:solidFill>
+                  <a:srgbClr val="222222"/>
+                </a:solidFill>
+                <a:latin typeface="맑은 고딕"/>
+              </a:rPr>
+              <a:t> — 적용이 멈춘다</a:t>
             </a:r>
           </a:p>
           <a:p>
@@ -14166,7 +16149,25 @@
                 </a:solidFill>
                 <a:latin typeface="맑은 고딕"/>
               </a:rPr>
-              <a:t>•  **② FRA 를 쓴다** — 플래시백 로그. 실습에서 405MB</a:t>
+              <a:t>•  </a:t>
+            </a:r>
+            <a:r>
+              <a:rPr sz="1700" b="1">
+                <a:solidFill>
+                  <a:srgbClr val="222222"/>
+                </a:solidFill>
+                <a:latin typeface="맑은 고딕"/>
+              </a:rPr>
+              <a:t>② FRA 를 쓴다</a:t>
+            </a:r>
+            <a:r>
+              <a:rPr sz="1700" b="0">
+                <a:solidFill>
+                  <a:srgbClr val="222222"/>
+                </a:solidFill>
+                <a:latin typeface="맑은 고딕"/>
+              </a:rPr>
+              <a:t> — 플래시백 로그. 실습에서 405MB</a:t>
             </a:r>
           </a:p>
           <a:p>
@@ -14182,7 +16183,25 @@
                 </a:solidFill>
                 <a:latin typeface="맑은 고딕"/>
               </a:rPr>
-              <a:t>•  **③ 되돌리면 전부 사라진다** — 남길 것은 미리 빼낸다</a:t>
+              <a:t>•  </a:t>
+            </a:r>
+            <a:r>
+              <a:rPr sz="1700" b="1">
+                <a:solidFill>
+                  <a:srgbClr val="222222"/>
+                </a:solidFill>
+                <a:latin typeface="맑은 고딕"/>
+              </a:rPr>
+              <a:t>③ 되돌리면 전부 사라진다</a:t>
+            </a:r>
+            <a:r>
+              <a:rPr sz="1700" b="0">
+                <a:solidFill>
+                  <a:srgbClr val="222222"/>
+                </a:solidFill>
+                <a:latin typeface="맑은 고딕"/>
+              </a:rPr>
+              <a:t> — 남길 것은 미리 빼낸다</a:t>
             </a:r>
           </a:p>
           <a:p>
@@ -14198,7 +16217,25 @@
                 </a:solidFill>
                 <a:latin typeface="맑은 고딕"/>
               </a:rPr>
-              <a:t>•  라이선스 — ADG 옵션은 **필요 없다**. EE 의 Data Guard 범위</a:t>
+              <a:t>•  라이선스 — ADG 옵션은 </a:t>
+            </a:r>
+            <a:r>
+              <a:rPr sz="1700" b="1">
+                <a:solidFill>
+                  <a:srgbClr val="222222"/>
+                </a:solidFill>
+                <a:latin typeface="맑은 고딕"/>
+              </a:rPr>
+              <a:t>필요 없다</a:t>
+            </a:r>
+            <a:r>
+              <a:rPr sz="1700" b="0">
+                <a:solidFill>
+                  <a:srgbClr val="222222"/>
+                </a:solidFill>
+                <a:latin typeface="맑은 고딕"/>
+              </a:rPr>
+              <a:t>. EE 의 Data Guard 범위</a:t>
             </a:r>
           </a:p>
         </p:txBody>
@@ -14648,7 +16685,16 @@
                 </a:solidFill>
                 <a:latin typeface="맑은 고딕"/>
               </a:rPr>
-              <a:t>•  boston — PHYSICAL STANDBY / **READ ONLY WITH APPLY**</a:t>
+              <a:t>•  boston — PHYSICAL STANDBY / </a:t>
+            </a:r>
+            <a:r>
+              <a:rPr sz="1700" b="1">
+                <a:solidFill>
+                  <a:srgbClr val="222222"/>
+                </a:solidFill>
+                <a:latin typeface="맑은 고딕"/>
+              </a:rPr>
+              <a:t>READ ONLY WITH APPLY</a:t>
             </a:r>
           </a:p>
           <a:p>
@@ -14664,7 +16710,26 @@
                 </a:solidFill>
                 <a:latin typeface="맑은 고딕"/>
               </a:rPr>
-              <a:t>•  `RECOVERY_MODE` — MANAGED REAL TIME APPLY</a:t>
+              <a:t>•  </a:t>
+            </a:r>
+            <a:r>
+              <a:rPr sz="1700" b="0">
+                <a:solidFill>
+                  <a:srgbClr val="222222"/>
+                </a:solidFill>
+                <a:latin typeface="Consolas"/>
+                <a:cs typeface="Consolas"/>
+              </a:rPr>
+              <a:t>RECOVERY_MODE</a:t>
+            </a:r>
+            <a:r>
+              <a:rPr sz="1700" b="0">
+                <a:solidFill>
+                  <a:srgbClr val="222222"/>
+                </a:solidFill>
+                <a:latin typeface="맑은 고딕"/>
+              </a:rPr>
+              <a:t> — MANAGED REAL TIME APPLY</a:t>
             </a:r>
           </a:p>
           <a:p>
@@ -14696,7 +16761,25 @@
                 </a:solidFill>
                 <a:latin typeface="맑은 고딕"/>
               </a:rPr>
-              <a:t>•  Far Sync 는 내려가 있다. 이 장은 **2노드만** 쓴다</a:t>
+              <a:t>•  Far Sync 는 내려가 있다. 이 장은 </a:t>
+            </a:r>
+            <a:r>
+              <a:rPr sz="1700" b="1">
+                <a:solidFill>
+                  <a:srgbClr val="222222"/>
+                </a:solidFill>
+                <a:latin typeface="맑은 고딕"/>
+              </a:rPr>
+              <a:t>2노드만</a:t>
+            </a:r>
+            <a:r>
+              <a:rPr sz="1700" b="0">
+                <a:solidFill>
+                  <a:srgbClr val="222222"/>
+                </a:solidFill>
+                <a:latin typeface="맑은 고딕"/>
+              </a:rPr>
+              <a:t> 쓴다</a:t>
             </a:r>
           </a:p>
         </p:txBody>

--- a/ADG/11장/11장_SnapshotStandby.pptx
+++ b/ADG/11장/11장_SnapshotStandby.pptx
@@ -44,6 +44,16 @@
     <p:sldId id="292" r:id="rId44"/>
     <p:sldId id="293" r:id="rId45"/>
     <p:sldId id="294" r:id="rId46"/>
+    <p:sldId id="295" r:id="rId47"/>
+    <p:sldId id="296" r:id="rId48"/>
+    <p:sldId id="297" r:id="rId49"/>
+    <p:sldId id="298" r:id="rId50"/>
+    <p:sldId id="299" r:id="rId51"/>
+    <p:sldId id="300" r:id="rId52"/>
+    <p:sldId id="301" r:id="rId53"/>
+    <p:sldId id="302" r:id="rId54"/>
+    <p:sldId id="303" r:id="rId55"/>
+    <p:sldId id="304" r:id="rId56"/>
   </p:sldIdLst>
   <p:sldSz cx="12191695" cy="6858000" type="screen4x3"/>
   <p:notesSz cx="6858000" cy="9144000"/>
@@ -540,7 +550,7 @@
           <a:lstStyle/>
           <a:p>
             <a:r>
-              <a:t>9장의 Active Data Guard 는 강력하지만 읽기 전용이다. 쓰기를 시도하면 ORA-16000 이 난다. 그런데 시험해야 할 것들 중에는 쓰기를 요구하는 것이 많다. 이 목록의 공통점은 운영과 같은 크기·분포의 데이터에서 해야 의미가 있다는 것이다. 개발 환경의 작은 데이터로는 실행 계획이 다르게 나오고 소요 시간도 참고가 되지 않는다. 반대로 조회만으로 되는 시험이라면 9장의 ADG 로 충분하다. 굳이 전환할 이유가 없다.</a:t>
+              <a:t>검증 DB에서 1초 걸리던 배치가 운영에서 한 시간 넘게 도는 일은 생각보다 자주 일어납니다. 데이터가 열 배 많고 특정 값에 몰려 있으면 옵티마이저가 전혀 다른 계획을 고르기 때문입니다. 운영 크기의 복제본을 따로 만들면 해결되지만 준비와 정리에 시간이 듭니다. 물리 Standby는 이미 같은 데이터를 갖고 대기 중이니 그것을 잠시 빌려 쓰자는 발상입니다. 다만 Standby 서버가 Primary보다 작다면 절대 시간보다는 변경 전후의 상대 비교로 읽는 편이 맞습니다.</a:t>
             </a:r>
           </a:p>
         </p:txBody>
@@ -610,7 +620,7 @@
           <a:lstStyle/>
           <a:p>
             <a:r>
-              <a:t>이 실수가 반복해서 생기는 이유가 있다. ALTER DATABASE OPEN 이 성공하고 V$DATABASE.OPEN_MODE 도 READ WRITE 이므로 다 끝났다고 생각하게 된다. V$PDBS 를 따로 보지 않으면 알 수 없다. 게다가 오류는 애플리케이션 쪽에서 먼저 나타난다. DBA 는 CDB 에서 확인하고 정상이라고 판단했는데 사용자는 PDB 에 접속하므로 오류를 본다. 여는 절차의 마지막에 PDB 열기를 반드시 넣는다.</a:t>
+              <a:t>같은 Standby를 몇 번이든 다시 전환할 수 있습니다. 주의할 것은 출발점입니다. 되돌린 뒤 적용이 다 끝나기 전에 다시 전환하면 그때까지 적용된 SCN이 새 출발점이 됩니다. 시험마다 기준 데이터를 맞춰야 한다면 apply lag가 충분히 줄었는지 보고 전환해야 합니다. 같은 데이터로 같은 시험을 여러 번 돌릴 목적이라면 매번 되돌렸다 전환하기보다 Snapshot 안에서 직접 복원 지점을 만들어 그리로 되감는 편이 밀린 리두 적용 시간을 아낄 수 있습니다.</a:t>
             </a:r>
           </a:p>
         </p:txBody>
@@ -680,7 +690,7 @@
           <a:lstStyle/>
           <a:p>
             <a:r>
-              <a:t>여기서 두 데이터베이스가 갈라지기 시작한다. Primary 쪽 1번 행은 여전히 before-snapshot 이고 Snapshot 쪽은 modified-on-snapshot 이다. 이 차이가 실습 07 의 검증 근거가 된다. 되돌린 뒤 before-snapshot 으로 복귀하면 되돌리기가 동작했다는 뜻이다. 시험을 설계할 때도 이런 비교 기준을 미리 심어 두면 좋다. 뷰 조회만으로는 놓치는 문제가 있으므로 작은 쓰기 하나로 확인하는 것이 확실하다.</a:t>
+              <a:t>명령을 내리기 전에 이 네 값을 보는 습관을 들이면 이 장에서 다루는 오류 대부분을 피할 수 있습니다. CONTROLFILE_TYPE의 CURRENT 값은 특히 눈여겨볼 만한데, Snapshot Standby가 Primary처럼 읽기 쓰기로 열리는 이유와 MRP를 띄울 수 없는 이유를 이 값 하나가 함께 설명합니다. 그래도 역할은 SNAPSHOT STANDBY라서 Data Guard는 이 데이터베이스를 Primary로 보지 않고, Primary의 전송 대상 목록에도 그대로 남겨 둡니다.</a:t>
             </a:r>
           </a:p>
         </p:txBody>
@@ -750,7 +760,7 @@
           <a:lstStyle/>
           <a:p>
             <a:r>
-              <a:t>MOUNTED 에서 0 이 나오는 것은 알아 둘 만한 값이다. 복원 지점 SCN 과 비교하려고 조회했다가 당황하기 쉽다. V$DATABASE.CURRENT_SCN 은 열려 있을 때만 의미 있는 값을 준다. 복원 지점의 SCN 은 전환 시점에 고정되어 움직이지 않고 CURRENT_SCN 만 앞으로 나아간다. 되돌리기는 이 구간을 되감는 작업이다. 이 차이를 기록해 두면 되돌리기가 얼마나 걸릴지 가늠하는 데 도움이 된다.</a:t>
+              <a:t>공식 교재가 꼽는 조건은 세 가지로 정리됩니다. FRA가 있어야 하고, 적용이 멈춰 있어야 하고, MOUNT 상태여야 합니다. Active Data Guard로 열려 있던 Standby라면 적용을 멈춘 뒤 한 번 내렸다 MOUNT로 올려야 합니다. Flashback을 미리 켤 필요는 없습니다. Primary 쪽은 전송 목적지, 보호 모드, Broker 구성 모두 그대로 두는데, 최대 보호 모드라면 뒤에서 볼 유일한 Standby 제약부터 확인해야 합니다.</a:t>
             </a:r>
           </a:p>
         </p:txBody>
@@ -820,7 +830,7 @@
           <a:lstStyle/>
           <a:p>
             <a:r>
-              <a:t>오류 메시지가 데이터 파일을 언급하지 않고 컨트롤 파일을 말한다는 점이 힌트다. 어떤 데이터베이스에서 MRP 가 뜰지 알고 싶으면 역할을 볼 것이 아니라 CONTROLFILE_TYPE 을 보면 된다. 이 구별이 실무에서 유용하다. STATUS 는 여전히 VALID 로 남는다는 점도 함께 본다. 목적지 자체는 정상이며 두 열이 다른 질문에 답한다. 같은 오류를 세 장에 걸쳐 만났다는 것은 그만큼 근본적인 규칙이라는 뜻이다.</a:t>
+              <a:t>공간 계산은 두 덩어리로 나눠서 합니다. 시험에서 대형 테이블 전체를 UPDATE하거나 인덱스를 재생성한다면 그 세그먼트 크기만큼 Flashback 로그가 쌓입니다. 반대로 행 몇 개만 고치는 시험은 거의 늘지 않습니다. 아카이브 로그 쪽은 시험 내용과 상관없이 Primary가 만드는 리두가 고스란히 쌓입니다. 하루 리두량과 최대 전환 일수를 곱해 보면 시험 기간을 왜 짧게 잡아야 하는지 숫자로 바로 보입니다.</a:t>
             </a:r>
           </a:p>
         </p:txBody>
@@ -890,7 +900,7 @@
           <a:lstStyle/>
           <a:p>
             <a:r>
-              <a:t>7장에서 두 값을 구별해 배운 것이 여기서 쓰인다. 조합으로 원인을 좁힐 수 있다. transport 0 에 apply 증가면 적용이 멈춘 것이고, 둘 다 증가면 전송이 끊긴 것이다. 후자라면 7장의 진단 절차로 간다. Primary 가 영향받지 않는다는 점도 중요하다. 운영 데이터베이스를 건드리지 않고 시험할 수 있는 이유가 여기 있다. 감시 도구에 경보를 걸어 두었다면 apply lag 경보가 울릴 것이다. 전환 기간에는 그 경보를 잠시 눌러 둔다.</a:t>
+              <a:t>Snapshot Standby의 영향이 Primary까지 번지는 대표 경로가 아카이브 로그 삭제 정책입니다. Primary에 APPLIED ON ALL STANDBY를 걸어 두었다면 Snapshot Standby가 적용하지 않은 로그는 Primary에서도 지워지지 않습니다. 그렇다고 시험 기간에만 정책을 느슨하게 바꾸면 적용되지 않은 로그가 지워져 되돌린 뒤 갭이 생기고, Primary에도 없으면 Standby를 다시 맞춰야 합니다. 정책은 그대로 두고 공간과 기간으로 관리하는 것이 맞습니다.</a:t>
             </a:r>
           </a:p>
         </p:txBody>
@@ -960,7 +970,7 @@
           <a:lstStyle/>
           <a:p>
             <a:r>
-              <a:t>평소에는 이 위험이 작다. Standby 가 실시간으로 적용하므로 지워도 되는 아카이브만 남는다. 전환 중에만 생기는 위험이다. 며칠씩 전환해 두면 정리 정책에 걸릴 수 있다. 복귀 후 apply lag 이 0 으로 수렴하는지 확인하는 것도 이 때문이다. 줄지 않는다면 V$ARCHIVE_GAP 을 조회해 갭이 생겼는지 본다. 전환을 시작할 때 종료 시각을 달력에 적어 두는 것이 가장 단순하고 효과적인 대책이다.</a:t>
+              <a:t>FRA가 차도 오라클은 보장 복원 지점에 묶인 Flashback 로그를 지우지 않습니다. 시험 쪽 쓰기가 먼저 멈추고, 더 나쁜 경우 RFS가 받은 리두를 아카이브하지 못해 Primary의 전송 목적지에 오류가 뜹니다. 시험용으로 돌린 Standby 하나가 재해 대비용 리두 보관을 막는 셈입니다. 급하다고 복원 지점을 지우면 공간은 생기지만 그 Standby는 물리 Standby로 돌아갈 방법을 잃고 새로 만들어야 합니다.</a:t>
             </a:r>
           </a:p>
         </p:txBody>
@@ -1030,7 +1040,7 @@
           <a:lstStyle/>
           <a:p>
             <a:r>
-              <a:t>플래시백 로그는 바뀐 블록의 이전 이미지를 통째로 남긴다. 한 행을 고쳐도 그 행이 속한 블록 전체가 대상이다. 그래서 흩어진 소량 갱신이 집중된 대량 갱신보다 오히려 비쌀 수 있고 예측이 어렵다. 감시가 가장 현실적인 대응이다. 주의할 것은 V$RESTORE_POINT 의 STORAGE_SIZE 로 감시하면 안 된다는 점이다. 다음 슬라이드에서 다룬다. 시험 스크립트를 미리 읽어 어느 테이블을 얼마나 건드리는지 가늠해 두면 예측이 조금 쉬워진다.</a:t>
+              <a:t>전환 전에는 V$RECOVERY_AREA_USAGE에서 FLASHBACK LOG 행이 0으로 나오다가 시험을 시작하면 값이 생깁니다. STORAGE_SIZE는 전환 직후에도 0이 아닌 값이 보이는데, Flashback 로그 파일을 처음 만들 때 미리 할당하는 크기 때문입니다. 감시 기준은 개별 값보다 FRA 전체 사용률로 잡는 편이 단순합니다. 오라클이 85%와 97%에서 남기는 경고를 감시 시스템에 연결해 두면 Snapshot 전용 감시를 따로 만들 필요가 없습니다.</a:t>
             </a:r>
           </a:p>
         </p:txBody>
@@ -1100,7 +1110,7 @@
           <a:lstStyle/>
           <a:p>
             <a:r>
-              <a:t>예상과 다른 실측이었다. 쓰기 전 200MB, 대량 쓰기 후에도 200MB 였다. 미리 잡아 둔 한 덩어리 안에서 감당됐다는 뜻이다. 이 값을 감시 지표로 삼았다면 위험이 커지는 것을 놓쳤을 것이다. 전체 사용률에 여유를 두는 이유는 아카이브 로그도 계속 쌓이기 때문이다. 증가 속도가 남은 시험 시간 안에 한계에 닿을 것으로 계산되면 그때도 중단한다. 예상과 다른 실측을 만났을 때 문서를 의심하기보다 값을 기록해 두는 것이 낫다.</a:t>
+              <a:t>앞의 다섯 항목은 명령이 성공하느냐를 가르고, 마지막 항목은 전환한 뒤 위험을 가릅니다. 여섯 번째가 비어 있으면 명령은 성공해도 시험 기간 내내 재해 대비 공백이 생깁니다. 전환 직전의 apply lag도 봐야 합니다. 적용이 멈추는 순간의 데이터가 그대로 시험 데이터가 되므로, 뒤처진 채로 전환하면 어제 날짜를 기대했는데 그제 데이터로 시험하는 일이 생깁니다. 실습 1에서 이 기준값들을 기록해 둡니다.</a:t>
             </a:r>
           </a:p>
         </p:txBody>
@@ -1170,7 +1180,7 @@
           <a:lstStyle/>
           <a:p>
             <a:r>
-              <a:t>긴 시험을 한 번에 하는 것보다 나누는 편이 나은 이유가 이 숫자에 있다. 다만 되돌리기와 재전환에 재기동이 두 번 들어간다. 실습 환경에서도 몇 분이 걸린다. 시험 하나가 5분이라면 나누는 것이 오히려 손해다. 나누는 단위는 되돌리기 비용보다 커야 한다는 것이 판단 기준이다. 실습에서는 세 번 전환했고 매번 복원 지점이 새로 만들어졌다가 되돌릴 때 사라졌다. 반복해도 흔적이 남지 않는다는 점이 이 기능의 장점이다. 다만 재기동 시간은 매번 든다.</a:t>
+              <a:t>전환 명령 하나가 보장 복원 지점 생성, Flashback 로깅 활성화, 컨트롤 파일 유형 변경, 역할 변경을 모두 처리합니다. 적용을 멈추지 않고 명령을 내리면 오류 메시지에 복원 지점 이름이 찍혀 나오는데, 이것을 보면 전환 명령이 맨 먼저 복원 지점부터 만들려 했다는 것을 알 수 있습니다. 첫 단계에서 실패했으므로 아무것도 바뀌지 않은 상태이고, 적용을 멈춘 뒤 같은 명령을 다시 내리면 됩니다.</a:t>
             </a:r>
           </a:p>
         </p:txBody>
@@ -1240,7 +1250,7 @@
           <a:lstStyle/>
           <a:p>
             <a:r>
-              <a:t>되돌릴 준비를 먼저 하고 바꾼다. 오라클이 위험한 작업을 설계할 때 쓰는 일반적인 원칙이기도 하다. 만약 역할부터 바꾼 뒤 복원 지점 생성이 실패했다면 되돌릴 수 없는 어중간한 상태가 만들어졌을 것이다. 복귀 명령은 이 순서를 거꾸로 밟으며, 되감기가 첫 단계이므로 실패하면 역할이 그대로 남는다. 양쪽 모두 안전한 순서다. 이런 식으로 오류 메시지와 관찰값에서 내부 동작을 역으로 추론하는 연습은 다른 기능에도 그대로 쓸 수 있다.</a:t>
+              <a:t>실습에서 가장 자주 막히는 곳이 PDB입니다. CDB를 열고 바로 PDB 안의 테이블을 조회하면 ORA-01219가 나는데, 저장된 상태가 없으면 PDB는 따라 열리지 않기 때문입니다. 9장에서 Real-Time Query 상태의 Standby에 INSERT를 시도하면 ORA-16000이 났습니다. 같은 boston에서 같은 문장이 이번에는 정상 처리되는 것을 비교해 보면 전환이 무엇을 바꿨는지 체감할 수 있습니다. 열린 뒤의 SCN은 Primary와 아무 관계없이 앞으로 갑니다.</a:t>
             </a:r>
           </a:p>
         </p:txBody>
@@ -1310,7 +1320,7 @@
           <a:lstStyle/>
           <a:p>
             <a:r>
-              <a:t>되돌리기가 쉬운 방법일수록 데이터 시점이 최신이라는 점을 함께 본다. 이 둘이 같이 가는 것이 Snapshot Standby 의 강점이다. 백업 복원은 되돌리기가 곧 다시 복원이므로 시험을 반복할수록 비용이 커진다. 반대로 적합한 시험의 폭은 좁다. 단기 검증에 맞춰져 있으며 개발팀이 몇 주씩 쓰는 환경으로는 맞지 않는다. 표를 볼 때 자기 조직의 상황을 대입해 본다. 테스트 DB 가 이미 있고 잘 쓰이고 있다면 굳이 바꿀 필요는 없다.</a:t>
+              <a:t>Database Replay는 재생 대상의 데이터가 캡처 시작 시점과 같아야 결과를 믿을 수 있습니다. 캡처를 시작하기 직전에 Standby를 Snapshot으로 바꾸어 두면 그 시점의 데이터가 고정되어 재생 준비가 끝납니다. SPA는 SQL 단위 비교라서 인덱스나 통계를 바꾼 뒤 회귀가 생기는 SQL을 골라내는 데 씁니다. 비용 이야기도 함께 나와야 하는데, Snapshot Standby 자체는 Data Guard 기본 기능이고 비용은 RAT 옵션 쪽에서 생깁니다.</a:t>
             </a:r>
           </a:p>
         </p:txBody>
@@ -1380,7 +1390,7 @@
           <a:lstStyle/>
           <a:p>
             <a:r>
-              <a:t>요구가 다른 이유는 하는 일이 다르기 때문이다. 전환은 복원 지점을 만들고 표시를 바꾸는 일이지만 복귀는 데이터 파일을 복원 지점 시점으로 되감는 일이다. 되감으려면 아무도 그 파일을 쓰고 있지 않아야 한다. 복원 지점은 지우라고 한 적이 없는데 없어진다. 임무를 마쳤으므로 오라클이 정리한 것이다. SHUTDOWN IMMEDIATE 가 Database closed. 부터 시작하면 열려 있었다는 뜻이고, ORA-01109 가 나오면 마운트 상태였다는 뜻이다.</a:t>
+              <a:t>Snapshot Standby가 열리면 평범한 읽기 쓰기 데이터베이스처럼 유지 작업과 스케줄러 잡이 돌기 시작합니다. 야간에 통계가 자동으로 다시 수집되면 시험 중간에 실행 계획이 바뀌어 비교 결과가 흐려집니다. 더 위험한 것은 운영 데이터를 외부 시스템으로 보내는 잡입니다. 시험 DB에서 그런 잡이 돌면 운영과 똑같은 데이터가 한 번 더 나갑니다. 서비스도 역할 기준으로 정의해 두어야 애플리케이션이 시험 DB에 붙는 사고를 막을 수 있습니다.</a:t>
             </a:r>
           </a:p>
         </p:txBody>
@@ -1450,7 +1460,7 @@
           <a:lstStyle/>
           <a:p>
             <a:r>
-              <a:t>⑤와 ⑥의 순서가 이 절차의 함정이다. 반대로 하면 ORA-10456 이다. ADG 를 쓰지 않는다면 ⑤를 건너뛰고 MOUNT 에서 ⑥만 해도 되며, 그때는 조회가 안 될 뿐 복제는 정상이다. ①을 절차의 첫 단계로 넣어 둔 이유는 잊기 쉽기 때문이다. 되돌린 뒤에 아차 하면 이미 늦었다. 절차를 스크립트로 만들어 두면 좋다. 다만 각 단계 뒤에 확인 조회를 넣어 실패를 조용히 지나치지 않게 한다.</a:t>
+              <a:t>되돌리기는 반드시 MOUNT 상태에서 합니다. 열린 채로 명령을 내리면 ORA-01126이 납니다. ORA-16433은 조금 의외인데, 전환만 해 놓고 한 번도 읽기 쓰기로 열지 않은 채 되돌리려 할 때 나옵니다. 시험 계획이 취소됐더라도 한 번 열었다 닫은 뒤 되돌려야 합니다. 명령이 성공하면 Flashback과 역할 복귀가 끝나고 복원 지점도 사라집니다. 컨트롤 파일 유형이 바뀌었으니 한 번 재기동해 깨끗한 상태에서 다음 단계로 가는 것이 일반적입니다.</a:t>
             </a:r>
           </a:p>
         </p:txBody>
@@ -1520,7 +1530,7 @@
           <a:lstStyle/>
           <a:p>
             <a:r>
-              <a:t>이 실수가 흔한 이유는 MOUNT 상태에서도 MRP 가 잘 뜨기 때문이다. 오류 없이 Database altered. 가 나오므로 잘못됐다는 신호가 없다. 문제는 그다음에 드러난다. 게다가 ADG 를 쓰지 않는 환경에서는 이 순서가 아무 문제가 없다. MOUNT 에서 MRP 만 돌려도 복제는 정상이고 조회가 안 될 뿐이다. 그래서 ADG 환경으로 옮겨 왔을 때 예전 습관대로 하다가 만난다.</a:t>
+              <a:t>MOUNT 상태에서 적용을 먼저 기동해도 오류 없이 성공하기 때문에 순서를 틀리기 쉽습니다. 문제는 그다음 OPEN에서 ORA-10456이 난다는 것입니다. 이때는 적용을 CANCEL하고, 읽기 전용으로 연 뒤, 적용을 다시 기동하면 READ ONLY WITH APPLY로 돌아옵니다. 9장에서 Real-Time Query를 처음 켤 때와 같은 순서입니다. Active Data Guard를 쓰지 않는 Standby라면 MOUNT에서 적용만 기동하면 물리 Standby 역할로는 충분합니다.</a:t>
             </a:r>
           </a:p>
         </p:txBody>
@@ -1590,7 +1600,7 @@
           <a:lstStyle/>
           <a:p>
             <a:r>
-              <a:t>이 장에서 PDB 를 세 번 열었다. 전환 후 한 번, 복귀 후 한 번, 재기동할 때마다 또 한 번이다. 컨테이너를 여닫을 때마다 반복된다. ALTER PLUGGABLE DATABASE ALL OPEN 으로 한꺼번에 열거나, SAVE STATE 를 써서 다음 기동에서 자동으로 열리게 할 수도 있다. 자동화 스크립트를 쓴다면 마지막 단계에 반드시 넣는다. 명령을 외우기보다 지금 어떤 역할인지 먼저 확인하면 어느 쪽을 써야 할지 저절로 나온다.</a:t>
+              <a:t>시험 기간에 확인할 것은 수신이 정상으로 이어지고 있느냐입니다. Snapshot Standby에서도 V$DATAGUARD_STATS를 조회할 수 있고, transport lag가 몇 초 이내이고 DATUM_TIME이 최근이면 수신은 문제가 없습니다. Primary에서는 해당 목적지 상태가 VALID인지 봅니다. 여기에 오류가 보인다면 Snapshot 쪽 FRA가 찼을 가능성이 가장 높습니다. 되돌린 뒤에는 V$ARCHIVED_LOG의 APPLIED가 차례로 YES로 바뀌는 모습으로 따라잡기를 확인합니다.</a:t>
             </a:r>
           </a:p>
         </p:txBody>
@@ -1660,7 +1670,7 @@
           <a:lstStyle/>
           <a:p>
             <a:r>
-              <a:t>두 가지가 한꺼번에 일어난다는 점이 핵심이다. 되돌리기는 원래 자리로 돌아가는 것에서 끝나지 않는다. 원래 자리로 돌아간 뒤 그동안 밀린 리두를 따라잡는다. FRA 400MB 회수도 함께 본다. 반대로 말하면 되돌리기 전에는 회수되지 않는다. FRA 가 차서 곤란할 때 공간을 비울 유일한 방법이 되돌리는 것이라고 한 이유가 여기 있다. 검증 없이 복귀를 끝냈다고 판단하면 나중에 갭을 뒤늦게 발견하게 된다. 두 지연이 0 으로 수렴하는지 반드시 본다.</a:t>
+              <a:t>오류 번호가 많아 보이지만 원인은 거의 하나로 모입니다. 데이터베이스의 현재 상태와 명령이 요구하는 상태가 다른 것입니다. 명령 전에 V$DATABASE의 역할, 열린 모드, 컨트롤 파일 유형을 확인하면 대부분 피할 수 있습니다. ORA-01665는 Primary나 Far Sync에서 적용을 기동할 때도 나오는 오류입니다. 세 경우 모두 컨트롤 파일이 STANDBY 유형이 아니라는 같은 원인을 갖고 있어 묶어서 기억하기 좋습니다.</a:t>
             </a:r>
           </a:p>
         </p:txBody>
@@ -1730,7 +1740,7 @@
           <a:lstStyle/>
           <a:p>
             <a:r>
-              <a:t>조합으로 읽는 법도 정해져 있다. SNAPSHOT STANDBY 에 READ WRITE 면 시험 가능, MOUNTED 면 열어야 한다. apply lag 증가에 RFS 있고 MRP0 없으면 정상적인 Snapshot 동작이다. PHYSICAL STANDBY 에 복원 지점 0행이면 복귀 완료다. FLASHBACK LOG 비율이 계속 오르면 시험이 데이터를 많이 바꾸고 있으니 임계 감시로 넘어간다.</a:t>
+              <a:t>Broker가 관리하는 구성에서 SQL로 역할을 바꾸면 Broker가 알고 있는 상태와 실제 상태가 어긋나 경고가 생깁니다. Broker를 쓰는 곳에서는 DGMGRL의 CONVERT DATABASE를 쓰는 것이 원칙입니다. Broker는 SQL 절차에서 손으로 하던 적용 중지, 재기동, 되돌린 뒤 적용 재개를 스스로 처리합니다. 여기서는 명령 형태만 소개하고, Broker 구성 자체와 상태 조회 명령은 13장과 14장에서 다룹니다.</a:t>
             </a:r>
           </a:p>
         </p:txBody>
@@ -1800,7 +1810,7 @@
           <a:lstStyle/>
           <a:p>
             <a:r>
-              <a:t>나누는 것이 유리한 이유가 셋 있다. 쌓이는 리두가 적고, FRA 사용량이 매번 초기화되며, 각 시험이 더 최신 데이터에서 이뤄진다. 실측에서 두 번째 전환의 복원 지점 SCN 이 2252853 에서 2253716 으로 앞으로 나아갔다. 다만 되돌리기와 재전환에 재기동이 두 번 들어가므로 시험 하나가 5분이라면 나누는 것이 오히려 손해다. 판단이 애매하면 기간을 짧게 잡고 한 번 해 보는 것이 낫다. 되돌리면 흔적이 남지 않으므로 시도 비용이 낮다.</a:t>
+              <a:t>Switchover는 대상 Standby가 Primary의 마지막 리두까지 적용한 상태를 전제로 하는데, Snapshot Standby는 적용을 멈추고 자기 변경까지 갖고 있습니다. 자동 Failover도 마찬가지로 짧은 시간 안에 넘겨받아야 하므로 대상이 될 수 없습니다. 수동 Failover는 가능합니다. 되돌려서 로컬 변경을 버리고 받아 둔 리두를 모두 적용한 다음 진행합니다. Broker를 쓰면 이 과정을 Failover 명령 안에서 처리해 주지만 걸리는 시간이 줄지는 않습니다.</a:t>
             </a:r>
           </a:p>
         </p:txBody>
@@ -1870,7 +1880,147 @@
           <a:lstStyle/>
           <a:p>
             <a:r>
-              <a:t>이 한 줄이면 역할·개방 모드·컨트롤 파일 유형·플래시백 상태를 한꺼번에 볼 수 있다. 조합별 판정도 정해져 있다. SNAPSHOT STANDBY 에 MOUNTED 면 열어야 하고, READ WRITE 면 시험 가능 상태이며, PHYSICAL STANDBY 에 복원 지점 0행이면 복귀 완료다. 명령을 내리기 전에 이 한 줄을 먼저 실행하는 습관을 들이면 이 장의 오류 대부분을 피할 수 있다.</a:t>
+              <a:t>최대 보호 모드는 동기 Standby가 리두를 받아야 Primary가 커밋을 끝내는 모드입니다. 그 역할을 맡을 Standby가 시험용으로 바뀌는 것을 막기 위해 유일한 Standby의 전환을 금지합니다. 전환한 뒤 다른 물리 Standby를 제거하려는 작업도 같은 이유로 거부됩니다. 다른 두 모드에는 제약이 없고, SYNC 대상이었다면 수신 확인도 그대로 보냅니다. 보호 모드가 약속하는 것은 데이터 손실 범위이고, 복구에 걸리는 시간은 별개의 문제로 따져야 합니다.</a:t>
+            </a:r>
+          </a:p>
+        </p:txBody>
+      </p:sp>
+      <p:sp>
+        <p:nvSpPr>
+          <p:cNvPr id="4" name="Slide Number Placeholder 3"/>
+          <p:cNvSpPr>
+            <a:spLocks noGrp="1"/>
+          </p:cNvSpPr>
+          <p:nvPr>
+            <p:ph type="sldNum" idx="5" sz="quarter"/>
+          </p:nvPr>
+        </p:nvSpPr>
+        <p:spPr/>
+      </p:sp>
+    </p:spTree>
+  </p:cSld>
+  <p:clrMapOvr>
+    <a:masterClrMapping/>
+  </p:clrMapOvr>
+</p:notes>
+</file>
+
+<file path=ppt/notesSlides/notesSlide28.xml><?xml version="1.0" encoding="utf-8"?>
+<p:notes xmlns:a="http://schemas.openxmlformats.org/drawingml/2006/main" xmlns:p="http://schemas.openxmlformats.org/presentationml/2006/main" xmlns:r="http://schemas.openxmlformats.org/officeDocument/2006/relationships">
+  <p:cSld>
+    <p:spTree>
+      <p:nvGrpSpPr>
+        <p:cNvPr id="1" name=""/>
+        <p:cNvGrpSpPr/>
+        <p:nvPr/>
+      </p:nvGrpSpPr>
+      <p:grpSpPr>
+        <a:xfrm>
+          <a:off x="0" y="0"/>
+          <a:ext cx="0" cy="0"/>
+          <a:chOff x="0" y="0"/>
+          <a:chExt cx="0" cy="0"/>
+        </a:xfrm>
+      </p:grpSpPr>
+      <p:sp>
+        <p:nvSpPr>
+          <p:cNvPr id="2" name="Slide Image Placeholder 1"/>
+          <p:cNvSpPr>
+            <a:spLocks noGrp="1"/>
+          </p:cNvSpPr>
+          <p:nvPr>
+            <p:ph type="sldImg" idx="2"/>
+          </p:nvPr>
+        </p:nvSpPr>
+        <p:spPr/>
+      </p:sp>
+      <p:sp>
+        <p:nvSpPr>
+          <p:cNvPr id="3" name="Notes Placeholder 2"/>
+          <p:cNvSpPr>
+            <a:spLocks noGrp="1"/>
+          </p:cNvSpPr>
+          <p:nvPr>
+            <p:ph type="body" idx="3" sz="quarter"/>
+          </p:nvPr>
+        </p:nvSpPr>
+        <p:spPr/>
+        <p:txBody>
+          <a:bodyPr/>
+          <a:lstStyle/>
+          <a:p>
+            <a:r>
+              <a:t>장애가 났을 때 Snapshot Standby가 Primary가 되기까지의 시간을 세 부분으로 나눠 보면 어디서 시간이 드는지 보입니다. 되감기는 대개 빠르고 역할 전환도 짧습니다. 시간을 잡아먹는 것은 밀린 리두 적용입니다. 적용이 리두 생성보다 세 배 빠르다고 가정해도 사흘 치를 따라잡는 데 하루 가까이 걸립니다. 업무가 요구하는 RTO가 분 단위라면 그 Standby는 시험 기간 동안 재해 대비 수단으로 계산하면 안 됩니다.</a:t>
+            </a:r>
+          </a:p>
+        </p:txBody>
+      </p:sp>
+      <p:sp>
+        <p:nvSpPr>
+          <p:cNvPr id="4" name="Slide Number Placeholder 3"/>
+          <p:cNvSpPr>
+            <a:spLocks noGrp="1"/>
+          </p:cNvSpPr>
+          <p:nvPr>
+            <p:ph type="sldNum" idx="5" sz="quarter"/>
+          </p:nvPr>
+        </p:nvSpPr>
+        <p:spPr/>
+      </p:sp>
+    </p:spTree>
+  </p:cSld>
+  <p:clrMapOvr>
+    <a:masterClrMapping/>
+  </p:clrMapOvr>
+</p:notes>
+</file>
+
+<file path=ppt/notesSlides/notesSlide29.xml><?xml version="1.0" encoding="utf-8"?>
+<p:notes xmlns:a="http://schemas.openxmlformats.org/drawingml/2006/main" xmlns:p="http://schemas.openxmlformats.org/presentationml/2006/main" xmlns:r="http://schemas.openxmlformats.org/officeDocument/2006/relationships">
+  <p:cSld>
+    <p:spTree>
+      <p:nvGrpSpPr>
+        <p:cNvPr id="1" name=""/>
+        <p:cNvGrpSpPr/>
+        <p:nvPr/>
+      </p:nvGrpSpPr>
+      <p:grpSpPr>
+        <a:xfrm>
+          <a:off x="0" y="0"/>
+          <a:ext cx="0" cy="0"/>
+          <a:chOff x="0" y="0"/>
+          <a:chExt cx="0" cy="0"/>
+        </a:xfrm>
+      </p:grpSpPr>
+      <p:sp>
+        <p:nvSpPr>
+          <p:cNvPr id="2" name="Slide Image Placeholder 1"/>
+          <p:cNvSpPr>
+            <a:spLocks noGrp="1"/>
+          </p:cNvSpPr>
+          <p:nvPr>
+            <p:ph type="sldImg" idx="2"/>
+          </p:nvPr>
+        </p:nvSpPr>
+        <p:spPr/>
+      </p:sp>
+      <p:sp>
+        <p:nvSpPr>
+          <p:cNvPr id="3" name="Notes Placeholder 2"/>
+          <p:cNvSpPr>
+            <a:spLocks noGrp="1"/>
+          </p:cNvSpPr>
+          <p:nvPr>
+            <p:ph type="body" idx="3" sz="quarter"/>
+          </p:nvPr>
+        </p:nvSpPr>
+        <p:spPr/>
+        <p:txBody>
+          <a:bodyPr/>
+          <a:lstStyle/>
+          <a:p>
+            <a:r>
+              <a:t>공식 교재가 Snapshot Standby의 위험으로 따로 꼽는 항목입니다. 받은 아카이브 로그는 적용하는 순간 내용이 검증되는데, 적용을 멈춰 두면 그 검증도 같이 미뤄집니다. Primary가 살아 있다면 FAL로 정상 로그를 다시 받으면 그만이지만, Primary 장애로 Failover하려는 순간 발견된다면 그 지점 이후 데이터는 잃습니다. RMAN의 VALIDATE로 받은 로그를 미리 점검할 수 있고, 가장 확실한 대책은 적용을 이어 가는 물리 Standby를 하나 더 두는 것입니다.</a:t>
             </a:r>
           </a:p>
         </p:txBody>
@@ -1940,7 +2090,427 @@
           <a:lstStyle/>
           <a:p>
             <a:r>
-              <a:t>첫 번째가 가장 무겁다. 그래서 운영에서는 Standby 를 둘 이상 두고 하나만 전환한다. Standby 가 하나뿐이라면 그 기간 동안 보호가 없다는 것을 인지하고 승인을 받아야 한다. 라이선스는 조금 미묘하다. 같은 Standby 를 평소 ADG 로 조회에 쓴다면 ADG 옵션이 필요하다. 어느 상태로 쓰느냐가 아니라 어느 기능을 쓰느냐가 기준이다. 세 가지 대가를 감수할 수 없다면 이 기능을 쓰지 않는 것이 맞다. 기능이 있다고 해서 써야 하는 것은 아니다.</a:t>
+              <a:t>물리 Standby만 가능한 이유는 되돌리는 수단이 Flashback Database이기 때문입니다. 블록 이미지를 되감아 원상 복구하려면 출발점이 Primary와 블록 단위로 같아야 하는데, SQL Apply로 데이터를 맞추는 논리 Standby는 그 전제가 없습니다. Far Sync는 데이터 파일이 없으니 애초에 대상이 아닙니다. 공식 교재의 퀴즈도 논리 Standby로 만들 수 있느냐는 물음에 거짓을 정답으로 둡니다. 라이선스 면에서는 Active Data Guard 옵션 없이도 쓸 수 있습니다.</a:t>
+            </a:r>
+          </a:p>
+        </p:txBody>
+      </p:sp>
+      <p:sp>
+        <p:nvSpPr>
+          <p:cNvPr id="4" name="Slide Number Placeholder 3"/>
+          <p:cNvSpPr>
+            <a:spLocks noGrp="1"/>
+          </p:cNvSpPr>
+          <p:nvPr>
+            <p:ph type="sldNum" idx="5" sz="quarter"/>
+          </p:nvPr>
+        </p:nvSpPr>
+        <p:spPr/>
+      </p:sp>
+    </p:spTree>
+  </p:cSld>
+  <p:clrMapOvr>
+    <a:masterClrMapping/>
+  </p:clrMapOvr>
+</p:notes>
+</file>
+
+<file path=ppt/notesSlides/notesSlide30.xml><?xml version="1.0" encoding="utf-8"?>
+<p:notes xmlns:a="http://schemas.openxmlformats.org/drawingml/2006/main" xmlns:p="http://schemas.openxmlformats.org/presentationml/2006/main" xmlns:r="http://schemas.openxmlformats.org/officeDocument/2006/relationships">
+  <p:cSld>
+    <p:spTree>
+      <p:nvGrpSpPr>
+        <p:cNvPr id="1" name=""/>
+        <p:cNvGrpSpPr/>
+        <p:nvPr/>
+      </p:nvGrpSpPr>
+      <p:grpSpPr>
+        <a:xfrm>
+          <a:off x="0" y="0"/>
+          <a:ext cx="0" cy="0"/>
+          <a:chOff x="0" y="0"/>
+          <a:chExt cx="0" cy="0"/>
+        </a:xfrm>
+      </p:grpSpPr>
+      <p:sp>
+        <p:nvSpPr>
+          <p:cNvPr id="2" name="Slide Image Placeholder 1"/>
+          <p:cNvSpPr>
+            <a:spLocks noGrp="1"/>
+          </p:cNvSpPr>
+          <p:nvPr>
+            <p:ph type="sldImg" idx="2"/>
+          </p:nvPr>
+        </p:nvSpPr>
+        <p:spPr/>
+      </p:sp>
+      <p:sp>
+        <p:nvSpPr>
+          <p:cNvPr id="3" name="Notes Placeholder 2"/>
+          <p:cNvSpPr>
+            <a:spLocks noGrp="1"/>
+          </p:cNvSpPr>
+          <p:nvPr>
+            <p:ph type="body" idx="3" sz="quarter"/>
+          </p:nvPr>
+        </p:nvSpPr>
+        <p:spPr/>
+        <p:txBody>
+          <a:bodyPr/>
+          <a:lstStyle/>
+          <a:p>
+            <a:r>
+              <a:t>되돌리기는 Flashback Database에 기대므로 Flashback이 넘어가지 못하는 작업을 시험 중에 하면 돌아갈 수 없습니다. 컨트롤 파일을 다시 만들면 그 이전 Flashback 정보가 무의미해지고, 데이터 파일 축소도 되감기로 원상 복구되지 않습니다. FRA를 정리하려고 OS에서 파일을 직접 지우는 습관도 이 기간에는 치명적입니다. 되돌리기가 실패하면 Standby를 새로 만들어야 하니, 시험 계획서에 금지 작업을 적고 권한으로 막는 편이 확실합니다.</a:t>
+            </a:r>
+          </a:p>
+        </p:txBody>
+      </p:sp>
+      <p:sp>
+        <p:nvSpPr>
+          <p:cNvPr id="4" name="Slide Number Placeholder 3"/>
+          <p:cNvSpPr>
+            <a:spLocks noGrp="1"/>
+          </p:cNvSpPr>
+          <p:nvPr>
+            <p:ph type="sldNum" idx="5" sz="quarter"/>
+          </p:nvPr>
+        </p:nvSpPr>
+        <p:spPr/>
+      </p:sp>
+    </p:spTree>
+  </p:cSld>
+  <p:clrMapOvr>
+    <a:masterClrMapping/>
+  </p:clrMapOvr>
+</p:notes>
+</file>
+
+<file path=ppt/notesSlides/notesSlide31.xml><?xml version="1.0" encoding="utf-8"?>
+<p:notes xmlns:a="http://schemas.openxmlformats.org/drawingml/2006/main" xmlns:p="http://schemas.openxmlformats.org/presentationml/2006/main" xmlns:r="http://schemas.openxmlformats.org/officeDocument/2006/relationships">
+  <p:cSld>
+    <p:spTree>
+      <p:nvGrpSpPr>
+        <p:cNvPr id="1" name=""/>
+        <p:cNvGrpSpPr/>
+        <p:nvPr/>
+      </p:nvGrpSpPr>
+      <p:grpSpPr>
+        <a:xfrm>
+          <a:off x="0" y="0"/>
+          <a:ext cx="0" cy="0"/>
+          <a:chOff x="0" y="0"/>
+          <a:chExt cx="0" cy="0"/>
+        </a:xfrm>
+      </p:grpSpPr>
+      <p:sp>
+        <p:nvSpPr>
+          <p:cNvPr id="2" name="Slide Image Placeholder 1"/>
+          <p:cNvSpPr>
+            <a:spLocks noGrp="1"/>
+          </p:cNvSpPr>
+          <p:nvPr>
+            <p:ph type="sldImg" idx="2"/>
+          </p:nvPr>
+        </p:nvSpPr>
+        <p:spPr/>
+      </p:sp>
+      <p:sp>
+        <p:nvSpPr>
+          <p:cNvPr id="3" name="Notes Placeholder 2"/>
+          <p:cNvSpPr>
+            <a:spLocks noGrp="1"/>
+          </p:cNvSpPr>
+          <p:nvPr>
+            <p:ph type="body" idx="3" sz="quarter"/>
+          </p:nvPr>
+        </p:nvSpPr>
+        <p:spPr/>
+        <p:txBody>
+          <a:bodyPr/>
+          <a:lstStyle/>
+          <a:p>
+            <a:r>
+              <a:t>세 방식을 가르는 질문은 두 가지입니다. 데이터를 바꿔야 하는가, 바꾼다면 그 결과를 남겨야 하는가입니다. Real-Time Query는 최신 데이터를 읽기만 합니다. 19c의 DML 리다이렉션으로 Standby 세션에서 DML을 낼 수는 있지만 실제 변경은 Primary에서 일어나니 시험과는 성격이 다릅니다. Logical Standby는 보고용 객체를 추가로 두고 유지할 수 있지만 SQL Apply가 지원하지 않는 유형이 있습니다. Snapshot은 무엇이든 바꿀 수 있는 대신 결과가 남지 않습니다.</a:t>
+            </a:r>
+          </a:p>
+        </p:txBody>
+      </p:sp>
+      <p:sp>
+        <p:nvSpPr>
+          <p:cNvPr id="4" name="Slide Number Placeholder 3"/>
+          <p:cNvSpPr>
+            <a:spLocks noGrp="1"/>
+          </p:cNvSpPr>
+          <p:nvPr>
+            <p:ph type="sldNum" idx="5" sz="quarter"/>
+          </p:nvPr>
+        </p:nvSpPr>
+        <p:spPr/>
+      </p:sp>
+    </p:spTree>
+  </p:cSld>
+  <p:clrMapOvr>
+    <a:masterClrMapping/>
+  </p:clrMapOvr>
+</p:notes>
+</file>
+
+<file path=ppt/notesSlides/notesSlide32.xml><?xml version="1.0" encoding="utf-8"?>
+<p:notes xmlns:a="http://schemas.openxmlformats.org/drawingml/2006/main" xmlns:p="http://schemas.openxmlformats.org/presentationml/2006/main" xmlns:r="http://schemas.openxmlformats.org/officeDocument/2006/relationships">
+  <p:cSld>
+    <p:spTree>
+      <p:nvGrpSpPr>
+        <p:cNvPr id="1" name=""/>
+        <p:cNvGrpSpPr/>
+        <p:nvPr/>
+      </p:nvGrpSpPr>
+      <p:grpSpPr>
+        <a:xfrm>
+          <a:off x="0" y="0"/>
+          <a:ext cx="0" cy="0"/>
+          <a:chOff x="0" y="0"/>
+          <a:chExt cx="0" cy="0"/>
+        </a:xfrm>
+      </p:grpSpPr>
+      <p:sp>
+        <p:nvSpPr>
+          <p:cNvPr id="2" name="Slide Image Placeholder 1"/>
+          <p:cNvSpPr>
+            <a:spLocks noGrp="1"/>
+          </p:cNvSpPr>
+          <p:nvPr>
+            <p:ph type="sldImg" idx="2"/>
+          </p:nvPr>
+        </p:nvSpPr>
+        <p:spPr/>
+      </p:sp>
+      <p:sp>
+        <p:nvSpPr>
+          <p:cNvPr id="3" name="Notes Placeholder 2"/>
+          <p:cNvSpPr>
+            <a:spLocks noGrp="1"/>
+          </p:cNvSpPr>
+          <p:nvPr>
+            <p:ph type="body" idx="3" sz="quarter"/>
+          </p:nvPr>
+        </p:nvSpPr>
+        <p:spPr/>
+        <p:txBody>
+          <a:bodyPr/>
+          <a:lstStyle/>
+          <a:p>
+            <a:r>
+              <a:t>배치 리허설, 데이터 이관 스크립트 검증, 인덱스와 통계 변경 영향도, Database Replay는 모두 바꾸고 버려도 되는 시험이라 Snapshot Standby가 맞습니다. 시험이 몇 주씩 이어지거나 상시 개발 환경이 필요하다면 Snapshot을 오래 붙잡아 두기보다 별도 복제본을 만드는 편이 FRA와 RTO 모두에 낫습니다. 같은 Standby를 평소엔 조회용, 시험 때만 Snapshot으로 쓰는 것도 가능하지만 전환과 되돌리기 때마다 재기동이 있어 조회 사용자는 두 번 끊깁니다.</a:t>
+            </a:r>
+          </a:p>
+        </p:txBody>
+      </p:sp>
+      <p:sp>
+        <p:nvSpPr>
+          <p:cNvPr id="4" name="Slide Number Placeholder 3"/>
+          <p:cNvSpPr>
+            <a:spLocks noGrp="1"/>
+          </p:cNvSpPr>
+          <p:nvPr>
+            <p:ph type="sldNum" idx="5" sz="quarter"/>
+          </p:nvPr>
+        </p:nvSpPr>
+        <p:spPr/>
+      </p:sp>
+    </p:spTree>
+  </p:cSld>
+  <p:clrMapOvr>
+    <a:masterClrMapping/>
+  </p:clrMapOvr>
+</p:notes>
+</file>
+
+<file path=ppt/notesSlides/notesSlide33.xml><?xml version="1.0" encoding="utf-8"?>
+<p:notes xmlns:a="http://schemas.openxmlformats.org/drawingml/2006/main" xmlns:p="http://schemas.openxmlformats.org/presentationml/2006/main" xmlns:r="http://schemas.openxmlformats.org/officeDocument/2006/relationships">
+  <p:cSld>
+    <p:spTree>
+      <p:nvGrpSpPr>
+        <p:cNvPr id="1" name=""/>
+        <p:cNvGrpSpPr/>
+        <p:nvPr/>
+      </p:nvGrpSpPr>
+      <p:grpSpPr>
+        <a:xfrm>
+          <a:off x="0" y="0"/>
+          <a:ext cx="0" cy="0"/>
+          <a:chOff x="0" y="0"/>
+          <a:chExt cx="0" cy="0"/>
+        </a:xfrm>
+      </p:grpSpPr>
+      <p:sp>
+        <p:nvSpPr>
+          <p:cNvPr id="2" name="Slide Image Placeholder 1"/>
+          <p:cNvSpPr>
+            <a:spLocks noGrp="1"/>
+          </p:cNvSpPr>
+          <p:nvPr>
+            <p:ph type="sldImg" idx="2"/>
+          </p:nvPr>
+        </p:nvSpPr>
+        <p:spPr/>
+      </p:sp>
+      <p:sp>
+        <p:nvSpPr>
+          <p:cNvPr id="3" name="Notes Placeholder 2"/>
+          <p:cNvSpPr>
+            <a:spLocks noGrp="1"/>
+          </p:cNvSpPr>
+          <p:nvPr>
+            <p:ph type="body" idx="3" sz="quarter"/>
+          </p:nvPr>
+        </p:nvSpPr>
+        <p:spPr/>
+        <p:txBody>
+          <a:bodyPr/>
+          <a:lstStyle/>
+          <a:p>
+            <a:r>
+              <a:t>세 가지 요구를 다 가진 조직이라면 물리 Standby 두 개로 역할을 나누는 구성이 가장 무리가 없습니다. 한쪽은 동기 전송을 받으면서 Fast-Start Failover 대상이 되고, 다른 쪽은 평소 조회를 받다가 시험 때만 Snapshot으로 돌립니다. 이렇게 두면 시험 기간에도 재해 대비 수준이 떨어지지 않고, 손상 로그 위험이나 RTO 증가도 시험 일정 문제로 끝납니다. 최대 보호 모드의 유일한 Standby 제약에 걸리지 않는 것도 덤으로 얻는 이점입니다.</a:t>
+            </a:r>
+          </a:p>
+        </p:txBody>
+      </p:sp>
+      <p:sp>
+        <p:nvSpPr>
+          <p:cNvPr id="4" name="Slide Number Placeholder 3"/>
+          <p:cNvSpPr>
+            <a:spLocks noGrp="1"/>
+          </p:cNvSpPr>
+          <p:nvPr>
+            <p:ph type="sldNum" idx="5" sz="quarter"/>
+          </p:nvPr>
+        </p:nvSpPr>
+        <p:spPr/>
+      </p:sp>
+    </p:spTree>
+  </p:cSld>
+  <p:clrMapOvr>
+    <a:masterClrMapping/>
+  </p:clrMapOvr>
+</p:notes>
+</file>
+
+<file path=ppt/notesSlides/notesSlide34.xml><?xml version="1.0" encoding="utf-8"?>
+<p:notes xmlns:a="http://schemas.openxmlformats.org/drawingml/2006/main" xmlns:p="http://schemas.openxmlformats.org/presentationml/2006/main" xmlns:r="http://schemas.openxmlformats.org/officeDocument/2006/relationships">
+  <p:cSld>
+    <p:spTree>
+      <p:nvGrpSpPr>
+        <p:cNvPr id="1" name=""/>
+        <p:cNvGrpSpPr/>
+        <p:nvPr/>
+      </p:nvGrpSpPr>
+      <p:grpSpPr>
+        <a:xfrm>
+          <a:off x="0" y="0"/>
+          <a:ext cx="0" cy="0"/>
+          <a:chOff x="0" y="0"/>
+          <a:chExt cx="0" cy="0"/>
+        </a:xfrm>
+      </p:grpSpPr>
+      <p:sp>
+        <p:nvSpPr>
+          <p:cNvPr id="2" name="Slide Image Placeholder 1"/>
+          <p:cNvSpPr>
+            <a:spLocks noGrp="1"/>
+          </p:cNvSpPr>
+          <p:nvPr>
+            <p:ph type="sldImg" idx="2"/>
+          </p:nvPr>
+        </p:nvSpPr>
+        <p:spPr/>
+      </p:sp>
+      <p:sp>
+        <p:nvSpPr>
+          <p:cNvPr id="3" name="Notes Placeholder 2"/>
+          <p:cNvSpPr>
+            <a:spLocks noGrp="1"/>
+          </p:cNvSpPr>
+          <p:nvPr>
+            <p:ph type="body" idx="3" sz="quarter"/>
+          </p:nvPr>
+        </p:nvSpPr>
+        <p:spPr/>
+        <p:txBody>
+          <a:bodyPr/>
+          <a:lstStyle/>
+          <a:p>
+            <a:r>
+              <a:t>금요일 오후에 전환해 두고 되돌리지 않은 채 퇴근했는데 월요일 새벽에 Primary 장애가 나는 시나리오가 실제로 가장 흔한 사고 유형입니다. 사흘 치 리두가 쌓인 Standby는 몇 시간 동안 Primary가 되지 못합니다. apply lag 경보가 계속 울리면 운영자가 경보 자체를 무시하게 되는 것도 문제입니다. 이를 막으려고 전환할 때 담당자와 되돌릴 시각을 기록하고, 그 시각을 넘기면 경보 단계를 올리는 절차를 두는 조직이 많습니다.</a:t>
+            </a:r>
+          </a:p>
+        </p:txBody>
+      </p:sp>
+      <p:sp>
+        <p:nvSpPr>
+          <p:cNvPr id="4" name="Slide Number Placeholder 3"/>
+          <p:cNvSpPr>
+            <a:spLocks noGrp="1"/>
+          </p:cNvSpPr>
+          <p:nvPr>
+            <p:ph type="sldNum" idx="5" sz="quarter"/>
+          </p:nvPr>
+        </p:nvSpPr>
+        <p:spPr/>
+      </p:sp>
+    </p:spTree>
+  </p:cSld>
+  <p:clrMapOvr>
+    <a:masterClrMapping/>
+  </p:clrMapOvr>
+</p:notes>
+</file>
+
+<file path=ppt/notesSlides/notesSlide35.xml><?xml version="1.0" encoding="utf-8"?>
+<p:notes xmlns:a="http://schemas.openxmlformats.org/drawingml/2006/main" xmlns:p="http://schemas.openxmlformats.org/presentationml/2006/main" xmlns:r="http://schemas.openxmlformats.org/officeDocument/2006/relationships">
+  <p:cSld>
+    <p:spTree>
+      <p:nvGrpSpPr>
+        <p:cNvPr id="1" name=""/>
+        <p:cNvGrpSpPr/>
+        <p:nvPr/>
+      </p:nvGrpSpPr>
+      <p:grpSpPr>
+        <a:xfrm>
+          <a:off x="0" y="0"/>
+          <a:ext cx="0" cy="0"/>
+          <a:chOff x="0" y="0"/>
+          <a:chExt cx="0" cy="0"/>
+        </a:xfrm>
+      </p:grpSpPr>
+      <p:sp>
+        <p:nvSpPr>
+          <p:cNvPr id="2" name="Slide Image Placeholder 1"/>
+          <p:cNvSpPr>
+            <a:spLocks noGrp="1"/>
+          </p:cNvSpPr>
+          <p:nvPr>
+            <p:ph type="sldImg" idx="2"/>
+          </p:nvPr>
+        </p:nvSpPr>
+        <p:spPr/>
+      </p:sp>
+      <p:sp>
+        <p:nvSpPr>
+          <p:cNvPr id="3" name="Notes Placeholder 2"/>
+          <p:cNvSpPr>
+            <a:spLocks noGrp="1"/>
+          </p:cNvSpPr>
+          <p:nvPr>
+            <p:ph type="body" idx="3" sz="quarter"/>
+          </p:nvPr>
+        </p:nvSpPr>
+        <p:spPr/>
+        <p:txBody>
+          <a:bodyPr/>
+          <a:lstStyle/>
+          <a:p>
+            <a:r>
+              <a:t>Flashback은 데이터베이스 안의 블록만 되돌립니다. 시험 중에 DB 링크로 다른 시스템에 넣은 데이터나 발송된 메일은 그대로 남습니다. AWR 스냅샷도 Snapshot Standby 안의 데이터라서 되돌리면 같이 사라지니 awrextr.sql로 먼저 추출해야 합니다. 개발자에게 접속을 열어 줄 때는 이것이 운영 데이터 전체라는 사실을 잊으면 안 됩니다. 되돌린 뒤에는 역할, 복원 지점 유무, 적용 프로세스, apply lag를 차례로 보고 시험 객체가 사라졌는지까지 확인합니다.</a:t>
             </a:r>
           </a:p>
         </p:txBody>
@@ -2010,7 +2580,7 @@
           <a:lstStyle/>
           <a:p>
             <a:r>
-              <a:t>10장을 마친 상태 그대로다. 매 장의 출발점을 명시하는 이유는 실습을 이어서 하기 때문이다. 여기서 값이 다르다면 앞 장의 원상 복구가 덜 된 것이므로 먼저 맞추고 시작한다. 특히 MRP0 이 살아 있고 두 지연이 0 인지 확인한다. 이미 밀려 있는 상태에서 전환하면 복귀 후 따라잡는 데 더 오래 걸린다. 값이 어긋났을 때 가장 확실한 복구는 VM 스냅샷 adg-configured 로 되돌리는 것이다. 실습 환경의 안전망이다.</a:t>
+              <a:t>현장에서 스냅샷이라는 말이 여러 의미로 쓰여 대화가 엇갈리는 일이 많습니다. 스토리지 담당자가 말하는 스냅샷은 장비가 디스크 블록을 복사해 두는 기능이고, 멀티테넌트의 스냅샷 복제는 PDB 하나를 쓰기 시 복사 방식으로 만드는 기능입니다. Snapshot Standby는 데이터베이스 전체를 대상으로 하고 Data Guard 구성원으로 남은 채 Flashback으로 돌아온다는 데서 둘과 갈립니다. 시험이 끝나면 별도 복사본이 남지 않으니 정리할 것도 없습니다.</a:t>
             </a:r>
           </a:p>
         </p:txBody>
@@ -2080,7 +2650,7 @@
           <a:lstStyle/>
           <a:p>
             <a:r>
-              <a:t>전체 플래시백 로깅은 임의의 시점으로 자유롭게 돌아가게 해 주며 그러려면 상시 로그를 남겨야 한다. 보장 복원 지점은 특정 시점 하나로 돌아가는 것만 보장한다. Snapshot Standby 가 필요한 것은 딱 그것이다. 전환 시점 하나로만 돌아가면 된다. 전환 후 값이 RESTORE POINT ONLY 가 되는 것이 이 사실을 정확히 표현한다. 전환 전에 플래시백을 미리 켤 필요가 없다는 뜻이기도 하다. 준비가 그만큼 간단해진다.</a:t>
+              <a:t>복원 지점은 SCN에 이름을 붙여 둔 것이고, 보장이라는 말이 붙으면 그 SCN까지 되감는 데 필요한 Flashback 로그를 오라클이 끝까지 지킵니다. 보존 기간 파라미터를 하루로 잡아 두었더라도 사흘을 Snapshot으로 두면 사흘 치가 남습니다. 이 복원 지점은 사용자가 만드는 것이 아니고 전환 명령이 만들며, 되돌리기가 끝나면 오라클이 스스로 지웁니다. 이름에 시각이 붙어 길기 때문에 실수로 지우기도 어렵습니다.</a:t>
             </a:r>
           </a:p>
         </p:txBody>
@@ -2150,7 +2720,7 @@
           <a:lstStyle/>
           <a:p>
             <a:r>
-              <a:t>①을 소홀히 하면 시험 도중에 데이터베이스가 멈춘다. 보장 복원 지점은 FRA 가 부족해도 지워지지 않으므로 공간을 비울 방법이 없다. ③은 Primary 의 아카이브 보관 정책과 함께 본다. 전환 기간이 그보다 길면 아직 적용되지 않은 아카이브를 Primary 가 지워 갭이 생길 수 있다. ⑧번째로 비교 기준 데이터를 심어 두는 것도 권한다. 되돌리기가 동작했는지 확인할 근거가 된다.</a:t>
+              <a:t>전환 전에 FLASHBACK_ON을 조회하면 NO가 나와서 전환이 안 될 거라고 생각하는 경우가 많습니다. 전환 명령이 보장 복원 지점 전용 로깅을 스스로 켜므로 FRA만 있으면 됩니다. 이 방식은 복원 지점 이후 처음 바뀌는 블록의 이전 이미지만 남깁니다. 같은 블록을 백 번 고쳐도 기록은 한 번이니 공간은 건드린 블록 수에 따라 늘어납니다. 되감을 때도 바뀐 블록만 되돌리므로 수 TB 데이터베이스라도 변경이 적으면 금방 끝납니다.</a:t>
             </a:r>
           </a:p>
         </p:txBody>
@@ -2220,7 +2790,7 @@
           <a:lstStyle/>
           <a:p>
             <a:r>
-              <a:t>앞의 것이 결과이고 뒤의 것이 원인이다. 여기서 오라클의 설계 원칙이 드러난다. 되돌릴 준비를 먼저 하고 바꾼다. 만약 순서가 반대여서 역할부터 바꾼 뒤 복원 지점 생성이 실패했다면 되돌릴 수 없는 어중간한 상태가 만들어졌을 것이다. 조치는 간단하다. MRP 를 멈춘다. 그러면 READ ONLY WITH APPLY 가 READ ONLY 로 바뀐다. 오류 메시지를 끝까지 읽는 습관이 여기서 값을 한다. 두 번째 줄에 진짜 원인이 있었다.</a:t>
+              <a:t>Primary 쪽에서 보면 boston은 여전히 평범한 전송 목적지입니다. SYNC든 ASYNC든 정해 둔 방식으로 리두가 넘어가고 Standby는 SRL에 쓰고 아카이브합니다. 달라지는 것은 적용뿐입니다. 시험 도중 습관적으로 MRP를 띄우려 하면 ORA-01665가 나는데, 전환하면서 컨트롤 파일 유형이 STANDBY에서 CURRENT로 바뀌었기 때문입니다. 리두가 디스크에 남아 있으니 데이터 손실 관점의 보호는 유지되고, 걸리는 것은 그 데이터를 쓸 수 있게 될 때까지의 시간입니다.</a:t>
             </a:r>
           </a:p>
         </p:txBody>
@@ -2290,7 +2860,7 @@
           <a:lstStyle/>
           <a:p>
             <a:r>
-              <a:t>OPEN_MODE 가 MOUNTED 로 바뀐 것을 놓치기 쉽다. 열려 있는 상태에서 명령을 냈는데 끝나고 보니 마운트다. 전환 과정에서 데이터베이스를 닫았다가 다시 마운트했기 때문이며 그래서 따로 열어야 한다. CONTROLFILE_TYPE 이 CURRENT 가 된 것이 특히 중요하다. Primary 와 같은 값이며 그래서 MRP 를 띄울 수 없다. 네 값을 한 줄로 조회하는 습관을 들이면 지금 어느 단계인지 헷갈릴 일이 없다.</a:t>
+              <a:t>7장에서 전송과 적용을 나눠 보는 연습을 했는데, Snapshot Standby가 그 구분이 가장 선명하게 드러나는 상황입니다. transport lag는 평소처럼 작게 유지되고 apply lag는 시계처럼 일정하게 늘어납니다. 전환 후 두 시간이 지났다면 apply lag도 대략 두 시간입니다. 이 값은 정상 동작의 결과이므로 경보 기준을 물리 Standby와 똑같이 두면 시험 내내 경보가 울리게 됩니다. 감시 쪽 설정도 전환 계획에 같이 넣어야 합니다.</a:t>
             </a:r>
           </a:p>
         </p:txBody>
@@ -2360,7 +2930,7 @@
           <a:lstStyle/>
           <a:p>
             <a:r>
-              <a:t>GUARANTEE 가 YES 인 것이 핵심이다. 일반 복원 지점은 FRA 가 부족하면 오라클이 지우지만 보장 복원 지점은 지우지 않는다. 반드시 되돌아갈 수 있게 하겠다는 약속이므로 대신 데이터베이스가 멈춘다. 이름이 길고 날짜가 들어 있어 실수로 지우기 어렵다는 점도 다행이다. 정리 스크립트를 쓴다면 SNAPSHOT_STANDBY_REQUIRED 로 시작하는 것은 반드시 제외한다.</a:t>
+              <a:t>되돌린 직후의 Standby는 데이터만 보면 전환하던 순간에 멈춰 있습니다. 그 뒤 적용이 시작되어야 그동안의 Primary 변경이 들어옵니다. 시험에서 만든 테이블과 고친 행은 첫 단계에서 모두 사라지고 되살릴 방법이 없습니다. 시험 결과 데이터나 보고서를 남겨야 한다면 Data Pump나 파일로 먼저 빼 두어야 합니다. 전환 기간에 Primary에서 데이터 파일을 추가했다면 STANDBY_FILE_MANAGEMENT가 AUTO인 덕분에 적용 단계에서 함께 만들어집니다.</a:t>
             </a:r>
           </a:p>
         </p:txBody>
@@ -5610,7 +6180,7 @@
                 </a:solidFill>
                 <a:latin typeface="맑은 고딕"/>
               </a:rPr>
-              <a:t>Standby 를 잠시 빌려 쓰기</a:t>
+              <a:t>운영 데이터를 잠시 빌려 쓰고 그대로 돌려놓기</a:t>
             </a:r>
           </a:p>
         </p:txBody>
@@ -5649,7 +6219,7 @@
                 </a:solidFill>
                 <a:latin typeface="맑은 고딕"/>
               </a:rPr>
-              <a:t>되돌릴 준비를 먼저 하고 바꾼다</a:t>
+              <a:t>제11장</a:t>
             </a:r>
           </a:p>
         </p:txBody>
@@ -5750,7 +6320,7 @@
                 </a:solidFill>
                 <a:latin typeface="맑은 고딕"/>
               </a:rPr>
-              <a:t>뜻밖의 값</a:t>
+              <a:t>보장 복원 지점</a:t>
             </a:r>
           </a:p>
         </p:txBody>
@@ -5789,7 +6359,7 @@
                 </a:solidFill>
                 <a:latin typeface="맑은 고딕"/>
               </a:rPr>
-              <a:t>FLASHBACK_ON 이 NO 다</a:t>
+              <a:t>되돌아갈 SCN에 붙인 이름표</a:t>
             </a:r>
           </a:p>
         </p:txBody>
@@ -5828,7 +6398,7 @@
                 </a:solidFill>
                 <a:latin typeface="맑은 고딕"/>
               </a:rPr>
-              <a:t>•  전환 전 boston — `FLASHBACK_ON = NO`</a:t>
+              <a:t>•  이름: SNAPSHOT_STANDBY_REQUIRED_ + 시각</a:t>
             </a:r>
           </a:p>
           <a:p>
@@ -5844,7 +6414,7 @@
                 </a:solidFill>
                 <a:latin typeface="맑은 고딕"/>
               </a:rPr>
-              <a:t>•  Primary 도 `NO`</a:t>
+              <a:t>•  그 SCN까지 Flashback 로그를 지우지 않고 보존</a:t>
             </a:r>
           </a:p>
           <a:p>
@@ -5860,7 +6430,7 @@
                 </a:solidFill>
                 <a:latin typeface="맑은 고딕"/>
               </a:rPr>
-              <a:t>•  그런데 전환이 된다</a:t>
+              <a:t>•  DB_FLASHBACK_RETENTION_TARGET과 무관</a:t>
             </a:r>
           </a:p>
           <a:p>
@@ -5876,7 +6446,23 @@
                 </a:solidFill>
                 <a:latin typeface="맑은 고딕"/>
               </a:rPr>
-              <a:t>•  이유 — 전체 플래시백 로깅이 아니라 **보장 복원 지점**을 쓴다</a:t>
+              <a:t>•  되돌린 뒤 자동 삭제, 직접 지울 대상 아님</a:t>
+            </a:r>
+          </a:p>
+          <a:p>
+            <a:pPr algn="l">
+              <a:spcAft>
+                <a:spcPts val="1000"/>
+              </a:spcAft>
+            </a:pPr>
+            <a:r>
+              <a:rPr sz="1700" b="0">
+                <a:solidFill>
+                  <a:srgbClr val="222222"/>
+                </a:solidFill>
+                <a:latin typeface="맑은 고딕"/>
+              </a:rPr>
+              <a:t>•  이름을 틀리면 ORA-38780, 아무 일 없음</a:t>
             </a:r>
           </a:p>
         </p:txBody>
@@ -5977,7 +6563,7 @@
                 </a:solidFill>
                 <a:latin typeface="맑은 고딕"/>
               </a:rPr>
-              <a:t>전환 전 점검표</a:t>
+              <a:t>Flashback이 꺼져 있어도 된다</a:t>
             </a:r>
           </a:p>
         </p:txBody>
@@ -6016,7 +6602,7 @@
                 </a:solidFill>
                 <a:latin typeface="맑은 고딕"/>
               </a:rPr>
-              <a:t>다섯 가지</a:t>
+              <a:t>RESTORE POINT ONLY 로깅</a:t>
             </a:r>
           </a:p>
         </p:txBody>
@@ -6055,7 +6641,7 @@
                 </a:solidFill>
                 <a:latin typeface="맑은 고딕"/>
               </a:rPr>
-              <a:t>•  **① FRA 여유** — 실습 15,360MB 중 1,536MB 사용</a:t>
+              <a:t>•  전환 전 FLASHBACK_ON = NO여도 전환 가능</a:t>
             </a:r>
           </a:p>
           <a:p>
@@ -6071,7 +6657,7 @@
                 </a:solidFill>
                 <a:latin typeface="맑은 고딕"/>
               </a:rPr>
-              <a:t>•  **② 다른 Standby 가 있는가** — 전환하면 재해 복구 대상이 아니다</a:t>
+              <a:t>•  전환 후 FLASHBACK_ON = RESTORE POINT ONLY</a:t>
             </a:r>
           </a:p>
           <a:p>
@@ -6087,7 +6673,7 @@
                 </a:solidFill>
                 <a:latin typeface="맑은 고딕"/>
               </a:rPr>
-              <a:t>•  **③ 언제까지 쓸 것인가** — 길수록 리두가 쌓인다</a:t>
+              <a:t>•  복원 지점 이후 처음 바뀐 블록만 기록</a:t>
             </a:r>
           </a:p>
           <a:p>
@@ -6103,7 +6689,7 @@
                 </a:solidFill>
                 <a:latin typeface="맑은 고딕"/>
               </a:rPr>
-              <a:t>•  **④ 남길 것은 무엇인가** — 되돌리면 전부 사라진다</a:t>
+              <a:t>•  공간은 변경 횟수보다 건드린 블록 수에 비례</a:t>
             </a:r>
           </a:p>
           <a:p>
@@ -6119,7 +6705,7 @@
                 </a:solidFill>
                 <a:latin typeface="맑은 고딕"/>
               </a:rPr>
-              <a:t>•  **⑤ 알림은 했는가** — ADG 조회 사용자가 있다면</a:t>
+              <a:t>•  되감기 시간은 DB 크기 아닌 변경량에 비례</a:t>
             </a:r>
           </a:p>
         </p:txBody>
@@ -6151,7 +6737,7 @@
         <p:spPr>
           <a:xfrm>
             <a:off x="0" y="0"/>
-            <a:ext cx="12191695" cy="6858000"/>
+            <a:ext cx="12191695" cy="1005840"/>
           </a:xfrm>
           <a:prstGeom prst="rect">
             <a:avLst/>
@@ -6194,8 +6780,8 @@
         </p:nvSpPr>
         <p:spPr>
           <a:xfrm>
-            <a:off x="822960" y="2011680"/>
-            <a:ext cx="10515600" cy="1097280"/>
+            <a:off x="548640" y="91440"/>
+            <a:ext cx="10972800" cy="777240"/>
           </a:xfrm>
           <a:prstGeom prst="rect">
             <a:avLst/>
@@ -6214,13 +6800,13 @@
               </a:spcAft>
             </a:pPr>
             <a:r>
-              <a:rPr sz="4000" b="1">
+              <a:rPr sz="2600" b="1">
                 <a:solidFill>
                   <a:srgbClr val="FFFFFF"/>
                 </a:solidFill>
                 <a:latin typeface="맑은 고딕"/>
               </a:rPr>
-              <a:t>11.4</a:t>
+              <a:t>받기는 계속, 적용만 멈춤</a:t>
             </a:r>
           </a:p>
         </p:txBody>
@@ -6233,8 +6819,8 @@
         </p:nvSpPr>
         <p:spPr>
           <a:xfrm>
-            <a:off x="822960" y="3017520"/>
-            <a:ext cx="10515600" cy="914400"/>
+            <a:off x="640080" y="1078992"/>
+            <a:ext cx="10881360" cy="457200"/>
           </a:xfrm>
           <a:prstGeom prst="rect">
             <a:avLst/>
@@ -6253,71 +6839,27 @@
               </a:spcAft>
             </a:pPr>
             <a:r>
-              <a:rPr sz="2800" b="1">
-                <a:solidFill>
-                  <a:srgbClr val="FFFFFF"/>
-                </a:solidFill>
-                <a:latin typeface="맑은 고딕"/>
-              </a:rPr>
-              <a:t>전환</a:t>
-            </a:r>
-          </a:p>
-        </p:txBody>
-      </p:sp>
-      <p:sp>
-        <p:nvSpPr>
-          <p:cNvPr id="5" name="Rectangle 4"/>
-          <p:cNvSpPr/>
-          <p:nvPr/>
-        </p:nvSpPr>
-        <p:spPr>
-          <a:xfrm>
-            <a:off x="822960" y="4114800"/>
-            <a:ext cx="5486400" cy="54864"/>
-          </a:xfrm>
-          <a:prstGeom prst="rect">
-            <a:avLst/>
-          </a:prstGeom>
-          <a:solidFill>
-            <a:srgbClr val="FFFFFF"/>
-          </a:solidFill>
-          <a:ln>
-            <a:noFill/>
-          </a:ln>
-          <a:effectLst/>
-        </p:spPr>
-        <p:style>
-          <a:lnRef idx="1">
-            <a:schemeClr val="accent1"/>
-          </a:lnRef>
-          <a:fillRef idx="3">
-            <a:schemeClr val="accent1"/>
-          </a:fillRef>
-          <a:effectRef idx="2">
-            <a:schemeClr val="accent1"/>
-          </a:effectRef>
-          <a:fontRef idx="minor">
-            <a:schemeClr val="lt1"/>
-          </a:fontRef>
-        </p:style>
-        <p:txBody>
-          <a:bodyPr rtlCol="0" anchor="ctr"/>
-          <a:lstStyle/>
-          <a:p>
-            <a:pPr algn="ctr"/>
-          </a:p>
-        </p:txBody>
-      </p:sp>
-      <p:sp>
-        <p:nvSpPr>
-          <p:cNvPr id="6" name="TextBox 5"/>
+              <a:rPr sz="1500" b="0">
+                <a:solidFill>
+                  <a:srgbClr val="5A6672"/>
+                </a:solidFill>
+                <a:latin typeface="맑은 고딕"/>
+              </a:rPr>
+              <a:t>전송 서비스는 아무것도 바뀌지 않음</a:t>
+            </a:r>
+          </a:p>
+        </p:txBody>
+      </p:sp>
+      <p:sp>
+        <p:nvSpPr>
+          <p:cNvPr id="5" name="TextBox 4"/>
           <p:cNvSpPr txBox="1"/>
           <p:nvPr/>
         </p:nvSpPr>
         <p:spPr>
           <a:xfrm>
-            <a:off x="822960" y="4297680"/>
-            <a:ext cx="10058400" cy="2011680"/>
+            <a:off x="640080" y="1737360"/>
+            <a:ext cx="10881360" cy="4754880"/>
           </a:xfrm>
           <a:prstGeom prst="rect">
             <a:avLst/>
@@ -6332,49 +6874,81 @@
           <a:p>
             <a:pPr algn="l">
               <a:spcAft>
-                <a:spcPts val="800"/>
-              </a:spcAft>
-            </a:pPr>
-            <a:r>
-              <a:rPr sz="1600" b="0">
-                <a:solidFill>
-                  <a:srgbClr val="FFFFFF"/>
-                </a:solidFill>
-                <a:latin typeface="맑은 고딕"/>
-              </a:rPr>
-              <a:t>•  먼저 실패해 본다</a:t>
-            </a:r>
-          </a:p>
-          <a:p>
-            <a:pPr algn="l">
-              <a:spcAft>
-                <a:spcPts val="800"/>
-              </a:spcAft>
-            </a:pPr>
-            <a:r>
-              <a:rPr sz="1600" b="0">
-                <a:solidFill>
-                  <a:srgbClr val="FFFFFF"/>
-                </a:solidFill>
-                <a:latin typeface="맑은 고딕"/>
-              </a:rPr>
-              <a:t>•  네 값이 바뀐다</a:t>
-            </a:r>
-          </a:p>
-          <a:p>
-            <a:pPr algn="l">
-              <a:spcAft>
-                <a:spcPts val="800"/>
-              </a:spcAft>
-            </a:pPr>
-            <a:r>
-              <a:rPr sz="1600" b="0">
-                <a:solidFill>
-                  <a:srgbClr val="FFFFFF"/>
-                </a:solidFill>
-                <a:latin typeface="맑은 고딕"/>
-              </a:rPr>
-              <a:t>•  복원 지점 읽기</a:t>
+                <a:spcPts val="1000"/>
+              </a:spcAft>
+            </a:pPr>
+            <a:r>
+              <a:rPr sz="1700" b="0">
+                <a:solidFill>
+                  <a:srgbClr val="222222"/>
+                </a:solidFill>
+                <a:latin typeface="맑은 고딕"/>
+              </a:rPr>
+              <a:t>•  RFS 수신, SRL 기록, 아카이브는 그대로</a:t>
+            </a:r>
+          </a:p>
+          <a:p>
+            <a:pPr algn="l">
+              <a:spcAft>
+                <a:spcPts val="1000"/>
+              </a:spcAft>
+            </a:pPr>
+            <a:r>
+              <a:rPr sz="1700" b="0">
+                <a:solidFill>
+                  <a:srgbClr val="222222"/>
+                </a:solidFill>
+                <a:latin typeface="맑은 고딕"/>
+              </a:rPr>
+              <a:t>•  MRP0가 없어 데이터 파일 반영은 멈춤</a:t>
+            </a:r>
+          </a:p>
+          <a:p>
+            <a:pPr algn="l">
+              <a:spcAft>
+                <a:spcPts val="1000"/>
+              </a:spcAft>
+            </a:pPr>
+            <a:r>
+              <a:rPr sz="1700" b="0">
+                <a:solidFill>
+                  <a:srgbClr val="222222"/>
+                </a:solidFill>
+                <a:latin typeface="맑은 고딕"/>
+              </a:rPr>
+              <a:t>•  MRP 기동 시 ORA-01665</a:t>
+            </a:r>
+          </a:p>
+          <a:p>
+            <a:pPr algn="l">
+              <a:spcAft>
+                <a:spcPts val="1000"/>
+              </a:spcAft>
+            </a:pPr>
+            <a:r>
+              <a:rPr sz="1700" b="0">
+                <a:solidFill>
+                  <a:srgbClr val="222222"/>
+                </a:solidFill>
+                <a:latin typeface="맑은 고딕"/>
+              </a:rPr>
+              <a:t>•  자체 변경은 자기 온라인 리두 로그에 기록</a:t>
+            </a:r>
+          </a:p>
+          <a:p>
+            <a:pPr algn="l">
+              <a:spcAft>
+                <a:spcPts val="1000"/>
+              </a:spcAft>
+            </a:pPr>
+            <a:r>
+              <a:rPr sz="1700" b="0">
+                <a:solidFill>
+                  <a:srgbClr val="222222"/>
+                </a:solidFill>
+                <a:latin typeface="맑은 고딕"/>
+              </a:rPr>
+              <a:t>•  Primary가 사라져도 받은 리두는 남아 있음</a:t>
             </a:r>
           </a:p>
         </p:txBody>
@@ -6475,7 +7049,7 @@
                 </a:solidFill>
                 <a:latin typeface="맑은 고딕"/>
               </a:rPr>
-              <a:t>ORA-38784</a:t>
+              <a:t>두 지연이 갈라진다</a:t>
             </a:r>
           </a:p>
         </p:txBody>
@@ -6514,7 +7088,7 @@
                 </a:solidFill>
                 <a:latin typeface="맑은 고딕"/>
               </a:rPr>
-              <a:t>메시지가 설계를 드러낸다</a:t>
+              <a:t>transport lag는 그대로, apply lag만 증가</a:t>
             </a:r>
           </a:p>
         </p:txBody>
@@ -6553,7 +7127,7 @@
                 </a:solidFill>
                 <a:latin typeface="맑은 고딕"/>
               </a:rPr>
-              <a:t>•  MRP 가 도는 채로 전환 → 오류 두 줄</a:t>
+              <a:t>•  transport lag: 평소처럼 수 초 이내</a:t>
             </a:r>
           </a:p>
           <a:p>
@@ -6569,7 +7143,7 @@
                 </a:solidFill>
                 <a:latin typeface="맑은 고딕"/>
               </a:rPr>
-              <a:t>•  `ORA-38784: Cannot create restore point 'SNAPSHOT_STANDBY_REQUIRED_...'`</a:t>
+              <a:t>•  apply lag: 전환 후 흐른 시간만큼 증가</a:t>
             </a:r>
           </a:p>
           <a:p>
@@ -6585,7 +7159,7 @@
                 </a:solidFill>
                 <a:latin typeface="맑은 고딕"/>
               </a:rPr>
-              <a:t>•  `ORA-01153: an incompatible media recovery is active`</a:t>
+              <a:t>•  V$ARCHIVED_LOG의 APPLIED는 NO로 쌓임</a:t>
             </a:r>
           </a:p>
           <a:p>
@@ -6601,23 +7175,7 @@
                 </a:solidFill>
                 <a:latin typeface="맑은 고딕"/>
               </a:rPr>
-              <a:t>•  읽어 낼 수 있는 것 — **전환의 첫 단계가 복원 지점 생성**</a:t>
-            </a:r>
-          </a:p>
-          <a:p>
-            <a:pPr algn="l">
-              <a:spcAft>
-                <a:spcPts val="1000"/>
-              </a:spcAft>
-            </a:pPr>
-            <a:r>
-              <a:rPr sz="1700" b="0">
-                <a:solidFill>
-                  <a:srgbClr val="222222"/>
-                </a:solidFill>
-                <a:latin typeface="맑은 고딕"/>
-              </a:rPr>
-              <a:t>•  복원 지점은 **SCN 이 고정**되어야 만들 수 있다</a:t>
+              <a:t>•  7장에서 나눈 두 지표가 가장 뚜렷이 갈림</a:t>
             </a:r>
           </a:p>
         </p:txBody>
@@ -6718,7 +7276,7 @@
                 </a:solidFill>
                 <a:latin typeface="맑은 고딕"/>
               </a:rPr>
-              <a:t>전환</a:t>
+              <a:t>되돌릴 때 일어나는 일</a:t>
             </a:r>
           </a:p>
         </p:txBody>
@@ -6757,7 +7315,7 @@
                 </a:solidFill>
                 <a:latin typeface="맑은 고딕"/>
               </a:rPr>
-              <a:t>네 값이 바뀐다</a:t>
+              <a:t>Flashback, 역할 복귀, 적용 재개, 실시간 복귀</a:t>
             </a:r>
           </a:p>
         </p:txBody>
@@ -6796,7 +7354,7 @@
                 </a:solidFill>
                 <a:latin typeface="맑은 고딕"/>
               </a:rPr>
-              <a:t>•  `DATABASE_ROLE` — PHYSICAL STANDBY → **SNAPSHOT STANDBY**</a:t>
+              <a:t>•  1) 복원 지점 SCN으로 Flashback, 로컬 변경 폐기</a:t>
             </a:r>
           </a:p>
           <a:p>
@@ -6812,7 +7370,7 @@
                 </a:solidFill>
                 <a:latin typeface="맑은 고딕"/>
               </a:rPr>
-              <a:t>•  `CONTROLFILE_TYPE` — STANDBY → **CURRENT**</a:t>
+              <a:t>•  2) 컨트롤 파일 STANDBY, 역할 복귀, 복원 지점 삭제</a:t>
             </a:r>
           </a:p>
           <a:p>
@@ -6828,7 +7386,7 @@
                 </a:solidFill>
                 <a:latin typeface="맑은 고딕"/>
               </a:rPr>
-              <a:t>•  `FLASHBACK_ON` — NO → **RESTORE POINT ONLY**</a:t>
+              <a:t>•  3) 쌓인 아카이브 로그를 순서대로 적용</a:t>
             </a:r>
           </a:p>
           <a:p>
@@ -6844,7 +7402,7 @@
                 </a:solidFill>
                 <a:latin typeface="맑은 고딕"/>
               </a:rPr>
-              <a:t>•  `OPEN_MODE` — READ ONLY → **MOUNTED**</a:t>
+              <a:t>•  4) 따라잡은 뒤 실시간 적용으로 복귀</a:t>
             </a:r>
           </a:p>
           <a:p>
@@ -6860,7 +7418,7 @@
                 </a:solidFill>
                 <a:latin typeface="맑은 고딕"/>
               </a:rPr>
-              <a:t>•  열린 채로도 전환된다. MOUNT 로 내릴 필요 없다</a:t>
+              <a:t>•  남길 결과는 되돌리기 전에 추출</a:t>
             </a:r>
           </a:p>
         </p:txBody>
@@ -6961,7 +7519,7 @@
                 </a:solidFill>
                 <a:latin typeface="맑은 고딕"/>
               </a:rPr>
-              <a:t>복원 지점</a:t>
+              <a:t>전환을 반복할 때</a:t>
             </a:r>
           </a:p>
         </p:txBody>
@@ -7000,7 +7558,7 @@
                 </a:solidFill>
                 <a:latin typeface="맑은 고딕"/>
               </a:rPr>
-              <a:t>되돌아갈 자리</a:t>
+              <a:t>매번 새 복원 지점, 새 출발점</a:t>
             </a:r>
           </a:p>
         </p:txBody>
@@ -7039,7 +7597,7 @@
                 </a:solidFill>
                 <a:latin typeface="맑은 고딕"/>
               </a:rPr>
-              <a:t>•  이름 — `SNAPSHOT_STANDBY_REQUIRED_08/27/2026 16:16:43`</a:t>
+              <a:t>•  전환할 때마다 새 보장 복원 지점 생성</a:t>
             </a:r>
           </a:p>
           <a:p>
@@ -7055,7 +7613,7 @@
                 </a:solidFill>
                 <a:latin typeface="맑은 고딕"/>
               </a:rPr>
-              <a:t>•  SCN — 2252853 (전환 시점에 고정)</a:t>
+              <a:t>•  출발점은 그 시점까지 적용된 Primary 데이터</a:t>
             </a:r>
           </a:p>
           <a:p>
@@ -7071,7 +7629,7 @@
                 </a:solidFill>
                 <a:latin typeface="맑은 고딕"/>
               </a:rPr>
-              <a:t>•  `GUARANTEE_FLASHBACK_DATABASE` — **YES**</a:t>
+              <a:t>•  이전 시험의 객체는 남지 않음</a:t>
             </a:r>
           </a:p>
           <a:p>
@@ -7087,23 +7645,7 @@
                 </a:solidFill>
                 <a:latin typeface="맑은 고딕"/>
               </a:rPr>
-              <a:t>•  `STORAGE_SIZE` — 200MB</a:t>
-            </a:r>
-          </a:p>
-          <a:p>
-            <a:pPr algn="l">
-              <a:spcAft>
-                <a:spcPts val="1000"/>
-              </a:spcAft>
-            </a:pPr>
-            <a:r>
-              <a:rPr sz="1700" b="0">
-                <a:solidFill>
-                  <a:srgbClr val="222222"/>
-                </a:solidFill>
-                <a:latin typeface="맑은 고딕"/>
-              </a:rPr>
-              <a:t>•  **REQUIRED** 는 지우면 안 된다는 표시</a:t>
+              <a:t>•  같은 시험 반복은 사용자 복원 지점이 빠름</a:t>
             </a:r>
           </a:p>
         </p:txBody>
@@ -7204,7 +7746,7 @@
                 </a:solidFill>
                 <a:latin typeface="맑은 고딕"/>
               </a:rPr>
-              <a:t>열고 쓰기</a:t>
+              <a:t>상태 값의 변화</a:t>
             </a:r>
           </a:p>
         </p:txBody>
@@ -7243,7 +7785,7 @@
                 </a:solidFill>
                 <a:latin typeface="맑은 고딕"/>
               </a:rPr>
-              <a:t>PDB 는 따라오지 않는다</a:t>
+              <a:t>V$DATABASE 네 열로 단계 판별</a:t>
             </a:r>
           </a:p>
         </p:txBody>
@@ -7282,7 +7824,7 @@
                 </a:solidFill>
                 <a:latin typeface="맑은 고딕"/>
               </a:rPr>
-              <a:t>•  `ALTER DATABASE OPEN` → **READ WRITE** (READ ONLY 가 아니다)</a:t>
+              <a:t>•  DATABASE_ROLE: PHYSICAL ↔ SNAPSHOT STANDBY</a:t>
             </a:r>
           </a:p>
           <a:p>
@@ -7298,7 +7840,7 @@
                 </a:solidFill>
                 <a:latin typeface="맑은 고딕"/>
               </a:rPr>
-              <a:t>•  `V$PDBS` — CHICAGO_PDB1 이 **MOUNTED** 로 남는다</a:t>
+              <a:t>•  CONTROLFILE_TYPE: STANDBY ↔ CURRENT</a:t>
             </a:r>
           </a:p>
           <a:p>
@@ -7314,7 +7856,7 @@
                 </a:solidFill>
                 <a:latin typeface="맑은 고딕"/>
               </a:rPr>
-              <a:t>•  조회하면 **ORA-01219**</a:t>
+              <a:t>•  FLASHBACK_ON: NO ↔ RESTORE POINT ONLY</a:t>
             </a:r>
           </a:p>
           <a:p>
@@ -7330,7 +7872,7 @@
                 </a:solidFill>
                 <a:latin typeface="맑은 고딕"/>
               </a:rPr>
-              <a:t>•  `ALTER PLUGGABLE DATABASE ... OPEN` 으로 따로 연다</a:t>
+              <a:t>•  OPEN_MODE: MOUNTED → READ WRITE</a:t>
             </a:r>
           </a:p>
           <a:p>
@@ -7346,7 +7888,7 @@
                 </a:solidFill>
                 <a:latin typeface="맑은 고딕"/>
               </a:rPr>
-              <a:t>•  CDB·PDB 양쪽에 DDL·DML·COMMIT 모두 가능</a:t>
+              <a:t>•  V$RESTORE_POINT 행 유무</a:t>
             </a:r>
           </a:p>
         </p:txBody>
@@ -7378,7 +7920,7 @@
         <p:spPr>
           <a:xfrm>
             <a:off x="0" y="0"/>
-            <a:ext cx="12191695" cy="1005840"/>
+            <a:ext cx="12191695" cy="6858000"/>
           </a:xfrm>
           <a:prstGeom prst="rect">
             <a:avLst/>
@@ -7421,8 +7963,8 @@
         </p:nvSpPr>
         <p:spPr>
           <a:xfrm>
-            <a:off x="548640" y="91440"/>
-            <a:ext cx="10972800" cy="777240"/>
+            <a:off x="822960" y="2011680"/>
+            <a:ext cx="10515600" cy="1097280"/>
           </a:xfrm>
           <a:prstGeom prst="rect">
             <a:avLst/>
@@ -7441,13 +7983,13 @@
               </a:spcAft>
             </a:pPr>
             <a:r>
-              <a:rPr sz="2600" b="1">
+              <a:rPr sz="4000" b="1">
                 <a:solidFill>
                   <a:srgbClr val="FFFFFF"/>
                 </a:solidFill>
                 <a:latin typeface="맑은 고딕"/>
               </a:rPr>
-              <a:t>실제로 쓴다</a:t>
+              <a:t>11.4</a:t>
             </a:r>
           </a:p>
         </p:txBody>
@@ -7460,8 +8002,8 @@
         </p:nvSpPr>
         <p:spPr>
           <a:xfrm>
-            <a:off x="640080" y="1078992"/>
-            <a:ext cx="10881360" cy="457200"/>
+            <a:off x="822960" y="3017520"/>
+            <a:ext cx="10515600" cy="914400"/>
           </a:xfrm>
           <a:prstGeom prst="rect">
             <a:avLst/>
@@ -7480,27 +8022,71 @@
               </a:spcAft>
             </a:pPr>
             <a:r>
-              <a:rPr sz="1500" b="0">
-                <a:solidFill>
-                  <a:srgbClr val="5A6672"/>
-                </a:solidFill>
-                <a:latin typeface="맑은 고딕"/>
-              </a:rPr>
-              <a:t>이것이 목적이다</a:t>
-            </a:r>
-          </a:p>
-        </p:txBody>
-      </p:sp>
-      <p:sp>
-        <p:nvSpPr>
-          <p:cNvPr id="5" name="TextBox 4"/>
+              <a:rPr sz="2800" b="1">
+                <a:solidFill>
+                  <a:srgbClr val="FFFFFF"/>
+                </a:solidFill>
+                <a:latin typeface="맑은 고딕"/>
+              </a:rPr>
+              <a:t>전제 조건과 공간 계획</a:t>
+            </a:r>
+          </a:p>
+        </p:txBody>
+      </p:sp>
+      <p:sp>
+        <p:nvSpPr>
+          <p:cNvPr id="5" name="Rectangle 4"/>
+          <p:cNvSpPr/>
+          <p:nvPr/>
+        </p:nvSpPr>
+        <p:spPr>
+          <a:xfrm>
+            <a:off x="822960" y="4114800"/>
+            <a:ext cx="5486400" cy="54864"/>
+          </a:xfrm>
+          <a:prstGeom prst="rect">
+            <a:avLst/>
+          </a:prstGeom>
+          <a:solidFill>
+            <a:srgbClr val="FFFFFF"/>
+          </a:solidFill>
+          <a:ln>
+            <a:noFill/>
+          </a:ln>
+          <a:effectLst/>
+        </p:spPr>
+        <p:style>
+          <a:lnRef idx="1">
+            <a:schemeClr val="accent1"/>
+          </a:lnRef>
+          <a:fillRef idx="3">
+            <a:schemeClr val="accent1"/>
+          </a:fillRef>
+          <a:effectRef idx="2">
+            <a:schemeClr val="accent1"/>
+          </a:effectRef>
+          <a:fontRef idx="minor">
+            <a:schemeClr val="lt1"/>
+          </a:fontRef>
+        </p:style>
+        <p:txBody>
+          <a:bodyPr rtlCol="0" anchor="ctr"/>
+          <a:lstStyle/>
+          <a:p>
+            <a:pPr algn="ctr"/>
+          </a:p>
+        </p:txBody>
+      </p:sp>
+      <p:sp>
+        <p:nvSpPr>
+          <p:cNvPr id="6" name="TextBox 5"/>
           <p:cNvSpPr txBox="1"/>
           <p:nvPr/>
         </p:nvSpPr>
         <p:spPr>
           <a:xfrm>
-            <a:off x="640080" y="1737360"/>
-            <a:ext cx="10881360" cy="4754880"/>
+            <a:off x="822960" y="4297680"/>
+            <a:ext cx="10058400" cy="2011680"/>
           </a:xfrm>
           <a:prstGeom prst="rect">
             <a:avLst/>
@@ -7515,65 +8101,49 @@
           <a:p>
             <a:pPr algn="l">
               <a:spcAft>
-                <a:spcPts val="1000"/>
-              </a:spcAft>
-            </a:pPr>
-            <a:r>
-              <a:rPr sz="1700" b="0">
-                <a:solidFill>
-                  <a:srgbClr val="222222"/>
-                </a:solidFill>
-                <a:latin typeface="맑은 고딕"/>
-              </a:rPr>
-              <a:t>•  CDB — `CREATE TABLE` / `INSERT` / `COMMIT` 모두 성공</a:t>
-            </a:r>
-          </a:p>
-          <a:p>
-            <a:pPr algn="l">
-              <a:spcAft>
-                <a:spcPts val="1000"/>
-              </a:spcAft>
-            </a:pPr>
-            <a:r>
-              <a:rPr sz="1700" b="0">
-                <a:solidFill>
-                  <a:srgbClr val="222222"/>
-                </a:solidFill>
-                <a:latin typeface="맑은 고딕"/>
-              </a:rPr>
-              <a:t>•  기존 행 `UPDATE` — `before-snapshot` → `modified-on-snapshot`</a:t>
-            </a:r>
-          </a:p>
-          <a:p>
-            <a:pPr algn="l">
-              <a:spcAft>
-                <a:spcPts val="1000"/>
-              </a:spcAft>
-            </a:pPr>
-            <a:r>
-              <a:rPr sz="1700" b="0">
-                <a:solidFill>
-                  <a:srgbClr val="222222"/>
-                </a:solidFill>
-                <a:latin typeface="맑은 고딕"/>
-              </a:rPr>
-              <a:t>•  PDB 안에서도 같다</a:t>
-            </a:r>
-          </a:p>
-          <a:p>
-            <a:pPr algn="l">
-              <a:spcAft>
-                <a:spcPts val="1000"/>
-              </a:spcAft>
-            </a:pPr>
-            <a:r>
-              <a:rPr sz="1700" b="0">
-                <a:solidFill>
-                  <a:srgbClr val="222222"/>
-                </a:solidFill>
-                <a:latin typeface="맑은 고딕"/>
-              </a:rPr>
-              <a:t>•  9장에서 같은 명령이 **ORA-16000** 을 냈던 것과 대조</a:t>
+                <a:spcPts val="800"/>
+              </a:spcAft>
+            </a:pPr>
+            <a:r>
+              <a:rPr sz="1600" b="0">
+                <a:solidFill>
+                  <a:srgbClr val="FFFFFF"/>
+                </a:solidFill>
+                <a:latin typeface="맑은 고딕"/>
+              </a:rPr>
+              <a:t>•  전환 명령의 조건은 단순</a:t>
+            </a:r>
+          </a:p>
+          <a:p>
+            <a:pPr algn="l">
+              <a:spcAft>
+                <a:spcPts val="800"/>
+              </a:spcAft>
+            </a:pPr>
+            <a:r>
+              <a:rPr sz="1600" b="0">
+                <a:solidFill>
+                  <a:srgbClr val="FFFFFF"/>
+                </a:solidFill>
+                <a:latin typeface="맑은 고딕"/>
+              </a:rPr>
+              <a:t>•  사고는 FRA 공간에서 시작</a:t>
+            </a:r>
+          </a:p>
+          <a:p>
+            <a:pPr algn="l">
+              <a:spcAft>
+                <a:spcPts val="800"/>
+              </a:spcAft>
+            </a:pPr>
+            <a:r>
+              <a:rPr sz="1600" b="0">
+                <a:solidFill>
+                  <a:srgbClr val="FFFFFF"/>
+                </a:solidFill>
+                <a:latin typeface="맑은 고딕"/>
+              </a:rPr>
+              <a:t>•  감시 기준과 점검 순서</a:t>
             </a:r>
           </a:p>
         </p:txBody>
@@ -7674,7 +8244,7 @@
                 </a:solidFill>
                 <a:latin typeface="맑은 고딕"/>
               </a:rPr>
-              <a:t>SCN 이 벌어진다</a:t>
+              <a:t>전환 전에 갖춰야 할 조건</a:t>
             </a:r>
           </a:p>
         </p:txBody>
@@ -7713,7 +8283,7 @@
                 </a:solidFill>
                 <a:latin typeface="맑은 고딕"/>
               </a:rPr>
-              <a:t>되돌릴 양</a:t>
+              <a:t>FRA, 적용 중지, MOUNT</a:t>
             </a:r>
           </a:p>
         </p:txBody>
@@ -7752,7 +8322,7 @@
                 </a:solidFill>
                 <a:latin typeface="맑은 고딕"/>
               </a:rPr>
-              <a:t>•  MOUNTED 에서 `CURRENT_SCN` → **0** (열려 있어야 값이 나온다)</a:t>
+              <a:t>•  FRA 구성: DB_RECOVERY_FILE_DEST, _SIZE</a:t>
             </a:r>
           </a:p>
           <a:p>
@@ -7768,7 +8338,7 @@
                 </a:solidFill>
                 <a:latin typeface="맑은 고딕"/>
               </a:rPr>
-              <a:t>•  연 뒤 쓰기 → 복원 지점 **2255344** / `CURRENT_SCN` **2256351**</a:t>
+              <a:t>•  Redo Apply 중지 (아니면 ORA-38784)</a:t>
             </a:r>
           </a:p>
           <a:p>
@@ -7784,7 +8354,7 @@
                 </a:solidFill>
                 <a:latin typeface="맑은 고딕"/>
               </a:rPr>
-              <a:t>•  차이 **1,007** 이 되돌릴 양</a:t>
+              <a:t>•  MOUNT 상태 (ADG였다면 재기동)</a:t>
             </a:r>
           </a:p>
           <a:p>
@@ -7800,7 +8370,23 @@
                 </a:solidFill>
                 <a:latin typeface="맑은 고딕"/>
               </a:rPr>
-              <a:t>•  시험이 길수록 이 차이가 벌어진다</a:t>
+              <a:t>•  RAC는 인스턴스 하나만 남기는 편이 안전</a:t>
+            </a:r>
+          </a:p>
+          <a:p>
+            <a:pPr algn="l">
+              <a:spcAft>
+                <a:spcPts val="1000"/>
+              </a:spcAft>
+            </a:pPr>
+            <a:r>
+              <a:rPr sz="1700" b="0">
+                <a:solidFill>
+                  <a:srgbClr val="222222"/>
+                </a:solidFill>
+                <a:latin typeface="맑은 고딕"/>
+              </a:rPr>
+              <a:t>•  Primary 쪽 설정은 손대지 않음</a:t>
             </a:r>
           </a:p>
         </p:txBody>
@@ -7832,7 +8418,7 @@
         <p:spPr>
           <a:xfrm>
             <a:off x="0" y="0"/>
-            <a:ext cx="12191695" cy="6858000"/>
+            <a:ext cx="12191695" cy="1005840"/>
           </a:xfrm>
           <a:prstGeom prst="rect">
             <a:avLst/>
@@ -7875,8 +8461,8 @@
         </p:nvSpPr>
         <p:spPr>
           <a:xfrm>
-            <a:off x="822960" y="2011680"/>
-            <a:ext cx="10515600" cy="1097280"/>
+            <a:off x="548640" y="91440"/>
+            <a:ext cx="10972800" cy="777240"/>
           </a:xfrm>
           <a:prstGeom prst="rect">
             <a:avLst/>
@@ -7895,13 +8481,13 @@
               </a:spcAft>
             </a:pPr>
             <a:r>
-              <a:rPr sz="4000" b="1">
+              <a:rPr sz="2600" b="1">
                 <a:solidFill>
                   <a:srgbClr val="FFFFFF"/>
                 </a:solidFill>
                 <a:latin typeface="맑은 고딕"/>
               </a:rPr>
-              <a:t>11.5</a:t>
+              <a:t>FRA를 함께 쓰는 두 파일</a:t>
             </a:r>
           </a:p>
         </p:txBody>
@@ -7914,8 +8500,8 @@
         </p:nvSpPr>
         <p:spPr>
           <a:xfrm>
-            <a:off x="822960" y="3017520"/>
-            <a:ext cx="10515600" cy="914400"/>
+            <a:off x="640080" y="1078992"/>
+            <a:ext cx="10881360" cy="457200"/>
           </a:xfrm>
           <a:prstGeom prst="rect">
             <a:avLst/>
@@ -7934,71 +8520,27 @@
               </a:spcAft>
             </a:pPr>
             <a:r>
-              <a:rPr sz="2800" b="1">
-                <a:solidFill>
-                  <a:srgbClr val="FFFFFF"/>
-                </a:solidFill>
-                <a:latin typeface="맑은 고딕"/>
-              </a:rPr>
-              <a:t>전환 중에 무슨 일이 일어나는가</a:t>
-            </a:r>
-          </a:p>
-        </p:txBody>
-      </p:sp>
-      <p:sp>
-        <p:nvSpPr>
-          <p:cNvPr id="5" name="Rectangle 4"/>
-          <p:cNvSpPr/>
-          <p:nvPr/>
-        </p:nvSpPr>
-        <p:spPr>
-          <a:xfrm>
-            <a:off x="822960" y="4114800"/>
-            <a:ext cx="5486400" cy="54864"/>
-          </a:xfrm>
-          <a:prstGeom prst="rect">
-            <a:avLst/>
-          </a:prstGeom>
-          <a:solidFill>
-            <a:srgbClr val="FFFFFF"/>
-          </a:solidFill>
-          <a:ln>
-            <a:noFill/>
-          </a:ln>
-          <a:effectLst/>
-        </p:spPr>
-        <p:style>
-          <a:lnRef idx="1">
-            <a:schemeClr val="accent1"/>
-          </a:lnRef>
-          <a:fillRef idx="3">
-            <a:schemeClr val="accent1"/>
-          </a:fillRef>
-          <a:effectRef idx="2">
-            <a:schemeClr val="accent1"/>
-          </a:effectRef>
-          <a:fontRef idx="minor">
-            <a:schemeClr val="lt1"/>
-          </a:fontRef>
-        </p:style>
-        <p:txBody>
-          <a:bodyPr rtlCol="0" anchor="ctr"/>
-          <a:lstStyle/>
-          <a:p>
-            <a:pPr algn="ctr"/>
-          </a:p>
-        </p:txBody>
-      </p:sp>
-      <p:sp>
-        <p:nvSpPr>
-          <p:cNvPr id="6" name="TextBox 5"/>
+              <a:rPr sz="1500" b="0">
+                <a:solidFill>
+                  <a:srgbClr val="5A6672"/>
+                </a:solidFill>
+                <a:latin typeface="맑은 고딕"/>
+              </a:rPr>
+              <a:t>Flashback 로그 + 적용 못 한 아카이브 로그</a:t>
+            </a:r>
+          </a:p>
+        </p:txBody>
+      </p:sp>
+      <p:sp>
+        <p:nvSpPr>
+          <p:cNvPr id="5" name="TextBox 4"/>
           <p:cNvSpPr txBox="1"/>
           <p:nvPr/>
         </p:nvSpPr>
         <p:spPr>
           <a:xfrm>
-            <a:off x="822960" y="4297680"/>
-            <a:ext cx="10058400" cy="2011680"/>
+            <a:off x="640080" y="1737360"/>
+            <a:ext cx="10881360" cy="4754880"/>
           </a:xfrm>
           <a:prstGeom prst="rect">
             <a:avLst/>
@@ -8013,49 +8555,81 @@
           <a:p>
             <a:pPr algn="l">
               <a:spcAft>
-                <a:spcPts val="800"/>
-              </a:spcAft>
-            </a:pPr>
-            <a:r>
-              <a:rPr sz="1600" b="0">
-                <a:solidFill>
-                  <a:srgbClr val="FFFFFF"/>
-                </a:solidFill>
-                <a:latin typeface="맑은 고딕"/>
-              </a:rPr>
-              <a:t>•  적용은 멈춘다</a:t>
-            </a:r>
-          </a:p>
-          <a:p>
-            <a:pPr algn="l">
-              <a:spcAft>
-                <a:spcPts val="800"/>
-              </a:spcAft>
-            </a:pPr>
-            <a:r>
-              <a:rPr sz="1600" b="0">
-                <a:solidFill>
-                  <a:srgbClr val="FFFFFF"/>
-                </a:solidFill>
-                <a:latin typeface="맑은 고딕"/>
-              </a:rPr>
-              <a:t>•  받기는 계속한다</a:t>
-            </a:r>
-          </a:p>
-          <a:p>
-            <a:pPr algn="l">
-              <a:spcAft>
-                <a:spcPts val="800"/>
-              </a:spcAft>
-            </a:pPr>
-            <a:r>
-              <a:rPr sz="1600" b="0">
-                <a:solidFill>
-                  <a:srgbClr val="FFFFFF"/>
-                </a:solidFill>
-                <a:latin typeface="맑은 고딕"/>
-              </a:rPr>
-              <a:t>•  FRA 가 늘어난다</a:t>
+                <a:spcPts val="1000"/>
+              </a:spcAft>
+            </a:pPr>
+            <a:r>
+              <a:rPr sz="1700" b="0">
+                <a:solidFill>
+                  <a:srgbClr val="222222"/>
+                </a:solidFill>
+                <a:latin typeface="맑은 고딕"/>
+              </a:rPr>
+              <a:t>•  Flashback 로그: 시험이 건드린 블록 수에 비례</a:t>
+            </a:r>
+          </a:p>
+          <a:p>
+            <a:pPr algn="l">
+              <a:spcAft>
+                <a:spcPts val="1000"/>
+              </a:spcAft>
+            </a:pPr>
+            <a:r>
+              <a:rPr sz="1700" b="0">
+                <a:solidFill>
+                  <a:srgbClr val="222222"/>
+                </a:solidFill>
+                <a:latin typeface="맑은 고딕"/>
+              </a:rPr>
+              <a:t>•  행 하나를 고쳐도 블록 전체 이미지</a:t>
+            </a:r>
+          </a:p>
+          <a:p>
+            <a:pPr algn="l">
+              <a:spcAft>
+                <a:spcPts val="1000"/>
+              </a:spcAft>
+            </a:pPr>
+            <a:r>
+              <a:rPr sz="1700" b="0">
+                <a:solidFill>
+                  <a:srgbClr val="222222"/>
+                </a:solidFill>
+                <a:latin typeface="맑은 고딕"/>
+              </a:rPr>
+              <a:t>•  아카이브 로그: 리두 생성량 × 전환 기간</a:t>
+            </a:r>
+          </a:p>
+          <a:p>
+            <a:pPr algn="l">
+              <a:spcAft>
+                <a:spcPts val="1000"/>
+              </a:spcAft>
+            </a:pPr>
+            <a:r>
+              <a:rPr sz="1700" b="0">
+                <a:solidFill>
+                  <a:srgbClr val="222222"/>
+                </a:solidFill>
+                <a:latin typeface="맑은 고딕"/>
+              </a:rPr>
+              <a:t>•  하루 200GB × 3일 = 600GB</a:t>
+            </a:r>
+          </a:p>
+          <a:p>
+            <a:pPr algn="l">
+              <a:spcAft>
+                <a:spcPts val="1000"/>
+              </a:spcAft>
+            </a:pPr>
+            <a:r>
+              <a:rPr sz="1700" b="0">
+                <a:solidFill>
+                  <a:srgbClr val="222222"/>
+                </a:solidFill>
+                <a:latin typeface="맑은 고딕"/>
+              </a:rPr>
+              <a:t>•  적용 전 로그는 삭제 대상이 아님</a:t>
             </a:r>
           </a:p>
         </p:txBody>
@@ -8156,7 +8730,7 @@
                 </a:solidFill>
                 <a:latin typeface="맑은 고딕"/>
               </a:rPr>
-              <a:t>학습 목표 (Objectives)</a:t>
+              <a:t>학습 목표</a:t>
             </a:r>
           </a:p>
         </p:txBody>
@@ -8195,7 +8769,7 @@
                 </a:solidFill>
                 <a:latin typeface="맑은 고딕"/>
               </a:rPr>
-              <a:t>•  Snapshot Standby 가 필요한 상황을 ADG 의 한계와 연결해 설명한다.</a:t>
+              <a:t>•  Snapshot Standby가 필요한 상황과 RAT 연계를 설명한다</a:t>
             </a:r>
           </a:p>
           <a:p>
@@ -8211,7 +8785,7 @@
                 </a:solidFill>
                 <a:latin typeface="맑은 고딕"/>
               </a:rPr>
-              <a:t>•  전환에 필요한 전제 조건을 확인하고 준비한다.</a:t>
+              <a:t>•  보장 복원 지점과 Flashback의 역할을 설명한다</a:t>
             </a:r>
           </a:p>
           <a:p>
@@ -8227,7 +8801,7 @@
                 </a:solidFill>
                 <a:latin typeface="맑은 고딕"/>
               </a:rPr>
-              <a:t>•  전환 후 역할·컨트롤 파일 유형·플래시백 상태의 변화를 읽는다.</a:t>
+              <a:t>•  받기는 계속, 적용만 멈추는 구조를 설명한다</a:t>
             </a:r>
           </a:p>
           <a:p>
@@ -8243,7 +8817,7 @@
                 </a:solidFill>
                 <a:latin typeface="맑은 고딕"/>
               </a:rPr>
-              <a:t>•  보장 복원 지점이 자동 생성되는 것을 확인하고 의미를 설명한다.</a:t>
+              <a:t>•  FRA·Flashback 로그 공간을 계획하고 감시한다</a:t>
             </a:r>
           </a:p>
           <a:p>
@@ -8259,7 +8833,7 @@
                 </a:solidFill>
                 <a:latin typeface="맑은 고딕"/>
               </a:rPr>
-              <a:t>•  Snapshot Standby 에서 되는 일과 안 되는 일을 구분한다.</a:t>
+              <a:t>•  전환·열기·되돌리기와 순서 오류를 해석한다</a:t>
             </a:r>
           </a:p>
           <a:p>
@@ -8275,23 +8849,7 @@
                 </a:solidFill>
                 <a:latin typeface="맑은 고딕"/>
               </a:rPr>
-              <a:t>•  되돌리기 절차를 수행하고 데이터가 원래대로 돌아왔음을 검증한다.</a:t>
-            </a:r>
-          </a:p>
-          <a:p>
-            <a:pPr algn="l">
-              <a:spcAft>
-                <a:spcPts val="1000"/>
-              </a:spcAft>
-            </a:pPr>
-            <a:r>
-              <a:rPr sz="1600" b="0">
-                <a:solidFill>
-                  <a:srgbClr val="222222"/>
-                </a:solidFill>
-                <a:latin typeface="맑은 고딕"/>
-              </a:rPr>
-              <a:t>•  ORA-38784·ORA-01153·ORA-01665·ORA-10456 을 해석한다.</a:t>
+              <a:t>•  세 가지 활용 방식 중 요구에 맞는 것을 고른다</a:t>
             </a:r>
           </a:p>
         </p:txBody>
@@ -8392,7 +8950,7 @@
                 </a:solidFill>
                 <a:latin typeface="맑은 고딕"/>
               </a:rPr>
-              <a:t>ORA-01665</a:t>
+              <a:t>삭제 정책과 Primary FRA</a:t>
             </a:r>
           </a:p>
         </p:txBody>
@@ -8431,7 +8989,7 @@
                 </a:solidFill>
                 <a:latin typeface="맑은 고딕"/>
               </a:rPr>
-              <a:t>세 번째 만난다</a:t>
+              <a:t>APPLIED ON ALL STANDBY의 영향</a:t>
             </a:r>
           </a:p>
         </p:txBody>
@@ -8470,7 +9028,7 @@
                 </a:solidFill>
                 <a:latin typeface="맑은 고딕"/>
               </a:rPr>
-              <a:t>•  Snapshot Standby 에서 MRP 기동 → **ORA-01665**</a:t>
+              <a:t>•  적용 기준 정책이면 Primary에서도 보존</a:t>
             </a:r>
           </a:p>
           <a:p>
@@ -8486,7 +9044,7 @@
                 </a:solidFill>
                 <a:latin typeface="맑은 고딕"/>
               </a:rPr>
-              <a:t>•  1장 Primary(CURRENT) / 10장 Far Sync(FARSYNC) / 11장 Snapshot(CURRENT)</a:t>
+              <a:t>•  Primary와 Standby FRA가 함께 차오름</a:t>
             </a:r>
           </a:p>
           <a:p>
@@ -8502,7 +9060,7 @@
                 </a:solidFill>
                 <a:latin typeface="맑은 고딕"/>
               </a:rPr>
-              <a:t>•  **MRP 를 띄울 수 있는 것은 Standby 컨트롤 파일뿐**</a:t>
+              <a:t>•  시험 기간에만 정책을 푸는 것은 위험</a:t>
             </a:r>
           </a:p>
           <a:p>
@@ -8518,23 +9076,7 @@
                 </a:solidFill>
                 <a:latin typeface="맑은 고딕"/>
               </a:rPr>
-              <a:t>•  오라클이 이 판단을 **역할이 아니라 컨트롤 파일 유형**으로 한다</a:t>
-            </a:r>
-          </a:p>
-          <a:p>
-            <a:pPr algn="l">
-              <a:spcAft>
-                <a:spcPts val="1000"/>
-              </a:spcAft>
-            </a:pPr>
-            <a:r>
-              <a:rPr sz="1700" b="0">
-                <a:solidFill>
-                  <a:srgbClr val="222222"/>
-                </a:solidFill>
-                <a:latin typeface="맑은 고딕"/>
-              </a:rPr>
-              <a:t>•  `RECOVERY_MODE` = **IDLE**, MRP0 = 0개</a:t>
+              <a:t>•  지워진 로그는 되돌린 뒤 갭이 됨</a:t>
             </a:r>
           </a:p>
         </p:txBody>
@@ -8635,7 +9177,7 @@
                 </a:solidFill>
                 <a:latin typeface="맑은 고딕"/>
               </a:rPr>
-              <a:t>두 지연이 갈라진다</a:t>
+              <a:t>FRA가 가득 차면</a:t>
             </a:r>
           </a:p>
         </p:txBody>
@@ -8674,7 +9216,7 @@
                 </a:solidFill>
                 <a:latin typeface="맑은 고딕"/>
               </a:rPr>
-              <a:t>Snapshot 의 표식</a:t>
+              <a:t>시험 DB의 공간 문제가 리두 보관까지 막음</a:t>
             </a:r>
           </a:p>
         </p:txBody>
@@ -8713,7 +9255,7 @@
                 </a:solidFill>
                 <a:latin typeface="맑은 고딕"/>
               </a:rPr>
-              <a:t>•  `transport lag` — **+00 00:00:00** (계속 받는다)</a:t>
+              <a:t>•  보장 복원 지점의 로그는 자동 삭제 불가</a:t>
             </a:r>
           </a:p>
           <a:p>
@@ -8729,7 +9271,7 @@
                 </a:solidFill>
                 <a:latin typeface="맑은 고딕"/>
               </a:rPr>
-              <a:t>•  `apply lag` — **+00 00:02:38** (적용을 안 한다)</a:t>
+              <a:t>•  Snapshot 쪽 쓰기 정지</a:t>
             </a:r>
           </a:p>
           <a:p>
@@ -8745,7 +9287,7 @@
                 </a:solidFill>
                 <a:latin typeface="맑은 고딕"/>
               </a:rPr>
-              <a:t>•  RFS 있음 / MRP0 없음</a:t>
+              <a:t>•  리두 아카이브 실패로 Primary 목적지 오류</a:t>
             </a:r>
           </a:p>
           <a:p>
@@ -8761,7 +9303,23 @@
                 </a:solidFill>
                 <a:latin typeface="맑은 고딕"/>
               </a:rPr>
-              <a:t>•  Primary 목적지는 **VALID** — 영향받지 않는다</a:t>
+              <a:t>•  해결: FRA 확장 또는 시험 중단 후 되돌리기</a:t>
+            </a:r>
+          </a:p>
+          <a:p>
+            <a:pPr algn="l">
+              <a:spcAft>
+                <a:spcPts val="1000"/>
+              </a:spcAft>
+            </a:pPr>
+            <a:r>
+              <a:rPr sz="1700" b="0">
+                <a:solidFill>
+                  <a:srgbClr val="222222"/>
+                </a:solidFill>
+                <a:latin typeface="맑은 고딕"/>
+              </a:rPr>
+              <a:t>•  복원 지점을 지우면 되돌릴 길이 사라짐</a:t>
             </a:r>
           </a:p>
         </p:txBody>
@@ -8862,7 +9420,7 @@
                 </a:solidFill>
                 <a:latin typeface="맑은 고딕"/>
               </a:rPr>
-              <a:t>쌓이는 리두</a:t>
+              <a:t>공간 감시</a:t>
             </a:r>
           </a:p>
         </p:txBody>
@@ -8901,7 +9459,7 @@
                 </a:solidFill>
                 <a:latin typeface="맑은 고딕"/>
               </a:rPr>
-              <a:t>갭의 위험</a:t>
+              <a:t>FRA 전체 사용률을 기준으로</a:t>
             </a:r>
           </a:p>
         </p:txBody>
@@ -8940,7 +9498,7 @@
                 </a:solidFill>
                 <a:latin typeface="맑은 고딕"/>
               </a:rPr>
-              <a:t>•  전환 중 적용이 멈추므로 "아직 필요한" 아카이브가 늘어난다</a:t>
+              <a:t>•  V$RECOVERY_FILE_DEST: 전체 한도와 사용량</a:t>
             </a:r>
           </a:p>
           <a:p>
@@ -8956,7 +9514,7 @@
                 </a:solidFill>
                 <a:latin typeface="맑은 고딕"/>
               </a:rPr>
-              <a:t>•  Primary 가 그것을 지우면 **갭**이 된다</a:t>
+              <a:t>•  V$RECOVERY_AREA_USAGE: 유형별 비율</a:t>
             </a:r>
           </a:p>
           <a:p>
@@ -8972,7 +9530,7 @@
                 </a:solidFill>
                 <a:latin typeface="맑은 고딕"/>
               </a:rPr>
-              <a:t>•  다행히 **전송은 계속**되므로 이미 받아 둔 것은 무사하다</a:t>
+              <a:t>•  V$RESTORE_POINT.STORAGE_SIZE: 복원 지점 몫</a:t>
             </a:r>
           </a:p>
           <a:p>
@@ -8988,7 +9546,7 @@
                 </a:solidFill>
                 <a:latin typeface="맑은 고딕"/>
               </a:rPr>
-              <a:t>•  위험한 것은 **전송이 끊겼던 구간**</a:t>
+              <a:t>•  85%, 97%에서 alert log 경고</a:t>
             </a:r>
           </a:p>
           <a:p>
@@ -9004,7 +9562,7 @@
                 </a:solidFill>
                 <a:latin typeface="맑은 고딕"/>
               </a:rPr>
-              <a:t>•  대책 — 기간을 짧게, Primary 보관 정책을 확인</a:t>
+              <a:t>•  80% 같은 중단 기준을 미리 정함</a:t>
             </a:r>
           </a:p>
         </p:txBody>
@@ -9105,7 +9663,7 @@
                 </a:solidFill>
                 <a:latin typeface="맑은 고딕"/>
               </a:rPr>
-              <a:t>FRA</a:t>
+              <a:t>전환 전 점검 순서</a:t>
             </a:r>
           </a:p>
         </p:txBody>
@@ -9144,7 +9702,7 @@
                 </a:solidFill>
                 <a:latin typeface="맑은 고딕"/>
               </a:rPr>
-              <a:t>새 유형이 생긴다</a:t>
+              <a:t>명령 성공 조건과 전환 후 위험을 함께</a:t>
             </a:r>
           </a:p>
         </p:txBody>
@@ -9183,7 +9741,7 @@
                 </a:solidFill>
                 <a:latin typeface="맑은 고딕"/>
               </a:rPr>
-              <a:t>•  전환 전 — REDO LOG / ARCHIVED LOG / BACKUP PIECE</a:t>
+              <a:t>•  1) 역할이 PHYSICAL STANDBY인가</a:t>
             </a:r>
           </a:p>
           <a:p>
@@ -9199,7 +9757,7 @@
                 </a:solidFill>
                 <a:latin typeface="맑은 고딕"/>
               </a:rPr>
-              <a:t>•  전환 후 — **FLASHBACK LOG** 2.6% / 2개 추가</a:t>
+              <a:t>•  2) FRA 경로·크기, 3) 여유 공간</a:t>
             </a:r>
           </a:p>
           <a:p>
@@ -9215,7 +9773,7 @@
                 </a:solidFill>
                 <a:latin typeface="맑은 고딕"/>
               </a:rPr>
-              <a:t>•  1,536MB → **1,941MB** (405MB 증가)</a:t>
+              <a:t>•  4) 적용 중지, 5) MOUNTED</a:t>
             </a:r>
           </a:p>
           <a:p>
@@ -9231,7 +9789,23 @@
                 </a:solidFill>
                 <a:latin typeface="맑은 고딕"/>
               </a:rPr>
-              <a:t>•  몇 건만 바꿨는데 405MB 인 이유 — **블록 단위 이전 이미지**</a:t>
+              <a:t>•  6) 재해 대비를 맡을 다른 Standby가 있는가</a:t>
+            </a:r>
+          </a:p>
+          <a:p>
+            <a:pPr algn="l">
+              <a:spcAft>
+                <a:spcPts val="1000"/>
+              </a:spcAft>
+            </a:pPr>
+            <a:r>
+              <a:rPr sz="1700" b="0">
+                <a:solidFill>
+                  <a:srgbClr val="222222"/>
+                </a:solidFill>
+                <a:latin typeface="맑은 고딕"/>
+              </a:rPr>
+              <a:t>•  apply lag가 충분히 작은지도 확인</a:t>
             </a:r>
           </a:p>
         </p:txBody>
@@ -9263,7 +9837,7 @@
         <p:spPr>
           <a:xfrm>
             <a:off x="0" y="0"/>
-            <a:ext cx="12191695" cy="1005840"/>
+            <a:ext cx="12191695" cy="6858000"/>
           </a:xfrm>
           <a:prstGeom prst="rect">
             <a:avLst/>
@@ -9306,8 +9880,8 @@
         </p:nvSpPr>
         <p:spPr>
           <a:xfrm>
-            <a:off x="548640" y="91440"/>
-            <a:ext cx="10972800" cy="777240"/>
+            <a:off x="822960" y="2011680"/>
+            <a:ext cx="10515600" cy="1097280"/>
           </a:xfrm>
           <a:prstGeom prst="rect">
             <a:avLst/>
@@ -9326,13 +9900,13 @@
               </a:spcAft>
             </a:pPr>
             <a:r>
-              <a:rPr sz="2600" b="1">
+              <a:rPr sz="4000" b="1">
                 <a:solidFill>
                   <a:srgbClr val="FFFFFF"/>
                 </a:solidFill>
                 <a:latin typeface="맑은 고딕"/>
               </a:rPr>
-              <a:t>무엇으로 감시하는가</a:t>
+              <a:t>11.5</a:t>
             </a:r>
           </a:p>
         </p:txBody>
@@ -9345,8 +9919,8 @@
         </p:nvSpPr>
         <p:spPr>
           <a:xfrm>
-            <a:off x="640080" y="1078992"/>
-            <a:ext cx="10881360" cy="457200"/>
+            <a:off x="822960" y="3017520"/>
+            <a:ext cx="10515600" cy="914400"/>
           </a:xfrm>
           <a:prstGeom prst="rect">
             <a:avLst/>
@@ -9365,27 +9939,71 @@
               </a:spcAft>
             </a:pPr>
             <a:r>
-              <a:rPr sz="1500" b="0">
-                <a:solidFill>
-                  <a:srgbClr val="5A6672"/>
-                </a:solidFill>
-                <a:latin typeface="맑은 고딕"/>
-              </a:rPr>
-              <a:t>실측이 예상과 달랐다</a:t>
-            </a:r>
-          </a:p>
-        </p:txBody>
-      </p:sp>
-      <p:sp>
-        <p:nvSpPr>
-          <p:cNvPr id="5" name="TextBox 4"/>
+              <a:rPr sz="2800" b="1">
+                <a:solidFill>
+                  <a:srgbClr val="FFFFFF"/>
+                </a:solidFill>
+                <a:latin typeface="맑은 고딕"/>
+              </a:rPr>
+              <a:t>전환과 되돌리기 명령</a:t>
+            </a:r>
+          </a:p>
+        </p:txBody>
+      </p:sp>
+      <p:sp>
+        <p:nvSpPr>
+          <p:cNvPr id="5" name="Rectangle 4"/>
+          <p:cNvSpPr/>
+          <p:nvPr/>
+        </p:nvSpPr>
+        <p:spPr>
+          <a:xfrm>
+            <a:off x="822960" y="4114800"/>
+            <a:ext cx="5486400" cy="54864"/>
+          </a:xfrm>
+          <a:prstGeom prst="rect">
+            <a:avLst/>
+          </a:prstGeom>
+          <a:solidFill>
+            <a:srgbClr val="FFFFFF"/>
+          </a:solidFill>
+          <a:ln>
+            <a:noFill/>
+          </a:ln>
+          <a:effectLst/>
+        </p:spPr>
+        <p:style>
+          <a:lnRef idx="1">
+            <a:schemeClr val="accent1"/>
+          </a:lnRef>
+          <a:fillRef idx="3">
+            <a:schemeClr val="accent1"/>
+          </a:fillRef>
+          <a:effectRef idx="2">
+            <a:schemeClr val="accent1"/>
+          </a:effectRef>
+          <a:fontRef idx="minor">
+            <a:schemeClr val="lt1"/>
+          </a:fontRef>
+        </p:style>
+        <p:txBody>
+          <a:bodyPr rtlCol="0" anchor="ctr"/>
+          <a:lstStyle/>
+          <a:p>
+            <a:pPr algn="ctr"/>
+          </a:p>
+        </p:txBody>
+      </p:sp>
+      <p:sp>
+        <p:nvSpPr>
+          <p:cNvPr id="6" name="TextBox 5"/>
           <p:cNvSpPr txBox="1"/>
           <p:nvPr/>
         </p:nvSpPr>
         <p:spPr>
           <a:xfrm>
-            <a:off x="640080" y="1737360"/>
-            <a:ext cx="10881360" cy="4754880"/>
+            <a:off x="822960" y="4297680"/>
+            <a:ext cx="10058400" cy="2011680"/>
           </a:xfrm>
           <a:prstGeom prst="rect">
             <a:avLst/>
@@ -9400,65 +10018,49 @@
           <a:p>
             <a:pPr algn="l">
               <a:spcAft>
-                <a:spcPts val="1000"/>
-              </a:spcAft>
-            </a:pPr>
-            <a:r>
-              <a:rPr sz="1700" b="0">
-                <a:solidFill>
-                  <a:srgbClr val="222222"/>
-                </a:solidFill>
-                <a:latin typeface="맑은 고딕"/>
-              </a:rPr>
-              <a:t>•  144,766행 테이블 생성 후 `STORAGE_SIZE` → **200MB 그대로**</a:t>
-            </a:r>
-          </a:p>
-          <a:p>
-            <a:pPr algn="l">
-              <a:spcAft>
-                <a:spcPts val="1000"/>
-              </a:spcAft>
-            </a:pPr>
-            <a:r>
-              <a:rPr sz="1700" b="0">
-                <a:solidFill>
-                  <a:srgbClr val="222222"/>
-                </a:solidFill>
-                <a:latin typeface="맑은 고딕"/>
-              </a:rPr>
-              <a:t>•  이 값은 "쓴 양" 이 아니라 **확보된 크기**</a:t>
-            </a:r>
-          </a:p>
-          <a:p>
-            <a:pPr algn="l">
-              <a:spcAft>
-                <a:spcPts val="1000"/>
-              </a:spcAft>
-            </a:pPr>
-            <a:r>
-              <a:rPr sz="1700" b="0">
-                <a:solidFill>
-                  <a:srgbClr val="222222"/>
-                </a:solidFill>
-                <a:latin typeface="맑은 고딕"/>
-              </a:rPr>
-              <a:t>•  감시는 `V$FLASH_RECOVERY_AREA_USAGE` 의 **FLASHBACK LOG** 로</a:t>
-            </a:r>
-          </a:p>
-          <a:p>
-            <a:pPr algn="l">
-              <a:spcAft>
-                <a:spcPts val="1000"/>
-              </a:spcAft>
-            </a:pPr>
-            <a:r>
-              <a:rPr sz="1700" b="0">
-                <a:solidFill>
-                  <a:srgbClr val="222222"/>
-                </a:solidFill>
-                <a:latin typeface="맑은 고딕"/>
-              </a:rPr>
-              <a:t>•  중단 기준 — 전체 사용률 80% 또는 계획한 상한 초과</a:t>
+                <a:spcPts val="800"/>
+              </a:spcAft>
+            </a:pPr>
+            <a:r>
+              <a:rPr sz="1600" b="0">
+                <a:solidFill>
+                  <a:srgbClr val="FFFFFF"/>
+                </a:solidFill>
+                <a:latin typeface="맑은 고딕"/>
+              </a:rPr>
+              <a:t>•  전환, 열기, 되돌리기</a:t>
+            </a:r>
+          </a:p>
+          <a:p>
+            <a:pPr algn="l">
+              <a:spcAft>
+                <a:spcPts val="800"/>
+              </a:spcAft>
+            </a:pPr>
+            <a:r>
+              <a:rPr sz="1600" b="0">
+                <a:solidFill>
+                  <a:srgbClr val="FFFFFF"/>
+                </a:solidFill>
+                <a:latin typeface="맑은 고딕"/>
+              </a:rPr>
+              <a:t>•  순서를 어기면 나는 오류들</a:t>
+            </a:r>
+          </a:p>
+          <a:p>
+            <a:pPr algn="l">
+              <a:spcAft>
+                <a:spcPts val="800"/>
+              </a:spcAft>
+            </a:pPr>
+            <a:r>
+              <a:rPr sz="1600" b="0">
+                <a:solidFill>
+                  <a:srgbClr val="FFFFFF"/>
+                </a:solidFill>
+                <a:latin typeface="맑은 고딕"/>
+              </a:rPr>
+              <a:t>•  Broker의 CONVERT DATABASE</a:t>
             </a:r>
           </a:p>
         </p:txBody>
@@ -9559,7 +10161,7 @@
                 </a:solidFill>
                 <a:latin typeface="맑은 고딕"/>
               </a:rPr>
-              <a:t>나누어 하기</a:t>
+              <a:t>Snapshot Standby로 전환</a:t>
             </a:r>
           </a:p>
         </p:txBody>
@@ -9598,7 +10200,7 @@
                 </a:solidFill>
                 <a:latin typeface="맑은 고딕"/>
               </a:rPr>
-              <a:t>두 번째 전환의 SCN</a:t>
+              <a:t>CANCEL, CONVERT, OPEN</a:t>
             </a:r>
           </a:p>
         </p:txBody>
@@ -9637,7 +10239,7 @@
                 </a:solidFill>
                 <a:latin typeface="맑은 고딕"/>
               </a:rPr>
-              <a:t>•  첫 전환 SCN **2252853** → 되돌림 → 두 번째 전환 SCN **2253716**</a:t>
+              <a:t>•  RECOVER MANAGED STANDBY DATABASE CANCEL</a:t>
             </a:r>
           </a:p>
           <a:p>
@@ -9653,7 +10255,7 @@
                 </a:solidFill>
                 <a:latin typeface="맑은 고딕"/>
               </a:rPr>
-              <a:t>•  되돌리면 Primary 를 따라잡고, 그 상태에서 다시 전환한다</a:t>
+              <a:t>•  ALTER DATABASE CONVERT TO SNAPSHOT STANDBY</a:t>
             </a:r>
           </a:p>
           <a:p>
@@ -9669,7 +10271,7 @@
                 </a:solidFill>
                 <a:latin typeface="맑은 고딕"/>
               </a:rPr>
-              <a:t>•  그래서 **매번 더 최신 데이터**에서 시작한다</a:t>
+              <a:t>•  명령 직후 MOUNT 상태로 남음</a:t>
             </a:r>
           </a:p>
           <a:p>
@@ -9685,7 +10287,23 @@
                 </a:solidFill>
                 <a:latin typeface="맑은 고딕"/>
               </a:rPr>
-              <a:t>•  쌓이는 리두가 적고 FRA 사용량도 초기화된다</a:t>
+              <a:t>•  ALTER DATABASE OPEN으로 읽기·쓰기</a:t>
+            </a:r>
+          </a:p>
+          <a:p>
+            <a:pPr algn="l">
+              <a:spcAft>
+                <a:spcPts val="1000"/>
+              </a:spcAft>
+            </a:pPr>
+            <a:r>
+              <a:rPr sz="1700" b="0">
+                <a:solidFill>
+                  <a:srgbClr val="222222"/>
+                </a:solidFill>
+                <a:latin typeface="맑은 고딕"/>
+              </a:rPr>
+              <a:t>•  적용 중 전환은 ORA-38784 + ORA-01153</a:t>
             </a:r>
           </a:p>
         </p:txBody>
@@ -9786,7 +10404,7 @@
                 </a:solidFill>
                 <a:latin typeface="맑은 고딕"/>
               </a:rPr>
-              <a:t>전환 명령이 하는 일</a:t>
+              <a:t>열기와 PDB</a:t>
             </a:r>
           </a:p>
         </p:txBody>
@@ -9825,7 +10443,7 @@
                 </a:solidFill>
                 <a:latin typeface="맑은 고딕"/>
               </a:rPr>
-              <a:t>순서를 재구성한다</a:t>
+              <a:t>CDB를 열어도 PDB는 MOUNTED</a:t>
             </a:r>
           </a:p>
         </p:txBody>
@@ -9864,7 +10482,7 @@
                 </a:solidFill>
                 <a:latin typeface="맑은 고딕"/>
               </a:rPr>
-              <a:t>•  ① 보장 복원 지점 생성 ← 근거 ORA-38784</a:t>
+              <a:t>•  OPEN 순간부터 Primary와 갈라짐</a:t>
             </a:r>
           </a:p>
           <a:p>
@@ -9880,7 +10498,7 @@
                 </a:solidFill>
                 <a:latin typeface="맑은 고딕"/>
               </a:rPr>
-              <a:t>•  ② 적용이 멈춰 있어야 한다 ← 근거 ORA-01153</a:t>
+              <a:t>•  PDB는 ALL OPEN으로 따로 열기</a:t>
             </a:r>
           </a:p>
           <a:p>
@@ -9896,7 +10514,7 @@
                 </a:solidFill>
                 <a:latin typeface="맑은 고딕"/>
               </a:rPr>
-              <a:t>•  ③ 닫고 마운트로 ← 근거 전환 후 MOUNTED</a:t>
+              <a:t>•  열기 전 PDB 조회는 ORA-01219</a:t>
             </a:r>
           </a:p>
           <a:p>
@@ -9912,7 +10530,7 @@
                 </a:solidFill>
                 <a:latin typeface="맑은 고딕"/>
               </a:rPr>
-              <a:t>•  ④ 컨트롤 파일 유형 변경 ⑤ 역할 변경 ⑥ 플래시백 상태 변경</a:t>
+              <a:t>•  DDL·DML 모두 가능, ORA-16000 없음</a:t>
             </a:r>
           </a:p>
           <a:p>
@@ -9928,7 +10546,7 @@
                 </a:solidFill>
                 <a:latin typeface="맑은 고딕"/>
               </a:rPr>
-              <a:t>•  **①이 첫 단계인 것**이 핵심이다</a:t>
+              <a:t>•  SCN은 시험 작업에 따라 독자적으로 진행</a:t>
             </a:r>
           </a:p>
         </p:txBody>
@@ -9960,7 +10578,7 @@
         <p:spPr>
           <a:xfrm>
             <a:off x="0" y="0"/>
-            <a:ext cx="12191695" cy="6858000"/>
+            <a:ext cx="12191695" cy="1005840"/>
           </a:xfrm>
           <a:prstGeom prst="rect">
             <a:avLst/>
@@ -10003,8 +10621,8 @@
         </p:nvSpPr>
         <p:spPr>
           <a:xfrm>
-            <a:off x="822960" y="2011680"/>
-            <a:ext cx="10515600" cy="1097280"/>
+            <a:off x="548640" y="91440"/>
+            <a:ext cx="10972800" cy="777240"/>
           </a:xfrm>
           <a:prstGeom prst="rect">
             <a:avLst/>
@@ -10023,13 +10641,13 @@
               </a:spcAft>
             </a:pPr>
             <a:r>
-              <a:rPr sz="4000" b="1">
+              <a:rPr sz="2600" b="1">
                 <a:solidFill>
                   <a:srgbClr val="FFFFFF"/>
                 </a:solidFill>
                 <a:latin typeface="맑은 고딕"/>
               </a:rPr>
-              <a:t>11.6</a:t>
+              <a:t>열려 있는 동안</a:t>
             </a:r>
           </a:p>
         </p:txBody>
@@ -10042,8 +10660,8 @@
         </p:nvSpPr>
         <p:spPr>
           <a:xfrm>
-            <a:off x="822960" y="3017520"/>
-            <a:ext cx="10515600" cy="914400"/>
+            <a:off x="640080" y="1078992"/>
+            <a:ext cx="10881360" cy="457200"/>
           </a:xfrm>
           <a:prstGeom prst="rect">
             <a:avLst/>
@@ -10062,71 +10680,27 @@
               </a:spcAft>
             </a:pPr>
             <a:r>
-              <a:rPr sz="2800" b="1">
-                <a:solidFill>
-                  <a:srgbClr val="FFFFFF"/>
-                </a:solidFill>
-                <a:latin typeface="맑은 고딕"/>
-              </a:rPr>
-              <a:t>되돌리기</a:t>
-            </a:r>
-          </a:p>
-        </p:txBody>
-      </p:sp>
-      <p:sp>
-        <p:nvSpPr>
-          <p:cNvPr id="5" name="Rectangle 4"/>
-          <p:cNvSpPr/>
-          <p:nvPr/>
-        </p:nvSpPr>
-        <p:spPr>
-          <a:xfrm>
-            <a:off x="822960" y="4114800"/>
-            <a:ext cx="5486400" cy="54864"/>
-          </a:xfrm>
-          <a:prstGeom prst="rect">
-            <a:avLst/>
-          </a:prstGeom>
-          <a:solidFill>
-            <a:srgbClr val="FFFFFF"/>
-          </a:solidFill>
-          <a:ln>
-            <a:noFill/>
-          </a:ln>
-          <a:effectLst/>
-        </p:spPr>
-        <p:style>
-          <a:lnRef idx="1">
-            <a:schemeClr val="accent1"/>
-          </a:lnRef>
-          <a:fillRef idx="3">
-            <a:schemeClr val="accent1"/>
-          </a:fillRef>
-          <a:effectRef idx="2">
-            <a:schemeClr val="accent1"/>
-          </a:effectRef>
-          <a:fontRef idx="minor">
-            <a:schemeClr val="lt1"/>
-          </a:fontRef>
-        </p:style>
-        <p:txBody>
-          <a:bodyPr rtlCol="0" anchor="ctr"/>
-          <a:lstStyle/>
-          <a:p>
-            <a:pPr algn="ctr"/>
-          </a:p>
-        </p:txBody>
-      </p:sp>
-      <p:sp>
-        <p:nvSpPr>
-          <p:cNvPr id="6" name="TextBox 5"/>
+              <a:rPr sz="1500" b="0">
+                <a:solidFill>
+                  <a:srgbClr val="5A6672"/>
+                </a:solidFill>
+                <a:latin typeface="맑은 고딕"/>
+              </a:rPr>
+              <a:t>자동 작업과 서비스 점검</a:t>
+            </a:r>
+          </a:p>
+        </p:txBody>
+      </p:sp>
+      <p:sp>
+        <p:nvSpPr>
+          <p:cNvPr id="5" name="TextBox 4"/>
           <p:cNvSpPr txBox="1"/>
           <p:nvPr/>
         </p:nvSpPr>
         <p:spPr>
           <a:xfrm>
-            <a:off x="822960" y="4297680"/>
-            <a:ext cx="10058400" cy="2011680"/>
+            <a:off x="640080" y="1737360"/>
+            <a:ext cx="10881360" cy="4754880"/>
           </a:xfrm>
           <a:prstGeom prst="rect">
             <a:avLst/>
@@ -10141,49 +10715,65 @@
           <a:p>
             <a:pPr algn="l">
               <a:spcAft>
-                <a:spcPts val="800"/>
-              </a:spcAft>
-            </a:pPr>
-            <a:r>
-              <a:rPr sz="1600" b="0">
-                <a:solidFill>
-                  <a:srgbClr val="FFFFFF"/>
-                </a:solidFill>
-                <a:latin typeface="맑은 고딕"/>
-              </a:rPr>
-              <a:t>•  절차</a:t>
-            </a:r>
-          </a:p>
-          <a:p>
-            <a:pPr algn="l">
-              <a:spcAft>
-                <a:spcPts val="800"/>
-              </a:spcAft>
-            </a:pPr>
-            <a:r>
-              <a:rPr sz="1600" b="0">
-                <a:solidFill>
-                  <a:srgbClr val="FFFFFF"/>
-                </a:solidFill>
-                <a:latin typeface="맑은 고딕"/>
-              </a:rPr>
-              <a:t>•  여는 순서</a:t>
-            </a:r>
-          </a:p>
-          <a:p>
-            <a:pPr algn="l">
-              <a:spcAft>
-                <a:spcPts val="800"/>
-              </a:spcAft>
-            </a:pPr>
-            <a:r>
-              <a:rPr sz="1600" b="0">
-                <a:solidFill>
-                  <a:srgbClr val="FFFFFF"/>
-                </a:solidFill>
-                <a:latin typeface="맑은 고딕"/>
-              </a:rPr>
-              <a:t>•  검증</a:t>
+                <a:spcPts val="1000"/>
+              </a:spcAft>
+            </a:pPr>
+            <a:r>
+              <a:rPr sz="1700" b="0">
+                <a:solidFill>
+                  <a:srgbClr val="222222"/>
+                </a:solidFill>
+                <a:latin typeface="맑은 고딕"/>
+              </a:rPr>
+              <a:t>•  자동 통계 수집이 계획을 바꿀 수 있음</a:t>
+            </a:r>
+          </a:p>
+          <a:p>
+            <a:pPr algn="l">
+              <a:spcAft>
+                <a:spcPts val="1000"/>
+              </a:spcAft>
+            </a:pPr>
+            <a:r>
+              <a:rPr sz="1700" b="0">
+                <a:solidFill>
+                  <a:srgbClr val="222222"/>
+                </a:solidFill>
+                <a:latin typeface="맑은 고딕"/>
+              </a:rPr>
+              <a:t>•  비교 시험이면 DBMS_AUTO_TASK_ADMIN으로 중지</a:t>
+            </a:r>
+          </a:p>
+          <a:p>
+            <a:pPr algn="l">
+              <a:spcAft>
+                <a:spcPts val="1000"/>
+              </a:spcAft>
+            </a:pPr>
+            <a:r>
+              <a:rPr sz="1700" b="0">
+                <a:solidFill>
+                  <a:srgbClr val="222222"/>
+                </a:solidFill>
+                <a:latin typeface="맑은 고딕"/>
+              </a:rPr>
+              <a:t>•  스케줄러 잡은 JOB_QUEUE_PROCESSES로 차단</a:t>
+            </a:r>
+          </a:p>
+          <a:p>
+            <a:pPr algn="l">
+              <a:spcAft>
+                <a:spcPts val="1000"/>
+              </a:spcAft>
+            </a:pPr>
+            <a:r>
+              <a:rPr sz="1700" b="0">
+                <a:solidFill>
+                  <a:srgbClr val="222222"/>
+                </a:solidFill>
+                <a:latin typeface="맑은 고딕"/>
+              </a:rPr>
+              <a:t>•  역할 기반 서비스로 운영 접속 차단</a:t>
             </a:r>
           </a:p>
         </p:txBody>
@@ -10284,7 +10874,7 @@
                 </a:solidFill>
                 <a:latin typeface="맑은 고딕"/>
               </a:rPr>
-              <a:t>되돌리기</a:t>
+              <a:t>Physical Standby로 되돌리기</a:t>
             </a:r>
           </a:p>
         </p:txBody>
@@ -10323,7 +10913,7 @@
                 </a:solidFill>
                 <a:latin typeface="맑은 고딕"/>
               </a:rPr>
-              <a:t>MOUNT 에서 한다</a:t>
+              <a:t>MOUNT에서 CONVERT TO PHYSICAL STANDBY</a:t>
             </a:r>
           </a:p>
         </p:txBody>
@@ -10362,7 +10952,7 @@
                 </a:solidFill>
                 <a:latin typeface="맑은 고딕"/>
               </a:rPr>
-              <a:t>•  `SHUTDOWN IMMEDIATE` → `STARTUP MOUNT`</a:t>
+              <a:t>•  SHUTDOWN IMMEDIATE, STARTUP MOUNT</a:t>
             </a:r>
           </a:p>
           <a:p>
@@ -10378,7 +10968,7 @@
                 </a:solidFill>
                 <a:latin typeface="맑은 고딕"/>
               </a:rPr>
-              <a:t>•  `ALTER DATABASE CONVERT TO PHYSICAL STANDBY`</a:t>
+              <a:t>•  ALTER DATABASE CONVERT TO PHYSICAL STANDBY</a:t>
             </a:r>
           </a:p>
           <a:p>
@@ -10394,7 +10984,7 @@
                 </a:solidFill>
                 <a:latin typeface="맑은 고딕"/>
               </a:rPr>
-              <a:t>•  결과 — `PHYSICAL STANDBY / STANDBY / NO`</a:t>
+              <a:t>•  열린 상태면 ORA-01126</a:t>
             </a:r>
           </a:p>
           <a:p>
@@ -10410,7 +11000,7 @@
                 </a:solidFill>
                 <a:latin typeface="맑은 고딕"/>
               </a:rPr>
-              <a:t>•  **복원 지점이 사라진다** (`V$RESTORE_POINT` 0행)</a:t>
+              <a:t>•  한 번도 열지 않았으면 ORA-16433</a:t>
             </a:r>
           </a:p>
           <a:p>
@@ -10426,7 +11016,7 @@
                 </a:solidFill>
                 <a:latin typeface="맑은 고딕"/>
               </a:rPr>
-              <a:t>•  전환은 열린 채로도 됐는데 복귀는 MOUNT 여야 한다</a:t>
+              <a:t>•  RAC는 인스턴스 하나만 남김</a:t>
             </a:r>
           </a:p>
         </p:txBody>
@@ -10527,7 +11117,7 @@
                 </a:solidFill>
                 <a:latin typeface="맑은 고딕"/>
               </a:rPr>
-              <a:t>복귀 절차</a:t>
+              <a:t>ADG로 복귀하는 순서</a:t>
             </a:r>
           </a:p>
         </p:txBody>
@@ -10566,7 +11156,7 @@
                 </a:solidFill>
                 <a:latin typeface="맑은 고딕"/>
               </a:rPr>
-              <a:t>이유로 기억한다</a:t>
+              <a:t>열고 나서 적용</a:t>
             </a:r>
           </a:p>
         </p:txBody>
@@ -10605,7 +11195,7 @@
                 </a:solidFill>
                 <a:latin typeface="맑은 고딕"/>
               </a:rPr>
-              <a:t>•  ① 결과를 밖으로 뺀다 — 되돌리면 사라진다</a:t>
+              <a:t>•  STARTUP MOUNT 후 OPEN READ ONLY</a:t>
             </a:r>
           </a:p>
           <a:p>
@@ -10621,7 +11211,7 @@
                 </a:solidFill>
                 <a:latin typeface="맑은 고딕"/>
               </a:rPr>
-              <a:t>•  ② `SHUTDOWN` → `STARTUP MOUNT` — 되감으려면 아무도 안 써야 한다</a:t>
+              <a:t>•  그다음 RECOVER MANAGED STANDBY DATABASE</a:t>
             </a:r>
           </a:p>
           <a:p>
@@ -10637,7 +11227,7 @@
                 </a:solidFill>
                 <a:latin typeface="맑은 고딕"/>
               </a:rPr>
-              <a:t>•  ③ `CONVERT TO PHYSICAL STANDBY`</a:t>
+              <a:t>•  적용을 먼저 기동하면 OPEN에서 ORA-10456</a:t>
             </a:r>
           </a:p>
           <a:p>
@@ -10653,7 +11243,7 @@
                 </a:solidFill>
                 <a:latin typeface="맑은 고딕"/>
               </a:rPr>
-              <a:t>•  ④ 재기동 — 컨트롤 파일 유형이 바뀌었으므로</a:t>
+              <a:t>•  ADG를 안 쓰면 MOUNT에서 적용만 기동</a:t>
             </a:r>
           </a:p>
           <a:p>
@@ -10669,7 +11259,7 @@
                 </a:solidFill>
                 <a:latin typeface="맑은 고딕"/>
               </a:rPr>
-              <a:t>•  ⑤ `OPEN READ ONLY` → ⑥ MRP 기동 → ⑦ PDB 열기</a:t>
+              <a:t>•  apply lag가 줄 때까지 Failover 준비 미완</a:t>
             </a:r>
           </a:p>
         </p:txBody>
@@ -10770,7 +11360,7 @@
                 </a:solidFill>
                 <a:latin typeface="맑은 고딕"/>
               </a:rPr>
-              <a:t>이 장의 구성 (Agenda)</a:t>
+              <a:t>Agenda</a:t>
             </a:r>
           </a:p>
         </p:txBody>
@@ -10809,7 +11399,7 @@
                 </a:solidFill>
                 <a:latin typeface="맑은 고딕"/>
               </a:rPr>
-              <a:t>•  11.2  왜 Snapshot Standby 인가</a:t>
+              <a:t>•  11.2  Snapshot Standby가 필요한 상황</a:t>
             </a:r>
           </a:p>
           <a:p>
@@ -10825,7 +11415,7 @@
                 </a:solidFill>
                 <a:latin typeface="맑은 고딕"/>
               </a:rPr>
-              <a:t>•  11.3  전환 전에 확인할 것</a:t>
+              <a:t>•  11.3  동작 원리</a:t>
             </a:r>
           </a:p>
           <a:p>
@@ -10841,7 +11431,7 @@
                 </a:solidFill>
                 <a:latin typeface="맑은 고딕"/>
               </a:rPr>
-              <a:t>•  11.4  전환</a:t>
+              <a:t>•  11.4  전제 조건과 공간 계획</a:t>
             </a:r>
           </a:p>
           <a:p>
@@ -10857,7 +11447,7 @@
                 </a:solidFill>
                 <a:latin typeface="맑은 고딕"/>
               </a:rPr>
-              <a:t>•  11.5  전환 중에 무슨 일이 일어나는가</a:t>
+              <a:t>•  11.5  전환과 되돌리기 명령</a:t>
             </a:r>
           </a:p>
           <a:p>
@@ -10873,7 +11463,7 @@
                 </a:solidFill>
                 <a:latin typeface="맑은 고딕"/>
               </a:rPr>
-              <a:t>•  11.6  되돌리기</a:t>
+              <a:t>•  11.6  제약과 위험</a:t>
             </a:r>
           </a:p>
           <a:p>
@@ -10889,7 +11479,7 @@
                 </a:solidFill>
                 <a:latin typeface="맑은 고딕"/>
               </a:rPr>
-              <a:t>•  11.7  운영에서의 판단</a:t>
+              <a:t>•  11.7  세 가지 방식 비교와 선택  /  11.8  운영 시 주의점</a:t>
             </a:r>
           </a:p>
         </p:txBody>
@@ -10990,7 +11580,7 @@
                 </a:solidFill>
                 <a:latin typeface="맑은 고딕"/>
               </a:rPr>
-              <a:t>ORA-10456</a:t>
+              <a:t>전환 기간 중 상태 확인</a:t>
             </a:r>
           </a:p>
         </p:txBody>
@@ -11029,7 +11619,7 @@
                 </a:solidFill>
                 <a:latin typeface="맑은 고딕"/>
               </a:rPr>
-              <a:t>순서를 어기면</a:t>
+              <a:t>수신은 정상인지, 목적지는 VALID인지</a:t>
             </a:r>
           </a:p>
         </p:txBody>
@@ -11068,7 +11658,7 @@
                 </a:solidFill>
                 <a:latin typeface="맑은 고딕"/>
               </a:rPr>
-              <a:t>•  재기동 후 MRP 를 먼저 띄우고 열면</a:t>
+              <a:t>•  Standby: V$DATAGUARD_STATS의 두 lag</a:t>
             </a:r>
           </a:p>
           <a:p>
@@ -11084,7 +11674,7 @@
                 </a:solidFill>
                 <a:latin typeface="맑은 고딕"/>
               </a:rPr>
-              <a:t>•  `ORA-10456: cannot open standby database; media recovery session may be in progress`</a:t>
+              <a:t>•  Standby: V$ARCHIVED_LOG 시퀀스 증가</a:t>
             </a:r>
           </a:p>
           <a:p>
@@ -11100,7 +11690,7 @@
                 </a:solidFill>
                 <a:latin typeface="맑은 고딕"/>
               </a:rPr>
-              <a:t>•  올바른 순서 — **MRP 취소 → OPEN READ ONLY → MRP 기동**</a:t>
+              <a:t>•  Primary: V$ARCHIVE_DEST_STATUS가 VALID</a:t>
             </a:r>
           </a:p>
           <a:p>
@@ -11116,7 +11706,7 @@
                 </a:solidFill>
                 <a:latin typeface="맑은 고딕"/>
               </a:rPr>
-              <a:t>•  결과 — `READ ONLY WITH APPLY`</a:t>
+              <a:t>•  ERROR가 보이면 FRA 부족부터 의심</a:t>
             </a:r>
           </a:p>
         </p:txBody>
@@ -11217,7 +11807,7 @@
                 </a:solidFill>
                 <a:latin typeface="맑은 고딕"/>
               </a:rPr>
-              <a:t>PDB 명령이 다르다</a:t>
+              <a:t>자주 만나는 오류</a:t>
             </a:r>
           </a:p>
         </p:txBody>
@@ -11256,7 +11846,7 @@
                 </a:solidFill>
                 <a:latin typeface="맑은 고딕"/>
               </a:rPr>
-              <a:t>상태에 따라</a:t>
+              <a:t>대부분 상태와 명령의 불일치</a:t>
             </a:r>
           </a:p>
         </p:txBody>
@@ -11295,7 +11885,7 @@
                 </a:solidFill>
                 <a:latin typeface="맑은 고딕"/>
               </a:rPr>
-              <a:t>•  Snapshot Standby — `ALTER PLUGGABLE DATABASE ... **OPEN**`</a:t>
+              <a:t>•  38784+01153: 적용 중 전환</a:t>
             </a:r>
           </a:p>
           <a:p>
@@ -11311,7 +11901,7 @@
                 </a:solidFill>
                 <a:latin typeface="맑은 고딕"/>
               </a:rPr>
-              <a:t>•  Physical Standby — `ALTER PLUGGABLE DATABASE ... **OPEN READ ONLY**`</a:t>
+              <a:t>•  01665: Snapshot에서 MRP 기동</a:t>
             </a:r>
           </a:p>
           <a:p>
@@ -11327,7 +11917,7 @@
                 </a:solidFill>
                 <a:latin typeface="맑은 고딕"/>
               </a:rPr>
-              <a:t>•  CDB 도 마찬가지 — Snapshot 은 `OPEN`, Physical 은 `OPEN READ ONLY`</a:t>
+              <a:t>•  01219: 닫힌 PDB 조회</a:t>
             </a:r>
           </a:p>
           <a:p>
@@ -11343,7 +11933,23 @@
                 </a:solidFill>
                 <a:latin typeface="맑은 고딕"/>
               </a:rPr>
-              <a:t>•  어느 쪽이든 **CDB 를 열어도 PDB 는 따라오지 않는다**</a:t>
+              <a:t>•  16433: 안 열고 되돌리기 / 01126: 열린 채 되돌리기</a:t>
+            </a:r>
+          </a:p>
+          <a:p>
+            <a:pPr algn="l">
+              <a:spcAft>
+                <a:spcPts val="1000"/>
+              </a:spcAft>
+            </a:pPr>
+            <a:r>
+              <a:rPr sz="1700" b="0">
+                <a:solidFill>
+                  <a:srgbClr val="222222"/>
+                </a:solidFill>
+                <a:latin typeface="맑은 고딕"/>
+              </a:rPr>
+              <a:t>•  10456: 적용 먼저, 열기 나중</a:t>
             </a:r>
           </a:p>
         </p:txBody>
@@ -11444,7 +12050,7 @@
                 </a:solidFill>
                 <a:latin typeface="맑은 고딕"/>
               </a:rPr>
-              <a:t>검증</a:t>
+              <a:t>Broker에서의 전환</a:t>
             </a:r>
           </a:p>
         </p:txBody>
@@ -11483,7 +12089,7 @@
                 </a:solidFill>
                 <a:latin typeface="맑은 고딕"/>
               </a:rPr>
-              <a:t>정말 돌아왔는가</a:t>
+              <a:t>CONVERT DATABASE 한 줄</a:t>
             </a:r>
           </a:p>
         </p:txBody>
@@ -11522,7 +12128,7 @@
                 </a:solidFill>
                 <a:latin typeface="맑은 고딕"/>
               </a:rPr>
-              <a:t>•  Snapshot 에서 만든 테이블 → **ORA-00942** (존재 자체가 없다)</a:t>
+              <a:t>•  CONVERT DATABASE 'boston' TO SNAPSHOT STANDBY</a:t>
             </a:r>
           </a:p>
           <a:p>
@@ -11538,7 +12144,7 @@
                 </a:solidFill>
                 <a:latin typeface="맑은 고딕"/>
               </a:rPr>
-              <a:t>•  고친 행 → `modified-on-snapshot` → **`before-snapshot`** 복귀</a:t>
+              <a:t>•  CONVERT DATABASE 'boston' TO PHYSICAL STANDBY</a:t>
             </a:r>
           </a:p>
           <a:p>
@@ -11554,7 +12160,7 @@
                 </a:solidFill>
                 <a:latin typeface="맑은 고딕"/>
               </a:rPr>
-              <a:t>•  그동안 Primary 가 넣은 2·3번 행 → **나타났다**</a:t>
+              <a:t>•  적용 중지·재기동·적용 재개를 Broker가 처리</a:t>
             </a:r>
           </a:p>
           <a:p>
@@ -11570,7 +12176,7 @@
                 </a:solidFill>
                 <a:latin typeface="맑은 고딕"/>
               </a:rPr>
-              <a:t>•  `apply lag` 2분 38초 → **0**</a:t>
+              <a:t>•  Broker 구성에서는 SQL로 바꾸지 않음</a:t>
             </a:r>
           </a:p>
           <a:p>
@@ -11586,7 +12192,7 @@
                 </a:solidFill>
                 <a:latin typeface="맑은 고딕"/>
               </a:rPr>
-              <a:t>•  FRA — FLASHBACK LOG 사라지고 **1,941MB → 1,559MB**</a:t>
+              <a:t>•  SHOW CONFIGURATION에 Snapshot standby 표시</a:t>
             </a:r>
           </a:p>
         </p:txBody>
@@ -11618,7 +12224,7 @@
         <p:spPr>
           <a:xfrm>
             <a:off x="0" y="0"/>
-            <a:ext cx="12191695" cy="1005840"/>
+            <a:ext cx="12191695" cy="6858000"/>
           </a:xfrm>
           <a:prstGeom prst="rect">
             <a:avLst/>
@@ -11661,8 +12267,8 @@
         </p:nvSpPr>
         <p:spPr>
           <a:xfrm>
-            <a:off x="548640" y="91440"/>
-            <a:ext cx="10972800" cy="777240"/>
+            <a:off x="822960" y="2011680"/>
+            <a:ext cx="10515600" cy="1097280"/>
           </a:xfrm>
           <a:prstGeom prst="rect">
             <a:avLst/>
@@ -11681,13 +12287,13 @@
               </a:spcAft>
             </a:pPr>
             <a:r>
-              <a:rPr sz="2600" b="1">
+              <a:rPr sz="4000" b="1">
                 <a:solidFill>
                   <a:srgbClr val="FFFFFF"/>
                 </a:solidFill>
                 <a:latin typeface="맑은 고딕"/>
               </a:rPr>
-              <a:t>점검 명령 여섯 개</a:t>
+              <a:t>11.6</a:t>
             </a:r>
           </a:p>
         </p:txBody>
@@ -11700,8 +12306,8 @@
         </p:nvSpPr>
         <p:spPr>
           <a:xfrm>
-            <a:off x="640080" y="1078992"/>
-            <a:ext cx="10881360" cy="457200"/>
+            <a:off x="822960" y="3017520"/>
+            <a:ext cx="10515600" cy="914400"/>
           </a:xfrm>
           <a:prstGeom prst="rect">
             <a:avLst/>
@@ -11720,27 +12326,71 @@
               </a:spcAft>
             </a:pPr>
             <a:r>
-              <a:rPr sz="1500" b="0">
-                <a:solidFill>
-                  <a:srgbClr val="5A6672"/>
-                </a:solidFill>
-                <a:latin typeface="맑은 고딕"/>
-              </a:rPr>
-              <a:t>이것이면 충분하다</a:t>
-            </a:r>
-          </a:p>
-        </p:txBody>
-      </p:sp>
-      <p:sp>
-        <p:nvSpPr>
-          <p:cNvPr id="5" name="TextBox 4"/>
+              <a:rPr sz="2800" b="1">
+                <a:solidFill>
+                  <a:srgbClr val="FFFFFF"/>
+                </a:solidFill>
+                <a:latin typeface="맑은 고딕"/>
+              </a:rPr>
+              <a:t>제약과 위험</a:t>
+            </a:r>
+          </a:p>
+        </p:txBody>
+      </p:sp>
+      <p:sp>
+        <p:nvSpPr>
+          <p:cNvPr id="5" name="Rectangle 4"/>
+          <p:cNvSpPr/>
+          <p:nvPr/>
+        </p:nvSpPr>
+        <p:spPr>
+          <a:xfrm>
+            <a:off x="822960" y="4114800"/>
+            <a:ext cx="5486400" cy="54864"/>
+          </a:xfrm>
+          <a:prstGeom prst="rect">
+            <a:avLst/>
+          </a:prstGeom>
+          <a:solidFill>
+            <a:srgbClr val="FFFFFF"/>
+          </a:solidFill>
+          <a:ln>
+            <a:noFill/>
+          </a:ln>
+          <a:effectLst/>
+        </p:spPr>
+        <p:style>
+          <a:lnRef idx="1">
+            <a:schemeClr val="accent1"/>
+          </a:lnRef>
+          <a:fillRef idx="3">
+            <a:schemeClr val="accent1"/>
+          </a:fillRef>
+          <a:effectRef idx="2">
+            <a:schemeClr val="accent1"/>
+          </a:effectRef>
+          <a:fontRef idx="minor">
+            <a:schemeClr val="lt1"/>
+          </a:fontRef>
+        </p:style>
+        <p:txBody>
+          <a:bodyPr rtlCol="0" anchor="ctr"/>
+          <a:lstStyle/>
+          <a:p>
+            <a:pPr algn="ctr"/>
+          </a:p>
+        </p:txBody>
+      </p:sp>
+      <p:sp>
+        <p:nvSpPr>
+          <p:cNvPr id="6" name="TextBox 5"/>
           <p:cNvSpPr txBox="1"/>
           <p:nvPr/>
         </p:nvSpPr>
         <p:spPr>
           <a:xfrm>
-            <a:off x="640080" y="1737360"/>
-            <a:ext cx="10881360" cy="4754880"/>
+            <a:off x="822960" y="4297680"/>
+            <a:ext cx="10058400" cy="2011680"/>
           </a:xfrm>
           <a:prstGeom prst="rect">
             <a:avLst/>
@@ -11755,97 +12405,49 @@
           <a:p>
             <a:pPr algn="l">
               <a:spcAft>
-                <a:spcPts val="1000"/>
-              </a:spcAft>
-            </a:pPr>
-            <a:r>
-              <a:rPr sz="1700" b="0">
-                <a:solidFill>
-                  <a:srgbClr val="222222"/>
-                </a:solidFill>
-                <a:latin typeface="맑은 고딕"/>
-              </a:rPr>
-              <a:t>•  상태 — `database_role, open_mode, controlfile_type, flashback_on`</a:t>
-            </a:r>
-          </a:p>
-          <a:p>
-            <a:pPr algn="l">
-              <a:spcAft>
-                <a:spcPts val="1000"/>
-              </a:spcAft>
-            </a:pPr>
-            <a:r>
-              <a:rPr sz="1700" b="0">
-                <a:solidFill>
-                  <a:srgbClr val="222222"/>
-                </a:solidFill>
-                <a:latin typeface="맑은 고딕"/>
-              </a:rPr>
-              <a:t>•  되돌아갈 자리 — `V$RESTORE_POINT`</a:t>
-            </a:r>
-          </a:p>
-          <a:p>
-            <a:pPr algn="l">
-              <a:spcAft>
-                <a:spcPts val="1000"/>
-              </a:spcAft>
-            </a:pPr>
-            <a:r>
-              <a:rPr sz="1700" b="0">
-                <a:solidFill>
-                  <a:srgbClr val="222222"/>
-                </a:solidFill>
-                <a:latin typeface="맑은 고딕"/>
-              </a:rPr>
-              <a:t>•  적용 — `V$ARCHIVE_DEST_STATUS.RECOVERY_MODE`, `V$MANAGED_STANDBY`</a:t>
-            </a:r>
-          </a:p>
-          <a:p>
-            <a:pPr algn="l">
-              <a:spcAft>
-                <a:spcPts val="1000"/>
-              </a:spcAft>
-            </a:pPr>
-            <a:r>
-              <a:rPr sz="1700" b="0">
-                <a:solidFill>
-                  <a:srgbClr val="222222"/>
-                </a:solidFill>
-                <a:latin typeface="맑은 고딕"/>
-              </a:rPr>
-              <a:t>•  지연 — `V$DATAGUARD_STATS`</a:t>
-            </a:r>
-          </a:p>
-          <a:p>
-            <a:pPr algn="l">
-              <a:spcAft>
-                <a:spcPts val="1000"/>
-              </a:spcAft>
-            </a:pPr>
-            <a:r>
-              <a:rPr sz="1700" b="0">
-                <a:solidFill>
-                  <a:srgbClr val="222222"/>
-                </a:solidFill>
-                <a:latin typeface="맑은 고딕"/>
-              </a:rPr>
-              <a:t>•  FRA — `V$FLASH_RECOVERY_AREA_USAGE`</a:t>
-            </a:r>
-          </a:p>
-          <a:p>
-            <a:pPr algn="l">
-              <a:spcAft>
-                <a:spcPts val="1000"/>
-              </a:spcAft>
-            </a:pPr>
-            <a:r>
-              <a:rPr sz="1700" b="0">
-                <a:solidFill>
-                  <a:srgbClr val="222222"/>
-                </a:solidFill>
-                <a:latin typeface="맑은 고딕"/>
-              </a:rPr>
-              <a:t>•  PDB — `V$PDBS`</a:t>
+                <a:spcPts val="800"/>
+              </a:spcAft>
+            </a:pPr>
+            <a:r>
+              <a:rPr sz="1600" b="0">
+                <a:solidFill>
+                  <a:srgbClr val="FFFFFF"/>
+                </a:solidFill>
+                <a:latin typeface="맑은 고딕"/>
+              </a:rPr>
+              <a:t>•  역할 전환과 FSFO 제약</a:t>
+            </a:r>
+          </a:p>
+          <a:p>
+            <a:pPr algn="l">
+              <a:spcAft>
+                <a:spcPts val="800"/>
+              </a:spcAft>
+            </a:pPr>
+            <a:r>
+              <a:rPr sz="1600" b="0">
+                <a:solidFill>
+                  <a:srgbClr val="FFFFFF"/>
+                </a:solidFill>
+                <a:latin typeface="맑은 고딕"/>
+              </a:rPr>
+              <a:t>•  보호 모드 영향과 RTO 증가</a:t>
+            </a:r>
+          </a:p>
+          <a:p>
+            <a:pPr algn="l">
+              <a:spcAft>
+                <a:spcPts val="800"/>
+              </a:spcAft>
+            </a:pPr>
+            <a:r>
+              <a:rPr sz="1600" b="0">
+                <a:solidFill>
+                  <a:srgbClr val="FFFFFF"/>
+                </a:solidFill>
+                <a:latin typeface="맑은 고딕"/>
+              </a:rPr>
+              <a:t>•  되돌리기를 막는 작업</a:t>
             </a:r>
           </a:p>
         </p:txBody>
@@ -11877,7 +12479,7 @@
         <p:spPr>
           <a:xfrm>
             <a:off x="0" y="0"/>
-            <a:ext cx="12191695" cy="6858000"/>
+            <a:ext cx="12191695" cy="1005840"/>
           </a:xfrm>
           <a:prstGeom prst="rect">
             <a:avLst/>
@@ -11920,8 +12522,8 @@
         </p:nvSpPr>
         <p:spPr>
           <a:xfrm>
-            <a:off x="822960" y="2011680"/>
-            <a:ext cx="10515600" cy="1097280"/>
+            <a:off x="548640" y="91440"/>
+            <a:ext cx="10972800" cy="777240"/>
           </a:xfrm>
           <a:prstGeom prst="rect">
             <a:avLst/>
@@ -11940,13 +12542,13 @@
               </a:spcAft>
             </a:pPr>
             <a:r>
-              <a:rPr sz="4000" b="1">
+              <a:rPr sz="2600" b="1">
                 <a:solidFill>
                   <a:srgbClr val="FFFFFF"/>
                 </a:solidFill>
                 <a:latin typeface="맑은 고딕"/>
               </a:rPr>
-              <a:t>11.7</a:t>
+              <a:t>역할 전환과 Fast-Start Failover</a:t>
             </a:r>
           </a:p>
         </p:txBody>
@@ -11959,8 +12561,8 @@
         </p:nvSpPr>
         <p:spPr>
           <a:xfrm>
-            <a:off x="822960" y="3017520"/>
-            <a:ext cx="10515600" cy="914400"/>
+            <a:off x="640080" y="1078992"/>
+            <a:ext cx="10881360" cy="457200"/>
           </a:xfrm>
           <a:prstGeom prst="rect">
             <a:avLst/>
@@ -11979,71 +12581,27 @@
               </a:spcAft>
             </a:pPr>
             <a:r>
-              <a:rPr sz="2800" b="1">
-                <a:solidFill>
-                  <a:srgbClr val="FFFFFF"/>
-                </a:solidFill>
-                <a:latin typeface="맑은 고딕"/>
-              </a:rPr>
-              <a:t>운영에서의 판단</a:t>
-            </a:r>
-          </a:p>
-        </p:txBody>
-      </p:sp>
-      <p:sp>
-        <p:nvSpPr>
-          <p:cNvPr id="5" name="Rectangle 4"/>
-          <p:cNvSpPr/>
-          <p:nvPr/>
-        </p:nvSpPr>
-        <p:spPr>
-          <a:xfrm>
-            <a:off x="822960" y="4114800"/>
-            <a:ext cx="5486400" cy="54864"/>
-          </a:xfrm>
-          <a:prstGeom prst="rect">
-            <a:avLst/>
-          </a:prstGeom>
-          <a:solidFill>
-            <a:srgbClr val="FFFFFF"/>
-          </a:solidFill>
-          <a:ln>
-            <a:noFill/>
-          </a:ln>
-          <a:effectLst/>
-        </p:spPr>
-        <p:style>
-          <a:lnRef idx="1">
-            <a:schemeClr val="accent1"/>
-          </a:lnRef>
-          <a:fillRef idx="3">
-            <a:schemeClr val="accent1"/>
-          </a:fillRef>
-          <a:effectRef idx="2">
-            <a:schemeClr val="accent1"/>
-          </a:effectRef>
-          <a:fontRef idx="minor">
-            <a:schemeClr val="lt1"/>
-          </a:fontRef>
-        </p:style>
-        <p:txBody>
-          <a:bodyPr rtlCol="0" anchor="ctr"/>
-          <a:lstStyle/>
-          <a:p>
-            <a:pPr algn="ctr"/>
-          </a:p>
-        </p:txBody>
-      </p:sp>
-      <p:sp>
-        <p:nvSpPr>
-          <p:cNvPr id="6" name="TextBox 5"/>
+              <a:rPr sz="1500" b="0">
+                <a:solidFill>
+                  <a:srgbClr val="5A6672"/>
+                </a:solidFill>
+                <a:latin typeface="맑은 고딕"/>
+              </a:rPr>
+              <a:t>Switchover와 FSFO 대상 불가</a:t>
+            </a:r>
+          </a:p>
+        </p:txBody>
+      </p:sp>
+      <p:sp>
+        <p:nvSpPr>
+          <p:cNvPr id="5" name="TextBox 4"/>
           <p:cNvSpPr txBox="1"/>
           <p:nvPr/>
         </p:nvSpPr>
         <p:spPr>
           <a:xfrm>
-            <a:off x="822960" y="4297680"/>
-            <a:ext cx="10058400" cy="2011680"/>
+            <a:off x="640080" y="1737360"/>
+            <a:ext cx="10881360" cy="4754880"/>
           </a:xfrm>
           <a:prstGeom prst="rect">
             <a:avLst/>
@@ -12058,33 +12616,81 @@
           <a:p>
             <a:pPr algn="l">
               <a:spcAft>
-                <a:spcPts val="800"/>
-              </a:spcAft>
-            </a:pPr>
-            <a:r>
-              <a:rPr sz="1600" b="0">
-                <a:solidFill>
-                  <a:srgbClr val="FFFFFF"/>
-                </a:solidFill>
-                <a:latin typeface="맑은 고딕"/>
-              </a:rPr>
-              <a:t>•  적합·부적합</a:t>
-            </a:r>
-          </a:p>
-          <a:p>
-            <a:pPr algn="l">
-              <a:spcAft>
-                <a:spcPts val="800"/>
-              </a:spcAft>
-            </a:pPr>
-            <a:r>
-              <a:rPr sz="1600" b="0">
-                <a:solidFill>
-                  <a:srgbClr val="FFFFFF"/>
-                </a:solidFill>
-                <a:latin typeface="맑은 고딕"/>
-              </a:rPr>
-              <a:t>•  상태가 어렵지 명령은 쉽다</a:t>
+                <a:spcPts val="1000"/>
+              </a:spcAft>
+            </a:pPr>
+            <a:r>
+              <a:rPr sz="1700" b="0">
+                <a:solidFill>
+                  <a:srgbClr val="222222"/>
+                </a:solidFill>
+                <a:latin typeface="맑은 고딕"/>
+              </a:rPr>
+              <a:t>•  Switchover 대상이 될 수 없음</a:t>
+            </a:r>
+          </a:p>
+          <a:p>
+            <a:pPr algn="l">
+              <a:spcAft>
+                <a:spcPts val="1000"/>
+              </a:spcAft>
+            </a:pPr>
+            <a:r>
+              <a:rPr sz="1700" b="0">
+                <a:solidFill>
+                  <a:srgbClr val="222222"/>
+                </a:solidFill>
+                <a:latin typeface="맑은 고딕"/>
+              </a:rPr>
+              <a:t>•  Fast-Start Failover 대상이 될 수 없음</a:t>
+            </a:r>
+          </a:p>
+          <a:p>
+            <a:pPr algn="l">
+              <a:spcAft>
+                <a:spcPts val="1000"/>
+              </a:spcAft>
+            </a:pPr>
+            <a:r>
+              <a:rPr sz="1700" b="0">
+                <a:solidFill>
+                  <a:srgbClr val="222222"/>
+                </a:solidFill>
+                <a:latin typeface="맑은 고딕"/>
+              </a:rPr>
+              <a:t>•  Failover는 되돌리기와 적용을 거친 뒤 가능</a:t>
+            </a:r>
+          </a:p>
+          <a:p>
+            <a:pPr algn="l">
+              <a:spcAft>
+                <a:spcPts val="1000"/>
+              </a:spcAft>
+            </a:pPr>
+            <a:r>
+              <a:rPr sz="1700" b="0">
+                <a:solidFill>
+                  <a:srgbClr val="222222"/>
+                </a:solidFill>
+                <a:latin typeface="맑은 고딕"/>
+              </a:rPr>
+              <a:t>•  Broker는 Failover 안에서 이 단계를 처리</a:t>
+            </a:r>
+          </a:p>
+          <a:p>
+            <a:pPr algn="l">
+              <a:spcAft>
+                <a:spcPts val="1000"/>
+              </a:spcAft>
+            </a:pPr>
+            <a:r>
+              <a:rPr sz="1700" b="0">
+                <a:solidFill>
+                  <a:srgbClr val="222222"/>
+                </a:solidFill>
+                <a:latin typeface="맑은 고딕"/>
+              </a:rPr>
+              <a:t>•  다른 물리 Standby가 있으면 그쪽이 대상</a:t>
             </a:r>
           </a:p>
         </p:txBody>
@@ -12185,7 +12791,7 @@
                 </a:solidFill>
                 <a:latin typeface="맑은 고딕"/>
               </a:rPr>
-              <a:t>적합·부적합</a:t>
+              <a:t>보호 모드에 미치는 영향</a:t>
             </a:r>
           </a:p>
         </p:txBody>
@@ -12224,7 +12830,7 @@
                 </a:solidFill>
                 <a:latin typeface="맑은 고딕"/>
               </a:rPr>
-              <a:t>판단 기준</a:t>
+              <a:t>최대 보호에서는 유일한 Standby 불가</a:t>
             </a:r>
           </a:p>
         </p:txBody>
@@ -12263,7 +12869,7 @@
                 </a:solidFill>
                 <a:latin typeface="맑은 고딕"/>
               </a:rPr>
-              <a:t>•  **적합** — 실제 데이터에서만 드러나는 문제 / 짧게 / 되돌릴 것이 확실할 때</a:t>
+              <a:t>•  최대 보호: 유일한 Standby로 전환 불가</a:t>
             </a:r>
           </a:p>
           <a:p>
@@ -12279,7 +12885,7 @@
                 </a:solidFill>
                 <a:latin typeface="맑은 고딕"/>
               </a:rPr>
-              <a:t>•  **부적합** — Standby 가 하나뿐 / 오래 / 결과를 유지 / 데이터를 많이 바꿈</a:t>
+              <a:t>•  그런 상황을 만드는 구성 변경도 거부</a:t>
             </a:r>
           </a:p>
           <a:p>
@@ -12295,7 +12901,7 @@
                 </a:solidFill>
                 <a:latin typeface="맑은 고딕"/>
               </a:rPr>
-              <a:t>•  긴 시험은 **나누어** 한다 — 되돌렸다 다시 전환</a:t>
+              <a:t>•  최대 가용성·성능: 전환 제약 없음</a:t>
             </a:r>
           </a:p>
           <a:p>
@@ -12311,7 +12917,23 @@
                 </a:solidFill>
                 <a:latin typeface="맑은 고딕"/>
               </a:rPr>
-              <a:t>•  나누는 단위는 되돌리기 비용보다 커야 한다</a:t>
+              <a:t>•  SYNC 대상이면 수신 확인은 계속 보냄</a:t>
+            </a:r>
+          </a:p>
+          <a:p>
+            <a:pPr algn="l">
+              <a:spcAft>
+                <a:spcPts val="1000"/>
+              </a:spcAft>
+            </a:pPr>
+            <a:r>
+              <a:rPr sz="1700" b="0">
+                <a:solidFill>
+                  <a:srgbClr val="222222"/>
+                </a:solidFill>
+                <a:latin typeface="맑은 고딕"/>
+              </a:rPr>
+              <a:t>•  손실 보호는 유지, 복구 시간은 늘어남</a:t>
             </a:r>
           </a:p>
         </p:txBody>
@@ -12412,7 +13034,7 @@
                 </a:solidFill>
                 <a:latin typeface="맑은 고딕"/>
               </a:rPr>
-              <a:t>이 장을 관통하는 한 문장</a:t>
+              <a:t>지연된 적용과 RTO</a:t>
             </a:r>
           </a:p>
         </p:txBody>
@@ -12451,7 +13073,7 @@
                 </a:solidFill>
                 <a:latin typeface="맑은 고딕"/>
               </a:rPr>
-              <a:t>명령이 아니라 상태다</a:t>
+              <a:t>되감기 + 밀린 적용 + 역할 전환</a:t>
             </a:r>
           </a:p>
         </p:txBody>
@@ -12490,7 +13112,7 @@
                 </a:solidFill>
                 <a:latin typeface="맑은 고딕"/>
               </a:rPr>
-              <a:t>•  쓰는 명령은 둘뿐이고 옵션도 없다</a:t>
+              <a:t>•  되감기: 시험이 건드린 블록 양에 비례</a:t>
             </a:r>
           </a:p>
           <a:p>
@@ -12506,7 +13128,7 @@
                 </a:solidFill>
                 <a:latin typeface="맑은 고딕"/>
               </a:rPr>
-              <a:t>•  그런데 만난 오류 넷 중 **셋이 상태에서** 왔다</a:t>
+              <a:t>•  적용: 전환 기간 리두 양에 비례</a:t>
             </a:r>
           </a:p>
           <a:p>
@@ -12522,7 +13144,7 @@
                 </a:solidFill>
                 <a:latin typeface="맑은 고딕"/>
               </a:rPr>
-              <a:t>•  MRP 가 돌고 있어서 / 열려 있어서 / 마운트가 아니어서</a:t>
+              <a:t>•  사흘 Snapshot이면 사흘 치 리두 적용</a:t>
             </a:r>
           </a:p>
           <a:p>
@@ -12538,7 +13160,7 @@
                 </a:solidFill>
                 <a:latin typeface="맑은 고딕"/>
               </a:rPr>
-              <a:t>•  대책 — 명령 전에 **상태 한 줄**을 먼저 조회한다</a:t>
+              <a:t>•  적용 속도가 3배여도 하루 가까이 소요</a:t>
             </a:r>
           </a:p>
           <a:p>
@@ -12554,7 +13176,7 @@
                 </a:solidFill>
                 <a:latin typeface="맑은 고딕"/>
               </a:rPr>
-              <a:t>•  `select database_role, open_mode, controlfile_type, flashback_on from v$database;`</a:t>
+              <a:t>•  RTO가 분 단위라면 재해 대비 역할 불가</a:t>
             </a:r>
           </a:p>
         </p:txBody>
@@ -12655,7 +13277,7 @@
                 </a:solidFill>
                 <a:latin typeface="맑은 고딕"/>
               </a:rPr>
-              <a:t>요약 (1/2)</a:t>
+              <a:t>손상 로그 위험</a:t>
             </a:r>
           </a:p>
         </p:txBody>
@@ -12668,8 +13290,8 @@
         </p:nvSpPr>
         <p:spPr>
           <a:xfrm>
-            <a:off x="640080" y="1371600"/>
-            <a:ext cx="10881360" cy="5120640"/>
+            <a:off x="640080" y="1078992"/>
+            <a:ext cx="10881360" cy="457200"/>
           </a:xfrm>
           <a:prstGeom prst="rect">
             <a:avLst/>
@@ -12684,97 +13306,120 @@
           <a:p>
             <a:pPr algn="l">
               <a:spcAft>
-                <a:spcPts val="1000"/>
-              </a:spcAft>
-            </a:pPr>
-            <a:r>
-              <a:rPr sz="1600" b="0">
-                <a:solidFill>
-                  <a:srgbClr val="222222"/>
-                </a:solidFill>
-                <a:latin typeface="맑은 고딕"/>
-              </a:rPr>
-              <a:t>•  Snapshot Standby 는 Physical Standby 를 **잠시 쓰기 가능**하게 바꾼다. 되돌리면 전부 사라진다.</a:t>
-            </a:r>
-          </a:p>
-          <a:p>
-            <a:pPr algn="l">
-              <a:spcAft>
-                <a:spcPts val="1000"/>
-              </a:spcAft>
-            </a:pPr>
-            <a:r>
-              <a:rPr sz="1600" b="0">
-                <a:solidFill>
-                  <a:srgbClr val="222222"/>
-                </a:solidFill>
-                <a:latin typeface="맑은 고딕"/>
-              </a:rPr>
-              <a:t>•  대가는 셋 — 재해 복구 능력 일시 상실, FRA 사용, 결과 소멸.</a:t>
-            </a:r>
-          </a:p>
-          <a:p>
-            <a:pPr algn="l">
-              <a:spcAft>
-                <a:spcPts val="1000"/>
-              </a:spcAft>
-            </a:pPr>
-            <a:r>
-              <a:rPr sz="1600" b="0">
-                <a:solidFill>
-                  <a:srgbClr val="222222"/>
-                </a:solidFill>
-                <a:latin typeface="맑은 고딕"/>
-              </a:rPr>
-              <a:t>•  되돌리는 원리는 **보장 복원 지점**이다. 전환할 때 자동으로 만들어진다.</a:t>
-            </a:r>
-          </a:p>
-          <a:p>
-            <a:pPr algn="l">
-              <a:spcAft>
-                <a:spcPts val="1000"/>
-              </a:spcAft>
-            </a:pPr>
-            <a:r>
-              <a:rPr sz="1600" b="0">
-                <a:solidFill>
-                  <a:srgbClr val="222222"/>
-                </a:solidFill>
-                <a:latin typeface="맑은 고딕"/>
-              </a:rPr>
-              <a:t>•  `FLASHBACK_ON` 이 NO 여도 전환된다. 전체 로깅이 아니라 복원 지점을 쓰기 때문이다.</a:t>
-            </a:r>
-          </a:p>
-          <a:p>
-            <a:pPr algn="l">
-              <a:spcAft>
-                <a:spcPts val="1000"/>
-              </a:spcAft>
-            </a:pPr>
-            <a:r>
-              <a:rPr sz="1600" b="0">
-                <a:solidFill>
-                  <a:srgbClr val="222222"/>
-                </a:solidFill>
-                <a:latin typeface="맑은 고딕"/>
-              </a:rPr>
-              <a:t>•  MRP 가 돌면 전환 불가 — **ORA-38784 + ORA-01153**. 메시지에 복원 지점 이름이 드러난다.</a:t>
-            </a:r>
-          </a:p>
-          <a:p>
-            <a:pPr algn="l">
-              <a:spcAft>
-                <a:spcPts val="1000"/>
-              </a:spcAft>
-            </a:pPr>
-            <a:r>
-              <a:rPr sz="1600" b="0">
-                <a:solidFill>
-                  <a:srgbClr val="222222"/>
-                </a:solidFill>
-                <a:latin typeface="맑은 고딕"/>
-              </a:rPr>
-              <a:t>•  전환 후 — SNAPSHOT STANDBY / **MOUNTED** / CURRENT / RESTORE POINT ONLY.</a:t>
+                <a:spcPts val="600"/>
+              </a:spcAft>
+            </a:pPr>
+            <a:r>
+              <a:rPr sz="1500" b="0">
+                <a:solidFill>
+                  <a:srgbClr val="5A6672"/>
+                </a:solidFill>
+                <a:latin typeface="맑은 고딕"/>
+              </a:rPr>
+              <a:t>적용할 때에야 발견되는 손상</a:t>
+            </a:r>
+          </a:p>
+        </p:txBody>
+      </p:sp>
+      <p:sp>
+        <p:nvSpPr>
+          <p:cNvPr id="5" name="TextBox 4"/>
+          <p:cNvSpPr txBox="1"/>
+          <p:nvPr/>
+        </p:nvSpPr>
+        <p:spPr>
+          <a:xfrm>
+            <a:off x="640080" y="1737360"/>
+            <a:ext cx="10881360" cy="4754880"/>
+          </a:xfrm>
+          <a:prstGeom prst="rect">
+            <a:avLst/>
+          </a:prstGeom>
+          <a:noFill/>
+        </p:spPr>
+        <p:txBody>
+          <a:bodyPr wrap="square">
+            <a:spAutoFit/>
+          </a:bodyPr>
+          <a:lstStyle/>
+          <a:p>
+            <a:pPr algn="l">
+              <a:spcAft>
+                <a:spcPts val="1000"/>
+              </a:spcAft>
+            </a:pPr>
+            <a:r>
+              <a:rPr sz="1700" b="0">
+                <a:solidFill>
+                  <a:srgbClr val="222222"/>
+                </a:solidFill>
+                <a:latin typeface="맑은 고딕"/>
+              </a:rPr>
+              <a:t>•  받은 로그는 적용 시점에 검증됨</a:t>
+            </a:r>
+          </a:p>
+          <a:p>
+            <a:pPr algn="l">
+              <a:spcAft>
+                <a:spcPts val="1000"/>
+              </a:spcAft>
+            </a:pPr>
+            <a:r>
+              <a:rPr sz="1700" b="0">
+                <a:solidFill>
+                  <a:srgbClr val="222222"/>
+                </a:solidFill>
+                <a:latin typeface="맑은 고딕"/>
+              </a:rPr>
+              <a:t>•  손상은 되돌린 뒤 MRP가 읽을 때 발견</a:t>
+            </a:r>
+          </a:p>
+          <a:p>
+            <a:pPr algn="l">
+              <a:spcAft>
+                <a:spcPts val="1000"/>
+              </a:spcAft>
+            </a:pPr>
+            <a:r>
+              <a:rPr sz="1700" b="0">
+                <a:solidFill>
+                  <a:srgbClr val="222222"/>
+                </a:solidFill>
+                <a:latin typeface="맑은 고딕"/>
+              </a:rPr>
+              <a:t>•  Primary가 없으면 다시 받을 방법 없음</a:t>
+            </a:r>
+          </a:p>
+          <a:p>
+            <a:pPr algn="l">
+              <a:spcAft>
+                <a:spcPts val="1000"/>
+              </a:spcAft>
+            </a:pPr>
+            <a:r>
+              <a:rPr sz="1700" b="0">
+                <a:solidFill>
+                  <a:srgbClr val="222222"/>
+                </a:solidFill>
+                <a:latin typeface="맑은 고딕"/>
+              </a:rPr>
+              <a:t>•  Flashback 로그 손상 시 되돌리기 실패 가능</a:t>
+            </a:r>
+          </a:p>
+          <a:p>
+            <a:pPr algn="l">
+              <a:spcAft>
+                <a:spcPts val="1000"/>
+              </a:spcAft>
+            </a:pPr>
+            <a:r>
+              <a:rPr sz="1700" b="0">
+                <a:solidFill>
+                  <a:srgbClr val="222222"/>
+                </a:solidFill>
+                <a:latin typeface="맑은 고딕"/>
+              </a:rPr>
+              <a:t>•  대책: Primary 로그 보존, 다른 물리 Standby</a:t>
             </a:r>
           </a:p>
         </p:txBody>
@@ -12875,7 +13520,7 @@
                 </a:solidFill>
                 <a:latin typeface="맑은 고딕"/>
               </a:rPr>
-              <a:t>요약 (2/2)</a:t>
+              <a:t>되돌리기를 막는 작업</a:t>
             </a:r>
           </a:p>
         </p:txBody>
@@ -12888,8 +13533,8 @@
         </p:nvSpPr>
         <p:spPr>
           <a:xfrm>
-            <a:off x="640080" y="1371600"/>
-            <a:ext cx="10881360" cy="5120640"/>
+            <a:off x="640080" y="1078992"/>
+            <a:ext cx="10881360" cy="457200"/>
           </a:xfrm>
           <a:prstGeom prst="rect">
             <a:avLst/>
@@ -12904,113 +13549,120 @@
           <a:p>
             <a:pPr algn="l">
               <a:spcAft>
-                <a:spcPts val="1000"/>
-              </a:spcAft>
-            </a:pPr>
-            <a:r>
-              <a:rPr sz="1600" b="0">
-                <a:solidFill>
-                  <a:srgbClr val="222222"/>
-                </a:solidFill>
-                <a:latin typeface="맑은 고딕"/>
-              </a:rPr>
-              <a:t>•  보장 복원 지점은 FRA 가 부족해도 **지워지지 않는다.** 대신 데이터베이스가 멈춘다.</a:t>
-            </a:r>
-          </a:p>
-          <a:p>
-            <a:pPr algn="l">
-              <a:spcAft>
-                <a:spcPts val="1000"/>
-              </a:spcAft>
-            </a:pPr>
-            <a:r>
-              <a:rPr sz="1600" b="0">
-                <a:solidFill>
-                  <a:srgbClr val="222222"/>
-                </a:solidFill>
-                <a:latin typeface="맑은 고딕"/>
-              </a:rPr>
-              <a:t>•  CDB 를 열어도 **PDB 는 MOUNTED** 로 남는다. 조회하면 ORA-01219.</a:t>
-            </a:r>
-          </a:p>
-          <a:p>
-            <a:pPr algn="l">
-              <a:spcAft>
-                <a:spcPts val="1000"/>
-              </a:spcAft>
-            </a:pPr>
-            <a:r>
-              <a:rPr sz="1600" b="0">
-                <a:solidFill>
-                  <a:srgbClr val="222222"/>
-                </a:solidFill>
-                <a:latin typeface="맑은 고딕"/>
-              </a:rPr>
-              <a:t>•  Snapshot 에서 MRP 기동 → **ORA-01665**. Primary·Far Sync 와 같은 이유(컨트롤 파일 유형).</a:t>
-            </a:r>
-          </a:p>
-          <a:p>
-            <a:pPr algn="l">
-              <a:spcAft>
-                <a:spcPts val="1000"/>
-              </a:spcAft>
-            </a:pPr>
-            <a:r>
-              <a:rPr sz="1600" b="0">
-                <a:solidFill>
-                  <a:srgbClr val="222222"/>
-                </a:solidFill>
-                <a:latin typeface="맑은 고딕"/>
-              </a:rPr>
-              <a:t>•  적용은 멈추고 **수신은 계속**한다. transport lag 0 / apply lag 증가.</a:t>
-            </a:r>
-          </a:p>
-          <a:p>
-            <a:pPr algn="l">
-              <a:spcAft>
-                <a:spcPts val="1000"/>
-              </a:spcAft>
-            </a:pPr>
-            <a:r>
-              <a:rPr sz="1600" b="0">
-                <a:solidFill>
-                  <a:srgbClr val="222222"/>
-                </a:solidFill>
-                <a:latin typeface="맑은 고딕"/>
-              </a:rPr>
-              <a:t>•  FRA 에 **FLASHBACK LOG** 유형이 생긴다(1,536 → 1,941MB). 감시는 `STORAGE_SIZE` 가 아니라 이것으로.</a:t>
-            </a:r>
-          </a:p>
-          <a:p>
-            <a:pPr algn="l">
-              <a:spcAft>
-                <a:spcPts val="1000"/>
-              </a:spcAft>
-            </a:pPr>
-            <a:r>
-              <a:rPr sz="1600" b="0">
-                <a:solidFill>
-                  <a:srgbClr val="222222"/>
-                </a:solidFill>
-                <a:latin typeface="맑은 고딕"/>
-              </a:rPr>
-              <a:t>•  복귀는 **MOUNT 에서**. 이후 **열고 나서 MRP** — 반대면 **ORA-10456**.</a:t>
-            </a:r>
-          </a:p>
-          <a:p>
-            <a:pPr algn="l">
-              <a:spcAft>
-                <a:spcPts val="1000"/>
-              </a:spcAft>
-            </a:pPr>
-            <a:r>
-              <a:rPr sz="1600" b="0">
-                <a:solidFill>
-                  <a:srgbClr val="222222"/>
-                </a:solidFill>
-                <a:latin typeface="맑은 고딕"/>
-              </a:rPr>
-              <a:t>•  검증 — 쓴 테이블은 **ORA-00942**, 고친 행은 복귀, 밀린 리두는 적용, FRA 400MB 회수.</a:t>
+                <a:spcPts val="600"/>
+              </a:spcAft>
+            </a:pPr>
+            <a:r>
+              <a:rPr sz="1500" b="0">
+                <a:solidFill>
+                  <a:srgbClr val="5A6672"/>
+                </a:solidFill>
+                <a:latin typeface="맑은 고딕"/>
+              </a:rPr>
+              <a:t>Flashback이 넘지 못하는 선</a:t>
+            </a:r>
+          </a:p>
+        </p:txBody>
+      </p:sp>
+      <p:sp>
+        <p:nvSpPr>
+          <p:cNvPr id="5" name="TextBox 4"/>
+          <p:cNvSpPr txBox="1"/>
+          <p:nvPr/>
+        </p:nvSpPr>
+        <p:spPr>
+          <a:xfrm>
+            <a:off x="640080" y="1737360"/>
+            <a:ext cx="10881360" cy="4754880"/>
+          </a:xfrm>
+          <a:prstGeom prst="rect">
+            <a:avLst/>
+          </a:prstGeom>
+          <a:noFill/>
+        </p:spPr>
+        <p:txBody>
+          <a:bodyPr wrap="square">
+            <a:spAutoFit/>
+          </a:bodyPr>
+          <a:lstStyle/>
+          <a:p>
+            <a:pPr algn="l">
+              <a:spcAft>
+                <a:spcPts val="1000"/>
+              </a:spcAft>
+            </a:pPr>
+            <a:r>
+              <a:rPr sz="1700" b="0">
+                <a:solidFill>
+                  <a:srgbClr val="222222"/>
+                </a:solidFill>
+                <a:latin typeface="맑은 고딕"/>
+              </a:rPr>
+              <a:t>•  컨트롤 파일 재생성·복원</a:t>
+            </a:r>
+          </a:p>
+          <a:p>
+            <a:pPr algn="l">
+              <a:spcAft>
+                <a:spcPts val="1000"/>
+              </a:spcAft>
+            </a:pPr>
+            <a:r>
+              <a:rPr sz="1700" b="0">
+                <a:solidFill>
+                  <a:srgbClr val="222222"/>
+                </a:solidFill>
+                <a:latin typeface="맑은 고딕"/>
+              </a:rPr>
+              <a:t>•  데이터 파일 축소(RESIZE로 줄이기)</a:t>
+            </a:r>
+          </a:p>
+          <a:p>
+            <a:pPr algn="l">
+              <a:spcAft>
+                <a:spcPts val="1000"/>
+              </a:spcAft>
+            </a:pPr>
+            <a:r>
+              <a:rPr sz="1700" b="0">
+                <a:solidFill>
+                  <a:srgbClr val="222222"/>
+                </a:solidFill>
+                <a:latin typeface="맑은 고딕"/>
+              </a:rPr>
+              <a:t>•  OPEN RESETLOGS, Flashback 로그 수동 삭제</a:t>
+            </a:r>
+          </a:p>
+          <a:p>
+            <a:pPr algn="l">
+              <a:spcAft>
+                <a:spcPts val="1000"/>
+              </a:spcAft>
+            </a:pPr>
+            <a:r>
+              <a:rPr sz="1700" b="0">
+                <a:solidFill>
+                  <a:srgbClr val="222222"/>
+                </a:solidFill>
+                <a:latin typeface="맑은 고딕"/>
+              </a:rPr>
+              <a:t>•  실패 시 Standby를 새로 생성(5·6장)</a:t>
+            </a:r>
+          </a:p>
+          <a:p>
+            <a:pPr algn="l">
+              <a:spcAft>
+                <a:spcPts val="1000"/>
+              </a:spcAft>
+            </a:pPr>
+            <a:r>
+              <a:rPr sz="1700" b="0">
+                <a:solidFill>
+                  <a:srgbClr val="222222"/>
+                </a:solidFill>
+                <a:latin typeface="맑은 고딕"/>
+              </a:rPr>
+              <a:t>•  시험 계정에 ALTER DATABASE·SYSTEM 권한 금지</a:t>
             </a:r>
           </a:p>
         </p:txBody>
@@ -13042,7 +13694,7 @@
         <p:spPr>
           <a:xfrm>
             <a:off x="0" y="0"/>
-            <a:ext cx="12191695" cy="1005840"/>
+            <a:ext cx="12191695" cy="6858000"/>
           </a:xfrm>
           <a:prstGeom prst="rect">
             <a:avLst/>
@@ -13085,8 +13737,8 @@
         </p:nvSpPr>
         <p:spPr>
           <a:xfrm>
-            <a:off x="548640" y="91440"/>
-            <a:ext cx="10972800" cy="777240"/>
+            <a:off x="822960" y="2011680"/>
+            <a:ext cx="10515600" cy="1097280"/>
           </a:xfrm>
           <a:prstGeom prst="rect">
             <a:avLst/>
@@ -13105,13 +13757,13 @@
               </a:spcAft>
             </a:pPr>
             <a:r>
-              <a:rPr sz="2600" b="1">
+              <a:rPr sz="4000" b="1">
                 <a:solidFill>
                   <a:srgbClr val="FFFFFF"/>
                 </a:solidFill>
                 <a:latin typeface="맑은 고딕"/>
               </a:rPr>
-              <a:t>실습 개요</a:t>
+              <a:t>11.7</a:t>
             </a:r>
           </a:p>
         </p:txBody>
@@ -13124,8 +13776,8 @@
         </p:nvSpPr>
         <p:spPr>
           <a:xfrm>
-            <a:off x="640080" y="1371600"/>
-            <a:ext cx="10881360" cy="5120640"/>
+            <a:off x="822960" y="3017520"/>
+            <a:ext cx="10515600" cy="914400"/>
           </a:xfrm>
           <a:prstGeom prst="rect">
             <a:avLst/>
@@ -13140,113 +13792,132 @@
           <a:p>
             <a:pPr algn="l">
               <a:spcAft>
-                <a:spcPts val="1000"/>
+                <a:spcPts val="600"/>
+              </a:spcAft>
+            </a:pPr>
+            <a:r>
+              <a:rPr sz="2800" b="1">
+                <a:solidFill>
+                  <a:srgbClr val="FFFFFF"/>
+                </a:solidFill>
+                <a:latin typeface="맑은 고딕"/>
+              </a:rPr>
+              <a:t>세 가지 방식 비교와 선택</a:t>
+            </a:r>
+          </a:p>
+        </p:txBody>
+      </p:sp>
+      <p:sp>
+        <p:nvSpPr>
+          <p:cNvPr id="5" name="Rectangle 4"/>
+          <p:cNvSpPr/>
+          <p:nvPr/>
+        </p:nvSpPr>
+        <p:spPr>
+          <a:xfrm>
+            <a:off x="822960" y="4114800"/>
+            <a:ext cx="5486400" cy="54864"/>
+          </a:xfrm>
+          <a:prstGeom prst="rect">
+            <a:avLst/>
+          </a:prstGeom>
+          <a:solidFill>
+            <a:srgbClr val="FFFFFF"/>
+          </a:solidFill>
+          <a:ln>
+            <a:noFill/>
+          </a:ln>
+          <a:effectLst/>
+        </p:spPr>
+        <p:style>
+          <a:lnRef idx="1">
+            <a:schemeClr val="accent1"/>
+          </a:lnRef>
+          <a:fillRef idx="3">
+            <a:schemeClr val="accent1"/>
+          </a:fillRef>
+          <a:effectRef idx="2">
+            <a:schemeClr val="accent1"/>
+          </a:effectRef>
+          <a:fontRef idx="minor">
+            <a:schemeClr val="lt1"/>
+          </a:fontRef>
+        </p:style>
+        <p:txBody>
+          <a:bodyPr rtlCol="0" anchor="ctr"/>
+          <a:lstStyle/>
+          <a:p>
+            <a:pPr algn="ctr"/>
+          </a:p>
+        </p:txBody>
+      </p:sp>
+      <p:sp>
+        <p:nvSpPr>
+          <p:cNvPr id="6" name="TextBox 5"/>
+          <p:cNvSpPr txBox="1"/>
+          <p:nvPr/>
+        </p:nvSpPr>
+        <p:spPr>
+          <a:xfrm>
+            <a:off x="822960" y="4297680"/>
+            <a:ext cx="10058400" cy="2011680"/>
+          </a:xfrm>
+          <a:prstGeom prst="rect">
+            <a:avLst/>
+          </a:prstGeom>
+          <a:noFill/>
+        </p:spPr>
+        <p:txBody>
+          <a:bodyPr wrap="square">
+            <a:spAutoFit/>
+          </a:bodyPr>
+          <a:lstStyle/>
+          <a:p>
+            <a:pPr algn="l">
+              <a:spcAft>
+                <a:spcPts val="800"/>
               </a:spcAft>
             </a:pPr>
             <a:r>
               <a:rPr sz="1600" b="0">
                 <a:solidFill>
-                  <a:srgbClr val="222222"/>
-                </a:solidFill>
-                <a:latin typeface="맑은 고딕"/>
-              </a:rPr>
-              <a:t>•  실습 01 — 전제 조건 확인</a:t>
-            </a:r>
-          </a:p>
-          <a:p>
-            <a:pPr algn="l">
-              <a:spcAft>
-                <a:spcPts val="1000"/>
+                  <a:srgbClr val="FFFFFF"/>
+                </a:solidFill>
+                <a:latin typeface="맑은 고딕"/>
+              </a:rPr>
+              <a:t>•  Snapshot Standby</a:t>
+            </a:r>
+          </a:p>
+          <a:p>
+            <a:pPr algn="l">
+              <a:spcAft>
+                <a:spcPts val="800"/>
               </a:spcAft>
             </a:pPr>
             <a:r>
               <a:rPr sz="1600" b="0">
                 <a:solidFill>
-                  <a:srgbClr val="222222"/>
-                </a:solidFill>
-                <a:latin typeface="맑은 고딕"/>
-              </a:rPr>
-              <a:t>•  실습 02 — 전환 실패와 성공</a:t>
-            </a:r>
-          </a:p>
-          <a:p>
-            <a:pPr algn="l">
-              <a:spcAft>
-                <a:spcPts val="1000"/>
+                  <a:srgbClr val="FFFFFF"/>
+                </a:solidFill>
+                <a:latin typeface="맑은 고딕"/>
+              </a:rPr>
+              <a:t>•  Real-Time Query (ADG)</a:t>
+            </a:r>
+          </a:p>
+          <a:p>
+            <a:pPr algn="l">
+              <a:spcAft>
+                <a:spcPts val="800"/>
               </a:spcAft>
             </a:pPr>
             <a:r>
               <a:rPr sz="1600" b="0">
                 <a:solidFill>
-                  <a:srgbClr val="222222"/>
-                </a:solidFill>
-                <a:latin typeface="맑은 고딕"/>
-              </a:rPr>
-              <a:t>•  실습 03 — 복원 지점 읽기</a:t>
-            </a:r>
-          </a:p>
-          <a:p>
-            <a:pPr algn="l">
-              <a:spcAft>
-                <a:spcPts val="1000"/>
-              </a:spcAft>
-            </a:pPr>
-            <a:r>
-              <a:rPr sz="1600" b="0">
-                <a:solidFill>
-                  <a:srgbClr val="222222"/>
-                </a:solidFill>
-                <a:latin typeface="맑은 고딕"/>
-              </a:rPr>
-              <a:t>•  실습 04 — 열고 쓰기</a:t>
-            </a:r>
-          </a:p>
-          <a:p>
-            <a:pPr algn="l">
-              <a:spcAft>
-                <a:spcPts val="1000"/>
-              </a:spcAft>
-            </a:pPr>
-            <a:r>
-              <a:rPr sz="1600" b="0">
-                <a:solidFill>
-                  <a:srgbClr val="222222"/>
-                </a:solidFill>
-                <a:latin typeface="맑은 고딕"/>
-              </a:rPr>
-              <a:t>•  실습 05 — 전환 중의 관찰</a:t>
-            </a:r>
-          </a:p>
-          <a:p>
-            <a:pPr algn="l">
-              <a:spcAft>
-                <a:spcPts val="1000"/>
-              </a:spcAft>
-            </a:pPr>
-            <a:r>
-              <a:rPr sz="1600" b="0">
-                <a:solidFill>
-                  <a:srgbClr val="222222"/>
-                </a:solidFill>
-                <a:latin typeface="맑은 고딕"/>
-              </a:rPr>
-              <a:t>•  실습 06 — 되돌리기</a:t>
-            </a:r>
-          </a:p>
-          <a:p>
-            <a:pPr algn="l">
-              <a:spcAft>
-                <a:spcPts val="1000"/>
-              </a:spcAft>
-            </a:pPr>
-            <a:r>
-              <a:rPr sz="1600" b="0">
-                <a:solidFill>
-                  <a:srgbClr val="222222"/>
-                </a:solidFill>
-                <a:latin typeface="맑은 고딕"/>
-              </a:rPr>
-              <a:t>•  실습 07 — 검증과 정리</a:t>
+                  <a:srgbClr val="FFFFFF"/>
+                </a:solidFill>
+                <a:latin typeface="맑은 고딕"/>
+              </a:rPr>
+              <a:t>•  Logical Standby</a:t>
             </a:r>
           </a:p>
         </p:txBody>
@@ -13386,7 +14057,7 @@
                 </a:solidFill>
                 <a:latin typeface="맑은 고딕"/>
               </a:rPr>
-              <a:t>왜 Snapshot Standby 인가</a:t>
+              <a:t>Snapshot Standby가 필요한 상황</a:t>
             </a:r>
           </a:p>
         </p:txBody>
@@ -13469,7 +14140,7 @@
                 </a:solidFill>
                 <a:latin typeface="맑은 고딕"/>
               </a:rPr>
-              <a:t>•  조회만으로 안 되는 일</a:t>
+              <a:t>•  운영 크기의 데이터로 시험해야 하는 이유</a:t>
             </a:r>
           </a:p>
           <a:p>
@@ -13485,7 +14156,7 @@
                 </a:solidFill>
                 <a:latin typeface="맑은 고딕"/>
               </a:rPr>
-              <a:t>•  대가는 무엇인가</a:t>
+              <a:t>•  Real Application Testing과의 연계</a:t>
             </a:r>
           </a:p>
           <a:p>
@@ -13501,7 +14172,2261 @@
                 </a:solidFill>
                 <a:latin typeface="맑은 고딕"/>
               </a:rPr>
-              <a:t>•  다른 방법들과 나란히</a:t>
+              <a:t>•  물리 Standby만 전환 대상</a:t>
+            </a:r>
+          </a:p>
+        </p:txBody>
+      </p:sp>
+    </p:spTree>
+  </p:cSld>
+  <p:clrMapOvr>
+    <a:masterClrMapping/>
+  </p:clrMapOvr>
+</p:sld>
+</file>
+
+<file path=ppt/slides/slide40.xml><?xml version="1.0" encoding="utf-8"?>
+<p:sld xmlns:a="http://schemas.openxmlformats.org/drawingml/2006/main" xmlns:p="http://schemas.openxmlformats.org/presentationml/2006/main" xmlns:r="http://schemas.openxmlformats.org/officeDocument/2006/relationships">
+  <p:cSld>
+    <p:spTree>
+      <p:nvGrpSpPr>
+        <p:cNvPr id="1" name=""/>
+        <p:cNvGrpSpPr/>
+        <p:nvPr/>
+      </p:nvGrpSpPr>
+      <p:grpSpPr/>
+      <p:sp>
+        <p:nvSpPr>
+          <p:cNvPr id="2" name="Rectangle 1"/>
+          <p:cNvSpPr/>
+          <p:nvPr/>
+        </p:nvSpPr>
+        <p:spPr>
+          <a:xfrm>
+            <a:off x="0" y="0"/>
+            <a:ext cx="12191695" cy="1005840"/>
+          </a:xfrm>
+          <a:prstGeom prst="rect">
+            <a:avLst/>
+          </a:prstGeom>
+          <a:solidFill>
+            <a:srgbClr val="C0392B"/>
+          </a:solidFill>
+          <a:ln>
+            <a:noFill/>
+          </a:ln>
+          <a:effectLst/>
+        </p:spPr>
+        <p:style>
+          <a:lnRef idx="1">
+            <a:schemeClr val="accent1"/>
+          </a:lnRef>
+          <a:fillRef idx="3">
+            <a:schemeClr val="accent1"/>
+          </a:fillRef>
+          <a:effectRef idx="2">
+            <a:schemeClr val="accent1"/>
+          </a:effectRef>
+          <a:fontRef idx="minor">
+            <a:schemeClr val="lt1"/>
+          </a:fontRef>
+        </p:style>
+        <p:txBody>
+          <a:bodyPr rtlCol="0" anchor="ctr"/>
+          <a:lstStyle/>
+          <a:p>
+            <a:pPr algn="ctr"/>
+          </a:p>
+        </p:txBody>
+      </p:sp>
+      <p:sp>
+        <p:nvSpPr>
+          <p:cNvPr id="3" name="TextBox 2"/>
+          <p:cNvSpPr txBox="1"/>
+          <p:nvPr/>
+        </p:nvSpPr>
+        <p:spPr>
+          <a:xfrm>
+            <a:off x="548640" y="91440"/>
+            <a:ext cx="10972800" cy="777240"/>
+          </a:xfrm>
+          <a:prstGeom prst="rect">
+            <a:avLst/>
+          </a:prstGeom>
+          <a:noFill/>
+        </p:spPr>
+        <p:txBody>
+          <a:bodyPr wrap="square">
+            <a:spAutoFit/>
+          </a:bodyPr>
+          <a:lstStyle/>
+          <a:p>
+            <a:pPr algn="l">
+              <a:spcAft>
+                <a:spcPts val="600"/>
+              </a:spcAft>
+            </a:pPr>
+            <a:r>
+              <a:rPr sz="2600" b="1">
+                <a:solidFill>
+                  <a:srgbClr val="FFFFFF"/>
+                </a:solidFill>
+                <a:latin typeface="맑은 고딕"/>
+              </a:rPr>
+              <a:t>세 방식 비교</a:t>
+            </a:r>
+          </a:p>
+        </p:txBody>
+      </p:sp>
+      <p:sp>
+        <p:nvSpPr>
+          <p:cNvPr id="4" name="TextBox 3"/>
+          <p:cNvSpPr txBox="1"/>
+          <p:nvPr/>
+        </p:nvSpPr>
+        <p:spPr>
+          <a:xfrm>
+            <a:off x="640080" y="1078992"/>
+            <a:ext cx="10881360" cy="457200"/>
+          </a:xfrm>
+          <a:prstGeom prst="rect">
+            <a:avLst/>
+          </a:prstGeom>
+          <a:noFill/>
+        </p:spPr>
+        <p:txBody>
+          <a:bodyPr wrap="square">
+            <a:spAutoFit/>
+          </a:bodyPr>
+          <a:lstStyle/>
+          <a:p>
+            <a:pPr algn="l">
+              <a:spcAft>
+                <a:spcPts val="600"/>
+              </a:spcAft>
+            </a:pPr>
+            <a:r>
+              <a:rPr sz="1500" b="0">
+                <a:solidFill>
+                  <a:srgbClr val="5A6672"/>
+                </a:solidFill>
+                <a:latin typeface="맑은 고딕"/>
+              </a:rPr>
+              <a:t>쓰기, 데이터 시점, 전환 대상, 라이선스</a:t>
+            </a:r>
+          </a:p>
+        </p:txBody>
+      </p:sp>
+      <p:sp>
+        <p:nvSpPr>
+          <p:cNvPr id="5" name="TextBox 4"/>
+          <p:cNvSpPr txBox="1"/>
+          <p:nvPr/>
+        </p:nvSpPr>
+        <p:spPr>
+          <a:xfrm>
+            <a:off x="640080" y="1737360"/>
+            <a:ext cx="10881360" cy="4754880"/>
+          </a:xfrm>
+          <a:prstGeom prst="rect">
+            <a:avLst/>
+          </a:prstGeom>
+          <a:noFill/>
+        </p:spPr>
+        <p:txBody>
+          <a:bodyPr wrap="square">
+            <a:spAutoFit/>
+          </a:bodyPr>
+          <a:lstStyle/>
+          <a:p>
+            <a:pPr algn="l">
+              <a:spcAft>
+                <a:spcPts val="1000"/>
+              </a:spcAft>
+            </a:pPr>
+            <a:r>
+              <a:rPr sz="1700" b="0">
+                <a:solidFill>
+                  <a:srgbClr val="222222"/>
+                </a:solidFill>
+                <a:latin typeface="맑은 고딕"/>
+              </a:rPr>
+              <a:t>•  Snapshot: 전부 쓰기, 전환 시점 고정, EE 기본</a:t>
+            </a:r>
+          </a:p>
+          <a:p>
+            <a:pPr algn="l">
+              <a:spcAft>
+                <a:spcPts val="1000"/>
+              </a:spcAft>
+            </a:pPr>
+            <a:r>
+              <a:rPr sz="1700" b="0">
+                <a:solidFill>
+                  <a:srgbClr val="222222"/>
+                </a:solidFill>
+                <a:latin typeface="맑은 고딕"/>
+              </a:rPr>
+              <a:t>•  Real-Time Query: 읽기만, 최신, ADG 옵션</a:t>
+            </a:r>
+          </a:p>
+          <a:p>
+            <a:pPr algn="l">
+              <a:spcAft>
+                <a:spcPts val="1000"/>
+              </a:spcAft>
+            </a:pPr>
+            <a:r>
+              <a:rPr sz="1700" b="0">
+                <a:solidFill>
+                  <a:srgbClr val="222222"/>
+                </a:solidFill>
+                <a:latin typeface="맑은 고딕"/>
+              </a:rPr>
+              <a:t>•  Logical: 일부 객체 쓰기·유지, 최신, 유형 제약</a:t>
+            </a:r>
+          </a:p>
+          <a:p>
+            <a:pPr algn="l">
+              <a:spcAft>
+                <a:spcPts val="1000"/>
+              </a:spcAft>
+            </a:pPr>
+            <a:r>
+              <a:rPr sz="1700" b="0">
+                <a:solidFill>
+                  <a:srgbClr val="222222"/>
+                </a:solidFill>
+                <a:latin typeface="맑은 고딕"/>
+              </a:rPr>
+              <a:t>•  Switchover 대상: Snapshot만 불가</a:t>
+            </a:r>
+          </a:p>
+          <a:p>
+            <a:pPr algn="l">
+              <a:spcAft>
+                <a:spcPts val="1000"/>
+              </a:spcAft>
+            </a:pPr>
+            <a:r>
+              <a:rPr sz="1700" b="0">
+                <a:solidFill>
+                  <a:srgbClr val="222222"/>
+                </a:solidFill>
+                <a:latin typeface="맑은 고딕"/>
+              </a:rPr>
+              <a:t>•  DML 리다이렉션은 Primary에 기록</a:t>
+            </a:r>
+          </a:p>
+        </p:txBody>
+      </p:sp>
+    </p:spTree>
+  </p:cSld>
+  <p:clrMapOvr>
+    <a:masterClrMapping/>
+  </p:clrMapOvr>
+</p:sld>
+</file>
+
+<file path=ppt/slides/slide41.xml><?xml version="1.0" encoding="utf-8"?>
+<p:sld xmlns:a="http://schemas.openxmlformats.org/drawingml/2006/main" xmlns:p="http://schemas.openxmlformats.org/presentationml/2006/main" xmlns:r="http://schemas.openxmlformats.org/officeDocument/2006/relationships">
+  <p:cSld>
+    <p:spTree>
+      <p:nvGrpSpPr>
+        <p:cNvPr id="1" name=""/>
+        <p:cNvGrpSpPr/>
+        <p:nvPr/>
+      </p:nvGrpSpPr>
+      <p:grpSpPr/>
+      <p:sp>
+        <p:nvSpPr>
+          <p:cNvPr id="2" name="Rectangle 1"/>
+          <p:cNvSpPr/>
+          <p:nvPr/>
+        </p:nvSpPr>
+        <p:spPr>
+          <a:xfrm>
+            <a:off x="0" y="0"/>
+            <a:ext cx="12191695" cy="1005840"/>
+          </a:xfrm>
+          <a:prstGeom prst="rect">
+            <a:avLst/>
+          </a:prstGeom>
+          <a:solidFill>
+            <a:srgbClr val="C0392B"/>
+          </a:solidFill>
+          <a:ln>
+            <a:noFill/>
+          </a:ln>
+          <a:effectLst/>
+        </p:spPr>
+        <p:style>
+          <a:lnRef idx="1">
+            <a:schemeClr val="accent1"/>
+          </a:lnRef>
+          <a:fillRef idx="3">
+            <a:schemeClr val="accent1"/>
+          </a:fillRef>
+          <a:effectRef idx="2">
+            <a:schemeClr val="accent1"/>
+          </a:effectRef>
+          <a:fontRef idx="minor">
+            <a:schemeClr val="lt1"/>
+          </a:fontRef>
+        </p:style>
+        <p:txBody>
+          <a:bodyPr rtlCol="0" anchor="ctr"/>
+          <a:lstStyle/>
+          <a:p>
+            <a:pPr algn="ctr"/>
+          </a:p>
+        </p:txBody>
+      </p:sp>
+      <p:sp>
+        <p:nvSpPr>
+          <p:cNvPr id="3" name="TextBox 2"/>
+          <p:cNvSpPr txBox="1"/>
+          <p:nvPr/>
+        </p:nvSpPr>
+        <p:spPr>
+          <a:xfrm>
+            <a:off x="548640" y="91440"/>
+            <a:ext cx="10972800" cy="777240"/>
+          </a:xfrm>
+          <a:prstGeom prst="rect">
+            <a:avLst/>
+          </a:prstGeom>
+          <a:noFill/>
+        </p:spPr>
+        <p:txBody>
+          <a:bodyPr wrap="square">
+            <a:spAutoFit/>
+          </a:bodyPr>
+          <a:lstStyle/>
+          <a:p>
+            <a:pPr algn="l">
+              <a:spcAft>
+                <a:spcPts val="600"/>
+              </a:spcAft>
+            </a:pPr>
+            <a:r>
+              <a:rPr sz="2600" b="1">
+                <a:solidFill>
+                  <a:srgbClr val="FFFFFF"/>
+                </a:solidFill>
+                <a:latin typeface="맑은 고딕"/>
+              </a:rPr>
+              <a:t>선택 기준</a:t>
+            </a:r>
+          </a:p>
+        </p:txBody>
+      </p:sp>
+      <p:sp>
+        <p:nvSpPr>
+          <p:cNvPr id="4" name="TextBox 3"/>
+          <p:cNvSpPr txBox="1"/>
+          <p:nvPr/>
+        </p:nvSpPr>
+        <p:spPr>
+          <a:xfrm>
+            <a:off x="640080" y="1078992"/>
+            <a:ext cx="10881360" cy="457200"/>
+          </a:xfrm>
+          <a:prstGeom prst="rect">
+            <a:avLst/>
+          </a:prstGeom>
+          <a:noFill/>
+        </p:spPr>
+        <p:txBody>
+          <a:bodyPr wrap="square">
+            <a:spAutoFit/>
+          </a:bodyPr>
+          <a:lstStyle/>
+          <a:p>
+            <a:pPr algn="l">
+              <a:spcAft>
+                <a:spcPts val="600"/>
+              </a:spcAft>
+            </a:pPr>
+            <a:r>
+              <a:rPr sz="1500" b="0">
+                <a:solidFill>
+                  <a:srgbClr val="5A6672"/>
+                </a:solidFill>
+                <a:latin typeface="맑은 고딕"/>
+              </a:rPr>
+              <a:t>바꾸는가, 남기는가, 얼마나 오래인가</a:t>
+            </a:r>
+          </a:p>
+        </p:txBody>
+      </p:sp>
+      <p:sp>
+        <p:nvSpPr>
+          <p:cNvPr id="5" name="TextBox 4"/>
+          <p:cNvSpPr txBox="1"/>
+          <p:nvPr/>
+        </p:nvSpPr>
+        <p:spPr>
+          <a:xfrm>
+            <a:off x="640080" y="1737360"/>
+            <a:ext cx="10881360" cy="4754880"/>
+          </a:xfrm>
+          <a:prstGeom prst="rect">
+            <a:avLst/>
+          </a:prstGeom>
+          <a:noFill/>
+        </p:spPr>
+        <p:txBody>
+          <a:bodyPr wrap="square">
+            <a:spAutoFit/>
+          </a:bodyPr>
+          <a:lstStyle/>
+          <a:p>
+            <a:pPr algn="l">
+              <a:spcAft>
+                <a:spcPts val="1000"/>
+              </a:spcAft>
+            </a:pPr>
+            <a:r>
+              <a:rPr sz="1700" b="0">
+                <a:solidFill>
+                  <a:srgbClr val="222222"/>
+                </a:solidFill>
+                <a:latin typeface="맑은 고딕"/>
+              </a:rPr>
+              <a:t>•  바꾸고 버려도 됨 → Snapshot Standby</a:t>
+            </a:r>
+          </a:p>
+          <a:p>
+            <a:pPr algn="l">
+              <a:spcAft>
+                <a:spcPts val="1000"/>
+              </a:spcAft>
+            </a:pPr>
+            <a:r>
+              <a:rPr sz="1700" b="0">
+                <a:solidFill>
+                  <a:srgbClr val="222222"/>
+                </a:solidFill>
+                <a:latin typeface="맑은 고딕"/>
+              </a:rPr>
+              <a:t>•  최신 데이터 읽기만 → Real-Time Query</a:t>
+            </a:r>
+          </a:p>
+          <a:p>
+            <a:pPr algn="l">
+              <a:spcAft>
+                <a:spcPts val="1000"/>
+              </a:spcAft>
+            </a:pPr>
+            <a:r>
+              <a:rPr sz="1700" b="0">
+                <a:solidFill>
+                  <a:srgbClr val="222222"/>
+                </a:solidFill>
+                <a:latin typeface="맑은 고딕"/>
+              </a:rPr>
+              <a:t>•  추가 객체를 계속 유지 → Logical Standby</a:t>
+            </a:r>
+          </a:p>
+          <a:p>
+            <a:pPr algn="l">
+              <a:spcAft>
+                <a:spcPts val="1000"/>
+              </a:spcAft>
+            </a:pPr>
+            <a:r>
+              <a:rPr sz="1700" b="0">
+                <a:solidFill>
+                  <a:srgbClr val="222222"/>
+                </a:solidFill>
+                <a:latin typeface="맑은 고딕"/>
+              </a:rPr>
+              <a:t>•  장기 개발 환경 → RMAN 복제·PDB 클론</a:t>
+            </a:r>
+          </a:p>
+          <a:p>
+            <a:pPr algn="l">
+              <a:spcAft>
+                <a:spcPts val="1000"/>
+              </a:spcAft>
+            </a:pPr>
+            <a:r>
+              <a:rPr sz="1700" b="0">
+                <a:solidFill>
+                  <a:srgbClr val="222222"/>
+                </a:solidFill>
+                <a:latin typeface="맑은 고딕"/>
+              </a:rPr>
+              <a:t>•  번갈아 쓰면 전환마다 조회 서비스 중단</a:t>
+            </a:r>
+          </a:p>
+        </p:txBody>
+      </p:sp>
+    </p:spTree>
+  </p:cSld>
+  <p:clrMapOvr>
+    <a:masterClrMapping/>
+  </p:clrMapOvr>
+</p:sld>
+</file>
+
+<file path=ppt/slides/slide42.xml><?xml version="1.0" encoding="utf-8"?>
+<p:sld xmlns:a="http://schemas.openxmlformats.org/drawingml/2006/main" xmlns:p="http://schemas.openxmlformats.org/presentationml/2006/main" xmlns:r="http://schemas.openxmlformats.org/officeDocument/2006/relationships">
+  <p:cSld>
+    <p:spTree>
+      <p:nvGrpSpPr>
+        <p:cNvPr id="1" name=""/>
+        <p:cNvGrpSpPr/>
+        <p:nvPr/>
+      </p:nvGrpSpPr>
+      <p:grpSpPr/>
+      <p:sp>
+        <p:nvSpPr>
+          <p:cNvPr id="2" name="Rectangle 1"/>
+          <p:cNvSpPr/>
+          <p:nvPr/>
+        </p:nvSpPr>
+        <p:spPr>
+          <a:xfrm>
+            <a:off x="0" y="0"/>
+            <a:ext cx="12191695" cy="1005840"/>
+          </a:xfrm>
+          <a:prstGeom prst="rect">
+            <a:avLst/>
+          </a:prstGeom>
+          <a:solidFill>
+            <a:srgbClr val="C0392B"/>
+          </a:solidFill>
+          <a:ln>
+            <a:noFill/>
+          </a:ln>
+          <a:effectLst/>
+        </p:spPr>
+        <p:style>
+          <a:lnRef idx="1">
+            <a:schemeClr val="accent1"/>
+          </a:lnRef>
+          <a:fillRef idx="3">
+            <a:schemeClr val="accent1"/>
+          </a:fillRef>
+          <a:effectRef idx="2">
+            <a:schemeClr val="accent1"/>
+          </a:effectRef>
+          <a:fontRef idx="minor">
+            <a:schemeClr val="lt1"/>
+          </a:fontRef>
+        </p:style>
+        <p:txBody>
+          <a:bodyPr rtlCol="0" anchor="ctr"/>
+          <a:lstStyle/>
+          <a:p>
+            <a:pPr algn="ctr"/>
+          </a:p>
+        </p:txBody>
+      </p:sp>
+      <p:sp>
+        <p:nvSpPr>
+          <p:cNvPr id="3" name="TextBox 2"/>
+          <p:cNvSpPr txBox="1"/>
+          <p:nvPr/>
+        </p:nvSpPr>
+        <p:spPr>
+          <a:xfrm>
+            <a:off x="548640" y="91440"/>
+            <a:ext cx="10972800" cy="777240"/>
+          </a:xfrm>
+          <a:prstGeom prst="rect">
+            <a:avLst/>
+          </a:prstGeom>
+          <a:noFill/>
+        </p:spPr>
+        <p:txBody>
+          <a:bodyPr wrap="square">
+            <a:spAutoFit/>
+          </a:bodyPr>
+          <a:lstStyle/>
+          <a:p>
+            <a:pPr algn="l">
+              <a:spcAft>
+                <a:spcPts val="600"/>
+              </a:spcAft>
+            </a:pPr>
+            <a:r>
+              <a:rPr sz="2600" b="1">
+                <a:solidFill>
+                  <a:srgbClr val="FFFFFF"/>
+                </a:solidFill>
+                <a:latin typeface="맑은 고딕"/>
+              </a:rPr>
+              <a:t>역할을 나눠 둔 구성</a:t>
+            </a:r>
+          </a:p>
+        </p:txBody>
+      </p:sp>
+      <p:sp>
+        <p:nvSpPr>
+          <p:cNvPr id="4" name="TextBox 3"/>
+          <p:cNvSpPr txBox="1"/>
+          <p:nvPr/>
+        </p:nvSpPr>
+        <p:spPr>
+          <a:xfrm>
+            <a:off x="640080" y="1078992"/>
+            <a:ext cx="10881360" cy="457200"/>
+          </a:xfrm>
+          <a:prstGeom prst="rect">
+            <a:avLst/>
+          </a:prstGeom>
+          <a:noFill/>
+        </p:spPr>
+        <p:txBody>
+          <a:bodyPr wrap="square">
+            <a:spAutoFit/>
+          </a:bodyPr>
+          <a:lstStyle/>
+          <a:p>
+            <a:pPr algn="l">
+              <a:spcAft>
+                <a:spcPts val="600"/>
+              </a:spcAft>
+            </a:pPr>
+            <a:r>
+              <a:rPr sz="1500" b="0">
+                <a:solidFill>
+                  <a:srgbClr val="5A6672"/>
+                </a:solidFill>
+                <a:latin typeface="맑은 고딕"/>
+              </a:rPr>
+              <a:t>재해 대비, 조회, 시험을 분리</a:t>
+            </a:r>
+          </a:p>
+        </p:txBody>
+      </p:sp>
+      <p:sp>
+        <p:nvSpPr>
+          <p:cNvPr id="5" name="TextBox 4"/>
+          <p:cNvSpPr txBox="1"/>
+          <p:nvPr/>
+        </p:nvSpPr>
+        <p:spPr>
+          <a:xfrm>
+            <a:off x="640080" y="1737360"/>
+            <a:ext cx="10881360" cy="4754880"/>
+          </a:xfrm>
+          <a:prstGeom prst="rect">
+            <a:avLst/>
+          </a:prstGeom>
+          <a:noFill/>
+        </p:spPr>
+        <p:txBody>
+          <a:bodyPr wrap="square">
+            <a:spAutoFit/>
+          </a:bodyPr>
+          <a:lstStyle/>
+          <a:p>
+            <a:pPr algn="l">
+              <a:spcAft>
+                <a:spcPts val="1000"/>
+              </a:spcAft>
+            </a:pPr>
+            <a:r>
+              <a:rPr sz="1700" b="0">
+                <a:solidFill>
+                  <a:srgbClr val="222222"/>
+                </a:solidFill>
+                <a:latin typeface="맑은 고딕"/>
+              </a:rPr>
+              <a:t>•  Standby A: SYNC·FASTSYNC, FSFO 대상</a:t>
+            </a:r>
+          </a:p>
+          <a:p>
+            <a:pPr algn="l">
+              <a:spcAft>
+                <a:spcPts val="1000"/>
+              </a:spcAft>
+            </a:pPr>
+            <a:r>
+              <a:rPr sz="1700" b="0">
+                <a:solidFill>
+                  <a:srgbClr val="222222"/>
+                </a:solidFill>
+                <a:latin typeface="맑은 고딕"/>
+              </a:rPr>
+              <a:t>•  Standby B: 평소 Real-Time Query</a:t>
+            </a:r>
+          </a:p>
+          <a:p>
+            <a:pPr algn="l">
+              <a:spcAft>
+                <a:spcPts val="1000"/>
+              </a:spcAft>
+            </a:pPr>
+            <a:r>
+              <a:rPr sz="1700" b="0">
+                <a:solidFill>
+                  <a:srgbClr val="222222"/>
+                </a:solidFill>
+                <a:latin typeface="맑은 고딕"/>
+              </a:rPr>
+              <a:t>•  시험 기간에만 B를 Snapshot으로 전환</a:t>
+            </a:r>
+          </a:p>
+          <a:p>
+            <a:pPr algn="l">
+              <a:spcAft>
+                <a:spcPts val="1000"/>
+              </a:spcAft>
+            </a:pPr>
+            <a:r>
+              <a:rPr sz="1700" b="0">
+                <a:solidFill>
+                  <a:srgbClr val="222222"/>
+                </a:solidFill>
+                <a:latin typeface="맑은 고딕"/>
+              </a:rPr>
+              <a:t>•  재해 대비 수준이 시험 중에도 유지</a:t>
+            </a:r>
+          </a:p>
+          <a:p>
+            <a:pPr algn="l">
+              <a:spcAft>
+                <a:spcPts val="1000"/>
+              </a:spcAft>
+            </a:pPr>
+            <a:r>
+              <a:rPr sz="1700" b="0">
+                <a:solidFill>
+                  <a:srgbClr val="222222"/>
+                </a:solidFill>
+                <a:latin typeface="맑은 고딕"/>
+              </a:rPr>
+              <a:t>•  최대 보호의 유일한 Standby 제약도 회피</a:t>
+            </a:r>
+          </a:p>
+        </p:txBody>
+      </p:sp>
+    </p:spTree>
+  </p:cSld>
+  <p:clrMapOvr>
+    <a:masterClrMapping/>
+  </p:clrMapOvr>
+</p:sld>
+</file>
+
+<file path=ppt/slides/slide43.xml><?xml version="1.0" encoding="utf-8"?>
+<p:sld xmlns:a="http://schemas.openxmlformats.org/drawingml/2006/main" xmlns:p="http://schemas.openxmlformats.org/presentationml/2006/main" xmlns:r="http://schemas.openxmlformats.org/officeDocument/2006/relationships">
+  <p:cSld>
+    <p:spTree>
+      <p:nvGrpSpPr>
+        <p:cNvPr id="1" name=""/>
+        <p:cNvGrpSpPr/>
+        <p:nvPr/>
+      </p:nvGrpSpPr>
+      <p:grpSpPr/>
+      <p:sp>
+        <p:nvSpPr>
+          <p:cNvPr id="2" name="Rectangle 1"/>
+          <p:cNvSpPr/>
+          <p:nvPr/>
+        </p:nvSpPr>
+        <p:spPr>
+          <a:xfrm>
+            <a:off x="0" y="0"/>
+            <a:ext cx="12191695" cy="6858000"/>
+          </a:xfrm>
+          <a:prstGeom prst="rect">
+            <a:avLst/>
+          </a:prstGeom>
+          <a:solidFill>
+            <a:srgbClr val="C0392B"/>
+          </a:solidFill>
+          <a:ln>
+            <a:noFill/>
+          </a:ln>
+          <a:effectLst/>
+        </p:spPr>
+        <p:style>
+          <a:lnRef idx="1">
+            <a:schemeClr val="accent1"/>
+          </a:lnRef>
+          <a:fillRef idx="3">
+            <a:schemeClr val="accent1"/>
+          </a:fillRef>
+          <a:effectRef idx="2">
+            <a:schemeClr val="accent1"/>
+          </a:effectRef>
+          <a:fontRef idx="minor">
+            <a:schemeClr val="lt1"/>
+          </a:fontRef>
+        </p:style>
+        <p:txBody>
+          <a:bodyPr rtlCol="0" anchor="ctr"/>
+          <a:lstStyle/>
+          <a:p>
+            <a:pPr algn="ctr"/>
+          </a:p>
+        </p:txBody>
+      </p:sp>
+      <p:sp>
+        <p:nvSpPr>
+          <p:cNvPr id="3" name="TextBox 2"/>
+          <p:cNvSpPr txBox="1"/>
+          <p:nvPr/>
+        </p:nvSpPr>
+        <p:spPr>
+          <a:xfrm>
+            <a:off x="822960" y="2011680"/>
+            <a:ext cx="10515600" cy="1097280"/>
+          </a:xfrm>
+          <a:prstGeom prst="rect">
+            <a:avLst/>
+          </a:prstGeom>
+          <a:noFill/>
+        </p:spPr>
+        <p:txBody>
+          <a:bodyPr wrap="square">
+            <a:spAutoFit/>
+          </a:bodyPr>
+          <a:lstStyle/>
+          <a:p>
+            <a:pPr algn="l">
+              <a:spcAft>
+                <a:spcPts val="600"/>
+              </a:spcAft>
+            </a:pPr>
+            <a:r>
+              <a:rPr sz="4000" b="1">
+                <a:solidFill>
+                  <a:srgbClr val="FFFFFF"/>
+                </a:solidFill>
+                <a:latin typeface="맑은 고딕"/>
+              </a:rPr>
+              <a:t>11.8</a:t>
+            </a:r>
+          </a:p>
+        </p:txBody>
+      </p:sp>
+      <p:sp>
+        <p:nvSpPr>
+          <p:cNvPr id="4" name="TextBox 3"/>
+          <p:cNvSpPr txBox="1"/>
+          <p:nvPr/>
+        </p:nvSpPr>
+        <p:spPr>
+          <a:xfrm>
+            <a:off x="822960" y="3017520"/>
+            <a:ext cx="10515600" cy="914400"/>
+          </a:xfrm>
+          <a:prstGeom prst="rect">
+            <a:avLst/>
+          </a:prstGeom>
+          <a:noFill/>
+        </p:spPr>
+        <p:txBody>
+          <a:bodyPr wrap="square">
+            <a:spAutoFit/>
+          </a:bodyPr>
+          <a:lstStyle/>
+          <a:p>
+            <a:pPr algn="l">
+              <a:spcAft>
+                <a:spcPts val="600"/>
+              </a:spcAft>
+            </a:pPr>
+            <a:r>
+              <a:rPr sz="2800" b="1">
+                <a:solidFill>
+                  <a:srgbClr val="FFFFFF"/>
+                </a:solidFill>
+                <a:latin typeface="맑은 고딕"/>
+              </a:rPr>
+              <a:t>운영 시 주의점</a:t>
+            </a:r>
+          </a:p>
+        </p:txBody>
+      </p:sp>
+      <p:sp>
+        <p:nvSpPr>
+          <p:cNvPr id="5" name="Rectangle 4"/>
+          <p:cNvSpPr/>
+          <p:nvPr/>
+        </p:nvSpPr>
+        <p:spPr>
+          <a:xfrm>
+            <a:off x="822960" y="4114800"/>
+            <a:ext cx="5486400" cy="54864"/>
+          </a:xfrm>
+          <a:prstGeom prst="rect">
+            <a:avLst/>
+          </a:prstGeom>
+          <a:solidFill>
+            <a:srgbClr val="FFFFFF"/>
+          </a:solidFill>
+          <a:ln>
+            <a:noFill/>
+          </a:ln>
+          <a:effectLst/>
+        </p:spPr>
+        <p:style>
+          <a:lnRef idx="1">
+            <a:schemeClr val="accent1"/>
+          </a:lnRef>
+          <a:fillRef idx="3">
+            <a:schemeClr val="accent1"/>
+          </a:fillRef>
+          <a:effectRef idx="2">
+            <a:schemeClr val="accent1"/>
+          </a:effectRef>
+          <a:fontRef idx="minor">
+            <a:schemeClr val="lt1"/>
+          </a:fontRef>
+        </p:style>
+        <p:txBody>
+          <a:bodyPr rtlCol="0" anchor="ctr"/>
+          <a:lstStyle/>
+          <a:p>
+            <a:pPr algn="ctr"/>
+          </a:p>
+        </p:txBody>
+      </p:sp>
+      <p:sp>
+        <p:nvSpPr>
+          <p:cNvPr id="6" name="TextBox 5"/>
+          <p:cNvSpPr txBox="1"/>
+          <p:nvPr/>
+        </p:nvSpPr>
+        <p:spPr>
+          <a:xfrm>
+            <a:off x="822960" y="4297680"/>
+            <a:ext cx="10058400" cy="2011680"/>
+          </a:xfrm>
+          <a:prstGeom prst="rect">
+            <a:avLst/>
+          </a:prstGeom>
+          <a:noFill/>
+        </p:spPr>
+        <p:txBody>
+          <a:bodyPr wrap="square">
+            <a:spAutoFit/>
+          </a:bodyPr>
+          <a:lstStyle/>
+          <a:p>
+            <a:pPr algn="l">
+              <a:spcAft>
+                <a:spcPts val="800"/>
+              </a:spcAft>
+            </a:pPr>
+            <a:r>
+              <a:rPr sz="1600" b="0">
+                <a:solidFill>
+                  <a:srgbClr val="FFFFFF"/>
+                </a:solidFill>
+                <a:latin typeface="맑은 고딕"/>
+              </a:rPr>
+              <a:t>•  전환해 둔 사실을 잊는 사고</a:t>
+            </a:r>
+          </a:p>
+          <a:p>
+            <a:pPr algn="l">
+              <a:spcAft>
+                <a:spcPts val="800"/>
+              </a:spcAft>
+            </a:pPr>
+            <a:r>
+              <a:rPr sz="1600" b="0">
+                <a:solidFill>
+                  <a:srgbClr val="FFFFFF"/>
+                </a:solidFill>
+                <a:latin typeface="맑은 고딕"/>
+              </a:rPr>
+              <a:t>•  되돌려도 취소되지 않는 외부 작업</a:t>
+            </a:r>
+          </a:p>
+          <a:p>
+            <a:pPr algn="l">
+              <a:spcAft>
+                <a:spcPts val="800"/>
+              </a:spcAft>
+            </a:pPr>
+            <a:r>
+              <a:rPr sz="1600" b="0">
+                <a:solidFill>
+                  <a:srgbClr val="FFFFFF"/>
+                </a:solidFill>
+                <a:latin typeface="맑은 고딕"/>
+              </a:rPr>
+              <a:t>•  되돌린 뒤의 검증</a:t>
+            </a:r>
+          </a:p>
+        </p:txBody>
+      </p:sp>
+    </p:spTree>
+  </p:cSld>
+  <p:clrMapOvr>
+    <a:masterClrMapping/>
+  </p:clrMapOvr>
+</p:sld>
+</file>
+
+<file path=ppt/slides/slide44.xml><?xml version="1.0" encoding="utf-8"?>
+<p:sld xmlns:a="http://schemas.openxmlformats.org/drawingml/2006/main" xmlns:p="http://schemas.openxmlformats.org/presentationml/2006/main" xmlns:r="http://schemas.openxmlformats.org/officeDocument/2006/relationships">
+  <p:cSld>
+    <p:spTree>
+      <p:nvGrpSpPr>
+        <p:cNvPr id="1" name=""/>
+        <p:cNvGrpSpPr/>
+        <p:nvPr/>
+      </p:nvGrpSpPr>
+      <p:grpSpPr/>
+      <p:sp>
+        <p:nvSpPr>
+          <p:cNvPr id="2" name="Rectangle 1"/>
+          <p:cNvSpPr/>
+          <p:nvPr/>
+        </p:nvSpPr>
+        <p:spPr>
+          <a:xfrm>
+            <a:off x="0" y="0"/>
+            <a:ext cx="12191695" cy="1005840"/>
+          </a:xfrm>
+          <a:prstGeom prst="rect">
+            <a:avLst/>
+          </a:prstGeom>
+          <a:solidFill>
+            <a:srgbClr val="C0392B"/>
+          </a:solidFill>
+          <a:ln>
+            <a:noFill/>
+          </a:ln>
+          <a:effectLst/>
+        </p:spPr>
+        <p:style>
+          <a:lnRef idx="1">
+            <a:schemeClr val="accent1"/>
+          </a:lnRef>
+          <a:fillRef idx="3">
+            <a:schemeClr val="accent1"/>
+          </a:fillRef>
+          <a:effectRef idx="2">
+            <a:schemeClr val="accent1"/>
+          </a:effectRef>
+          <a:fontRef idx="minor">
+            <a:schemeClr val="lt1"/>
+          </a:fontRef>
+        </p:style>
+        <p:txBody>
+          <a:bodyPr rtlCol="0" anchor="ctr"/>
+          <a:lstStyle/>
+          <a:p>
+            <a:pPr algn="ctr"/>
+          </a:p>
+        </p:txBody>
+      </p:sp>
+      <p:sp>
+        <p:nvSpPr>
+          <p:cNvPr id="3" name="TextBox 2"/>
+          <p:cNvSpPr txBox="1"/>
+          <p:nvPr/>
+        </p:nvSpPr>
+        <p:spPr>
+          <a:xfrm>
+            <a:off x="548640" y="91440"/>
+            <a:ext cx="10972800" cy="777240"/>
+          </a:xfrm>
+          <a:prstGeom prst="rect">
+            <a:avLst/>
+          </a:prstGeom>
+          <a:noFill/>
+        </p:spPr>
+        <p:txBody>
+          <a:bodyPr wrap="square">
+            <a:spAutoFit/>
+          </a:bodyPr>
+          <a:lstStyle/>
+          <a:p>
+            <a:pPr algn="l">
+              <a:spcAft>
+                <a:spcPts val="600"/>
+              </a:spcAft>
+            </a:pPr>
+            <a:r>
+              <a:rPr sz="2600" b="1">
+                <a:solidFill>
+                  <a:srgbClr val="FFFFFF"/>
+                </a:solidFill>
+                <a:latin typeface="맑은 고딕"/>
+              </a:rPr>
+              <a:t>전환해 둔 사실을 잊지 않기</a:t>
+            </a:r>
+          </a:p>
+        </p:txBody>
+      </p:sp>
+      <p:sp>
+        <p:nvSpPr>
+          <p:cNvPr id="4" name="TextBox 3"/>
+          <p:cNvSpPr txBox="1"/>
+          <p:nvPr/>
+        </p:nvSpPr>
+        <p:spPr>
+          <a:xfrm>
+            <a:off x="640080" y="1078992"/>
+            <a:ext cx="10881360" cy="457200"/>
+          </a:xfrm>
+          <a:prstGeom prst="rect">
+            <a:avLst/>
+          </a:prstGeom>
+          <a:noFill/>
+        </p:spPr>
+        <p:txBody>
+          <a:bodyPr wrap="square">
+            <a:spAutoFit/>
+          </a:bodyPr>
+          <a:lstStyle/>
+          <a:p>
+            <a:pPr algn="l">
+              <a:spcAft>
+                <a:spcPts val="600"/>
+              </a:spcAft>
+            </a:pPr>
+            <a:r>
+              <a:rPr sz="1500" b="0">
+                <a:solidFill>
+                  <a:srgbClr val="5A6672"/>
+                </a:solidFill>
+                <a:latin typeface="맑은 고딕"/>
+              </a:rPr>
+              <a:t>명령보다 기억이 사고 원인</a:t>
+            </a:r>
+          </a:p>
+        </p:txBody>
+      </p:sp>
+      <p:sp>
+        <p:nvSpPr>
+          <p:cNvPr id="5" name="TextBox 4"/>
+          <p:cNvSpPr txBox="1"/>
+          <p:nvPr/>
+        </p:nvSpPr>
+        <p:spPr>
+          <a:xfrm>
+            <a:off x="640080" y="1737360"/>
+            <a:ext cx="10881360" cy="4754880"/>
+          </a:xfrm>
+          <a:prstGeom prst="rect">
+            <a:avLst/>
+          </a:prstGeom>
+          <a:noFill/>
+        </p:spPr>
+        <p:txBody>
+          <a:bodyPr wrap="square">
+            <a:spAutoFit/>
+          </a:bodyPr>
+          <a:lstStyle/>
+          <a:p>
+            <a:pPr algn="l">
+              <a:spcAft>
+                <a:spcPts val="1000"/>
+              </a:spcAft>
+            </a:pPr>
+            <a:r>
+              <a:rPr sz="1700" b="0">
+                <a:solidFill>
+                  <a:srgbClr val="222222"/>
+                </a:solidFill>
+                <a:latin typeface="맑은 고딕"/>
+              </a:rPr>
+              <a:t>•  감시 목록에 Snapshot 상태를 별도 표시</a:t>
+            </a:r>
+          </a:p>
+          <a:p>
+            <a:pPr algn="l">
+              <a:spcAft>
+                <a:spcPts val="1000"/>
+              </a:spcAft>
+            </a:pPr>
+            <a:r>
+              <a:rPr sz="1700" b="0">
+                <a:solidFill>
+                  <a:srgbClr val="222222"/>
+                </a:solidFill>
+                <a:latin typeface="맑은 고딕"/>
+              </a:rPr>
+              <a:t>•  전환 기간 상한, FRA 사용률 상한 명시</a:t>
+            </a:r>
+          </a:p>
+          <a:p>
+            <a:pPr algn="l">
+              <a:spcAft>
+                <a:spcPts val="1000"/>
+              </a:spcAft>
+            </a:pPr>
+            <a:r>
+              <a:rPr sz="1700" b="0">
+                <a:solidFill>
+                  <a:srgbClr val="222222"/>
+                </a:solidFill>
+                <a:latin typeface="맑은 고딕"/>
+              </a:rPr>
+              <a:t>•  담당자와 되돌릴 시각을 운영 일지에 기록</a:t>
+            </a:r>
+          </a:p>
+          <a:p>
+            <a:pPr algn="l">
+              <a:spcAft>
+                <a:spcPts val="1000"/>
+              </a:spcAft>
+            </a:pPr>
+            <a:r>
+              <a:rPr sz="1700" b="0">
+                <a:solidFill>
+                  <a:srgbClr val="222222"/>
+                </a:solidFill>
+                <a:latin typeface="맑은 고딕"/>
+              </a:rPr>
+              <a:t>•  시각이 지나면 경보를 상위 단계로</a:t>
+            </a:r>
+          </a:p>
+          <a:p>
+            <a:pPr algn="l">
+              <a:spcAft>
+                <a:spcPts val="1000"/>
+              </a:spcAft>
+            </a:pPr>
+            <a:r>
+              <a:rPr sz="1700" b="0">
+                <a:solidFill>
+                  <a:srgbClr val="222222"/>
+                </a:solidFill>
+                <a:latin typeface="맑은 고딕"/>
+              </a:rPr>
+              <a:t>•  반복 시험은 사용자 복원 지점 활용</a:t>
+            </a:r>
+          </a:p>
+        </p:txBody>
+      </p:sp>
+    </p:spTree>
+  </p:cSld>
+  <p:clrMapOvr>
+    <a:masterClrMapping/>
+  </p:clrMapOvr>
+</p:sld>
+</file>
+
+<file path=ppt/slides/slide45.xml><?xml version="1.0" encoding="utf-8"?>
+<p:sld xmlns:a="http://schemas.openxmlformats.org/drawingml/2006/main" xmlns:p="http://schemas.openxmlformats.org/presentationml/2006/main" xmlns:r="http://schemas.openxmlformats.org/officeDocument/2006/relationships">
+  <p:cSld>
+    <p:spTree>
+      <p:nvGrpSpPr>
+        <p:cNvPr id="1" name=""/>
+        <p:cNvGrpSpPr/>
+        <p:nvPr/>
+      </p:nvGrpSpPr>
+      <p:grpSpPr/>
+      <p:sp>
+        <p:nvSpPr>
+          <p:cNvPr id="2" name="Rectangle 1"/>
+          <p:cNvSpPr/>
+          <p:nvPr/>
+        </p:nvSpPr>
+        <p:spPr>
+          <a:xfrm>
+            <a:off x="0" y="0"/>
+            <a:ext cx="12191695" cy="1005840"/>
+          </a:xfrm>
+          <a:prstGeom prst="rect">
+            <a:avLst/>
+          </a:prstGeom>
+          <a:solidFill>
+            <a:srgbClr val="C0392B"/>
+          </a:solidFill>
+          <a:ln>
+            <a:noFill/>
+          </a:ln>
+          <a:effectLst/>
+        </p:spPr>
+        <p:style>
+          <a:lnRef idx="1">
+            <a:schemeClr val="accent1"/>
+          </a:lnRef>
+          <a:fillRef idx="3">
+            <a:schemeClr val="accent1"/>
+          </a:fillRef>
+          <a:effectRef idx="2">
+            <a:schemeClr val="accent1"/>
+          </a:effectRef>
+          <a:fontRef idx="minor">
+            <a:schemeClr val="lt1"/>
+          </a:fontRef>
+        </p:style>
+        <p:txBody>
+          <a:bodyPr rtlCol="0" anchor="ctr"/>
+          <a:lstStyle/>
+          <a:p>
+            <a:pPr algn="ctr"/>
+          </a:p>
+        </p:txBody>
+      </p:sp>
+      <p:sp>
+        <p:nvSpPr>
+          <p:cNvPr id="3" name="TextBox 2"/>
+          <p:cNvSpPr txBox="1"/>
+          <p:nvPr/>
+        </p:nvSpPr>
+        <p:spPr>
+          <a:xfrm>
+            <a:off x="548640" y="91440"/>
+            <a:ext cx="10972800" cy="777240"/>
+          </a:xfrm>
+          <a:prstGeom prst="rect">
+            <a:avLst/>
+          </a:prstGeom>
+          <a:noFill/>
+        </p:spPr>
+        <p:txBody>
+          <a:bodyPr wrap="square">
+            <a:spAutoFit/>
+          </a:bodyPr>
+          <a:lstStyle/>
+          <a:p>
+            <a:pPr algn="l">
+              <a:spcAft>
+                <a:spcPts val="600"/>
+              </a:spcAft>
+            </a:pPr>
+            <a:r>
+              <a:rPr sz="2600" b="1">
+                <a:solidFill>
+                  <a:srgbClr val="FFFFFF"/>
+                </a:solidFill>
+                <a:latin typeface="맑은 고딕"/>
+              </a:rPr>
+              <a:t>되돌려도 취소되지 않는 일</a:t>
+            </a:r>
+          </a:p>
+        </p:txBody>
+      </p:sp>
+      <p:sp>
+        <p:nvSpPr>
+          <p:cNvPr id="4" name="TextBox 3"/>
+          <p:cNvSpPr txBox="1"/>
+          <p:nvPr/>
+        </p:nvSpPr>
+        <p:spPr>
+          <a:xfrm>
+            <a:off x="640080" y="1078992"/>
+            <a:ext cx="10881360" cy="457200"/>
+          </a:xfrm>
+          <a:prstGeom prst="rect">
+            <a:avLst/>
+          </a:prstGeom>
+          <a:noFill/>
+        </p:spPr>
+        <p:txBody>
+          <a:bodyPr wrap="square">
+            <a:spAutoFit/>
+          </a:bodyPr>
+          <a:lstStyle/>
+          <a:p>
+            <a:pPr algn="l">
+              <a:spcAft>
+                <a:spcPts val="600"/>
+              </a:spcAft>
+            </a:pPr>
+            <a:r>
+              <a:rPr sz="1500" b="0">
+                <a:solidFill>
+                  <a:srgbClr val="5A6672"/>
+                </a:solidFill>
+                <a:latin typeface="맑은 고딕"/>
+              </a:rPr>
+              <a:t>DB 밖으로 나간 것은 돌아오지 않음</a:t>
+            </a:r>
+          </a:p>
+        </p:txBody>
+      </p:sp>
+      <p:sp>
+        <p:nvSpPr>
+          <p:cNvPr id="5" name="TextBox 4"/>
+          <p:cNvSpPr txBox="1"/>
+          <p:nvPr/>
+        </p:nvSpPr>
+        <p:spPr>
+          <a:xfrm>
+            <a:off x="640080" y="1737360"/>
+            <a:ext cx="10881360" cy="4754880"/>
+          </a:xfrm>
+          <a:prstGeom prst="rect">
+            <a:avLst/>
+          </a:prstGeom>
+          <a:noFill/>
+        </p:spPr>
+        <p:txBody>
+          <a:bodyPr wrap="square">
+            <a:spAutoFit/>
+          </a:bodyPr>
+          <a:lstStyle/>
+          <a:p>
+            <a:pPr algn="l">
+              <a:spcAft>
+                <a:spcPts val="1000"/>
+              </a:spcAft>
+            </a:pPr>
+            <a:r>
+              <a:rPr sz="1700" b="0">
+                <a:solidFill>
+                  <a:srgbClr val="222222"/>
+                </a:solidFill>
+                <a:latin typeface="맑은 고딕"/>
+              </a:rPr>
+              <a:t>•  DB 링크 INSERT, 메일 발송, 외부 인터페이스</a:t>
+            </a:r>
+          </a:p>
+          <a:p>
+            <a:pPr algn="l">
+              <a:spcAft>
+                <a:spcPts val="1000"/>
+              </a:spcAft>
+            </a:pPr>
+            <a:r>
+              <a:rPr sz="1700" b="0">
+                <a:solidFill>
+                  <a:srgbClr val="222222"/>
+                </a:solidFill>
+                <a:latin typeface="맑은 고딕"/>
+              </a:rPr>
+              <a:t>•  시험 전에 잡과 링크를 막아 둠</a:t>
+            </a:r>
+          </a:p>
+          <a:p>
+            <a:pPr algn="l">
+              <a:spcAft>
+                <a:spcPts val="1000"/>
+              </a:spcAft>
+            </a:pPr>
+            <a:r>
+              <a:rPr sz="1700" b="0">
+                <a:solidFill>
+                  <a:srgbClr val="222222"/>
+                </a:solidFill>
+                <a:latin typeface="맑은 고딕"/>
+              </a:rPr>
+              <a:t>•  AWR·재생 보고서는 되돌리기 전에 추출</a:t>
+            </a:r>
+          </a:p>
+          <a:p>
+            <a:pPr algn="l">
+              <a:spcAft>
+                <a:spcPts val="1000"/>
+              </a:spcAft>
+            </a:pPr>
+            <a:r>
+              <a:rPr sz="1700" b="0">
+                <a:solidFill>
+                  <a:srgbClr val="222222"/>
+                </a:solidFill>
+                <a:latin typeface="맑은 고딕"/>
+              </a:rPr>
+              <a:t>•  운영 데이터이므로 접근 통제는 운영 수준</a:t>
+            </a:r>
+          </a:p>
+          <a:p>
+            <a:pPr algn="l">
+              <a:spcAft>
+                <a:spcPts val="1000"/>
+              </a:spcAft>
+            </a:pPr>
+            <a:r>
+              <a:rPr sz="1700" b="0">
+                <a:solidFill>
+                  <a:srgbClr val="222222"/>
+                </a:solidFill>
+                <a:latin typeface="맑은 고딕"/>
+              </a:rPr>
+              <a:t>•  되돌린 뒤 역할·복원 지점·lag 순서로 확인</a:t>
+            </a:r>
+          </a:p>
+        </p:txBody>
+      </p:sp>
+    </p:spTree>
+  </p:cSld>
+  <p:clrMapOvr>
+    <a:masterClrMapping/>
+  </p:clrMapOvr>
+</p:sld>
+</file>
+
+<file path=ppt/slides/slide46.xml><?xml version="1.0" encoding="utf-8"?>
+<p:sld xmlns:a="http://schemas.openxmlformats.org/drawingml/2006/main" xmlns:p="http://schemas.openxmlformats.org/presentationml/2006/main" xmlns:r="http://schemas.openxmlformats.org/officeDocument/2006/relationships">
+  <p:cSld>
+    <p:spTree>
+      <p:nvGrpSpPr>
+        <p:cNvPr id="1" name=""/>
+        <p:cNvGrpSpPr/>
+        <p:nvPr/>
+      </p:nvGrpSpPr>
+      <p:grpSpPr/>
+      <p:sp>
+        <p:nvSpPr>
+          <p:cNvPr id="2" name="Rectangle 1"/>
+          <p:cNvSpPr/>
+          <p:nvPr/>
+        </p:nvSpPr>
+        <p:spPr>
+          <a:xfrm>
+            <a:off x="0" y="0"/>
+            <a:ext cx="12191695" cy="1005840"/>
+          </a:xfrm>
+          <a:prstGeom prst="rect">
+            <a:avLst/>
+          </a:prstGeom>
+          <a:solidFill>
+            <a:srgbClr val="C0392B"/>
+          </a:solidFill>
+          <a:ln>
+            <a:noFill/>
+          </a:ln>
+          <a:effectLst/>
+        </p:spPr>
+        <p:style>
+          <a:lnRef idx="1">
+            <a:schemeClr val="accent1"/>
+          </a:lnRef>
+          <a:fillRef idx="3">
+            <a:schemeClr val="accent1"/>
+          </a:fillRef>
+          <a:effectRef idx="2">
+            <a:schemeClr val="accent1"/>
+          </a:effectRef>
+          <a:fontRef idx="minor">
+            <a:schemeClr val="lt1"/>
+          </a:fontRef>
+        </p:style>
+        <p:txBody>
+          <a:bodyPr rtlCol="0" anchor="ctr"/>
+          <a:lstStyle/>
+          <a:p>
+            <a:pPr algn="ctr"/>
+          </a:p>
+        </p:txBody>
+      </p:sp>
+      <p:sp>
+        <p:nvSpPr>
+          <p:cNvPr id="3" name="TextBox 2"/>
+          <p:cNvSpPr txBox="1"/>
+          <p:nvPr/>
+        </p:nvSpPr>
+        <p:spPr>
+          <a:xfrm>
+            <a:off x="548640" y="91440"/>
+            <a:ext cx="10972800" cy="777240"/>
+          </a:xfrm>
+          <a:prstGeom prst="rect">
+            <a:avLst/>
+          </a:prstGeom>
+          <a:noFill/>
+        </p:spPr>
+        <p:txBody>
+          <a:bodyPr wrap="square">
+            <a:spAutoFit/>
+          </a:bodyPr>
+          <a:lstStyle/>
+          <a:p>
+            <a:pPr algn="l">
+              <a:spcAft>
+                <a:spcPts val="600"/>
+              </a:spcAft>
+            </a:pPr>
+            <a:r>
+              <a:rPr sz="2600" b="1">
+                <a:solidFill>
+                  <a:srgbClr val="FFFFFF"/>
+                </a:solidFill>
+                <a:latin typeface="맑은 고딕"/>
+              </a:rPr>
+              <a:t>요약</a:t>
+            </a:r>
+          </a:p>
+        </p:txBody>
+      </p:sp>
+      <p:sp>
+        <p:nvSpPr>
+          <p:cNvPr id="4" name="TextBox 3"/>
+          <p:cNvSpPr txBox="1"/>
+          <p:nvPr/>
+        </p:nvSpPr>
+        <p:spPr>
+          <a:xfrm>
+            <a:off x="640080" y="1371600"/>
+            <a:ext cx="10881360" cy="5120640"/>
+          </a:xfrm>
+          <a:prstGeom prst="rect">
+            <a:avLst/>
+          </a:prstGeom>
+          <a:noFill/>
+        </p:spPr>
+        <p:txBody>
+          <a:bodyPr wrap="square">
+            <a:spAutoFit/>
+          </a:bodyPr>
+          <a:lstStyle/>
+          <a:p>
+            <a:pPr algn="l">
+              <a:spcAft>
+                <a:spcPts val="1000"/>
+              </a:spcAft>
+            </a:pPr>
+            <a:r>
+              <a:rPr sz="1600" b="0">
+                <a:solidFill>
+                  <a:srgbClr val="222222"/>
+                </a:solidFill>
+                <a:latin typeface="맑은 고딕"/>
+              </a:rPr>
+              <a:t>•  물리 Standby를 임시로 읽기·쓰기, 끝나면 변경 폐기</a:t>
+            </a:r>
+          </a:p>
+          <a:p>
+            <a:pPr algn="l">
+              <a:spcAft>
+                <a:spcPts val="1000"/>
+              </a:spcAft>
+            </a:pPr>
+            <a:r>
+              <a:rPr sz="1600" b="0">
+                <a:solidFill>
+                  <a:srgbClr val="222222"/>
+                </a:solidFill>
+                <a:latin typeface="맑은 고딕"/>
+              </a:rPr>
+              <a:t>•  보장 복원 지점 자동 생성, RESTORE POINT ONLY 로깅</a:t>
+            </a:r>
+          </a:p>
+          <a:p>
+            <a:pPr algn="l">
+              <a:spcAft>
+                <a:spcPts val="1000"/>
+              </a:spcAft>
+            </a:pPr>
+            <a:r>
+              <a:rPr sz="1600" b="0">
+                <a:solidFill>
+                  <a:srgbClr val="222222"/>
+                </a:solidFill>
+                <a:latin typeface="맑은 고딕"/>
+              </a:rPr>
+              <a:t>•  수신·아카이브 계속, 적용만 멈춤 → apply lag 증가</a:t>
+            </a:r>
+          </a:p>
+          <a:p>
+            <a:pPr algn="l">
+              <a:spcAft>
+                <a:spcPts val="1000"/>
+              </a:spcAft>
+            </a:pPr>
+            <a:r>
+              <a:rPr sz="1600" b="0">
+                <a:solidFill>
+                  <a:srgbClr val="222222"/>
+                </a:solidFill>
+                <a:latin typeface="맑은 고딕"/>
+              </a:rPr>
+              <a:t>•  전제: FRA, 적용 중지, MOUNT / 공간은 두 파일이 함께</a:t>
+            </a:r>
+          </a:p>
+          <a:p>
+            <a:pPr algn="l">
+              <a:spcAft>
+                <a:spcPts val="1000"/>
+              </a:spcAft>
+            </a:pPr>
+            <a:r>
+              <a:rPr sz="1600" b="0">
+                <a:solidFill>
+                  <a:srgbClr val="222222"/>
+                </a:solidFill>
+                <a:latin typeface="맑은 고딕"/>
+              </a:rPr>
+              <a:t>•  되돌리기: 한 번 연 뒤(16433), MOUNT에서(01126)</a:t>
+            </a:r>
+          </a:p>
+          <a:p>
+            <a:pPr algn="l">
+              <a:spcAft>
+                <a:spcPts val="1000"/>
+              </a:spcAft>
+            </a:pPr>
+            <a:r>
+              <a:rPr sz="1600" b="0">
+                <a:solidFill>
+                  <a:srgbClr val="222222"/>
+                </a:solidFill>
+                <a:latin typeface="맑은 고딕"/>
+              </a:rPr>
+              <a:t>•  Switchover·FSFO 불가, 최대 보호 유일 Standby 불가</a:t>
+            </a:r>
+          </a:p>
+        </p:txBody>
+      </p:sp>
+    </p:spTree>
+  </p:cSld>
+  <p:clrMapOvr>
+    <a:masterClrMapping/>
+  </p:clrMapOvr>
+</p:sld>
+</file>
+
+<file path=ppt/slides/slide47.xml><?xml version="1.0" encoding="utf-8"?>
+<p:sld xmlns:a="http://schemas.openxmlformats.org/drawingml/2006/main" xmlns:p="http://schemas.openxmlformats.org/presentationml/2006/main" xmlns:r="http://schemas.openxmlformats.org/officeDocument/2006/relationships">
+  <p:cSld>
+    <p:spTree>
+      <p:nvGrpSpPr>
+        <p:cNvPr id="1" name=""/>
+        <p:cNvGrpSpPr/>
+        <p:nvPr/>
+      </p:nvGrpSpPr>
+      <p:grpSpPr/>
+      <p:sp>
+        <p:nvSpPr>
+          <p:cNvPr id="2" name="Rectangle 1"/>
+          <p:cNvSpPr/>
+          <p:nvPr/>
+        </p:nvSpPr>
+        <p:spPr>
+          <a:xfrm>
+            <a:off x="0" y="0"/>
+            <a:ext cx="12191695" cy="1005840"/>
+          </a:xfrm>
+          <a:prstGeom prst="rect">
+            <a:avLst/>
+          </a:prstGeom>
+          <a:solidFill>
+            <a:srgbClr val="C0392B"/>
+          </a:solidFill>
+          <a:ln>
+            <a:noFill/>
+          </a:ln>
+          <a:effectLst/>
+        </p:spPr>
+        <p:style>
+          <a:lnRef idx="1">
+            <a:schemeClr val="accent1"/>
+          </a:lnRef>
+          <a:fillRef idx="3">
+            <a:schemeClr val="accent1"/>
+          </a:fillRef>
+          <a:effectRef idx="2">
+            <a:schemeClr val="accent1"/>
+          </a:effectRef>
+          <a:fontRef idx="minor">
+            <a:schemeClr val="lt1"/>
+          </a:fontRef>
+        </p:style>
+        <p:txBody>
+          <a:bodyPr rtlCol="0" anchor="ctr"/>
+          <a:lstStyle/>
+          <a:p>
+            <a:pPr algn="ctr"/>
+          </a:p>
+        </p:txBody>
+      </p:sp>
+      <p:sp>
+        <p:nvSpPr>
+          <p:cNvPr id="3" name="TextBox 2"/>
+          <p:cNvSpPr txBox="1"/>
+          <p:nvPr/>
+        </p:nvSpPr>
+        <p:spPr>
+          <a:xfrm>
+            <a:off x="548640" y="91440"/>
+            <a:ext cx="10972800" cy="777240"/>
+          </a:xfrm>
+          <a:prstGeom prst="rect">
+            <a:avLst/>
+          </a:prstGeom>
+          <a:noFill/>
+        </p:spPr>
+        <p:txBody>
+          <a:bodyPr wrap="square">
+            <a:spAutoFit/>
+          </a:bodyPr>
+          <a:lstStyle/>
+          <a:p>
+            <a:pPr algn="l">
+              <a:spcAft>
+                <a:spcPts val="600"/>
+              </a:spcAft>
+            </a:pPr>
+            <a:r>
+              <a:rPr sz="2600" b="1">
+                <a:solidFill>
+                  <a:srgbClr val="FFFFFF"/>
+                </a:solidFill>
+                <a:latin typeface="맑은 고딕"/>
+              </a:rPr>
+              <a:t>퀴즈 (1/2)</a:t>
+            </a:r>
+          </a:p>
+        </p:txBody>
+      </p:sp>
+      <p:sp>
+        <p:nvSpPr>
+          <p:cNvPr id="4" name="TextBox 3"/>
+          <p:cNvSpPr txBox="1"/>
+          <p:nvPr/>
+        </p:nvSpPr>
+        <p:spPr>
+          <a:xfrm>
+            <a:off x="640080" y="1371600"/>
+            <a:ext cx="10881360" cy="5120640"/>
+          </a:xfrm>
+          <a:prstGeom prst="rect">
+            <a:avLst/>
+          </a:prstGeom>
+          <a:noFill/>
+        </p:spPr>
+        <p:txBody>
+          <a:bodyPr wrap="square">
+            <a:spAutoFit/>
+          </a:bodyPr>
+          <a:lstStyle/>
+          <a:p>
+            <a:pPr algn="l">
+              <a:spcAft>
+                <a:spcPts val="1000"/>
+              </a:spcAft>
+            </a:pPr>
+            <a:r>
+              <a:rPr sz="1600" b="0">
+                <a:solidFill>
+                  <a:srgbClr val="222222"/>
+                </a:solidFill>
+                <a:latin typeface="맑은 고딕"/>
+              </a:rPr>
+              <a:t>•  Q1. 논리 Standby로 Snapshot Standby를 만들 수 있나? → 아니다</a:t>
+            </a:r>
+          </a:p>
+          <a:p>
+            <a:pPr algn="l">
+              <a:spcAft>
+                <a:spcPts val="1000"/>
+              </a:spcAft>
+            </a:pPr>
+            <a:r>
+              <a:rPr sz="1600" b="0">
+                <a:solidFill>
+                  <a:srgbClr val="222222"/>
+                </a:solidFill>
+                <a:latin typeface="맑은 고딕"/>
+              </a:rPr>
+              <a:t>•  Q2. 적용 중 전환하면? → ORA-38784 + ORA-01153</a:t>
+            </a:r>
+          </a:p>
+          <a:p>
+            <a:pPr algn="l">
+              <a:spcAft>
+                <a:spcPts val="1000"/>
+              </a:spcAft>
+            </a:pPr>
+            <a:r>
+              <a:rPr sz="1600" b="0">
+                <a:solidFill>
+                  <a:srgbClr val="222222"/>
+                </a:solidFill>
+                <a:latin typeface="맑은 고딕"/>
+              </a:rPr>
+              <a:t>•  Q3. 전환 기간의 Primary 리두는? → 수신·아카이브, 되돌린 뒤 적용</a:t>
+            </a:r>
+          </a:p>
+        </p:txBody>
+      </p:sp>
+    </p:spTree>
+  </p:cSld>
+  <p:clrMapOvr>
+    <a:masterClrMapping/>
+  </p:clrMapOvr>
+</p:sld>
+</file>
+
+<file path=ppt/slides/slide48.xml><?xml version="1.0" encoding="utf-8"?>
+<p:sld xmlns:a="http://schemas.openxmlformats.org/drawingml/2006/main" xmlns:p="http://schemas.openxmlformats.org/presentationml/2006/main" xmlns:r="http://schemas.openxmlformats.org/officeDocument/2006/relationships">
+  <p:cSld>
+    <p:spTree>
+      <p:nvGrpSpPr>
+        <p:cNvPr id="1" name=""/>
+        <p:cNvGrpSpPr/>
+        <p:nvPr/>
+      </p:nvGrpSpPr>
+      <p:grpSpPr/>
+      <p:sp>
+        <p:nvSpPr>
+          <p:cNvPr id="2" name="Rectangle 1"/>
+          <p:cNvSpPr/>
+          <p:nvPr/>
+        </p:nvSpPr>
+        <p:spPr>
+          <a:xfrm>
+            <a:off x="0" y="0"/>
+            <a:ext cx="12191695" cy="1005840"/>
+          </a:xfrm>
+          <a:prstGeom prst="rect">
+            <a:avLst/>
+          </a:prstGeom>
+          <a:solidFill>
+            <a:srgbClr val="C0392B"/>
+          </a:solidFill>
+          <a:ln>
+            <a:noFill/>
+          </a:ln>
+          <a:effectLst/>
+        </p:spPr>
+        <p:style>
+          <a:lnRef idx="1">
+            <a:schemeClr val="accent1"/>
+          </a:lnRef>
+          <a:fillRef idx="3">
+            <a:schemeClr val="accent1"/>
+          </a:fillRef>
+          <a:effectRef idx="2">
+            <a:schemeClr val="accent1"/>
+          </a:effectRef>
+          <a:fontRef idx="minor">
+            <a:schemeClr val="lt1"/>
+          </a:fontRef>
+        </p:style>
+        <p:txBody>
+          <a:bodyPr rtlCol="0" anchor="ctr"/>
+          <a:lstStyle/>
+          <a:p>
+            <a:pPr algn="ctr"/>
+          </a:p>
+        </p:txBody>
+      </p:sp>
+      <p:sp>
+        <p:nvSpPr>
+          <p:cNvPr id="3" name="TextBox 2"/>
+          <p:cNvSpPr txBox="1"/>
+          <p:nvPr/>
+        </p:nvSpPr>
+        <p:spPr>
+          <a:xfrm>
+            <a:off x="548640" y="91440"/>
+            <a:ext cx="10972800" cy="777240"/>
+          </a:xfrm>
+          <a:prstGeom prst="rect">
+            <a:avLst/>
+          </a:prstGeom>
+          <a:noFill/>
+        </p:spPr>
+        <p:txBody>
+          <a:bodyPr wrap="square">
+            <a:spAutoFit/>
+          </a:bodyPr>
+          <a:lstStyle/>
+          <a:p>
+            <a:pPr algn="l">
+              <a:spcAft>
+                <a:spcPts val="600"/>
+              </a:spcAft>
+            </a:pPr>
+            <a:r>
+              <a:rPr sz="2600" b="1">
+                <a:solidFill>
+                  <a:srgbClr val="FFFFFF"/>
+                </a:solidFill>
+                <a:latin typeface="맑은 고딕"/>
+              </a:rPr>
+              <a:t>퀴즈 (2/2)</a:t>
+            </a:r>
+          </a:p>
+        </p:txBody>
+      </p:sp>
+      <p:sp>
+        <p:nvSpPr>
+          <p:cNvPr id="4" name="TextBox 3"/>
+          <p:cNvSpPr txBox="1"/>
+          <p:nvPr/>
+        </p:nvSpPr>
+        <p:spPr>
+          <a:xfrm>
+            <a:off x="640080" y="1371600"/>
+            <a:ext cx="10881360" cy="5120640"/>
+          </a:xfrm>
+          <a:prstGeom prst="rect">
+            <a:avLst/>
+          </a:prstGeom>
+          <a:noFill/>
+        </p:spPr>
+        <p:txBody>
+          <a:bodyPr wrap="square">
+            <a:spAutoFit/>
+          </a:bodyPr>
+          <a:lstStyle/>
+          <a:p>
+            <a:pPr algn="l">
+              <a:spcAft>
+                <a:spcPts val="1000"/>
+              </a:spcAft>
+            </a:pPr>
+            <a:r>
+              <a:rPr sz="1600" b="0">
+                <a:solidFill>
+                  <a:srgbClr val="222222"/>
+                </a:solidFill>
+                <a:latin typeface="맑은 고딕"/>
+              </a:rPr>
+              <a:t>•  Q4. FLASHBACK_ON = NO면 전환 불가? → FRA만 있으면 가능</a:t>
+            </a:r>
+          </a:p>
+          <a:p>
+            <a:pPr algn="l">
+              <a:spcAft>
+                <a:spcPts val="1000"/>
+              </a:spcAft>
+            </a:pPr>
+            <a:r>
+              <a:rPr sz="1600" b="0">
+                <a:solidFill>
+                  <a:srgbClr val="222222"/>
+                </a:solidFill>
+                <a:latin typeface="맑은 고딕"/>
+              </a:rPr>
+              <a:t>•  Q5. 장애 시 Primary가 될 수 없다? → 되돌리고 적용하면 가능</a:t>
+            </a:r>
+          </a:p>
+          <a:p>
+            <a:pPr algn="l">
+              <a:spcAft>
+                <a:spcPts val="1000"/>
+              </a:spcAft>
+            </a:pPr>
+            <a:r>
+              <a:rPr sz="1600" b="0">
+                <a:solidFill>
+                  <a:srgbClr val="222222"/>
+                </a:solidFill>
+                <a:latin typeface="맑은 고딕"/>
+              </a:rPr>
+              <a:t>•  Q6. ADG 복귀 순서는? → OPEN READ ONLY 후 적용 기동</a:t>
+            </a:r>
+          </a:p>
+        </p:txBody>
+      </p:sp>
+    </p:spTree>
+  </p:cSld>
+  <p:clrMapOvr>
+    <a:masterClrMapping/>
+  </p:clrMapOvr>
+</p:sld>
+</file>
+
+<file path=ppt/slides/slide49.xml><?xml version="1.0" encoding="utf-8"?>
+<p:sld xmlns:a="http://schemas.openxmlformats.org/drawingml/2006/main" xmlns:p="http://schemas.openxmlformats.org/presentationml/2006/main" xmlns:r="http://schemas.openxmlformats.org/officeDocument/2006/relationships">
+  <p:cSld>
+    <p:spTree>
+      <p:nvGrpSpPr>
+        <p:cNvPr id="1" name=""/>
+        <p:cNvGrpSpPr/>
+        <p:nvPr/>
+      </p:nvGrpSpPr>
+      <p:grpSpPr/>
+      <p:sp>
+        <p:nvSpPr>
+          <p:cNvPr id="2" name="Rectangle 1"/>
+          <p:cNvSpPr/>
+          <p:nvPr/>
+        </p:nvSpPr>
+        <p:spPr>
+          <a:xfrm>
+            <a:off x="0" y="0"/>
+            <a:ext cx="12191695" cy="1005840"/>
+          </a:xfrm>
+          <a:prstGeom prst="rect">
+            <a:avLst/>
+          </a:prstGeom>
+          <a:solidFill>
+            <a:srgbClr val="C0392B"/>
+          </a:solidFill>
+          <a:ln>
+            <a:noFill/>
+          </a:ln>
+          <a:effectLst/>
+        </p:spPr>
+        <p:style>
+          <a:lnRef idx="1">
+            <a:schemeClr val="accent1"/>
+          </a:lnRef>
+          <a:fillRef idx="3">
+            <a:schemeClr val="accent1"/>
+          </a:fillRef>
+          <a:effectRef idx="2">
+            <a:schemeClr val="accent1"/>
+          </a:effectRef>
+          <a:fontRef idx="minor">
+            <a:schemeClr val="lt1"/>
+          </a:fontRef>
+        </p:style>
+        <p:txBody>
+          <a:bodyPr rtlCol="0" anchor="ctr"/>
+          <a:lstStyle/>
+          <a:p>
+            <a:pPr algn="ctr"/>
+          </a:p>
+        </p:txBody>
+      </p:sp>
+      <p:sp>
+        <p:nvSpPr>
+          <p:cNvPr id="3" name="TextBox 2"/>
+          <p:cNvSpPr txBox="1"/>
+          <p:nvPr/>
+        </p:nvSpPr>
+        <p:spPr>
+          <a:xfrm>
+            <a:off x="548640" y="91440"/>
+            <a:ext cx="10972800" cy="777240"/>
+          </a:xfrm>
+          <a:prstGeom prst="rect">
+            <a:avLst/>
+          </a:prstGeom>
+          <a:noFill/>
+        </p:spPr>
+        <p:txBody>
+          <a:bodyPr wrap="square">
+            <a:spAutoFit/>
+          </a:bodyPr>
+          <a:lstStyle/>
+          <a:p>
+            <a:pPr algn="l">
+              <a:spcAft>
+                <a:spcPts val="600"/>
+              </a:spcAft>
+            </a:pPr>
+            <a:r>
+              <a:rPr sz="2600" b="1">
+                <a:solidFill>
+                  <a:srgbClr val="FFFFFF"/>
+                </a:solidFill>
+                <a:latin typeface="맑은 고딕"/>
+              </a:rPr>
+              <a:t>실습 개요</a:t>
+            </a:r>
+          </a:p>
+        </p:txBody>
+      </p:sp>
+      <p:sp>
+        <p:nvSpPr>
+          <p:cNvPr id="4" name="TextBox 3"/>
+          <p:cNvSpPr txBox="1"/>
+          <p:nvPr/>
+        </p:nvSpPr>
+        <p:spPr>
+          <a:xfrm>
+            <a:off x="640080" y="1371600"/>
+            <a:ext cx="10881360" cy="5120640"/>
+          </a:xfrm>
+          <a:prstGeom prst="rect">
+            <a:avLst/>
+          </a:prstGeom>
+          <a:noFill/>
+        </p:spPr>
+        <p:txBody>
+          <a:bodyPr wrap="square">
+            <a:spAutoFit/>
+          </a:bodyPr>
+          <a:lstStyle/>
+          <a:p>
+            <a:pPr algn="l">
+              <a:spcAft>
+                <a:spcPts val="1000"/>
+              </a:spcAft>
+            </a:pPr>
+            <a:r>
+              <a:rPr sz="1600" b="0">
+                <a:solidFill>
+                  <a:srgbClr val="222222"/>
+                </a:solidFill>
+                <a:latin typeface="맑은 고딕"/>
+              </a:rPr>
+              <a:t>•  01 전제 조건 확인 / 02 전환 실패와 성공 (11.4, 11.5.1)</a:t>
+            </a:r>
+          </a:p>
+          <a:p>
+            <a:pPr algn="l">
+              <a:spcAft>
+                <a:spcPts val="1000"/>
+              </a:spcAft>
+            </a:pPr>
+            <a:r>
+              <a:rPr sz="1600" b="0">
+                <a:solidFill>
+                  <a:srgbClr val="222222"/>
+                </a:solidFill>
+                <a:latin typeface="맑은 고딕"/>
+              </a:rPr>
+              <a:t>•  03 복원 지점 읽기 (11.3.1)</a:t>
+            </a:r>
+          </a:p>
+          <a:p>
+            <a:pPr algn="l">
+              <a:spcAft>
+                <a:spcPts val="1000"/>
+              </a:spcAft>
+            </a:pPr>
+            <a:r>
+              <a:rPr sz="1600" b="0">
+                <a:solidFill>
+                  <a:srgbClr val="222222"/>
+                </a:solidFill>
+                <a:latin typeface="맑은 고딕"/>
+              </a:rPr>
+              <a:t>•  04 열고 쓰기, PDB와 ORA-01219 (11.5.2)</a:t>
+            </a:r>
+          </a:p>
+          <a:p>
+            <a:pPr algn="l">
+              <a:spcAft>
+                <a:spcPts val="1000"/>
+              </a:spcAft>
+            </a:pPr>
+            <a:r>
+              <a:rPr sz="1600" b="0">
+                <a:solidFill>
+                  <a:srgbClr val="222222"/>
+                </a:solidFill>
+                <a:latin typeface="맑은 고딕"/>
+              </a:rPr>
+              <a:t>•  05 전환 중의 관찰, ORA-01665와 FRA (11.3.2, 11.5.4)</a:t>
+            </a:r>
+          </a:p>
+          <a:p>
+            <a:pPr algn="l">
+              <a:spcAft>
+                <a:spcPts val="1000"/>
+              </a:spcAft>
+            </a:pPr>
+            <a:r>
+              <a:rPr sz="1600" b="0">
+                <a:solidFill>
+                  <a:srgbClr val="222222"/>
+                </a:solidFill>
+                <a:latin typeface="맑은 고딕"/>
+              </a:rPr>
+              <a:t>•  06 되돌리기와 ORA-10456 (11.5.3)</a:t>
+            </a:r>
+          </a:p>
+          <a:p>
+            <a:pPr algn="l">
+              <a:spcAft>
+                <a:spcPts val="1000"/>
+              </a:spcAft>
+            </a:pPr>
+            <a:r>
+              <a:rPr sz="1600" b="0">
+                <a:solidFill>
+                  <a:srgbClr val="222222"/>
+                </a:solidFill>
+                <a:latin typeface="맑은 고딕"/>
+              </a:rPr>
+              <a:t>•  07 검증과 정리 (11.3.3, 11.8)</a:t>
             </a:r>
           </a:p>
         </p:txBody>
@@ -13602,7 +16527,7 @@
                 </a:solidFill>
                 <a:latin typeface="맑은 고딕"/>
               </a:rPr>
-              <a:t>조회만으로 안 되는 일</a:t>
+              <a:t>운영과 같은 데이터로 시험해야 하는 이유</a:t>
             </a:r>
           </a:p>
         </p:txBody>
@@ -13641,7 +16566,7 @@
                 </a:solidFill>
                 <a:latin typeface="맑은 고딕"/>
               </a:rPr>
-              <a:t>쓰기가 필요한 시험들</a:t>
+              <a:t>검증 DB에서 빠르던 SQL이 운영에서 느린 까닭</a:t>
             </a:r>
           </a:p>
         </p:txBody>
@@ -13680,7 +16605,7 @@
                 </a:solidFill>
                 <a:latin typeface="맑은 고딕"/>
               </a:rPr>
-              <a:t>•  새 애플리케이션 배포 시험 — DDL 이 실행된다</a:t>
+              <a:t>•  실행 계획은 데이터 양과 분포에 따라 바뀜</a:t>
             </a:r>
           </a:p>
           <a:p>
@@ -13696,7 +16621,7 @@
                 </a:solidFill>
                 <a:latin typeface="맑은 고딕"/>
               </a:rPr>
-              <a:t>•  통계 재수집 후 계획 비교 — 딕셔너리를 갱신한다</a:t>
+              <a:t>•  복제본 생성은 수 TB면 몇 시간, 회수도 필요</a:t>
             </a:r>
           </a:p>
           <a:p>
@@ -13712,7 +16637,7 @@
                 </a:solidFill>
                 <a:latin typeface="맑은 고딕"/>
               </a:rPr>
-              <a:t>•  대량 배치 소요 시간 측정 — 실제로 데이터를 바꿔야 한다</a:t>
+              <a:t>•  물리 Standby는 운영 크기 데이터를 이미 보유</a:t>
             </a:r>
           </a:p>
           <a:p>
@@ -13728,7 +16653,7 @@
                 </a:solidFill>
                 <a:latin typeface="맑은 고딕"/>
               </a:rPr>
-              <a:t>•  마이그레이션 스크립트 검증 — 구조가 바뀐다</a:t>
+              <a:t>•  전환과 되돌리기가 각각 명령 한 줄</a:t>
             </a:r>
           </a:p>
           <a:p>
@@ -13744,7 +16669,7 @@
                 </a:solidFill>
                 <a:latin typeface="맑은 고딕"/>
               </a:rPr>
-              <a:t>•  장애 상황 재현 — 일부러 망가뜨린다</a:t>
+              <a:t>•  Standby 서버 사양 차이는 결과 해석 때 반영</a:t>
             </a:r>
           </a:p>
         </p:txBody>
@@ -13845,7 +16770,7 @@
                 </a:solidFill>
                 <a:latin typeface="맑은 고딕"/>
               </a:rPr>
-              <a:t>네 가지 방법</a:t>
+              <a:t>Real Application Testing과의 연계</a:t>
             </a:r>
           </a:p>
         </p:txBody>
@@ -13884,7 +16809,7 @@
                 </a:solidFill>
                 <a:latin typeface="맑은 고딕"/>
               </a:rPr>
-              <a:t>자리가 다르다</a:t>
+              <a:t>캡처 직전 전환으로 시작 시점 데이터를 고정</a:t>
             </a:r>
           </a:p>
         </p:txBody>
@@ -13923,7 +16848,7 @@
                 </a:solidFill>
                 <a:latin typeface="맑은 고딕"/>
               </a:rPr>
-              <a:t>•  백업 복원 — 준비 오래, 공간 사본 하나, 데이터는 백업 시점</a:t>
+              <a:t>•  RAT는 별도 라이선스 옵션</a:t>
             </a:r>
           </a:p>
           <a:p>
@@ -13939,7 +16864,7 @@
                 </a:solidFill>
                 <a:latin typeface="맑은 고딕"/>
               </a:rPr>
-              <a:t>•  export/import — 준비 더 오래, 공간 사본 하나, 추출 시점</a:t>
+              <a:t>•  Database Replay: Primary 부하 캡처 후 재생</a:t>
             </a:r>
           </a:p>
           <a:p>
@@ -13955,7 +16880,7 @@
                 </a:solidFill>
                 <a:latin typeface="맑은 고딕"/>
               </a:rPr>
-              <a:t>•  **Snapshot Standby** — **명령 한 줄**, **기존 Standby 재사용**, **전환 직전까지**</a:t>
+              <a:t>•  캡처 시작 직전에 Snapshot으로 전환</a:t>
             </a:r>
           </a:p>
           <a:p>
@@ -13971,7 +16896,23 @@
                 </a:solidFill>
                 <a:latin typeface="맑은 고딕"/>
               </a:rPr>
-              <a:t>•  ADG (Physical Standby) — 실시간이지만 **조회만**</a:t>
+              <a:t>•  SPA: SQL Tuning Set을 변경 전후로 비교</a:t>
+            </a:r>
+          </a:p>
+          <a:p>
+            <a:pPr algn="l">
+              <a:spcAft>
+                <a:spcPts val="1000"/>
+              </a:spcAft>
+            </a:pPr>
+            <a:r>
+              <a:rPr sz="1700" b="0">
+                <a:solidFill>
+                  <a:srgbClr val="222222"/>
+                </a:solidFill>
+                <a:latin typeface="맑은 고딕"/>
+              </a:rPr>
+              <a:t>•  재생 클라이언트(wrc)는 별도 호스트에서 접속</a:t>
             </a:r>
           </a:p>
         </p:txBody>
@@ -14072,7 +17013,7 @@
                 </a:solidFill>
                 <a:latin typeface="맑은 고딕"/>
               </a:rPr>
-              <a:t>대가는 셋</a:t>
+              <a:t>어떤 Standby를 바꿀 수 있는가</a:t>
             </a:r>
           </a:p>
         </p:txBody>
@@ -14111,7 +17052,7 @@
                 </a:solidFill>
                 <a:latin typeface="맑은 고딕"/>
               </a:rPr>
-              <a:t>공짜가 아니다</a:t>
+              <a:t>물리 Standby 전용, ADG 옵션 불필요</a:t>
             </a:r>
           </a:p>
         </p:txBody>
@@ -14150,7 +17091,7 @@
                 </a:solidFill>
                 <a:latin typeface="맑은 고딕"/>
               </a:rPr>
-              <a:t>•  **① 재해 복구 능력이 잠시 사라진다** — 적용이 멈춘다</a:t>
+              <a:t>•  전환 대상은 물리 Standby뿐</a:t>
             </a:r>
           </a:p>
           <a:p>
@@ -14166,7 +17107,7 @@
                 </a:solidFill>
                 <a:latin typeface="맑은 고딕"/>
               </a:rPr>
-              <a:t>•  **② FRA 를 쓴다** — 플래시백 로그. 실습에서 405MB</a:t>
+              <a:t>•  논리 Standby, Far Sync는 불가</a:t>
             </a:r>
           </a:p>
           <a:p>
@@ -14182,7 +17123,7 @@
                 </a:solidFill>
                 <a:latin typeface="맑은 고딕"/>
               </a:rPr>
-              <a:t>•  **③ 되돌리면 전부 사라진다** — 남길 것은 미리 빼낸다</a:t>
+              <a:t>•  구성원 자격 유지, 리두도 계속 수신</a:t>
             </a:r>
           </a:p>
           <a:p>
@@ -14198,7 +17139,23 @@
                 </a:solidFill>
                 <a:latin typeface="맑은 고딕"/>
               </a:rPr>
-              <a:t>•  라이선스 — ADG 옵션은 **필요 없다**. EE 의 Data Guard 범위</a:t>
+              <a:t>•  여러 Standby 중 하나만 돌리는 배치가 일반적</a:t>
+            </a:r>
+          </a:p>
+          <a:p>
+            <a:pPr algn="l">
+              <a:spcAft>
+                <a:spcPts val="1000"/>
+              </a:spcAft>
+            </a:pPr>
+            <a:r>
+              <a:rPr sz="1700" b="0">
+                <a:solidFill>
+                  <a:srgbClr val="222222"/>
+                </a:solidFill>
+                <a:latin typeface="맑은 고딕"/>
+              </a:rPr>
+              <a:t>•  EE의 Data Guard 기본 기능</a:t>
             </a:r>
           </a:p>
         </p:txBody>
@@ -14230,7 +17187,7 @@
         <p:spPr>
           <a:xfrm>
             <a:off x="0" y="0"/>
-            <a:ext cx="12191695" cy="6858000"/>
+            <a:ext cx="12191695" cy="1005840"/>
           </a:xfrm>
           <a:prstGeom prst="rect">
             <a:avLst/>
@@ -14273,8 +17230,8 @@
         </p:nvSpPr>
         <p:spPr>
           <a:xfrm>
-            <a:off x="822960" y="2011680"/>
-            <a:ext cx="10515600" cy="1097280"/>
+            <a:off x="548640" y="91440"/>
+            <a:ext cx="10972800" cy="777240"/>
           </a:xfrm>
           <a:prstGeom prst="rect">
             <a:avLst/>
@@ -14293,13 +17250,13 @@
               </a:spcAft>
             </a:pPr>
             <a:r>
-              <a:rPr sz="4000" b="1">
+              <a:rPr sz="2600" b="1">
                 <a:solidFill>
                   <a:srgbClr val="FFFFFF"/>
                 </a:solidFill>
                 <a:latin typeface="맑은 고딕"/>
               </a:rPr>
-              <a:t>11.3</a:t>
+              <a:t>이름이 비슷한 다른 기능들</a:t>
             </a:r>
           </a:p>
         </p:txBody>
@@ -14312,8 +17269,8 @@
         </p:nvSpPr>
         <p:spPr>
           <a:xfrm>
-            <a:off x="822960" y="3017520"/>
-            <a:ext cx="10515600" cy="914400"/>
+            <a:off x="640080" y="1078992"/>
+            <a:ext cx="10881360" cy="457200"/>
           </a:xfrm>
           <a:prstGeom prst="rect">
             <a:avLst/>
@@ -14332,71 +17289,27 @@
               </a:spcAft>
             </a:pPr>
             <a:r>
-              <a:rPr sz="2800" b="1">
-                <a:solidFill>
-                  <a:srgbClr val="FFFFFF"/>
-                </a:solidFill>
-                <a:latin typeface="맑은 고딕"/>
-              </a:rPr>
-              <a:t>전환 전에 확인할 것</a:t>
-            </a:r>
-          </a:p>
-        </p:txBody>
-      </p:sp>
-      <p:sp>
-        <p:nvSpPr>
-          <p:cNvPr id="5" name="Rectangle 4"/>
-          <p:cNvSpPr/>
-          <p:nvPr/>
-        </p:nvSpPr>
-        <p:spPr>
-          <a:xfrm>
-            <a:off x="822960" y="4114800"/>
-            <a:ext cx="5486400" cy="54864"/>
-          </a:xfrm>
-          <a:prstGeom prst="rect">
-            <a:avLst/>
-          </a:prstGeom>
-          <a:solidFill>
-            <a:srgbClr val="FFFFFF"/>
-          </a:solidFill>
-          <a:ln>
-            <a:noFill/>
-          </a:ln>
-          <a:effectLst/>
-        </p:spPr>
-        <p:style>
-          <a:lnRef idx="1">
-            <a:schemeClr val="accent1"/>
-          </a:lnRef>
-          <a:fillRef idx="3">
-            <a:schemeClr val="accent1"/>
-          </a:fillRef>
-          <a:effectRef idx="2">
-            <a:schemeClr val="accent1"/>
-          </a:effectRef>
-          <a:fontRef idx="minor">
-            <a:schemeClr val="lt1"/>
-          </a:fontRef>
-        </p:style>
-        <p:txBody>
-          <a:bodyPr rtlCol="0" anchor="ctr"/>
-          <a:lstStyle/>
-          <a:p>
-            <a:pPr algn="ctr"/>
-          </a:p>
-        </p:txBody>
-      </p:sp>
-      <p:sp>
-        <p:nvSpPr>
-          <p:cNvPr id="6" name="TextBox 5"/>
+              <a:rPr sz="1500" b="0">
+                <a:solidFill>
+                  <a:srgbClr val="5A6672"/>
+                </a:solidFill>
+                <a:latin typeface="맑은 고딕"/>
+              </a:rPr>
+              <a:t>스토리지 스냅샷, PDB 스냅샷 복제와 구분</a:t>
+            </a:r>
+          </a:p>
+        </p:txBody>
+      </p:sp>
+      <p:sp>
+        <p:nvSpPr>
+          <p:cNvPr id="5" name="TextBox 4"/>
           <p:cNvSpPr txBox="1"/>
           <p:nvPr/>
         </p:nvSpPr>
         <p:spPr>
           <a:xfrm>
-            <a:off x="822960" y="4297680"/>
-            <a:ext cx="10058400" cy="2011680"/>
+            <a:off x="640080" y="1737360"/>
+            <a:ext cx="10881360" cy="4754880"/>
           </a:xfrm>
           <a:prstGeom prst="rect">
             <a:avLst/>
@@ -14411,49 +17324,65 @@
           <a:p>
             <a:pPr algn="l">
               <a:spcAft>
-                <a:spcPts val="800"/>
-              </a:spcAft>
-            </a:pPr>
-            <a:r>
-              <a:rPr sz="1600" b="0">
-                <a:solidFill>
-                  <a:srgbClr val="FFFFFF"/>
-                </a:solidFill>
-                <a:latin typeface="맑은 고딕"/>
-              </a:rPr>
-              <a:t>•  출발점</a:t>
-            </a:r>
-          </a:p>
-          <a:p>
-            <a:pPr algn="l">
-              <a:spcAft>
-                <a:spcPts val="800"/>
-              </a:spcAft>
-            </a:pPr>
-            <a:r>
-              <a:rPr sz="1600" b="0">
-                <a:solidFill>
-                  <a:srgbClr val="FFFFFF"/>
-                </a:solidFill>
-                <a:latin typeface="맑은 고딕"/>
-              </a:rPr>
-              <a:t>•  FRA 와 플래시백</a:t>
-            </a:r>
-          </a:p>
-          <a:p>
-            <a:pPr algn="l">
-              <a:spcAft>
-                <a:spcPts val="800"/>
-              </a:spcAft>
-            </a:pPr>
-            <a:r>
-              <a:rPr sz="1600" b="0">
-                <a:solidFill>
-                  <a:srgbClr val="FFFFFF"/>
-                </a:solidFill>
-                <a:latin typeface="맑은 고딕"/>
-              </a:rPr>
-              <a:t>•  점검표</a:t>
+                <a:spcPts val="1000"/>
+              </a:spcAft>
+            </a:pPr>
+            <a:r>
+              <a:rPr sz="1700" b="0">
+                <a:solidFill>
+                  <a:srgbClr val="222222"/>
+                </a:solidFill>
+                <a:latin typeface="맑은 고딕"/>
+              </a:rPr>
+              <a:t>•  스토리지 스냅샷: 장비 수준 블록 복사</a:t>
+            </a:r>
+          </a:p>
+          <a:p>
+            <a:pPr algn="l">
+              <a:spcAft>
+                <a:spcPts val="1000"/>
+              </a:spcAft>
+            </a:pPr>
+            <a:r>
+              <a:rPr sz="1700" b="0">
+                <a:solidFill>
+                  <a:srgbClr val="222222"/>
+                </a:solidFill>
+                <a:latin typeface="맑은 고딕"/>
+              </a:rPr>
+              <a:t>•  PDB 스냅샷 복제: PDB 하나를 쓰기 시 복사</a:t>
+            </a:r>
+          </a:p>
+          <a:p>
+            <a:pPr algn="l">
+              <a:spcAft>
+                <a:spcPts val="1000"/>
+              </a:spcAft>
+            </a:pPr>
+            <a:r>
+              <a:rPr sz="1700" b="0">
+                <a:solidFill>
+                  <a:srgbClr val="222222"/>
+                </a:solidFill>
+                <a:latin typeface="맑은 고딕"/>
+              </a:rPr>
+              <a:t>•  Snapshot Standby: DB 전체, Flashback으로 복귀</a:t>
+            </a:r>
+          </a:p>
+          <a:p>
+            <a:pPr algn="l">
+              <a:spcAft>
+                <a:spcPts val="1000"/>
+              </a:spcAft>
+            </a:pPr>
+            <a:r>
+              <a:rPr sz="1700" b="0">
+                <a:solidFill>
+                  <a:srgbClr val="222222"/>
+                </a:solidFill>
+                <a:latin typeface="맑은 고딕"/>
+              </a:rPr>
+              <a:t>•  시험 후 남는 복사본이 없음</a:t>
             </a:r>
           </a:p>
         </p:txBody>
@@ -14485,7 +17414,7 @@
         <p:spPr>
           <a:xfrm>
             <a:off x="0" y="0"/>
-            <a:ext cx="12191695" cy="1005840"/>
+            <a:ext cx="12191695" cy="6858000"/>
           </a:xfrm>
           <a:prstGeom prst="rect">
             <a:avLst/>
@@ -14528,8 +17457,8 @@
         </p:nvSpPr>
         <p:spPr>
           <a:xfrm>
-            <a:off x="548640" y="91440"/>
-            <a:ext cx="10972800" cy="777240"/>
+            <a:off x="822960" y="2011680"/>
+            <a:ext cx="10515600" cy="1097280"/>
           </a:xfrm>
           <a:prstGeom prst="rect">
             <a:avLst/>
@@ -14548,13 +17477,13 @@
               </a:spcAft>
             </a:pPr>
             <a:r>
-              <a:rPr sz="2600" b="1">
+              <a:rPr sz="4000" b="1">
                 <a:solidFill>
                   <a:srgbClr val="FFFFFF"/>
                 </a:solidFill>
                 <a:latin typeface="맑은 고딕"/>
               </a:rPr>
-              <a:t>출발점</a:t>
+              <a:t>11.3</a:t>
             </a:r>
           </a:p>
         </p:txBody>
@@ -14567,8 +17496,8 @@
         </p:nvSpPr>
         <p:spPr>
           <a:xfrm>
-            <a:off x="640080" y="1078992"/>
-            <a:ext cx="10881360" cy="457200"/>
+            <a:off x="822960" y="3017520"/>
+            <a:ext cx="10515600" cy="914400"/>
           </a:xfrm>
           <a:prstGeom prst="rect">
             <a:avLst/>
@@ -14587,27 +17516,71 @@
               </a:spcAft>
             </a:pPr>
             <a:r>
-              <a:rPr sz="1500" b="0">
-                <a:solidFill>
-                  <a:srgbClr val="5A6672"/>
-                </a:solidFill>
-                <a:latin typeface="맑은 고딕"/>
-              </a:rPr>
-              <a:t>11장은 여기서 시작한다</a:t>
-            </a:r>
-          </a:p>
-        </p:txBody>
-      </p:sp>
-      <p:sp>
-        <p:nvSpPr>
-          <p:cNvPr id="5" name="TextBox 4"/>
+              <a:rPr sz="2800" b="1">
+                <a:solidFill>
+                  <a:srgbClr val="FFFFFF"/>
+                </a:solidFill>
+                <a:latin typeface="맑은 고딕"/>
+              </a:rPr>
+              <a:t>동작 원리</a:t>
+            </a:r>
+          </a:p>
+        </p:txBody>
+      </p:sp>
+      <p:sp>
+        <p:nvSpPr>
+          <p:cNvPr id="5" name="Rectangle 4"/>
+          <p:cNvSpPr/>
+          <p:nvPr/>
+        </p:nvSpPr>
+        <p:spPr>
+          <a:xfrm>
+            <a:off x="822960" y="4114800"/>
+            <a:ext cx="5486400" cy="54864"/>
+          </a:xfrm>
+          <a:prstGeom prst="rect">
+            <a:avLst/>
+          </a:prstGeom>
+          <a:solidFill>
+            <a:srgbClr val="FFFFFF"/>
+          </a:solidFill>
+          <a:ln>
+            <a:noFill/>
+          </a:ln>
+          <a:effectLst/>
+        </p:spPr>
+        <p:style>
+          <a:lnRef idx="1">
+            <a:schemeClr val="accent1"/>
+          </a:lnRef>
+          <a:fillRef idx="3">
+            <a:schemeClr val="accent1"/>
+          </a:fillRef>
+          <a:effectRef idx="2">
+            <a:schemeClr val="accent1"/>
+          </a:effectRef>
+          <a:fontRef idx="minor">
+            <a:schemeClr val="lt1"/>
+          </a:fontRef>
+        </p:style>
+        <p:txBody>
+          <a:bodyPr rtlCol="0" anchor="ctr"/>
+          <a:lstStyle/>
+          <a:p>
+            <a:pPr algn="ctr"/>
+          </a:p>
+        </p:txBody>
+      </p:sp>
+      <p:sp>
+        <p:nvSpPr>
+          <p:cNvPr id="6" name="TextBox 5"/>
           <p:cNvSpPr txBox="1"/>
           <p:nvPr/>
         </p:nvSpPr>
         <p:spPr>
           <a:xfrm>
-            <a:off x="640080" y="1737360"/>
-            <a:ext cx="10881360" cy="4754880"/>
+            <a:off x="822960" y="4297680"/>
+            <a:ext cx="10058400" cy="2011680"/>
           </a:xfrm>
           <a:prstGeom prst="rect">
             <a:avLst/>
@@ -14622,81 +17595,49 @@
           <a:p>
             <a:pPr algn="l">
               <a:spcAft>
-                <a:spcPts val="1000"/>
-              </a:spcAft>
-            </a:pPr>
-            <a:r>
-              <a:rPr sz="1700" b="0">
-                <a:solidFill>
-                  <a:srgbClr val="222222"/>
-                </a:solidFill>
-                <a:latin typeface="맑은 고딕"/>
-              </a:rPr>
-              <a:t>•  chicago — PRIMARY / READ WRITE / MAXIMUM PERFORMANCE</a:t>
-            </a:r>
-          </a:p>
-          <a:p>
-            <a:pPr algn="l">
-              <a:spcAft>
-                <a:spcPts val="1000"/>
-              </a:spcAft>
-            </a:pPr>
-            <a:r>
-              <a:rPr sz="1700" b="0">
-                <a:solidFill>
-                  <a:srgbClr val="222222"/>
-                </a:solidFill>
-                <a:latin typeface="맑은 고딕"/>
-              </a:rPr>
-              <a:t>•  boston — PHYSICAL STANDBY / **READ ONLY WITH APPLY**</a:t>
-            </a:r>
-          </a:p>
-          <a:p>
-            <a:pPr algn="l">
-              <a:spcAft>
-                <a:spcPts val="1000"/>
-              </a:spcAft>
-            </a:pPr>
-            <a:r>
-              <a:rPr sz="1700" b="0">
-                <a:solidFill>
-                  <a:srgbClr val="222222"/>
-                </a:solidFill>
-                <a:latin typeface="맑은 고딕"/>
-              </a:rPr>
-              <a:t>•  `RECOVERY_MODE` — MANAGED REAL TIME APPLY</a:t>
-            </a:r>
-          </a:p>
-          <a:p>
-            <a:pPr algn="l">
-              <a:spcAft>
-                <a:spcPts val="1000"/>
-              </a:spcAft>
-            </a:pPr>
-            <a:r>
-              <a:rPr sz="1700" b="0">
-                <a:solidFill>
-                  <a:srgbClr val="222222"/>
-                </a:solidFill>
-                <a:latin typeface="맑은 고딕"/>
-              </a:rPr>
-              <a:t>•  MRP0 — APPLYING_LOG (시퀀스 40)</a:t>
-            </a:r>
-          </a:p>
-          <a:p>
-            <a:pPr algn="l">
-              <a:spcAft>
-                <a:spcPts val="1000"/>
-              </a:spcAft>
-            </a:pPr>
-            <a:r>
-              <a:rPr sz="1700" b="0">
-                <a:solidFill>
-                  <a:srgbClr val="222222"/>
-                </a:solidFill>
-                <a:latin typeface="맑은 고딕"/>
-              </a:rPr>
-              <a:t>•  Far Sync 는 내려가 있다. 이 장은 **2노드만** 쓴다</a:t>
+                <a:spcPts val="800"/>
+              </a:spcAft>
+            </a:pPr>
+            <a:r>
+              <a:rPr sz="1600" b="0">
+                <a:solidFill>
+                  <a:srgbClr val="FFFFFF"/>
+                </a:solidFill>
+                <a:latin typeface="맑은 고딕"/>
+              </a:rPr>
+              <a:t>•  보장 복원 지점과 Flashback Database</a:t>
+            </a:r>
+          </a:p>
+          <a:p>
+            <a:pPr algn="l">
+              <a:spcAft>
+                <a:spcPts val="800"/>
+              </a:spcAft>
+            </a:pPr>
+            <a:r>
+              <a:rPr sz="1600" b="0">
+                <a:solidFill>
+                  <a:srgbClr val="FFFFFF"/>
+                </a:solidFill>
+                <a:latin typeface="맑은 고딕"/>
+              </a:rPr>
+              <a:t>•  받기는 계속, 적용만 멈춤</a:t>
+            </a:r>
+          </a:p>
+          <a:p>
+            <a:pPr algn="l">
+              <a:spcAft>
+                <a:spcPts val="800"/>
+              </a:spcAft>
+            </a:pPr>
+            <a:r>
+              <a:rPr sz="1600" b="0">
+                <a:solidFill>
+                  <a:srgbClr val="FFFFFF"/>
+                </a:solidFill>
+                <a:latin typeface="맑은 고딕"/>
+              </a:rPr>
+              <a:t>•  되돌릴 때의 네 단계</a:t>
             </a:r>
           </a:p>
         </p:txBody>
